--- a/slides/Math130Test1Review_2026-09-23.pptx
+++ b/slides/Math130Test1Review_2026-09-23.pptx
@@ -5681,7 +5681,7 @@
           <a:bodyPr wrap="square" lIns="0" tIns="0" rIns="0" bIns="0" rtlCol="0" anchor="t"/>
           <a:lstStyle/>
           <a:p>
-            <a:pPr marL="342900" indent="-342900">
+            <a:pPr algn="l" marL="342900" indent="-342900">
               <a:spcAft>
                 <a:spcPts val="1200"/>
               </a:spcAft>
@@ -5702,7 +5702,7 @@
             <a:endParaRPr lang="en-US" sz="1500" dirty="0"/>
           </a:p>
           <a:p>
-            <a:pPr marL="342900" indent="-342900">
+            <a:pPr algn="l" marL="342900" indent="-342900">
               <a:spcAft>
                 <a:spcPts val="1200"/>
               </a:spcAft>
@@ -5723,7 +5723,7 @@
             <a:endParaRPr lang="en-US" sz="1500" dirty="0"/>
           </a:p>
           <a:p>
-            <a:pPr marL="342900" indent="-342900">
+            <a:pPr algn="l" marL="342900" indent="-342900">
               <a:spcAft>
                 <a:spcPts val="1200"/>
               </a:spcAft>
@@ -9489,7 +9489,7 @@
                 <a:ea typeface="Arial" pitchFamily="34" charset="-122"/>
                 <a:cs typeface="Arial" pitchFamily="34" charset="-120"/>
               </a:rPr>
-              <a:t>Open circle ↔ parenthesis; closed circle ↔ bracket; ∞ always takes a parenthesis</a:t>
+              <a:t>Open circle: parenthesis. Closed circle: bracket. Infinity always takes a parenthesis.</a:t>
             </a:r>
             <a:endParaRPr lang="en-US" sz="1300" dirty="0"/>
           </a:p>
@@ -13524,7 +13524,35 @@
                 <a:ea typeface="Times New Roman" pitchFamily="34" charset="-122"/>
                 <a:cs typeface="Times New Roman" pitchFamily="34" charset="-120"/>
               </a:rPr>
-              <a:t>2.     9x² = 30x − 25</a:t>
+              <a:t>2.     9x</a:t>
+            </a:r>
+            <a:pPr indent="0" marL="0">
+              <a:buNone/>
+            </a:pPr>
+            <a:r>
+              <a:rPr lang="en-US" sz="2200" baseline="30000" dirty="0">
+                <a:solidFill>
+                  <a:srgbClr val="11344E"/>
+                </a:solidFill>
+                <a:latin typeface="Times New Roman" pitchFamily="34" charset="0"/>
+                <a:ea typeface="Times New Roman" pitchFamily="34" charset="-122"/>
+                <a:cs typeface="Times New Roman" pitchFamily="34" charset="-120"/>
+              </a:rPr>
+              <a:t>2</a:t>
+            </a:r>
+            <a:pPr indent="0" marL="0">
+              <a:buNone/>
+            </a:pPr>
+            <a:r>
+              <a:rPr lang="en-US" sz="2200" dirty="0">
+                <a:solidFill>
+                  <a:srgbClr val="11344E"/>
+                </a:solidFill>
+                <a:latin typeface="Times New Roman" pitchFamily="34" charset="0"/>
+                <a:ea typeface="Times New Roman" pitchFamily="34" charset="-122"/>
+                <a:cs typeface="Times New Roman" pitchFamily="34" charset="-120"/>
+              </a:rPr>
+              <a:t> = 30x − 25</a:t>
             </a:r>
             <a:endParaRPr lang="en-US" sz="2200" dirty="0"/>
           </a:p>
@@ -13703,7 +13731,35 @@
                 <a:ea typeface="Times New Roman" pitchFamily="34" charset="-122"/>
                 <a:cs typeface="Times New Roman" pitchFamily="34" charset="-120"/>
               </a:rPr>
-              <a:t>x² + x =</a:t>
+              <a:t>x</a:t>
+            </a:r>
+            <a:pPr indent="0" marL="0">
+              <a:buNone/>
+            </a:pPr>
+            <a:r>
+              <a:rPr lang="en-US" sz="2200" baseline="30000" dirty="0">
+                <a:solidFill>
+                  <a:srgbClr val="11344E"/>
+                </a:solidFill>
+                <a:latin typeface="Times New Roman" pitchFamily="34" charset="0"/>
+                <a:ea typeface="Times New Roman" pitchFamily="34" charset="-122"/>
+                <a:cs typeface="Times New Roman" pitchFamily="34" charset="-120"/>
+              </a:rPr>
+              <a:t>2</a:t>
+            </a:r>
+            <a:pPr indent="0" marL="0">
+              <a:buNone/>
+            </a:pPr>
+            <a:r>
+              <a:rPr lang="en-US" sz="2200" dirty="0">
+                <a:solidFill>
+                  <a:srgbClr val="11344E"/>
+                </a:solidFill>
+                <a:latin typeface="Times New Roman" pitchFamily="34" charset="0"/>
+                <a:ea typeface="Times New Roman" pitchFamily="34" charset="-122"/>
+                <a:cs typeface="Times New Roman" pitchFamily="34" charset="-120"/>
+              </a:rPr>
+              <a:t> + x =</a:t>
             </a:r>
             <a:endParaRPr lang="en-US" sz="2200" dirty="0"/>
           </a:p>
@@ -14614,11 +14670,8 @@
                 <a:ea typeface="Times New Roman" pitchFamily="34" charset="-122"/>
                 <a:cs typeface="Times New Roman" pitchFamily="34" charset="-120"/>
               </a:rPr>
-              <a:t>9x² − 30x + 25 = 0</a:t>
-            </a:r>
-            <a:endParaRPr lang="en-US" sz="2100" dirty="0"/>
-          </a:p>
-          <a:p>
+              <a:t>9x</a:t>
+            </a:r>
             <a:pPr indent="0" marL="0">
               <a:spcAft>
                 <a:spcPts val="600"/>
@@ -14626,7 +14679,7 @@
               <a:buNone/>
             </a:pPr>
             <a:r>
-              <a:rPr lang="en-US" sz="2100" dirty="0">
+              <a:rPr lang="en-US" sz="2100" baseline="30000" dirty="0">
                 <a:solidFill>
                   <a:srgbClr val="11344E"/>
                 </a:solidFill>
@@ -14634,7 +14687,78 @@
                 <a:ea typeface="Times New Roman" pitchFamily="34" charset="-122"/>
                 <a:cs typeface="Times New Roman" pitchFamily="34" charset="-120"/>
               </a:rPr>
-              <a:t>(3x − 5)² = 0</a:t>
+              <a:t>2</a:t>
+            </a:r>
+            <a:pPr indent="0" marL="0">
+              <a:spcAft>
+                <a:spcPts val="600"/>
+              </a:spcAft>
+              <a:buNone/>
+            </a:pPr>
+            <a:r>
+              <a:rPr lang="en-US" sz="2100" dirty="0">
+                <a:solidFill>
+                  <a:srgbClr val="11344E"/>
+                </a:solidFill>
+                <a:latin typeface="Times New Roman" pitchFamily="34" charset="0"/>
+                <a:ea typeface="Times New Roman" pitchFamily="34" charset="-122"/>
+                <a:cs typeface="Times New Roman" pitchFamily="34" charset="-120"/>
+              </a:rPr>
+              <a:t> − 30x + 25 = 0</a:t>
+            </a:r>
+            <a:endParaRPr lang="en-US" sz="2100" dirty="0"/>
+          </a:p>
+          <a:p>
+            <a:pPr indent="0" marL="0">
+              <a:spcAft>
+                <a:spcPts val="600"/>
+              </a:spcAft>
+              <a:buNone/>
+            </a:pPr>
+            <a:r>
+              <a:rPr lang="en-US" sz="2100" dirty="0">
+                <a:solidFill>
+                  <a:srgbClr val="11344E"/>
+                </a:solidFill>
+                <a:latin typeface="Times New Roman" pitchFamily="34" charset="0"/>
+                <a:ea typeface="Times New Roman" pitchFamily="34" charset="-122"/>
+                <a:cs typeface="Times New Roman" pitchFamily="34" charset="-120"/>
+              </a:rPr>
+              <a:t>(3x − 5)</a:t>
+            </a:r>
+            <a:pPr indent="0" marL="0">
+              <a:spcAft>
+                <a:spcPts val="600"/>
+              </a:spcAft>
+              <a:buNone/>
+            </a:pPr>
+            <a:r>
+              <a:rPr lang="en-US" sz="2100" baseline="30000" dirty="0">
+                <a:solidFill>
+                  <a:srgbClr val="11344E"/>
+                </a:solidFill>
+                <a:latin typeface="Times New Roman" pitchFamily="34" charset="0"/>
+                <a:ea typeface="Times New Roman" pitchFamily="34" charset="-122"/>
+                <a:cs typeface="Times New Roman" pitchFamily="34" charset="-120"/>
+              </a:rPr>
+              <a:t>2</a:t>
+            </a:r>
+            <a:pPr indent="0" marL="0">
+              <a:spcAft>
+                <a:spcPts val="600"/>
+              </a:spcAft>
+              <a:buNone/>
+            </a:pPr>
+            <a:r>
+              <a:rPr lang="en-US" sz="2100" dirty="0">
+                <a:solidFill>
+                  <a:srgbClr val="11344E"/>
+                </a:solidFill>
+                <a:latin typeface="Times New Roman" pitchFamily="34" charset="0"/>
+                <a:ea typeface="Times New Roman" pitchFamily="34" charset="-122"/>
+                <a:cs typeface="Times New Roman" pitchFamily="34" charset="-120"/>
+              </a:rPr>
+              <a:t> = 0</a:t>
             </a:r>
             <a:endParaRPr lang="en-US" sz="2100" dirty="0"/>
           </a:p>
@@ -14977,11 +15101,8 @@
                 <a:ea typeface="Times New Roman" pitchFamily="34" charset="-122"/>
                 <a:cs typeface="Times New Roman" pitchFamily="34" charset="-120"/>
               </a:rPr>
-              <a:t>x² + 5x = 12x − 10</a:t>
-            </a:r>
-            <a:endParaRPr lang="en-US" sz="2100" dirty="0"/>
-          </a:p>
-          <a:p>
+              <a:t>x</a:t>
+            </a:r>
             <a:pPr indent="0" marL="0">
               <a:spcAft>
                 <a:spcPts val="600"/>
@@ -14989,7 +15110,7 @@
               <a:buNone/>
             </a:pPr>
             <a:r>
-              <a:rPr lang="en-US" sz="2100" dirty="0">
+              <a:rPr lang="en-US" sz="2100" baseline="30000" dirty="0">
                 <a:solidFill>
                   <a:srgbClr val="11344E"/>
                 </a:solidFill>
@@ -14997,7 +15118,78 @@
                 <a:ea typeface="Times New Roman" pitchFamily="34" charset="-122"/>
                 <a:cs typeface="Times New Roman" pitchFamily="34" charset="-120"/>
               </a:rPr>
-              <a:t>x² − 7x + 10 = 0</a:t>
+              <a:t>2</a:t>
+            </a:r>
+            <a:pPr indent="0" marL="0">
+              <a:spcAft>
+                <a:spcPts val="600"/>
+              </a:spcAft>
+              <a:buNone/>
+            </a:pPr>
+            <a:r>
+              <a:rPr lang="en-US" sz="2100" dirty="0">
+                <a:solidFill>
+                  <a:srgbClr val="11344E"/>
+                </a:solidFill>
+                <a:latin typeface="Times New Roman" pitchFamily="34" charset="0"/>
+                <a:ea typeface="Times New Roman" pitchFamily="34" charset="-122"/>
+                <a:cs typeface="Times New Roman" pitchFamily="34" charset="-120"/>
+              </a:rPr>
+              <a:t> + 5x = 12x − 10</a:t>
+            </a:r>
+            <a:endParaRPr lang="en-US" sz="2100" dirty="0"/>
+          </a:p>
+          <a:p>
+            <a:pPr indent="0" marL="0">
+              <a:spcAft>
+                <a:spcPts val="600"/>
+              </a:spcAft>
+              <a:buNone/>
+            </a:pPr>
+            <a:r>
+              <a:rPr lang="en-US" sz="2100" dirty="0">
+                <a:solidFill>
+                  <a:srgbClr val="11344E"/>
+                </a:solidFill>
+                <a:latin typeface="Times New Roman" pitchFamily="34" charset="0"/>
+                <a:ea typeface="Times New Roman" pitchFamily="34" charset="-122"/>
+                <a:cs typeface="Times New Roman" pitchFamily="34" charset="-120"/>
+              </a:rPr>
+              <a:t>x</a:t>
+            </a:r>
+            <a:pPr indent="0" marL="0">
+              <a:spcAft>
+                <a:spcPts val="600"/>
+              </a:spcAft>
+              <a:buNone/>
+            </a:pPr>
+            <a:r>
+              <a:rPr lang="en-US" sz="2100" baseline="30000" dirty="0">
+                <a:solidFill>
+                  <a:srgbClr val="11344E"/>
+                </a:solidFill>
+                <a:latin typeface="Times New Roman" pitchFamily="34" charset="0"/>
+                <a:ea typeface="Times New Roman" pitchFamily="34" charset="-122"/>
+                <a:cs typeface="Times New Roman" pitchFamily="34" charset="-120"/>
+              </a:rPr>
+              <a:t>2</a:t>
+            </a:r>
+            <a:pPr indent="0" marL="0">
+              <a:spcAft>
+                <a:spcPts val="600"/>
+              </a:spcAft>
+              <a:buNone/>
+            </a:pPr>
+            <a:r>
+              <a:rPr lang="en-US" sz="2100" dirty="0">
+                <a:solidFill>
+                  <a:srgbClr val="11344E"/>
+                </a:solidFill>
+                <a:latin typeface="Times New Roman" pitchFamily="34" charset="0"/>
+                <a:ea typeface="Times New Roman" pitchFamily="34" charset="-122"/>
+                <a:cs typeface="Times New Roman" pitchFamily="34" charset="-120"/>
+              </a:rPr>
+              <a:t> − 7x + 10 = 0</a:t>
             </a:r>
             <a:endParaRPr lang="en-US" sz="2100" dirty="0"/>
           </a:p>
@@ -16176,24 +16368,24 @@
         </p:nvSpPr>
         <p:spPr>
           <a:xfrm>
-            <a:off x="548640" y="1600200"/>
-            <a:ext cx="6583680" cy="457200"/>
-          </a:xfrm>
-          <a:prstGeom prst="rect">
-            <a:avLst/>
-          </a:prstGeom>
-          <a:noFill/>
-          <a:ln/>
-        </p:spPr>
-        <p:txBody>
-          <a:bodyPr wrap="square" lIns="0" tIns="0" rIns="0" bIns="0" rtlCol="0" anchor="t"/>
-          <a:lstStyle/>
-          <a:p>
-            <a:pPr indent="0" marL="0">
-              <a:buNone/>
-            </a:pPr>
-            <a:r>
-              <a:rPr lang="en-US" sz="2000" dirty="0">
+            <a:off x="548640" y="1691640"/>
+            <a:ext cx="1463040" cy="411480"/>
+          </a:xfrm>
+          <a:prstGeom prst="rect">
+            <a:avLst/>
+          </a:prstGeom>
+          <a:noFill/>
+          <a:ln/>
+        </p:spPr>
+        <p:txBody>
+          <a:bodyPr wrap="square" lIns="0" tIns="0" rIns="0" bIns="0" rtlCol="0" anchor="t"/>
+          <a:lstStyle/>
+          <a:p>
+            <a:pPr indent="0" marL="0">
+              <a:buNone/>
+            </a:pPr>
+            <a:r>
+              <a:rPr lang="en-US" sz="1900" dirty="0">
                 <a:solidFill>
                   <a:srgbClr val="11344E"/>
                 </a:solidFill>
@@ -16201,9 +16393,9 @@
                 <a:ea typeface="Times New Roman" pitchFamily="34" charset="-122"/>
                 <a:cs typeface="Times New Roman" pitchFamily="34" charset="-120"/>
               </a:rPr>
-              <a:t>1.   M = ((−2 + 6)/2, (5 + (−1))/2) = (2, 2)</a:t>
-            </a:r>
-            <a:endParaRPr lang="en-US" sz="2000" dirty="0"/>
+              <a:t>1.   M =  (</a:t>
+            </a:r>
+            <a:endParaRPr lang="en-US" sz="1900" dirty="0"/>
           </a:p>
         </p:txBody>
       </p:sp>
@@ -16215,24 +16407,24 @@
         </p:nvSpPr>
         <p:spPr>
           <a:xfrm>
-            <a:off x="548640" y="2331720"/>
-            <a:ext cx="6583680" cy="457200"/>
-          </a:xfrm>
-          <a:prstGeom prst="rect">
-            <a:avLst/>
-          </a:prstGeom>
-          <a:noFill/>
-          <a:ln/>
-        </p:spPr>
-        <p:txBody>
-          <a:bodyPr wrap="square" lIns="0" tIns="0" rIns="0" bIns="0" rtlCol="0" anchor="t"/>
-          <a:lstStyle/>
-          <a:p>
-            <a:pPr indent="0" marL="0">
-              <a:buNone/>
-            </a:pPr>
-            <a:r>
-              <a:rPr lang="en-US" sz="2000" dirty="0">
+            <a:off x="1783080" y="1481328"/>
+            <a:ext cx="960120" cy="313690"/>
+          </a:xfrm>
+          <a:prstGeom prst="rect">
+            <a:avLst/>
+          </a:prstGeom>
+          <a:noFill/>
+          <a:ln/>
+        </p:spPr>
+        <p:txBody>
+          <a:bodyPr wrap="square" lIns="0" tIns="0" rIns="0" bIns="0" rtlCol="0" anchor="b"/>
+          <a:lstStyle/>
+          <a:p>
+            <a:pPr algn="ctr" indent="0" marL="0">
+              <a:buNone/>
+            </a:pPr>
+            <a:r>
+              <a:rPr lang="en-US" sz="1900" dirty="0">
                 <a:solidFill>
                   <a:srgbClr val="11344E"/>
                 </a:solidFill>
@@ -16240,38 +16432,61 @@
                 <a:ea typeface="Times New Roman" pitchFamily="34" charset="-122"/>
                 <a:cs typeface="Times New Roman" pitchFamily="34" charset="-120"/>
               </a:rPr>
-              <a:t>2.   d = √(8² + (−6)²) = √100 = 10</a:t>
-            </a:r>
-            <a:endParaRPr lang="en-US" sz="2000" dirty="0"/>
-          </a:p>
-        </p:txBody>
-      </p:sp>
-      <p:sp>
-        <p:nvSpPr>
-          <p:cNvPr id="8" name="Text 5"/>
-          <p:cNvSpPr txBox="1"/>
-          <p:nvPr/>
-        </p:nvSpPr>
-        <p:spPr>
-          <a:xfrm>
-            <a:off x="548640" y="3063240"/>
-            <a:ext cx="6583680" cy="457200"/>
-          </a:xfrm>
-          <a:prstGeom prst="rect">
-            <a:avLst/>
-          </a:prstGeom>
-          <a:noFill/>
-          <a:ln/>
-        </p:spPr>
-        <p:txBody>
-          <a:bodyPr wrap="square" lIns="0" tIns="0" rIns="0" bIns="0" rtlCol="0" anchor="t"/>
-          <a:lstStyle/>
-          <a:p>
-            <a:pPr indent="0" marL="0">
-              <a:buNone/>
-            </a:pPr>
-            <a:r>
-              <a:rPr lang="en-US" sz="2000" dirty="0">
+              <a:t>−2 + 6</a:t>
+            </a:r>
+            <a:endParaRPr lang="en-US" sz="1900" dirty="0"/>
+          </a:p>
+        </p:txBody>
+      </p:sp>
+      <p:sp>
+        <p:nvSpPr>
+          <p:cNvPr id="8" name="Shape 5"/>
+          <p:cNvSpPr/>
+          <p:nvPr/>
+        </p:nvSpPr>
+        <p:spPr>
+          <a:xfrm>
+            <a:off x="1828800" y="1822450"/>
+            <a:ext cx="868680" cy="0"/>
+          </a:xfrm>
+          <a:prstGeom prst="line">
+            <a:avLst/>
+          </a:prstGeom>
+          <a:noFill/>
+          <a:ln w="12700">
+            <a:solidFill>
+              <a:srgbClr val="11344E"/>
+            </a:solidFill>
+            <a:prstDash val="solid"/>
+          </a:ln>
+        </p:spPr>
+      </p:sp>
+      <p:sp>
+        <p:nvSpPr>
+          <p:cNvPr id="9" name="Text 6"/>
+          <p:cNvSpPr txBox="1"/>
+          <p:nvPr/>
+        </p:nvSpPr>
+        <p:spPr>
+          <a:xfrm>
+            <a:off x="1783080" y="1859026"/>
+            <a:ext cx="960120" cy="313690"/>
+          </a:xfrm>
+          <a:prstGeom prst="rect">
+            <a:avLst/>
+          </a:prstGeom>
+          <a:noFill/>
+          <a:ln/>
+        </p:spPr>
+        <p:txBody>
+          <a:bodyPr wrap="square" lIns="0" tIns="0" rIns="0" bIns="0" rtlCol="0" anchor="t"/>
+          <a:lstStyle/>
+          <a:p>
+            <a:pPr algn="ctr" indent="0" marL="0">
+              <a:buNone/>
+            </a:pPr>
+            <a:r>
+              <a:rPr lang="en-US" sz="1900" dirty="0">
                 <a:solidFill>
                   <a:srgbClr val="11344E"/>
                 </a:solidFill>
@@ -16279,38 +16494,38 @@
                 <a:ea typeface="Times New Roman" pitchFamily="34" charset="-122"/>
                 <a:cs typeface="Times New Roman" pitchFamily="34" charset="-120"/>
               </a:rPr>
-              <a:t>3.   m = (−1 − 5)/(6 − (−2)) = −6/8 = −3/4</a:t>
-            </a:r>
-            <a:endParaRPr lang="en-US" sz="2000" dirty="0"/>
-          </a:p>
-        </p:txBody>
-      </p:sp>
-      <p:sp>
-        <p:nvSpPr>
-          <p:cNvPr id="9" name="Text 6"/>
-          <p:cNvSpPr txBox="1"/>
-          <p:nvPr/>
-        </p:nvSpPr>
-        <p:spPr>
-          <a:xfrm>
-            <a:off x="548640" y="3703320"/>
-            <a:ext cx="6583680" cy="457200"/>
-          </a:xfrm>
-          <a:prstGeom prst="rect">
-            <a:avLst/>
-          </a:prstGeom>
-          <a:noFill/>
-          <a:ln/>
-        </p:spPr>
-        <p:txBody>
-          <a:bodyPr wrap="square" lIns="0" tIns="0" rIns="0" bIns="0" rtlCol="0" anchor="t"/>
-          <a:lstStyle/>
-          <a:p>
-            <a:pPr indent="0" marL="0">
-              <a:buNone/>
-            </a:pPr>
-            <a:r>
-              <a:rPr lang="en-US" sz="2000" dirty="0">
+              <a:t>2</a:t>
+            </a:r>
+            <a:endParaRPr lang="en-US" sz="1900" dirty="0"/>
+          </a:p>
+        </p:txBody>
+      </p:sp>
+      <p:sp>
+        <p:nvSpPr>
+          <p:cNvPr id="10" name="Text 7"/>
+          <p:cNvSpPr txBox="1"/>
+          <p:nvPr/>
+        </p:nvSpPr>
+        <p:spPr>
+          <a:xfrm>
+            <a:off x="2743200" y="1691640"/>
+            <a:ext cx="182880" cy="411480"/>
+          </a:xfrm>
+          <a:prstGeom prst="rect">
+            <a:avLst/>
+          </a:prstGeom>
+          <a:noFill/>
+          <a:ln/>
+        </p:spPr>
+        <p:txBody>
+          <a:bodyPr wrap="square" lIns="0" tIns="0" rIns="0" bIns="0" rtlCol="0" anchor="t"/>
+          <a:lstStyle/>
+          <a:p>
+            <a:pPr indent="0" marL="0">
+              <a:buNone/>
+            </a:pPr>
+            <a:r>
+              <a:rPr lang="en-US" sz="1900" dirty="0">
                 <a:solidFill>
                   <a:srgbClr val="11344E"/>
                 </a:solidFill>
@@ -16318,65 +16533,815 @@
                 <a:ea typeface="Times New Roman" pitchFamily="34" charset="-122"/>
                 <a:cs typeface="Times New Roman" pitchFamily="34" charset="-120"/>
               </a:rPr>
-              <a:t>      y − 5 = −(3/4)(x + 2)</a:t>
-            </a:r>
-            <a:endParaRPr lang="en-US" sz="2000" dirty="0"/>
-          </a:p>
-        </p:txBody>
-      </p:sp>
-      <p:sp>
-        <p:nvSpPr>
-          <p:cNvPr id="10" name="Text 7"/>
-          <p:cNvSpPr txBox="1"/>
-          <p:nvPr/>
-        </p:nvSpPr>
-        <p:spPr>
-          <a:xfrm>
-            <a:off x="548640" y="4343400"/>
-            <a:ext cx="6583680" cy="457200"/>
-          </a:xfrm>
-          <a:prstGeom prst="rect">
-            <a:avLst/>
-          </a:prstGeom>
-          <a:noFill/>
-          <a:ln/>
-        </p:spPr>
-        <p:txBody>
-          <a:bodyPr wrap="square" lIns="0" tIns="0" rIns="0" bIns="0" rtlCol="0" anchor="t"/>
-          <a:lstStyle/>
-          <a:p>
-            <a:pPr indent="0" marL="0">
-              <a:buNone/>
-            </a:pPr>
-            <a:r>
-              <a:rPr lang="en-US" sz="2000" b="1" dirty="0">
-                <a:solidFill>
-                  <a:srgbClr val="1777B4"/>
+              <a:t>,</a:t>
+            </a:r>
+            <a:endParaRPr lang="en-US" sz="1900" dirty="0"/>
+          </a:p>
+        </p:txBody>
+      </p:sp>
+      <p:sp>
+        <p:nvSpPr>
+          <p:cNvPr id="11" name="Text 8"/>
+          <p:cNvSpPr txBox="1"/>
+          <p:nvPr/>
+        </p:nvSpPr>
+        <p:spPr>
+          <a:xfrm>
+            <a:off x="2926080" y="1481328"/>
+            <a:ext cx="1097280" cy="313690"/>
+          </a:xfrm>
+          <a:prstGeom prst="rect">
+            <a:avLst/>
+          </a:prstGeom>
+          <a:noFill/>
+          <a:ln/>
+        </p:spPr>
+        <p:txBody>
+          <a:bodyPr wrap="square" lIns="0" tIns="0" rIns="0" bIns="0" rtlCol="0" anchor="b"/>
+          <a:lstStyle/>
+          <a:p>
+            <a:pPr algn="ctr" indent="0" marL="0">
+              <a:buNone/>
+            </a:pPr>
+            <a:r>
+              <a:rPr lang="en-US" sz="1900" dirty="0">
+                <a:solidFill>
+                  <a:srgbClr val="11344E"/>
                 </a:solidFill>
                 <a:latin typeface="Times New Roman" pitchFamily="34" charset="0"/>
                 <a:ea typeface="Times New Roman" pitchFamily="34" charset="-122"/>
                 <a:cs typeface="Times New Roman" pitchFamily="34" charset="-120"/>
               </a:rPr>
+              <a:t>5 + (−1)</a:t>
+            </a:r>
+            <a:endParaRPr lang="en-US" sz="1900" dirty="0"/>
+          </a:p>
+        </p:txBody>
+      </p:sp>
+      <p:sp>
+        <p:nvSpPr>
+          <p:cNvPr id="12" name="Shape 9"/>
+          <p:cNvSpPr/>
+          <p:nvPr/>
+        </p:nvSpPr>
+        <p:spPr>
+          <a:xfrm>
+            <a:off x="2971800" y="1822450"/>
+            <a:ext cx="1005840" cy="0"/>
+          </a:xfrm>
+          <a:prstGeom prst="line">
+            <a:avLst/>
+          </a:prstGeom>
+          <a:noFill/>
+          <a:ln w="12700">
+            <a:solidFill>
+              <a:srgbClr val="11344E"/>
+            </a:solidFill>
+            <a:prstDash val="solid"/>
+          </a:ln>
+        </p:spPr>
+      </p:sp>
+      <p:sp>
+        <p:nvSpPr>
+          <p:cNvPr id="13" name="Text 10"/>
+          <p:cNvSpPr txBox="1"/>
+          <p:nvPr/>
+        </p:nvSpPr>
+        <p:spPr>
+          <a:xfrm>
+            <a:off x="2926080" y="1859026"/>
+            <a:ext cx="1097280" cy="313690"/>
+          </a:xfrm>
+          <a:prstGeom prst="rect">
+            <a:avLst/>
+          </a:prstGeom>
+          <a:noFill/>
+          <a:ln/>
+        </p:spPr>
+        <p:txBody>
+          <a:bodyPr wrap="square" lIns="0" tIns="0" rIns="0" bIns="0" rtlCol="0" anchor="t"/>
+          <a:lstStyle/>
+          <a:p>
+            <a:pPr algn="ctr" indent="0" marL="0">
+              <a:buNone/>
+            </a:pPr>
+            <a:r>
+              <a:rPr lang="en-US" sz="1900" dirty="0">
+                <a:solidFill>
+                  <a:srgbClr val="11344E"/>
+                </a:solidFill>
+                <a:latin typeface="Times New Roman" pitchFamily="34" charset="0"/>
+                <a:ea typeface="Times New Roman" pitchFamily="34" charset="-122"/>
+                <a:cs typeface="Times New Roman" pitchFamily="34" charset="-120"/>
+              </a:rPr>
+              <a:t>2</a:t>
+            </a:r>
+            <a:endParaRPr lang="en-US" sz="1900" dirty="0"/>
+          </a:p>
+        </p:txBody>
+      </p:sp>
+      <p:sp>
+        <p:nvSpPr>
+          <p:cNvPr id="14" name="Text 11"/>
+          <p:cNvSpPr txBox="1"/>
+          <p:nvPr/>
+        </p:nvSpPr>
+        <p:spPr>
+          <a:xfrm>
+            <a:off x="4069080" y="1691640"/>
+            <a:ext cx="2286000" cy="411480"/>
+          </a:xfrm>
+          <a:prstGeom prst="rect">
+            <a:avLst/>
+          </a:prstGeom>
+          <a:noFill/>
+          <a:ln/>
+        </p:spPr>
+        <p:txBody>
+          <a:bodyPr wrap="square" lIns="0" tIns="0" rIns="0" bIns="0" rtlCol="0" anchor="t"/>
+          <a:lstStyle/>
+          <a:p>
+            <a:pPr indent="0" marL="0">
+              <a:buNone/>
+            </a:pPr>
+            <a:r>
+              <a:rPr lang="en-US" sz="1900" dirty="0">
+                <a:solidFill>
+                  <a:srgbClr val="11344E"/>
+                </a:solidFill>
+                <a:latin typeface="Times New Roman" pitchFamily="34" charset="0"/>
+                <a:ea typeface="Times New Roman" pitchFamily="34" charset="-122"/>
+                <a:cs typeface="Times New Roman" pitchFamily="34" charset="-120"/>
+              </a:rPr>
+              <a:t>)  = (2, 2)</a:t>
+            </a:r>
+            <a:endParaRPr lang="en-US" sz="1900" dirty="0"/>
+          </a:p>
+        </p:txBody>
+      </p:sp>
+      <p:sp>
+        <p:nvSpPr>
+          <p:cNvPr id="15" name="Text 12"/>
+          <p:cNvSpPr txBox="1"/>
+          <p:nvPr/>
+        </p:nvSpPr>
+        <p:spPr>
+          <a:xfrm>
+            <a:off x="548640" y="2514600"/>
+            <a:ext cx="6766560" cy="411480"/>
+          </a:xfrm>
+          <a:prstGeom prst="rect">
+            <a:avLst/>
+          </a:prstGeom>
+          <a:noFill/>
+          <a:ln/>
+        </p:spPr>
+        <p:txBody>
+          <a:bodyPr wrap="square" lIns="0" tIns="0" rIns="0" bIns="0" rtlCol="0" anchor="t"/>
+          <a:lstStyle/>
+          <a:p>
+            <a:pPr indent="0" marL="0">
+              <a:buNone/>
+            </a:pPr>
+            <a:r>
+              <a:rPr lang="en-US" sz="1900" dirty="0">
+                <a:solidFill>
+                  <a:srgbClr val="11344E"/>
+                </a:solidFill>
+                <a:latin typeface="Times New Roman" pitchFamily="34" charset="0"/>
+                <a:ea typeface="Times New Roman" pitchFamily="34" charset="-122"/>
+                <a:cs typeface="Times New Roman" pitchFamily="34" charset="-120"/>
+              </a:rPr>
+              <a:t>2.   d = √((6 − (−2))</a:t>
+            </a:r>
+            <a:pPr indent="0" marL="0">
+              <a:buNone/>
+            </a:pPr>
+            <a:r>
+              <a:rPr lang="en-US" sz="1900" baseline="30000" dirty="0">
+                <a:solidFill>
+                  <a:srgbClr val="11344E"/>
+                </a:solidFill>
+                <a:latin typeface="Times New Roman" pitchFamily="34" charset="0"/>
+                <a:ea typeface="Times New Roman" pitchFamily="34" charset="-122"/>
+                <a:cs typeface="Times New Roman" pitchFamily="34" charset="-120"/>
+              </a:rPr>
+              <a:t>2</a:t>
+            </a:r>
+            <a:pPr indent="0" marL="0">
+              <a:buNone/>
+            </a:pPr>
+            <a:r>
+              <a:rPr lang="en-US" sz="1900" dirty="0">
+                <a:solidFill>
+                  <a:srgbClr val="11344E"/>
+                </a:solidFill>
+                <a:latin typeface="Times New Roman" pitchFamily="34" charset="0"/>
+                <a:ea typeface="Times New Roman" pitchFamily="34" charset="-122"/>
+                <a:cs typeface="Times New Roman" pitchFamily="34" charset="-120"/>
+              </a:rPr>
+              <a:t> + (−1 − 5)</a:t>
+            </a:r>
+            <a:pPr indent="0" marL="0">
+              <a:buNone/>
+            </a:pPr>
+            <a:r>
+              <a:rPr lang="en-US" sz="1900" baseline="30000" dirty="0">
+                <a:solidFill>
+                  <a:srgbClr val="11344E"/>
+                </a:solidFill>
+                <a:latin typeface="Times New Roman" pitchFamily="34" charset="0"/>
+                <a:ea typeface="Times New Roman" pitchFamily="34" charset="-122"/>
+                <a:cs typeface="Times New Roman" pitchFamily="34" charset="-120"/>
+              </a:rPr>
+              <a:t>2</a:t>
+            </a:r>
+            <a:pPr indent="0" marL="0">
+              <a:buNone/>
+            </a:pPr>
+            <a:r>
+              <a:rPr lang="en-US" sz="1900" dirty="0">
+                <a:solidFill>
+                  <a:srgbClr val="11344E"/>
+                </a:solidFill>
+                <a:latin typeface="Times New Roman" pitchFamily="34" charset="0"/>
+                <a:ea typeface="Times New Roman" pitchFamily="34" charset="-122"/>
+                <a:cs typeface="Times New Roman" pitchFamily="34" charset="-120"/>
+              </a:rPr>
+              <a:t>) = √(8</a:t>
+            </a:r>
+            <a:pPr indent="0" marL="0">
+              <a:buNone/>
+            </a:pPr>
+            <a:r>
+              <a:rPr lang="en-US" sz="1900" baseline="30000" dirty="0">
+                <a:solidFill>
+                  <a:srgbClr val="11344E"/>
+                </a:solidFill>
+                <a:latin typeface="Times New Roman" pitchFamily="34" charset="0"/>
+                <a:ea typeface="Times New Roman" pitchFamily="34" charset="-122"/>
+                <a:cs typeface="Times New Roman" pitchFamily="34" charset="-120"/>
+              </a:rPr>
+              <a:t>2</a:t>
+            </a:r>
+            <a:pPr indent="0" marL="0">
+              <a:buNone/>
+            </a:pPr>
+            <a:r>
+              <a:rPr lang="en-US" sz="1900" dirty="0">
+                <a:solidFill>
+                  <a:srgbClr val="11344E"/>
+                </a:solidFill>
+                <a:latin typeface="Times New Roman" pitchFamily="34" charset="0"/>
+                <a:ea typeface="Times New Roman" pitchFamily="34" charset="-122"/>
+                <a:cs typeface="Times New Roman" pitchFamily="34" charset="-120"/>
+              </a:rPr>
+              <a:t> + (−6)</a:t>
+            </a:r>
+            <a:pPr indent="0" marL="0">
+              <a:buNone/>
+            </a:pPr>
+            <a:r>
+              <a:rPr lang="en-US" sz="1900" baseline="30000" dirty="0">
+                <a:solidFill>
+                  <a:srgbClr val="11344E"/>
+                </a:solidFill>
+                <a:latin typeface="Times New Roman" pitchFamily="34" charset="0"/>
+                <a:ea typeface="Times New Roman" pitchFamily="34" charset="-122"/>
+                <a:cs typeface="Times New Roman" pitchFamily="34" charset="-120"/>
+              </a:rPr>
+              <a:t>2</a:t>
+            </a:r>
+            <a:pPr indent="0" marL="0">
+              <a:buNone/>
+            </a:pPr>
+            <a:r>
+              <a:rPr lang="en-US" sz="1900" dirty="0">
+                <a:solidFill>
+                  <a:srgbClr val="11344E"/>
+                </a:solidFill>
+                <a:latin typeface="Times New Roman" pitchFamily="34" charset="0"/>
+                <a:ea typeface="Times New Roman" pitchFamily="34" charset="-122"/>
+                <a:cs typeface="Times New Roman" pitchFamily="34" charset="-120"/>
+              </a:rPr>
+              <a:t>) = √100 = 10</a:t>
+            </a:r>
+            <a:endParaRPr lang="en-US" sz="1900" dirty="0"/>
+          </a:p>
+        </p:txBody>
+      </p:sp>
+      <p:sp>
+        <p:nvSpPr>
+          <p:cNvPr id="16" name="Text 13"/>
+          <p:cNvSpPr txBox="1"/>
+          <p:nvPr/>
+        </p:nvSpPr>
+        <p:spPr>
+          <a:xfrm>
+            <a:off x="548640" y="3401568"/>
+            <a:ext cx="1097280" cy="411480"/>
+          </a:xfrm>
+          <a:prstGeom prst="rect">
+            <a:avLst/>
+          </a:prstGeom>
+          <a:noFill/>
+          <a:ln/>
+        </p:spPr>
+        <p:txBody>
+          <a:bodyPr wrap="square" lIns="0" tIns="0" rIns="0" bIns="0" rtlCol="0" anchor="t"/>
+          <a:lstStyle/>
+          <a:p>
+            <a:pPr indent="0" marL="0">
+              <a:buNone/>
+            </a:pPr>
+            <a:r>
+              <a:rPr lang="en-US" sz="1900" dirty="0">
+                <a:solidFill>
+                  <a:srgbClr val="11344E"/>
+                </a:solidFill>
+                <a:latin typeface="Times New Roman" pitchFamily="34" charset="0"/>
+                <a:ea typeface="Times New Roman" pitchFamily="34" charset="-122"/>
+                <a:cs typeface="Times New Roman" pitchFamily="34" charset="-120"/>
+              </a:rPr>
+              <a:t>3.   m =</a:t>
+            </a:r>
+            <a:endParaRPr lang="en-US" sz="1900" dirty="0"/>
+          </a:p>
+        </p:txBody>
+      </p:sp>
+      <p:sp>
+        <p:nvSpPr>
+          <p:cNvPr id="17" name="Text 14"/>
+          <p:cNvSpPr txBox="1"/>
+          <p:nvPr/>
+        </p:nvSpPr>
+        <p:spPr>
+          <a:xfrm>
+            <a:off x="1417320" y="3191256"/>
+            <a:ext cx="1188720" cy="313690"/>
+          </a:xfrm>
+          <a:prstGeom prst="rect">
+            <a:avLst/>
+          </a:prstGeom>
+          <a:noFill/>
+          <a:ln/>
+        </p:spPr>
+        <p:txBody>
+          <a:bodyPr wrap="square" lIns="0" tIns="0" rIns="0" bIns="0" rtlCol="0" anchor="b"/>
+          <a:lstStyle/>
+          <a:p>
+            <a:pPr algn="ctr" indent="0" marL="0">
+              <a:buNone/>
+            </a:pPr>
+            <a:r>
+              <a:rPr lang="en-US" sz="1900" dirty="0">
+                <a:solidFill>
+                  <a:srgbClr val="11344E"/>
+                </a:solidFill>
+                <a:latin typeface="Times New Roman" pitchFamily="34" charset="0"/>
+                <a:ea typeface="Times New Roman" pitchFamily="34" charset="-122"/>
+                <a:cs typeface="Times New Roman" pitchFamily="34" charset="-120"/>
+              </a:rPr>
+              <a:t>−1 − 5</a:t>
+            </a:r>
+            <a:endParaRPr lang="en-US" sz="1900" dirty="0"/>
+          </a:p>
+        </p:txBody>
+      </p:sp>
+      <p:sp>
+        <p:nvSpPr>
+          <p:cNvPr id="18" name="Shape 15"/>
+          <p:cNvSpPr/>
+          <p:nvPr/>
+        </p:nvSpPr>
+        <p:spPr>
+          <a:xfrm>
+            <a:off x="1463040" y="3532378"/>
+            <a:ext cx="1097280" cy="0"/>
+          </a:xfrm>
+          <a:prstGeom prst="line">
+            <a:avLst/>
+          </a:prstGeom>
+          <a:noFill/>
+          <a:ln w="12700">
+            <a:solidFill>
+              <a:srgbClr val="11344E"/>
+            </a:solidFill>
+            <a:prstDash val="solid"/>
+          </a:ln>
+        </p:spPr>
+      </p:sp>
+      <p:sp>
+        <p:nvSpPr>
+          <p:cNvPr id="19" name="Text 16"/>
+          <p:cNvSpPr txBox="1"/>
+          <p:nvPr/>
+        </p:nvSpPr>
+        <p:spPr>
+          <a:xfrm>
+            <a:off x="1417320" y="3568954"/>
+            <a:ext cx="1188720" cy="313690"/>
+          </a:xfrm>
+          <a:prstGeom prst="rect">
+            <a:avLst/>
+          </a:prstGeom>
+          <a:noFill/>
+          <a:ln/>
+        </p:spPr>
+        <p:txBody>
+          <a:bodyPr wrap="square" lIns="0" tIns="0" rIns="0" bIns="0" rtlCol="0" anchor="t"/>
+          <a:lstStyle/>
+          <a:p>
+            <a:pPr algn="ctr" indent="0" marL="0">
+              <a:buNone/>
+            </a:pPr>
+            <a:r>
+              <a:rPr lang="en-US" sz="1900" dirty="0">
+                <a:solidFill>
+                  <a:srgbClr val="11344E"/>
+                </a:solidFill>
+                <a:latin typeface="Times New Roman" pitchFamily="34" charset="0"/>
+                <a:ea typeface="Times New Roman" pitchFamily="34" charset="-122"/>
+                <a:cs typeface="Times New Roman" pitchFamily="34" charset="-120"/>
+              </a:rPr>
+              <a:t>6 − (−2)</a:t>
+            </a:r>
+            <a:endParaRPr lang="en-US" sz="1900" dirty="0"/>
+          </a:p>
+        </p:txBody>
+      </p:sp>
+      <p:sp>
+        <p:nvSpPr>
+          <p:cNvPr id="20" name="Text 17"/>
+          <p:cNvSpPr txBox="1"/>
+          <p:nvPr/>
+        </p:nvSpPr>
+        <p:spPr>
+          <a:xfrm>
+            <a:off x="2606040" y="3401568"/>
+            <a:ext cx="320040" cy="411480"/>
+          </a:xfrm>
+          <a:prstGeom prst="rect">
+            <a:avLst/>
+          </a:prstGeom>
+          <a:noFill/>
+          <a:ln/>
+        </p:spPr>
+        <p:txBody>
+          <a:bodyPr wrap="square" lIns="0" tIns="0" rIns="0" bIns="0" rtlCol="0" anchor="t"/>
+          <a:lstStyle/>
+          <a:p>
+            <a:pPr algn="ctr" indent="0" marL="0">
+              <a:buNone/>
+            </a:pPr>
+            <a:r>
+              <a:rPr lang="en-US" sz="1900" dirty="0">
+                <a:solidFill>
+                  <a:srgbClr val="11344E"/>
+                </a:solidFill>
+                <a:latin typeface="Times New Roman" pitchFamily="34" charset="0"/>
+                <a:ea typeface="Times New Roman" pitchFamily="34" charset="-122"/>
+                <a:cs typeface="Times New Roman" pitchFamily="34" charset="-120"/>
+              </a:rPr>
+              <a:t>=</a:t>
+            </a:r>
+            <a:endParaRPr lang="en-US" sz="1900" dirty="0"/>
+          </a:p>
+        </p:txBody>
+      </p:sp>
+      <p:sp>
+        <p:nvSpPr>
+          <p:cNvPr id="21" name="Text 18"/>
+          <p:cNvSpPr txBox="1"/>
+          <p:nvPr/>
+        </p:nvSpPr>
+        <p:spPr>
+          <a:xfrm>
+            <a:off x="2926080" y="3191256"/>
+            <a:ext cx="548640" cy="313690"/>
+          </a:xfrm>
+          <a:prstGeom prst="rect">
+            <a:avLst/>
+          </a:prstGeom>
+          <a:noFill/>
+          <a:ln/>
+        </p:spPr>
+        <p:txBody>
+          <a:bodyPr wrap="square" lIns="0" tIns="0" rIns="0" bIns="0" rtlCol="0" anchor="b"/>
+          <a:lstStyle/>
+          <a:p>
+            <a:pPr algn="ctr" indent="0" marL="0">
+              <a:buNone/>
+            </a:pPr>
+            <a:r>
+              <a:rPr lang="en-US" sz="1900" dirty="0">
+                <a:solidFill>
+                  <a:srgbClr val="11344E"/>
+                </a:solidFill>
+                <a:latin typeface="Times New Roman" pitchFamily="34" charset="0"/>
+                <a:ea typeface="Times New Roman" pitchFamily="34" charset="-122"/>
+                <a:cs typeface="Times New Roman" pitchFamily="34" charset="-120"/>
+              </a:rPr>
+              <a:t>−6</a:t>
+            </a:r>
+            <a:endParaRPr lang="en-US" sz="1900" dirty="0"/>
+          </a:p>
+        </p:txBody>
+      </p:sp>
+      <p:sp>
+        <p:nvSpPr>
+          <p:cNvPr id="22" name="Shape 19"/>
+          <p:cNvSpPr/>
+          <p:nvPr/>
+        </p:nvSpPr>
+        <p:spPr>
+          <a:xfrm>
+            <a:off x="2971800" y="3532378"/>
+            <a:ext cx="457200" cy="0"/>
+          </a:xfrm>
+          <a:prstGeom prst="line">
+            <a:avLst/>
+          </a:prstGeom>
+          <a:noFill/>
+          <a:ln w="12700">
+            <a:solidFill>
+              <a:srgbClr val="11344E"/>
+            </a:solidFill>
+            <a:prstDash val="solid"/>
+          </a:ln>
+        </p:spPr>
+      </p:sp>
+      <p:sp>
+        <p:nvSpPr>
+          <p:cNvPr id="23" name="Text 20"/>
+          <p:cNvSpPr txBox="1"/>
+          <p:nvPr/>
+        </p:nvSpPr>
+        <p:spPr>
+          <a:xfrm>
+            <a:off x="2926080" y="3568954"/>
+            <a:ext cx="548640" cy="313690"/>
+          </a:xfrm>
+          <a:prstGeom prst="rect">
+            <a:avLst/>
+          </a:prstGeom>
+          <a:noFill/>
+          <a:ln/>
+        </p:spPr>
+        <p:txBody>
+          <a:bodyPr wrap="square" lIns="0" tIns="0" rIns="0" bIns="0" rtlCol="0" anchor="t"/>
+          <a:lstStyle/>
+          <a:p>
+            <a:pPr algn="ctr" indent="0" marL="0">
+              <a:buNone/>
+            </a:pPr>
+            <a:r>
+              <a:rPr lang="en-US" sz="1900" dirty="0">
+                <a:solidFill>
+                  <a:srgbClr val="11344E"/>
+                </a:solidFill>
+                <a:latin typeface="Times New Roman" pitchFamily="34" charset="0"/>
+                <a:ea typeface="Times New Roman" pitchFamily="34" charset="-122"/>
+                <a:cs typeface="Times New Roman" pitchFamily="34" charset="-120"/>
+              </a:rPr>
+              <a:t>8</a:t>
+            </a:r>
+            <a:endParaRPr lang="en-US" sz="1900" dirty="0"/>
+          </a:p>
+        </p:txBody>
+      </p:sp>
+      <p:sp>
+        <p:nvSpPr>
+          <p:cNvPr id="24" name="Text 21"/>
+          <p:cNvSpPr txBox="1"/>
+          <p:nvPr/>
+        </p:nvSpPr>
+        <p:spPr>
+          <a:xfrm>
+            <a:off x="3520440" y="3401568"/>
+            <a:ext cx="548640" cy="411480"/>
+          </a:xfrm>
+          <a:prstGeom prst="rect">
+            <a:avLst/>
+          </a:prstGeom>
+          <a:noFill/>
+          <a:ln/>
+        </p:spPr>
+        <p:txBody>
+          <a:bodyPr wrap="square" lIns="0" tIns="0" rIns="0" bIns="0" rtlCol="0" anchor="t"/>
+          <a:lstStyle/>
+          <a:p>
+            <a:pPr indent="0" marL="0">
+              <a:buNone/>
+            </a:pPr>
+            <a:r>
+              <a:rPr lang="en-US" sz="1900" dirty="0">
+                <a:solidFill>
+                  <a:srgbClr val="11344E"/>
+                </a:solidFill>
+                <a:latin typeface="Times New Roman" pitchFamily="34" charset="0"/>
+                <a:ea typeface="Times New Roman" pitchFamily="34" charset="-122"/>
+                <a:cs typeface="Times New Roman" pitchFamily="34" charset="-120"/>
+              </a:rPr>
+              <a:t>=  −</a:t>
+            </a:r>
+            <a:endParaRPr lang="en-US" sz="1900" dirty="0"/>
+          </a:p>
+        </p:txBody>
+      </p:sp>
+      <p:sp>
+        <p:nvSpPr>
+          <p:cNvPr id="25" name="Text 22"/>
+          <p:cNvSpPr txBox="1"/>
+          <p:nvPr/>
+        </p:nvSpPr>
+        <p:spPr>
+          <a:xfrm>
+            <a:off x="4023360" y="3191256"/>
+            <a:ext cx="411480" cy="313690"/>
+          </a:xfrm>
+          <a:prstGeom prst="rect">
+            <a:avLst/>
+          </a:prstGeom>
+          <a:noFill/>
+          <a:ln/>
+        </p:spPr>
+        <p:txBody>
+          <a:bodyPr wrap="square" lIns="0" tIns="0" rIns="0" bIns="0" rtlCol="0" anchor="b"/>
+          <a:lstStyle/>
+          <a:p>
+            <a:pPr algn="ctr" indent="0" marL="0">
+              <a:buNone/>
+            </a:pPr>
+            <a:r>
+              <a:rPr lang="en-US" sz="1900" dirty="0">
+                <a:solidFill>
+                  <a:srgbClr val="11344E"/>
+                </a:solidFill>
+                <a:latin typeface="Times New Roman" pitchFamily="34" charset="0"/>
+                <a:ea typeface="Times New Roman" pitchFamily="34" charset="-122"/>
+                <a:cs typeface="Times New Roman" pitchFamily="34" charset="-120"/>
+              </a:rPr>
+              <a:t>3</a:t>
+            </a:r>
+            <a:endParaRPr lang="en-US" sz="1900" dirty="0"/>
+          </a:p>
+        </p:txBody>
+      </p:sp>
+      <p:sp>
+        <p:nvSpPr>
+          <p:cNvPr id="26" name="Shape 23"/>
+          <p:cNvSpPr/>
+          <p:nvPr/>
+        </p:nvSpPr>
+        <p:spPr>
+          <a:xfrm>
+            <a:off x="4069080" y="3532378"/>
+            <a:ext cx="320040" cy="0"/>
+          </a:xfrm>
+          <a:prstGeom prst="line">
+            <a:avLst/>
+          </a:prstGeom>
+          <a:noFill/>
+          <a:ln w="12700">
+            <a:solidFill>
+              <a:srgbClr val="11344E"/>
+            </a:solidFill>
+            <a:prstDash val="solid"/>
+          </a:ln>
+        </p:spPr>
+      </p:sp>
+      <p:sp>
+        <p:nvSpPr>
+          <p:cNvPr id="27" name="Text 24"/>
+          <p:cNvSpPr txBox="1"/>
+          <p:nvPr/>
+        </p:nvSpPr>
+        <p:spPr>
+          <a:xfrm>
+            <a:off x="4023360" y="3568954"/>
+            <a:ext cx="411480" cy="313690"/>
+          </a:xfrm>
+          <a:prstGeom prst="rect">
+            <a:avLst/>
+          </a:prstGeom>
+          <a:noFill/>
+          <a:ln/>
+        </p:spPr>
+        <p:txBody>
+          <a:bodyPr wrap="square" lIns="0" tIns="0" rIns="0" bIns="0" rtlCol="0" anchor="t"/>
+          <a:lstStyle/>
+          <a:p>
+            <a:pPr algn="ctr" indent="0" marL="0">
+              <a:buNone/>
+            </a:pPr>
+            <a:r>
+              <a:rPr lang="en-US" sz="1900" dirty="0">
+                <a:solidFill>
+                  <a:srgbClr val="11344E"/>
+                </a:solidFill>
+                <a:latin typeface="Times New Roman" pitchFamily="34" charset="0"/>
+                <a:ea typeface="Times New Roman" pitchFamily="34" charset="-122"/>
+                <a:cs typeface="Times New Roman" pitchFamily="34" charset="-120"/>
+              </a:rPr>
+              <a:t>4</a:t>
+            </a:r>
+            <a:endParaRPr lang="en-US" sz="1900" dirty="0"/>
+          </a:p>
+        </p:txBody>
+      </p:sp>
+      <p:sp>
+        <p:nvSpPr>
+          <p:cNvPr id="28" name="Text 25"/>
+          <p:cNvSpPr txBox="1"/>
+          <p:nvPr/>
+        </p:nvSpPr>
+        <p:spPr>
+          <a:xfrm>
+            <a:off x="548640" y="4114800"/>
+            <a:ext cx="6583680" cy="411480"/>
+          </a:xfrm>
+          <a:prstGeom prst="rect">
+            <a:avLst/>
+          </a:prstGeom>
+          <a:noFill/>
+          <a:ln/>
+        </p:spPr>
+        <p:txBody>
+          <a:bodyPr wrap="square" lIns="0" tIns="0" rIns="0" bIns="0" rtlCol="0" anchor="t"/>
+          <a:lstStyle/>
+          <a:p>
+            <a:pPr indent="0" marL="0">
+              <a:buNone/>
+            </a:pPr>
+            <a:r>
+              <a:rPr lang="en-US" sz="1900" dirty="0">
+                <a:solidFill>
+                  <a:srgbClr val="11344E"/>
+                </a:solidFill>
+                <a:latin typeface="Times New Roman" pitchFamily="34" charset="0"/>
+                <a:ea typeface="Times New Roman" pitchFamily="34" charset="-122"/>
+                <a:cs typeface="Times New Roman" pitchFamily="34" charset="-120"/>
+              </a:rPr>
+              <a:t>      y − 5 = −(3/4)(x + 2)</a:t>
+            </a:r>
+            <a:endParaRPr lang="en-US" sz="1900" dirty="0"/>
+          </a:p>
+        </p:txBody>
+      </p:sp>
+      <p:sp>
+        <p:nvSpPr>
+          <p:cNvPr id="29" name="Text 26"/>
+          <p:cNvSpPr txBox="1"/>
+          <p:nvPr/>
+        </p:nvSpPr>
+        <p:spPr>
+          <a:xfrm>
+            <a:off x="548640" y="4617720"/>
+            <a:ext cx="6583680" cy="411480"/>
+          </a:xfrm>
+          <a:prstGeom prst="rect">
+            <a:avLst/>
+          </a:prstGeom>
+          <a:noFill/>
+          <a:ln/>
+        </p:spPr>
+        <p:txBody>
+          <a:bodyPr wrap="square" lIns="0" tIns="0" rIns="0" bIns="0" rtlCol="0" anchor="t"/>
+          <a:lstStyle/>
+          <a:p>
+            <a:pPr indent="0" marL="0">
+              <a:buNone/>
+            </a:pPr>
+            <a:r>
+              <a:rPr lang="en-US" sz="1900" b="1" dirty="0">
+                <a:solidFill>
+                  <a:srgbClr val="1777B4"/>
+                </a:solidFill>
+                <a:latin typeface="Times New Roman" pitchFamily="34" charset="0"/>
+                <a:ea typeface="Times New Roman" pitchFamily="34" charset="-122"/>
+                <a:cs typeface="Times New Roman" pitchFamily="34" charset="-120"/>
+              </a:rPr>
               <a:t>      y = −(3/4)x + 7/2</a:t>
             </a:r>
-            <a:endParaRPr lang="en-US" sz="2000" dirty="0"/>
-          </a:p>
-        </p:txBody>
-      </p:sp>
-      <p:sp>
-        <p:nvSpPr>
-          <p:cNvPr id="11" name="Shape 8"/>
+            <a:endParaRPr lang="en-US" sz="1900" dirty="0"/>
+          </a:p>
+        </p:txBody>
+      </p:sp>
+      <p:sp>
+        <p:nvSpPr>
+          <p:cNvPr id="30" name="Shape 27"/>
           <p:cNvSpPr/>
           <p:nvPr/>
         </p:nvSpPr>
         <p:spPr>
           <a:xfrm>
-            <a:off x="548640" y="5120640"/>
-            <a:ext cx="6217920" cy="822960"/>
+            <a:off x="548640" y="5257800"/>
+            <a:ext cx="6583680" cy="731520"/>
           </a:xfrm>
           <a:prstGeom prst="roundRect">
             <a:avLst>
-              <a:gd name="adj" fmla="val 8889"/>
+              <a:gd name="adj" fmla="val 10000"/>
             </a:avLst>
           </a:prstGeom>
           <a:solidFill>
@@ -16392,14 +17357,14 @@
       </p:sp>
       <p:sp>
         <p:nvSpPr>
-          <p:cNvPr id="12" name="Text 9"/>
-          <p:cNvSpPr txBox="1"/>
-          <p:nvPr/>
-        </p:nvSpPr>
-        <p:spPr>
-          <a:xfrm>
-            <a:off x="777240" y="5120640"/>
-            <a:ext cx="5852160" cy="822960"/>
+          <p:cNvPr id="31" name="Text 28"/>
+          <p:cNvSpPr txBox="1"/>
+          <p:nvPr/>
+        </p:nvSpPr>
+        <p:spPr>
+          <a:xfrm>
+            <a:off x="777240" y="5257800"/>
+            <a:ext cx="6217920" cy="731520"/>
           </a:xfrm>
           <a:prstGeom prst="rect">
             <a:avLst/>
@@ -16423,7 +17388,7 @@
                 <a:ea typeface="Arial" pitchFamily="34" charset="-122"/>
                 <a:cs typeface="Arial" pitchFamily="34" charset="-120"/>
               </a:rPr>
-              <a:t>Check with Q:  −(3/4)(6) + 7/2 = −9/2 + 7/2 = −1  ✓</a:t>
+              <a:t>Check with Q(6, −1):  −(3/4)(6) + 7/2 = −9/2 + 7/2 = −1  ✓</a:t>
             </a:r>
             <a:endParaRPr lang="en-US" sz="1500" dirty="0"/>
           </a:p>
@@ -16431,7 +17396,7 @@
       </p:sp>
       <p:sp>
         <p:nvSpPr>
-          <p:cNvPr id="13" name="Shape 10"/>
+          <p:cNvPr id="32" name="Shape 29"/>
           <p:cNvSpPr/>
           <p:nvPr/>
         </p:nvSpPr>
@@ -16454,13 +17419,13 @@
       </p:sp>
       <p:sp>
         <p:nvSpPr>
-          <p:cNvPr id="14" name="Shape 11"/>
+          <p:cNvPr id="33" name="Shape 30"/>
           <p:cNvSpPr/>
           <p:nvPr/>
         </p:nvSpPr>
         <p:spPr>
           <a:xfrm>
-            <a:off x="7982712" y="1554480"/>
+            <a:off x="7946967" y="1554480"/>
             <a:ext cx="91" cy="3931920"/>
           </a:xfrm>
           <a:prstGeom prst="line">
@@ -16477,13 +17442,13 @@
       </p:sp>
       <p:sp>
         <p:nvSpPr>
-          <p:cNvPr id="15" name="Shape 12"/>
+          <p:cNvPr id="34" name="Shape 31"/>
           <p:cNvSpPr/>
           <p:nvPr/>
         </p:nvSpPr>
         <p:spPr>
           <a:xfrm>
-            <a:off x="8375904" y="1554480"/>
+            <a:off x="8304415" y="1554480"/>
             <a:ext cx="91" cy="3931920"/>
           </a:xfrm>
           <a:prstGeom prst="line">
@@ -16500,13 +17465,13 @@
       </p:sp>
       <p:sp>
         <p:nvSpPr>
-          <p:cNvPr id="16" name="Shape 13"/>
+          <p:cNvPr id="35" name="Shape 32"/>
           <p:cNvSpPr/>
           <p:nvPr/>
         </p:nvSpPr>
         <p:spPr>
           <a:xfrm>
-            <a:off x="8769096" y="1554480"/>
+            <a:off x="8661862" y="1554480"/>
             <a:ext cx="91" cy="3931920"/>
           </a:xfrm>
           <a:prstGeom prst="line">
@@ -16523,13 +17488,13 @@
       </p:sp>
       <p:sp>
         <p:nvSpPr>
-          <p:cNvPr id="17" name="Shape 14"/>
+          <p:cNvPr id="36" name="Shape 33"/>
           <p:cNvSpPr/>
           <p:nvPr/>
         </p:nvSpPr>
         <p:spPr>
           <a:xfrm>
-            <a:off x="9162288" y="1554480"/>
+            <a:off x="9019309" y="1554480"/>
             <a:ext cx="91" cy="3931920"/>
           </a:xfrm>
           <a:prstGeom prst="line">
@@ -16546,13 +17511,13 @@
       </p:sp>
       <p:sp>
         <p:nvSpPr>
-          <p:cNvPr id="18" name="Shape 15"/>
+          <p:cNvPr id="37" name="Shape 34"/>
           <p:cNvSpPr/>
           <p:nvPr/>
         </p:nvSpPr>
         <p:spPr>
           <a:xfrm>
-            <a:off x="9555480" y="1554480"/>
+            <a:off x="9376756" y="1554480"/>
             <a:ext cx="91" cy="3931920"/>
           </a:xfrm>
           <a:prstGeom prst="line">
@@ -16569,13 +17534,13 @@
       </p:sp>
       <p:sp>
         <p:nvSpPr>
-          <p:cNvPr id="19" name="Shape 16"/>
+          <p:cNvPr id="38" name="Shape 35"/>
           <p:cNvSpPr/>
           <p:nvPr/>
         </p:nvSpPr>
         <p:spPr>
           <a:xfrm>
-            <a:off x="9948672" y="1554480"/>
+            <a:off x="9734204" y="1554480"/>
             <a:ext cx="91" cy="3931920"/>
           </a:xfrm>
           <a:prstGeom prst="line">
@@ -16592,13 +17557,13 @@
       </p:sp>
       <p:sp>
         <p:nvSpPr>
-          <p:cNvPr id="20" name="Shape 17"/>
+          <p:cNvPr id="39" name="Shape 36"/>
           <p:cNvSpPr/>
           <p:nvPr/>
         </p:nvSpPr>
         <p:spPr>
           <a:xfrm>
-            <a:off x="10341864" y="1554480"/>
+            <a:off x="10091651" y="1554480"/>
             <a:ext cx="91" cy="3931920"/>
           </a:xfrm>
           <a:prstGeom prst="line">
@@ -16615,13 +17580,13 @@
       </p:sp>
       <p:sp>
         <p:nvSpPr>
-          <p:cNvPr id="21" name="Shape 18"/>
+          <p:cNvPr id="40" name="Shape 37"/>
           <p:cNvSpPr/>
           <p:nvPr/>
         </p:nvSpPr>
         <p:spPr>
           <a:xfrm>
-            <a:off x="10735056" y="1554480"/>
+            <a:off x="10449098" y="1554480"/>
             <a:ext cx="91" cy="3931920"/>
           </a:xfrm>
           <a:prstGeom prst="line">
@@ -16638,13 +17603,13 @@
       </p:sp>
       <p:sp>
         <p:nvSpPr>
-          <p:cNvPr id="22" name="Shape 19"/>
+          <p:cNvPr id="41" name="Shape 38"/>
           <p:cNvSpPr/>
           <p:nvPr/>
         </p:nvSpPr>
         <p:spPr>
           <a:xfrm>
-            <a:off x="11128248" y="1554480"/>
+            <a:off x="10806545" y="1554480"/>
             <a:ext cx="91" cy="3931920"/>
           </a:xfrm>
           <a:prstGeom prst="line">
@@ -16661,13 +17626,13 @@
       </p:sp>
       <p:sp>
         <p:nvSpPr>
-          <p:cNvPr id="23" name="Shape 20"/>
+          <p:cNvPr id="42" name="Shape 39"/>
           <p:cNvSpPr/>
           <p:nvPr/>
         </p:nvSpPr>
         <p:spPr>
           <a:xfrm>
-            <a:off x="11521440" y="1554480"/>
+            <a:off x="11163993" y="1554480"/>
             <a:ext cx="91" cy="3931920"/>
           </a:xfrm>
           <a:prstGeom prst="line">
@@ -16684,14 +17649,14 @@
       </p:sp>
       <p:sp>
         <p:nvSpPr>
-          <p:cNvPr id="24" name="Shape 21"/>
+          <p:cNvPr id="43" name="Shape 40"/>
           <p:cNvSpPr/>
           <p:nvPr/>
         </p:nvSpPr>
         <p:spPr>
           <a:xfrm>
-            <a:off x="7589520" y="5486400"/>
-            <a:ext cx="3931920" cy="91"/>
+            <a:off x="11521440" y="1554480"/>
+            <a:ext cx="91" cy="3931920"/>
           </a:xfrm>
           <a:prstGeom prst="line">
             <a:avLst/>
@@ -16707,13 +17672,13 @@
       </p:sp>
       <p:sp>
         <p:nvSpPr>
-          <p:cNvPr id="25" name="Shape 22"/>
+          <p:cNvPr id="44" name="Shape 41"/>
           <p:cNvSpPr/>
           <p:nvPr/>
         </p:nvSpPr>
         <p:spPr>
           <a:xfrm>
-            <a:off x="7589520" y="5093208"/>
+            <a:off x="7589520" y="5486400"/>
             <a:ext cx="3931920" cy="91"/>
           </a:xfrm>
           <a:prstGeom prst="line">
@@ -16730,13 +17695,13 @@
       </p:sp>
       <p:sp>
         <p:nvSpPr>
-          <p:cNvPr id="26" name="Shape 23"/>
+          <p:cNvPr id="45" name="Shape 42"/>
           <p:cNvSpPr/>
           <p:nvPr/>
         </p:nvSpPr>
         <p:spPr>
           <a:xfrm>
-            <a:off x="7589520" y="4700016"/>
+            <a:off x="7589520" y="5128953"/>
             <a:ext cx="3931920" cy="91"/>
           </a:xfrm>
           <a:prstGeom prst="line">
@@ -16753,13 +17718,13 @@
       </p:sp>
       <p:sp>
         <p:nvSpPr>
-          <p:cNvPr id="27" name="Shape 24"/>
+          <p:cNvPr id="46" name="Shape 43"/>
           <p:cNvSpPr/>
           <p:nvPr/>
         </p:nvSpPr>
         <p:spPr>
           <a:xfrm>
-            <a:off x="7589520" y="4306824"/>
+            <a:off x="7589520" y="4771505"/>
             <a:ext cx="3931920" cy="91"/>
           </a:xfrm>
           <a:prstGeom prst="line">
@@ -16776,13 +17741,13 @@
       </p:sp>
       <p:sp>
         <p:nvSpPr>
-          <p:cNvPr id="28" name="Shape 25"/>
+          <p:cNvPr id="47" name="Shape 44"/>
           <p:cNvSpPr/>
           <p:nvPr/>
         </p:nvSpPr>
         <p:spPr>
           <a:xfrm>
-            <a:off x="7589520" y="3913632"/>
+            <a:off x="7589520" y="4414058"/>
             <a:ext cx="3931920" cy="91"/>
           </a:xfrm>
           <a:prstGeom prst="line">
@@ -16799,13 +17764,13 @@
       </p:sp>
       <p:sp>
         <p:nvSpPr>
-          <p:cNvPr id="29" name="Shape 26"/>
+          <p:cNvPr id="48" name="Shape 45"/>
           <p:cNvSpPr/>
           <p:nvPr/>
         </p:nvSpPr>
         <p:spPr>
           <a:xfrm>
-            <a:off x="7589520" y="3520440"/>
+            <a:off x="7589520" y="4056611"/>
             <a:ext cx="3931920" cy="91"/>
           </a:xfrm>
           <a:prstGeom prst="line">
@@ -16822,13 +17787,13 @@
       </p:sp>
       <p:sp>
         <p:nvSpPr>
-          <p:cNvPr id="30" name="Shape 27"/>
+          <p:cNvPr id="49" name="Shape 46"/>
           <p:cNvSpPr/>
           <p:nvPr/>
         </p:nvSpPr>
         <p:spPr>
           <a:xfrm>
-            <a:off x="7589520" y="3127248"/>
+            <a:off x="7589520" y="3699164"/>
             <a:ext cx="3931920" cy="91"/>
           </a:xfrm>
           <a:prstGeom prst="line">
@@ -16845,13 +17810,13 @@
       </p:sp>
       <p:sp>
         <p:nvSpPr>
-          <p:cNvPr id="31" name="Shape 28"/>
+          <p:cNvPr id="50" name="Shape 47"/>
           <p:cNvSpPr/>
           <p:nvPr/>
         </p:nvSpPr>
         <p:spPr>
           <a:xfrm>
-            <a:off x="7589520" y="2734056"/>
+            <a:off x="7589520" y="3341716"/>
             <a:ext cx="3931920" cy="91"/>
           </a:xfrm>
           <a:prstGeom prst="line">
@@ -16868,13 +17833,13 @@
       </p:sp>
       <p:sp>
         <p:nvSpPr>
-          <p:cNvPr id="32" name="Shape 29"/>
+          <p:cNvPr id="51" name="Shape 48"/>
           <p:cNvSpPr/>
           <p:nvPr/>
         </p:nvSpPr>
         <p:spPr>
           <a:xfrm>
-            <a:off x="7589520" y="2340864"/>
+            <a:off x="7589520" y="2984269"/>
             <a:ext cx="3931920" cy="91"/>
           </a:xfrm>
           <a:prstGeom prst="line">
@@ -16891,13 +17856,13 @@
       </p:sp>
       <p:sp>
         <p:nvSpPr>
-          <p:cNvPr id="33" name="Shape 30"/>
+          <p:cNvPr id="52" name="Shape 49"/>
           <p:cNvSpPr/>
           <p:nvPr/>
         </p:nvSpPr>
         <p:spPr>
           <a:xfrm>
-            <a:off x="7589520" y="1947672"/>
+            <a:off x="7589520" y="2626822"/>
             <a:ext cx="3931920" cy="91"/>
           </a:xfrm>
           <a:prstGeom prst="line">
@@ -16914,13 +17879,13 @@
       </p:sp>
       <p:sp>
         <p:nvSpPr>
-          <p:cNvPr id="34" name="Shape 31"/>
+          <p:cNvPr id="53" name="Shape 50"/>
           <p:cNvSpPr/>
           <p:nvPr/>
         </p:nvSpPr>
         <p:spPr>
           <a:xfrm>
-            <a:off x="7589520" y="1554480"/>
+            <a:off x="7589520" y="2269375"/>
             <a:ext cx="3931920" cy="91"/>
           </a:xfrm>
           <a:prstGeom prst="line">
@@ -16937,13 +17902,59 @@
       </p:sp>
       <p:sp>
         <p:nvSpPr>
-          <p:cNvPr id="35" name="Shape 32"/>
+          <p:cNvPr id="54" name="Shape 51"/>
           <p:cNvSpPr/>
           <p:nvPr/>
         </p:nvSpPr>
         <p:spPr>
           <a:xfrm>
-            <a:off x="8769096" y="1554480"/>
+            <a:off x="7589520" y="1911927"/>
+            <a:ext cx="3931920" cy="91"/>
+          </a:xfrm>
+          <a:prstGeom prst="line">
+            <a:avLst/>
+          </a:prstGeom>
+          <a:noFill/>
+          <a:ln w="6350">
+            <a:solidFill>
+              <a:srgbClr val="DCE3E8"/>
+            </a:solidFill>
+            <a:prstDash val="solid"/>
+          </a:ln>
+        </p:spPr>
+      </p:sp>
+      <p:sp>
+        <p:nvSpPr>
+          <p:cNvPr id="55" name="Shape 52"/>
+          <p:cNvSpPr/>
+          <p:nvPr/>
+        </p:nvSpPr>
+        <p:spPr>
+          <a:xfrm>
+            <a:off x="7589520" y="1554480"/>
+            <a:ext cx="3931920" cy="91"/>
+          </a:xfrm>
+          <a:prstGeom prst="line">
+            <a:avLst/>
+          </a:prstGeom>
+          <a:noFill/>
+          <a:ln w="6350">
+            <a:solidFill>
+              <a:srgbClr val="DCE3E8"/>
+            </a:solidFill>
+            <a:prstDash val="solid"/>
+          </a:ln>
+        </p:spPr>
+      </p:sp>
+      <p:sp>
+        <p:nvSpPr>
+          <p:cNvPr id="56" name="Shape 53"/>
+          <p:cNvSpPr/>
+          <p:nvPr/>
+        </p:nvSpPr>
+        <p:spPr>
+          <a:xfrm>
+            <a:off x="8661862" y="1554480"/>
             <a:ext cx="91" cy="3931920"/>
           </a:xfrm>
           <a:prstGeom prst="line">
@@ -16960,13 +17971,13 @@
       </p:sp>
       <p:sp>
         <p:nvSpPr>
-          <p:cNvPr id="36" name="Shape 33"/>
+          <p:cNvPr id="57" name="Shape 54"/>
           <p:cNvSpPr/>
           <p:nvPr/>
         </p:nvSpPr>
         <p:spPr>
           <a:xfrm>
-            <a:off x="7589520" y="4306824"/>
+            <a:off x="7589520" y="4414058"/>
             <a:ext cx="3931920" cy="91"/>
           </a:xfrm>
           <a:prstGeom prst="line">
@@ -16983,13 +17994,13 @@
       </p:sp>
       <p:sp>
         <p:nvSpPr>
-          <p:cNvPr id="37" name="Text 34"/>
-          <p:cNvSpPr txBox="1"/>
-          <p:nvPr/>
-        </p:nvSpPr>
-        <p:spPr>
-          <a:xfrm>
-            <a:off x="7799832" y="4343400"/>
+          <p:cNvPr id="58" name="Text 55"/>
+          <p:cNvSpPr txBox="1"/>
+          <p:nvPr/>
+        </p:nvSpPr>
+        <p:spPr>
+          <a:xfrm>
+            <a:off x="7764087" y="4450634"/>
             <a:ext cx="365760" cy="182880"/>
           </a:xfrm>
           <a:prstGeom prst="rect">
@@ -17022,13 +18033,13 @@
       </p:sp>
       <p:sp>
         <p:nvSpPr>
-          <p:cNvPr id="38" name="Text 35"/>
-          <p:cNvSpPr txBox="1"/>
-          <p:nvPr/>
-        </p:nvSpPr>
-        <p:spPr>
-          <a:xfrm>
-            <a:off x="9372600" y="4343400"/>
+          <p:cNvPr id="59" name="Text 56"/>
+          <p:cNvSpPr txBox="1"/>
+          <p:nvPr/>
+        </p:nvSpPr>
+        <p:spPr>
+          <a:xfrm>
+            <a:off x="9193876" y="4450634"/>
             <a:ext cx="365760" cy="182880"/>
           </a:xfrm>
           <a:prstGeom prst="rect">
@@ -17061,13 +18072,13 @@
       </p:sp>
       <p:sp>
         <p:nvSpPr>
-          <p:cNvPr id="39" name="Text 36"/>
-          <p:cNvSpPr txBox="1"/>
-          <p:nvPr/>
-        </p:nvSpPr>
-        <p:spPr>
-          <a:xfrm>
-            <a:off x="10158984" y="4343400"/>
+          <p:cNvPr id="60" name="Text 57"/>
+          <p:cNvSpPr txBox="1"/>
+          <p:nvPr/>
+        </p:nvSpPr>
+        <p:spPr>
+          <a:xfrm>
+            <a:off x="9908771" y="4450634"/>
             <a:ext cx="365760" cy="182880"/>
           </a:xfrm>
           <a:prstGeom prst="rect">
@@ -17100,13 +18111,13 @@
       </p:sp>
       <p:sp>
         <p:nvSpPr>
-          <p:cNvPr id="40" name="Text 37"/>
-          <p:cNvSpPr txBox="1"/>
-          <p:nvPr/>
-        </p:nvSpPr>
-        <p:spPr>
-          <a:xfrm>
-            <a:off x="10945368" y="4343400"/>
+          <p:cNvPr id="61" name="Text 58"/>
+          <p:cNvSpPr txBox="1"/>
+          <p:nvPr/>
+        </p:nvSpPr>
+        <p:spPr>
+          <a:xfrm>
+            <a:off x="10623665" y="4450634"/>
             <a:ext cx="365760" cy="182880"/>
           </a:xfrm>
           <a:prstGeom prst="rect">
@@ -17139,13 +18150,13 @@
       </p:sp>
       <p:sp>
         <p:nvSpPr>
-          <p:cNvPr id="41" name="Text 38"/>
-          <p:cNvSpPr txBox="1"/>
-          <p:nvPr/>
-        </p:nvSpPr>
-        <p:spPr>
-          <a:xfrm>
-            <a:off x="8357616" y="5001768"/>
+          <p:cNvPr id="62" name="Text 59"/>
+          <p:cNvSpPr txBox="1"/>
+          <p:nvPr/>
+        </p:nvSpPr>
+        <p:spPr>
+          <a:xfrm>
+            <a:off x="11338560" y="4450634"/>
             <a:ext cx="365760" cy="182880"/>
           </a:xfrm>
           <a:prstGeom prst="rect">
@@ -17158,6 +18169,45 @@
           <a:bodyPr wrap="square" lIns="0" tIns="0" rIns="0" bIns="0" rtlCol="0" anchor="t"/>
           <a:lstStyle/>
           <a:p>
+            <a:pPr algn="ctr" indent="0" marL="0">
+              <a:buNone/>
+            </a:pPr>
+            <a:r>
+              <a:rPr lang="en-US" sz="800" dirty="0">
+                <a:solidFill>
+                  <a:srgbClr val="687783"/>
+                </a:solidFill>
+                <a:latin typeface="Arial" pitchFamily="34" charset="0"/>
+                <a:ea typeface="Arial" pitchFamily="34" charset="-122"/>
+                <a:cs typeface="Arial" pitchFamily="34" charset="-120"/>
+              </a:rPr>
+              <a:t>8</a:t>
+            </a:r>
+            <a:endParaRPr lang="en-US" sz="800" dirty="0"/>
+          </a:p>
+        </p:txBody>
+      </p:sp>
+      <p:sp>
+        <p:nvSpPr>
+          <p:cNvPr id="63" name="Text 60"/>
+          <p:cNvSpPr txBox="1"/>
+          <p:nvPr/>
+        </p:nvSpPr>
+        <p:spPr>
+          <a:xfrm>
+            <a:off x="8250382" y="5037513"/>
+            <a:ext cx="365760" cy="182880"/>
+          </a:xfrm>
+          <a:prstGeom prst="rect">
+            <a:avLst/>
+          </a:prstGeom>
+          <a:noFill/>
+          <a:ln/>
+        </p:spPr>
+        <p:txBody>
+          <a:bodyPr wrap="square" lIns="0" tIns="0" rIns="0" bIns="0" rtlCol="0" anchor="t"/>
+          <a:lstStyle/>
+          <a:p>
             <a:pPr algn="r" indent="0" marL="0">
               <a:buNone/>
             </a:pPr>
@@ -17178,13 +18228,13 @@
       </p:sp>
       <p:sp>
         <p:nvSpPr>
-          <p:cNvPr id="42" name="Text 39"/>
-          <p:cNvSpPr txBox="1"/>
-          <p:nvPr/>
-        </p:nvSpPr>
-        <p:spPr>
-          <a:xfrm>
-            <a:off x="8357616" y="3429000"/>
+          <p:cNvPr id="64" name="Text 61"/>
+          <p:cNvSpPr txBox="1"/>
+          <p:nvPr/>
+        </p:nvSpPr>
+        <p:spPr>
+          <a:xfrm>
+            <a:off x="8250382" y="3607724"/>
             <a:ext cx="365760" cy="182880"/>
           </a:xfrm>
           <a:prstGeom prst="rect">
@@ -17217,13 +18267,13 @@
       </p:sp>
       <p:sp>
         <p:nvSpPr>
-          <p:cNvPr id="43" name="Text 40"/>
-          <p:cNvSpPr txBox="1"/>
-          <p:nvPr/>
-        </p:nvSpPr>
-        <p:spPr>
-          <a:xfrm>
-            <a:off x="8357616" y="2642616"/>
+          <p:cNvPr id="65" name="Text 62"/>
+          <p:cNvSpPr txBox="1"/>
+          <p:nvPr/>
+        </p:nvSpPr>
+        <p:spPr>
+          <a:xfrm>
+            <a:off x="8250382" y="2892829"/>
             <a:ext cx="365760" cy="182880"/>
           </a:xfrm>
           <a:prstGeom prst="rect">
@@ -17256,13 +18306,13 @@
       </p:sp>
       <p:sp>
         <p:nvSpPr>
-          <p:cNvPr id="44" name="Text 41"/>
-          <p:cNvSpPr txBox="1"/>
-          <p:nvPr/>
-        </p:nvSpPr>
-        <p:spPr>
-          <a:xfrm>
-            <a:off x="8357616" y="1856232"/>
+          <p:cNvPr id="66" name="Text 63"/>
+          <p:cNvSpPr txBox="1"/>
+          <p:nvPr/>
+        </p:nvSpPr>
+        <p:spPr>
+          <a:xfrm>
+            <a:off x="8250382" y="2177935"/>
             <a:ext cx="365760" cy="182880"/>
           </a:xfrm>
           <a:prstGeom prst="rect">
@@ -17295,14 +18345,53 @@
       </p:sp>
       <p:sp>
         <p:nvSpPr>
-          <p:cNvPr id="45" name="Shape 42"/>
+          <p:cNvPr id="67" name="Text 64"/>
+          <p:cNvSpPr txBox="1"/>
+          <p:nvPr/>
+        </p:nvSpPr>
+        <p:spPr>
+          <a:xfrm>
+            <a:off x="8250382" y="1463040"/>
+            <a:ext cx="365760" cy="182880"/>
+          </a:xfrm>
+          <a:prstGeom prst="rect">
+            <a:avLst/>
+          </a:prstGeom>
+          <a:noFill/>
+          <a:ln/>
+        </p:spPr>
+        <p:txBody>
+          <a:bodyPr wrap="square" lIns="0" tIns="0" rIns="0" bIns="0" rtlCol="0" anchor="t"/>
+          <a:lstStyle/>
+          <a:p>
+            <a:pPr algn="r" indent="0" marL="0">
+              <a:buNone/>
+            </a:pPr>
+            <a:r>
+              <a:rPr lang="en-US" sz="800" dirty="0">
+                <a:solidFill>
+                  <a:srgbClr val="687783"/>
+                </a:solidFill>
+                <a:latin typeface="Arial" pitchFamily="34" charset="0"/>
+                <a:ea typeface="Arial" pitchFamily="34" charset="-122"/>
+                <a:cs typeface="Arial" pitchFamily="34" charset="-120"/>
+              </a:rPr>
+              <a:t>8</a:t>
+            </a:r>
+            <a:endParaRPr lang="en-US" sz="800" dirty="0"/>
+          </a:p>
+        </p:txBody>
+      </p:sp>
+      <p:sp>
+        <p:nvSpPr>
+          <p:cNvPr id="68" name="Shape 65"/>
           <p:cNvSpPr/>
           <p:nvPr/>
         </p:nvSpPr>
         <p:spPr>
           <a:xfrm>
-            <a:off x="7982712" y="2340864"/>
-            <a:ext cx="3145536" cy="2359152"/>
+            <a:off x="7946967" y="2626822"/>
+            <a:ext cx="2859578" cy="2144684"/>
           </a:xfrm>
           <a:prstGeom prst="line">
             <a:avLst/>
@@ -17318,14 +18407,14 @@
       </p:sp>
       <p:sp>
         <p:nvSpPr>
-          <p:cNvPr id="46" name="Shape 43"/>
+          <p:cNvPr id="69" name="Shape 66"/>
           <p:cNvSpPr/>
           <p:nvPr/>
         </p:nvSpPr>
         <p:spPr>
           <a:xfrm>
-            <a:off x="7982712" y="2340864"/>
-            <a:ext cx="3145536" cy="91"/>
+            <a:off x="7946967" y="2626822"/>
+            <a:ext cx="2859578" cy="91"/>
           </a:xfrm>
           <a:prstGeom prst="line">
             <a:avLst/>
@@ -17341,14 +18430,14 @@
       </p:sp>
       <p:sp>
         <p:nvSpPr>
-          <p:cNvPr id="47" name="Shape 44"/>
+          <p:cNvPr id="70" name="Shape 67"/>
           <p:cNvSpPr/>
           <p:nvPr/>
         </p:nvSpPr>
         <p:spPr>
           <a:xfrm>
-            <a:off x="11128248" y="2340864"/>
-            <a:ext cx="91" cy="2359152"/>
+            <a:off x="10806545" y="2626822"/>
+            <a:ext cx="91" cy="2144684"/>
           </a:xfrm>
           <a:prstGeom prst="line">
             <a:avLst/>
@@ -17364,13 +18453,13 @@
       </p:sp>
       <p:sp>
         <p:nvSpPr>
-          <p:cNvPr id="48" name="Shape 45"/>
+          <p:cNvPr id="71" name="Shape 68"/>
           <p:cNvSpPr/>
           <p:nvPr/>
         </p:nvSpPr>
         <p:spPr>
           <a:xfrm>
-            <a:off x="7918704" y="2276856"/>
+            <a:off x="7882959" y="2562814"/>
             <a:ext cx="128016" cy="128016"/>
           </a:xfrm>
           <a:prstGeom prst="ellipse">
@@ -17389,13 +18478,13 @@
       </p:sp>
       <p:sp>
         <p:nvSpPr>
-          <p:cNvPr id="49" name="Shape 46"/>
+          <p:cNvPr id="72" name="Shape 69"/>
           <p:cNvSpPr/>
           <p:nvPr/>
         </p:nvSpPr>
         <p:spPr>
           <a:xfrm>
-            <a:off x="11064240" y="4636008"/>
+            <a:off x="10742537" y="4707497"/>
             <a:ext cx="128016" cy="128016"/>
           </a:xfrm>
           <a:prstGeom prst="ellipse">
@@ -17414,13 +18503,13 @@
       </p:sp>
       <p:sp>
         <p:nvSpPr>
-          <p:cNvPr id="50" name="Shape 47"/>
+          <p:cNvPr id="73" name="Shape 70"/>
           <p:cNvSpPr/>
           <p:nvPr/>
         </p:nvSpPr>
         <p:spPr>
           <a:xfrm>
-            <a:off x="9491472" y="3456432"/>
+            <a:off x="9312748" y="3635156"/>
             <a:ext cx="128016" cy="128016"/>
           </a:xfrm>
           <a:prstGeom prst="ellipse">
@@ -17439,13 +18528,13 @@
       </p:sp>
       <p:sp>
         <p:nvSpPr>
-          <p:cNvPr id="51" name="Text 48"/>
-          <p:cNvSpPr txBox="1"/>
-          <p:nvPr/>
-        </p:nvSpPr>
-        <p:spPr>
-          <a:xfrm>
-            <a:off x="7662672" y="2020824"/>
+          <p:cNvPr id="74" name="Text 71"/>
+          <p:cNvSpPr txBox="1"/>
+          <p:nvPr/>
+        </p:nvSpPr>
+        <p:spPr>
+          <a:xfrm>
+            <a:off x="7626927" y="2306782"/>
             <a:ext cx="274320" cy="274320"/>
           </a:xfrm>
           <a:prstGeom prst="rect">
@@ -17478,13 +18567,13 @@
       </p:sp>
       <p:sp>
         <p:nvSpPr>
-          <p:cNvPr id="52" name="Text 49"/>
-          <p:cNvSpPr txBox="1"/>
-          <p:nvPr/>
-        </p:nvSpPr>
-        <p:spPr>
-          <a:xfrm>
-            <a:off x="11219688" y="4608576"/>
+          <p:cNvPr id="75" name="Text 72"/>
+          <p:cNvSpPr txBox="1"/>
+          <p:nvPr/>
+        </p:nvSpPr>
+        <p:spPr>
+          <a:xfrm>
+            <a:off x="10897985" y="4680065"/>
             <a:ext cx="274320" cy="274320"/>
           </a:xfrm>
           <a:prstGeom prst="rect">
@@ -17517,13 +18606,13 @@
       </p:sp>
       <p:sp>
         <p:nvSpPr>
-          <p:cNvPr id="53" name="Text 50"/>
-          <p:cNvSpPr txBox="1"/>
-          <p:nvPr/>
-        </p:nvSpPr>
-        <p:spPr>
-          <a:xfrm>
-            <a:off x="9646920" y="3474720"/>
+          <p:cNvPr id="76" name="Text 73"/>
+          <p:cNvSpPr txBox="1"/>
+          <p:nvPr/>
+        </p:nvSpPr>
+        <p:spPr>
+          <a:xfrm>
+            <a:off x="9285316" y="3772316"/>
             <a:ext cx="274320" cy="274320"/>
           </a:xfrm>
           <a:prstGeom prst="rect">
@@ -17556,13 +18645,13 @@
       </p:sp>
       <p:sp>
         <p:nvSpPr>
-          <p:cNvPr id="54" name="Text 51"/>
-          <p:cNvSpPr txBox="1"/>
-          <p:nvPr/>
-        </p:nvSpPr>
-        <p:spPr>
-          <a:xfrm>
-            <a:off x="9240926" y="2048256"/>
+          <p:cNvPr id="77" name="Text 74"/>
+          <p:cNvSpPr txBox="1"/>
+          <p:nvPr/>
+        </p:nvSpPr>
+        <p:spPr>
+          <a:xfrm>
+            <a:off x="9090799" y="2334214"/>
             <a:ext cx="731520" cy="228600"/>
           </a:xfrm>
           <a:prstGeom prst="rect">
@@ -17595,14 +18684,14 @@
       </p:sp>
       <p:sp>
         <p:nvSpPr>
-          <p:cNvPr id="55" name="Text 52"/>
-          <p:cNvSpPr txBox="1"/>
-          <p:nvPr/>
-        </p:nvSpPr>
-        <p:spPr>
-          <a:xfrm>
-            <a:off x="11201400" y="3402482"/>
-            <a:ext cx="731520" cy="228600"/>
+          <p:cNvPr id="78" name="Text 75"/>
+          <p:cNvSpPr txBox="1"/>
+          <p:nvPr/>
+        </p:nvSpPr>
+        <p:spPr>
+          <a:xfrm>
+            <a:off x="10879697" y="3484695"/>
+            <a:ext cx="685800" cy="228600"/>
           </a:xfrm>
           <a:prstGeom prst="rect">
             <a:avLst/>
@@ -17736,7 +18825,35 @@
                 <a:ea typeface="Arial" pitchFamily="34" charset="-122"/>
                 <a:cs typeface="Arial" pitchFamily="34" charset="-120"/>
               </a:rPr>
-              <a:t>The circle equation uses r²; a perpendicular slope is the negative reciprocal</a:t>
+              <a:t>The circle equation uses r</a:t>
+            </a:r>
+            <a:pPr indent="0" marL="0">
+              <a:buNone/>
+            </a:pPr>
+            <a:r>
+              <a:rPr lang="en-US" sz="1300" baseline="30000" dirty="0">
+                <a:solidFill>
+                  <a:srgbClr val="687783"/>
+                </a:solidFill>
+                <a:latin typeface="Arial" pitchFamily="34" charset="0"/>
+                <a:ea typeface="Arial" pitchFamily="34" charset="-122"/>
+                <a:cs typeface="Arial" pitchFamily="34" charset="-120"/>
+              </a:rPr>
+              <a:t>2</a:t>
+            </a:r>
+            <a:pPr indent="0" marL="0">
+              <a:buNone/>
+            </a:pPr>
+            <a:r>
+              <a:rPr lang="en-US" sz="1300" dirty="0">
+                <a:solidFill>
+                  <a:srgbClr val="687783"/>
+                </a:solidFill>
+                <a:latin typeface="Arial" pitchFamily="34" charset="0"/>
+                <a:ea typeface="Arial" pitchFamily="34" charset="-122"/>
+                <a:cs typeface="Arial" pitchFamily="34" charset="-120"/>
+              </a:rPr>
+              <a:t>; a perpendicular slope is the negative reciprocal</a:t>
             </a:r>
             <a:endParaRPr lang="en-US" sz="1300" dirty="0"/>
           </a:p>
@@ -17880,46 +18997,172 @@
                 <a:ea typeface="Times New Roman" pitchFamily="34" charset="-122"/>
                 <a:cs typeface="Times New Roman" pitchFamily="34" charset="-120"/>
               </a:rPr>
-              <a:t>(x − h)² + (y − k)² = r²</a:t>
-            </a:r>
-            <a:endParaRPr lang="en-US" sz="2000" dirty="0"/>
-          </a:p>
-        </p:txBody>
-      </p:sp>
-      <p:sp>
-        <p:nvSpPr>
-          <p:cNvPr id="9" name="Text 6"/>
-          <p:cNvSpPr txBox="1"/>
-          <p:nvPr/>
-        </p:nvSpPr>
-        <p:spPr>
-          <a:xfrm>
-            <a:off x="822960" y="3017520"/>
-            <a:ext cx="4389120" cy="457200"/>
-          </a:xfrm>
-          <a:prstGeom prst="rect">
-            <a:avLst/>
-          </a:prstGeom>
-          <a:noFill/>
-          <a:ln/>
-        </p:spPr>
-        <p:txBody>
-          <a:bodyPr wrap="square" lIns="0" tIns="0" rIns="0" bIns="0" rtlCol="0" anchor="t"/>
-          <a:lstStyle/>
-          <a:p>
-            <a:pPr indent="0" marL="0">
-              <a:buNone/>
-            </a:pPr>
-            <a:r>
-              <a:rPr lang="en-US" sz="2300" b="1" dirty="0">
-                <a:solidFill>
-                  <a:srgbClr val="1777B4"/>
+              <a:t>(x − h)</a:t>
+            </a:r>
+            <a:pPr indent="0" marL="0">
+              <a:buNone/>
+            </a:pPr>
+            <a:r>
+              <a:rPr lang="en-US" sz="2000" baseline="30000" dirty="0">
+                <a:solidFill>
+                  <a:srgbClr val="687783"/>
                 </a:solidFill>
                 <a:latin typeface="Times New Roman" pitchFamily="34" charset="0"/>
                 <a:ea typeface="Times New Roman" pitchFamily="34" charset="-122"/>
                 <a:cs typeface="Times New Roman" pitchFamily="34" charset="-120"/>
               </a:rPr>
-              <a:t>(x + 3)² + (y − 1)² = 49</a:t>
+              <a:t>2</a:t>
+            </a:r>
+            <a:pPr indent="0" marL="0">
+              <a:buNone/>
+            </a:pPr>
+            <a:r>
+              <a:rPr lang="en-US" sz="2000" dirty="0">
+                <a:solidFill>
+                  <a:srgbClr val="687783"/>
+                </a:solidFill>
+                <a:latin typeface="Times New Roman" pitchFamily="34" charset="0"/>
+                <a:ea typeface="Times New Roman" pitchFamily="34" charset="-122"/>
+                <a:cs typeface="Times New Roman" pitchFamily="34" charset="-120"/>
+              </a:rPr>
+              <a:t> + (y − k)</a:t>
+            </a:r>
+            <a:pPr indent="0" marL="0">
+              <a:buNone/>
+            </a:pPr>
+            <a:r>
+              <a:rPr lang="en-US" sz="2000" baseline="30000" dirty="0">
+                <a:solidFill>
+                  <a:srgbClr val="687783"/>
+                </a:solidFill>
+                <a:latin typeface="Times New Roman" pitchFamily="34" charset="0"/>
+                <a:ea typeface="Times New Roman" pitchFamily="34" charset="-122"/>
+                <a:cs typeface="Times New Roman" pitchFamily="34" charset="-120"/>
+              </a:rPr>
+              <a:t>2</a:t>
+            </a:r>
+            <a:pPr indent="0" marL="0">
+              <a:buNone/>
+            </a:pPr>
+            <a:r>
+              <a:rPr lang="en-US" sz="2000" dirty="0">
+                <a:solidFill>
+                  <a:srgbClr val="687783"/>
+                </a:solidFill>
+                <a:latin typeface="Times New Roman" pitchFamily="34" charset="0"/>
+                <a:ea typeface="Times New Roman" pitchFamily="34" charset="-122"/>
+                <a:cs typeface="Times New Roman" pitchFamily="34" charset="-120"/>
+              </a:rPr>
+              <a:t> = r</a:t>
+            </a:r>
+            <a:pPr indent="0" marL="0">
+              <a:buNone/>
+            </a:pPr>
+            <a:r>
+              <a:rPr lang="en-US" sz="2000" baseline="30000" dirty="0">
+                <a:solidFill>
+                  <a:srgbClr val="687783"/>
+                </a:solidFill>
+                <a:latin typeface="Times New Roman" pitchFamily="34" charset="0"/>
+                <a:ea typeface="Times New Roman" pitchFamily="34" charset="-122"/>
+                <a:cs typeface="Times New Roman" pitchFamily="34" charset="-120"/>
+              </a:rPr>
+              <a:t>2</a:t>
+            </a:r>
+            <a:endParaRPr lang="en-US" sz="2000" dirty="0"/>
+          </a:p>
+        </p:txBody>
+      </p:sp>
+      <p:sp>
+        <p:nvSpPr>
+          <p:cNvPr id="9" name="Text 6"/>
+          <p:cNvSpPr txBox="1"/>
+          <p:nvPr/>
+        </p:nvSpPr>
+        <p:spPr>
+          <a:xfrm>
+            <a:off x="822960" y="3017520"/>
+            <a:ext cx="4389120" cy="457200"/>
+          </a:xfrm>
+          <a:prstGeom prst="rect">
+            <a:avLst/>
+          </a:prstGeom>
+          <a:noFill/>
+          <a:ln/>
+        </p:spPr>
+        <p:txBody>
+          <a:bodyPr wrap="square" lIns="0" tIns="0" rIns="0" bIns="0" rtlCol="0" anchor="t"/>
+          <a:lstStyle/>
+          <a:p>
+            <a:pPr indent="0" marL="0">
+              <a:buNone/>
+            </a:pPr>
+            <a:r>
+              <a:rPr lang="en-US" sz="2300" b="1" dirty="0">
+                <a:solidFill>
+                  <a:srgbClr val="1777B4"/>
+                </a:solidFill>
+                <a:latin typeface="Times New Roman" pitchFamily="34" charset="0"/>
+                <a:ea typeface="Times New Roman" pitchFamily="34" charset="-122"/>
+                <a:cs typeface="Times New Roman" pitchFamily="34" charset="-120"/>
+              </a:rPr>
+              <a:t>(x + 3)</a:t>
+            </a:r>
+            <a:pPr indent="0" marL="0">
+              <a:buNone/>
+            </a:pPr>
+            <a:r>
+              <a:rPr lang="en-US" sz="2300" b="1" baseline="30000" dirty="0">
+                <a:solidFill>
+                  <a:srgbClr val="1777B4"/>
+                </a:solidFill>
+                <a:latin typeface="Times New Roman" pitchFamily="34" charset="0"/>
+                <a:ea typeface="Times New Roman" pitchFamily="34" charset="-122"/>
+                <a:cs typeface="Times New Roman" pitchFamily="34" charset="-120"/>
+              </a:rPr>
+              <a:t>2</a:t>
+            </a:r>
+            <a:pPr indent="0" marL="0">
+              <a:buNone/>
+            </a:pPr>
+            <a:r>
+              <a:rPr lang="en-US" sz="2300" b="1" dirty="0">
+                <a:solidFill>
+                  <a:srgbClr val="1777B4"/>
+                </a:solidFill>
+                <a:latin typeface="Times New Roman" pitchFamily="34" charset="0"/>
+                <a:ea typeface="Times New Roman" pitchFamily="34" charset="-122"/>
+                <a:cs typeface="Times New Roman" pitchFamily="34" charset="-120"/>
+              </a:rPr>
+              <a:t> + (y − 1)</a:t>
+            </a:r>
+            <a:pPr indent="0" marL="0">
+              <a:buNone/>
+            </a:pPr>
+            <a:r>
+              <a:rPr lang="en-US" sz="2300" b="1" baseline="30000" dirty="0">
+                <a:solidFill>
+                  <a:srgbClr val="1777B4"/>
+                </a:solidFill>
+                <a:latin typeface="Times New Roman" pitchFamily="34" charset="0"/>
+                <a:ea typeface="Times New Roman" pitchFamily="34" charset="-122"/>
+                <a:cs typeface="Times New Roman" pitchFamily="34" charset="-120"/>
+              </a:rPr>
+              <a:t>2</a:t>
+            </a:r>
+            <a:pPr indent="0" marL="0">
+              <a:buNone/>
+            </a:pPr>
+            <a:r>
+              <a:rPr lang="en-US" sz="2300" b="1" dirty="0">
+                <a:solidFill>
+                  <a:srgbClr val="1777B4"/>
+                </a:solidFill>
+                <a:latin typeface="Times New Roman" pitchFamily="34" charset="0"/>
+                <a:ea typeface="Times New Roman" pitchFamily="34" charset="-122"/>
+                <a:cs typeface="Times New Roman" pitchFamily="34" charset="-120"/>
+              </a:rPr>
+              <a:t> = 49</a:t>
             </a:r>
             <a:endParaRPr lang="en-US" sz="2300" dirty="0"/>
           </a:p>
@@ -17946,7 +19189,7 @@
           <a:bodyPr wrap="square" lIns="0" tIns="0" rIns="0" bIns="0" rtlCol="0" anchor="t"/>
           <a:lstStyle/>
           <a:p>
-            <a:pPr marL="342900" indent="-342900">
+            <a:pPr algn="l" marL="342900" indent="-342900">
               <a:spcAft>
                 <a:spcPts val="1000"/>
               </a:spcAft>
@@ -17967,7 +19210,7 @@
             <a:endParaRPr lang="en-US" sz="1500" dirty="0"/>
           </a:p>
           <a:p>
-            <a:pPr marL="342900" indent="-342900">
+            <a:pPr algn="l" marL="342900" indent="-342900">
               <a:spcAft>
                 <a:spcPts val="1000"/>
               </a:spcAft>
@@ -17983,7 +19226,43 @@
                 <a:ea typeface="Arial" pitchFamily="34" charset="-122"/>
                 <a:cs typeface="Arial" pitchFamily="34" charset="-120"/>
               </a:rPr>
-              <a:t>Radius 7 gives 7² = 49 on the right.</a:t>
+              <a:t>Radius 7 gives 7</a:t>
+            </a:r>
+            <a:pPr algn="l" marL="342900" indent="-342900">
+              <a:spcAft>
+                <a:spcPts val="1000"/>
+              </a:spcAft>
+              <a:buSzPct val="100000"/>
+              <a:buChar char="•"/>
+            </a:pPr>
+            <a:r>
+              <a:rPr lang="en-US" sz="1500" baseline="30000" dirty="0">
+                <a:solidFill>
+                  <a:srgbClr val="11344E"/>
+                </a:solidFill>
+                <a:latin typeface="Arial" pitchFamily="34" charset="0"/>
+                <a:ea typeface="Arial" pitchFamily="34" charset="-122"/>
+                <a:cs typeface="Arial" pitchFamily="34" charset="-120"/>
+              </a:rPr>
+              <a:t>2</a:t>
+            </a:r>
+            <a:pPr algn="l" marL="342900" indent="-342900">
+              <a:spcAft>
+                <a:spcPts val="1000"/>
+              </a:spcAft>
+              <a:buSzPct val="100000"/>
+              <a:buChar char="•"/>
+            </a:pPr>
+            <a:r>
+              <a:rPr lang="en-US" sz="1500" dirty="0">
+                <a:solidFill>
+                  <a:srgbClr val="11344E"/>
+                </a:solidFill>
+                <a:latin typeface="Arial" pitchFamily="34" charset="0"/>
+                <a:ea typeface="Arial" pitchFamily="34" charset="-122"/>
+                <a:cs typeface="Arial" pitchFamily="34" charset="-120"/>
+              </a:rPr>
+              <a:t> = 49 on the right.</a:t>
             </a:r>
             <a:endParaRPr lang="en-US" sz="1500" dirty="0"/>
           </a:p>
@@ -19466,38 +20745,13 @@
                 <a:ea typeface="Times New Roman" pitchFamily="34" charset="-122"/>
                 <a:cs typeface="Times New Roman" pitchFamily="34" charset="-120"/>
               </a:rPr>
-              <a:t>1.   h(t) = 64t − 16t²</a:t>
-            </a:r>
-            <a:endParaRPr lang="en-US" sz="2800" dirty="0"/>
-          </a:p>
-        </p:txBody>
-      </p:sp>
-      <p:sp>
-        <p:nvSpPr>
-          <p:cNvPr id="10" name="Text 7"/>
-          <p:cNvSpPr txBox="1"/>
-          <p:nvPr/>
-        </p:nvSpPr>
-        <p:spPr>
-          <a:xfrm>
-            <a:off x="548640" y="3566160"/>
-            <a:ext cx="6400800" cy="548640"/>
-          </a:xfrm>
-          <a:prstGeom prst="rect">
-            <a:avLst/>
-          </a:prstGeom>
-          <a:noFill/>
-          <a:ln/>
-        </p:spPr>
-        <p:txBody>
-          <a:bodyPr wrap="square" lIns="0" tIns="0" rIns="0" bIns="0" rtlCol="0" anchor="t"/>
-          <a:lstStyle/>
-          <a:p>
-            <a:pPr indent="0" marL="0">
-              <a:buNone/>
-            </a:pPr>
-            <a:r>
-              <a:rPr lang="en-US" sz="2800" dirty="0">
+              <a:t>1.   h(t) = 64t − 16t</a:t>
+            </a:r>
+            <a:pPr indent="0" marL="0">
+              <a:buNone/>
+            </a:pPr>
+            <a:r>
+              <a:rPr lang="en-US" sz="2800" baseline="30000" dirty="0">
                 <a:solidFill>
                   <a:srgbClr val="11344E"/>
                 </a:solidFill>
@@ -19505,7 +20759,74 @@
                 <a:ea typeface="Times New Roman" pitchFamily="34" charset="-122"/>
                 <a:cs typeface="Times New Roman" pitchFamily="34" charset="-120"/>
               </a:rPr>
-              <a:t>2.   h(t) = −16t² + 96t + 6</a:t>
+              <a:t>2</a:t>
+            </a:r>
+            <a:endParaRPr lang="en-US" sz="2800" dirty="0"/>
+          </a:p>
+        </p:txBody>
+      </p:sp>
+      <p:sp>
+        <p:nvSpPr>
+          <p:cNvPr id="10" name="Text 7"/>
+          <p:cNvSpPr txBox="1"/>
+          <p:nvPr/>
+        </p:nvSpPr>
+        <p:spPr>
+          <a:xfrm>
+            <a:off x="548640" y="3566160"/>
+            <a:ext cx="6400800" cy="548640"/>
+          </a:xfrm>
+          <a:prstGeom prst="rect">
+            <a:avLst/>
+          </a:prstGeom>
+          <a:noFill/>
+          <a:ln/>
+        </p:spPr>
+        <p:txBody>
+          <a:bodyPr wrap="square" lIns="0" tIns="0" rIns="0" bIns="0" rtlCol="0" anchor="t"/>
+          <a:lstStyle/>
+          <a:p>
+            <a:pPr indent="0" marL="0">
+              <a:buNone/>
+            </a:pPr>
+            <a:r>
+              <a:rPr lang="en-US" sz="2800" dirty="0">
+                <a:solidFill>
+                  <a:srgbClr val="11344E"/>
+                </a:solidFill>
+                <a:latin typeface="Times New Roman" pitchFamily="34" charset="0"/>
+                <a:ea typeface="Times New Roman" pitchFamily="34" charset="-122"/>
+                <a:cs typeface="Times New Roman" pitchFamily="34" charset="-120"/>
+              </a:rPr>
+              <a:t>2.   h(t) = −16t</a:t>
+            </a:r>
+            <a:pPr indent="0" marL="0">
+              <a:buNone/>
+            </a:pPr>
+            <a:r>
+              <a:rPr lang="en-US" sz="2800" baseline="30000" dirty="0">
+                <a:solidFill>
+                  <a:srgbClr val="11344E"/>
+                </a:solidFill>
+                <a:latin typeface="Times New Roman" pitchFamily="34" charset="0"/>
+                <a:ea typeface="Times New Roman" pitchFamily="34" charset="-122"/>
+                <a:cs typeface="Times New Roman" pitchFamily="34" charset="-120"/>
+              </a:rPr>
+              <a:t>2</a:t>
+            </a:r>
+            <a:pPr indent="0" marL="0">
+              <a:buNone/>
+            </a:pPr>
+            <a:r>
+              <a:rPr lang="en-US" sz="2800" dirty="0">
+                <a:solidFill>
+                  <a:srgbClr val="11344E"/>
+                </a:solidFill>
+                <a:latin typeface="Times New Roman" pitchFamily="34" charset="0"/>
+                <a:ea typeface="Times New Roman" pitchFamily="34" charset="-122"/>
+                <a:cs typeface="Times New Roman" pitchFamily="34" charset="-120"/>
+              </a:rPr>
+              <a:t> + 96t + 6</a:t>
             </a:r>
             <a:endParaRPr lang="en-US" sz="2800" dirty="0"/>
           </a:p>
@@ -20136,7 +21457,7 @@
         <p:spPr>
           <a:xfrm>
             <a:off x="548640" y="2788920"/>
-            <a:ext cx="5943600" cy="457200"/>
+            <a:ext cx="6400800" cy="457200"/>
           </a:xfrm>
           <a:prstGeom prst="rect">
             <a:avLst/>
@@ -20160,72 +21481,22 @@
                 <a:ea typeface="Times New Roman" pitchFamily="34" charset="-122"/>
                 <a:cs typeface="Times New Roman" pitchFamily="34" charset="-120"/>
               </a:rPr>
-              <a:t>      h(2) = 128 − 64 = 64 ft</a:t>
-            </a:r>
-            <a:endParaRPr lang="en-US" sz="2100" dirty="0"/>
-          </a:p>
-        </p:txBody>
-      </p:sp>
-      <p:sp>
-        <p:nvSpPr>
-          <p:cNvPr id="9" name="Text 6"/>
-          <p:cNvSpPr txBox="1"/>
-          <p:nvPr/>
-        </p:nvSpPr>
-        <p:spPr>
-          <a:xfrm>
-            <a:off x="548640" y="3657600"/>
-            <a:ext cx="5943600" cy="457200"/>
-          </a:xfrm>
-          <a:prstGeom prst="rect">
-            <a:avLst/>
-          </a:prstGeom>
-          <a:noFill/>
-          <a:ln/>
-        </p:spPr>
-        <p:txBody>
-          <a:bodyPr wrap="square" lIns="0" tIns="0" rIns="0" bIns="0" rtlCol="0" anchor="t"/>
-          <a:lstStyle/>
-          <a:p>
-            <a:pPr indent="0" marL="0">
-              <a:buNone/>
-            </a:pPr>
-            <a:r>
-              <a:rPr lang="en-US" sz="2100" dirty="0">
-                <a:solidFill>
-                  <a:srgbClr val="11344E"/>
+              <a:t>      h(2) = 64(2) − 16(2)</a:t>
+            </a:r>
+            <a:pPr indent="0" marL="0">
+              <a:buNone/>
+            </a:pPr>
+            <a:r>
+              <a:rPr lang="en-US" sz="2100" b="1" baseline="30000" dirty="0">
+                <a:solidFill>
+                  <a:srgbClr val="1777B4"/>
                 </a:solidFill>
                 <a:latin typeface="Times New Roman" pitchFamily="34" charset="0"/>
                 <a:ea typeface="Times New Roman" pitchFamily="34" charset="-122"/>
                 <a:cs typeface="Times New Roman" pitchFamily="34" charset="-120"/>
               </a:rPr>
-              <a:t>2.   t = −96 / (2(−16)) = 3 s</a:t>
-            </a:r>
-            <a:endParaRPr lang="en-US" sz="2100" dirty="0"/>
-          </a:p>
-        </p:txBody>
-      </p:sp>
-      <p:sp>
-        <p:nvSpPr>
-          <p:cNvPr id="10" name="Text 7"/>
-          <p:cNvSpPr txBox="1"/>
-          <p:nvPr/>
-        </p:nvSpPr>
-        <p:spPr>
-          <a:xfrm>
-            <a:off x="548640" y="4251960"/>
-            <a:ext cx="5943600" cy="457200"/>
-          </a:xfrm>
-          <a:prstGeom prst="rect">
-            <a:avLst/>
-          </a:prstGeom>
-          <a:noFill/>
-          <a:ln/>
-        </p:spPr>
-        <p:txBody>
-          <a:bodyPr wrap="square" lIns="0" tIns="0" rIns="0" bIns="0" rtlCol="0" anchor="t"/>
-          <a:lstStyle/>
-          <a:p>
+              <a:t>2</a:t>
+            </a:r>
             <a:pPr indent="0" marL="0">
               <a:buNone/>
             </a:pPr>
@@ -20238,7 +21509,113 @@
                 <a:ea typeface="Times New Roman" pitchFamily="34" charset="-122"/>
                 <a:cs typeface="Times New Roman" pitchFamily="34" charset="-120"/>
               </a:rPr>
-              <a:t>      h(3) = −144 + 288 + 6 = 150 ft</a:t>
+              <a:t> = 128 − 64 = 64 ft</a:t>
+            </a:r>
+            <a:endParaRPr lang="en-US" sz="2100" dirty="0"/>
+          </a:p>
+        </p:txBody>
+      </p:sp>
+      <p:sp>
+        <p:nvSpPr>
+          <p:cNvPr id="9" name="Text 6"/>
+          <p:cNvSpPr txBox="1"/>
+          <p:nvPr/>
+        </p:nvSpPr>
+        <p:spPr>
+          <a:xfrm>
+            <a:off x="548640" y="3657600"/>
+            <a:ext cx="5943600" cy="457200"/>
+          </a:xfrm>
+          <a:prstGeom prst="rect">
+            <a:avLst/>
+          </a:prstGeom>
+          <a:noFill/>
+          <a:ln/>
+        </p:spPr>
+        <p:txBody>
+          <a:bodyPr wrap="square" lIns="0" tIns="0" rIns="0" bIns="0" rtlCol="0" anchor="t"/>
+          <a:lstStyle/>
+          <a:p>
+            <a:pPr indent="0" marL="0">
+              <a:buNone/>
+            </a:pPr>
+            <a:r>
+              <a:rPr lang="en-US" sz="2100" dirty="0">
+                <a:solidFill>
+                  <a:srgbClr val="11344E"/>
+                </a:solidFill>
+                <a:latin typeface="Times New Roman" pitchFamily="34" charset="0"/>
+                <a:ea typeface="Times New Roman" pitchFamily="34" charset="-122"/>
+                <a:cs typeface="Times New Roman" pitchFamily="34" charset="-120"/>
+              </a:rPr>
+              <a:t>2.   t = −96 / (2(−16)) = 3 s</a:t>
+            </a:r>
+            <a:endParaRPr lang="en-US" sz="2100" dirty="0"/>
+          </a:p>
+        </p:txBody>
+      </p:sp>
+      <p:sp>
+        <p:nvSpPr>
+          <p:cNvPr id="10" name="Text 7"/>
+          <p:cNvSpPr txBox="1"/>
+          <p:nvPr/>
+        </p:nvSpPr>
+        <p:spPr>
+          <a:xfrm>
+            <a:off x="548640" y="4251960"/>
+            <a:ext cx="6400800" cy="457200"/>
+          </a:xfrm>
+          <a:prstGeom prst="rect">
+            <a:avLst/>
+          </a:prstGeom>
+          <a:noFill/>
+          <a:ln/>
+        </p:spPr>
+        <p:txBody>
+          <a:bodyPr wrap="square" lIns="0" tIns="0" rIns="0" bIns="0" rtlCol="0" anchor="t"/>
+          <a:lstStyle/>
+          <a:p>
+            <a:pPr indent="0" marL="0">
+              <a:buNone/>
+            </a:pPr>
+            <a:r>
+              <a:rPr lang="en-US" sz="2100" b="1" dirty="0">
+                <a:solidFill>
+                  <a:srgbClr val="1777B4"/>
+                </a:solidFill>
+                <a:latin typeface="Times New Roman" pitchFamily="34" charset="0"/>
+                <a:ea typeface="Times New Roman" pitchFamily="34" charset="-122"/>
+                <a:cs typeface="Times New Roman" pitchFamily="34" charset="-120"/>
+              </a:rPr>
+              <a:t>      h(3) = −16(3)</a:t>
+            </a:r>
+            <a:pPr indent="0" marL="0">
+              <a:buNone/>
+            </a:pPr>
+            <a:r>
+              <a:rPr lang="en-US" sz="2100" b="1" baseline="30000" dirty="0">
+                <a:solidFill>
+                  <a:srgbClr val="1777B4"/>
+                </a:solidFill>
+                <a:latin typeface="Times New Roman" pitchFamily="34" charset="0"/>
+                <a:ea typeface="Times New Roman" pitchFamily="34" charset="-122"/>
+                <a:cs typeface="Times New Roman" pitchFamily="34" charset="-120"/>
+              </a:rPr>
+              <a:t>2</a:t>
+            </a:r>
+            <a:pPr indent="0" marL="0">
+              <a:buNone/>
+            </a:pPr>
+            <a:r>
+              <a:rPr lang="en-US" sz="2100" b="1" dirty="0">
+                <a:solidFill>
+                  <a:srgbClr val="1777B4"/>
+                </a:solidFill>
+                <a:latin typeface="Times New Roman" pitchFamily="34" charset="0"/>
+                <a:ea typeface="Times New Roman" pitchFamily="34" charset="-122"/>
+                <a:cs typeface="Times New Roman" pitchFamily="34" charset="-120"/>
+              </a:rPr>
+              <a:t> + 96(3) + 6 = 150 ft</a:t>
             </a:r>
             <a:endParaRPr lang="en-US" sz="2100" dirty="0"/>
           </a:p>
@@ -20253,7 +21630,7 @@
         <p:spPr>
           <a:xfrm>
             <a:off x="548640" y="5074920"/>
-            <a:ext cx="6035040" cy="868680"/>
+            <a:ext cx="6400800" cy="868680"/>
           </a:xfrm>
           <a:prstGeom prst="roundRect">
             <a:avLst>
@@ -20318,7 +21695,7 @@
         </p:nvSpPr>
         <p:spPr>
           <a:xfrm>
-            <a:off x="7498080" y="1645920"/>
+            <a:off x="7772400" y="1645920"/>
             <a:ext cx="91" cy="3749040"/>
           </a:xfrm>
           <a:prstGeom prst="line">
@@ -20341,7 +21718,7 @@
         </p:nvSpPr>
         <p:spPr>
           <a:xfrm>
-            <a:off x="8481060" y="1645920"/>
+            <a:off x="8709660" y="1645920"/>
             <a:ext cx="91" cy="3749040"/>
           </a:xfrm>
           <a:prstGeom prst="line">
@@ -20364,7 +21741,7 @@
         </p:nvSpPr>
         <p:spPr>
           <a:xfrm>
-            <a:off x="9464040" y="1645920"/>
+            <a:off x="9646920" y="1645920"/>
             <a:ext cx="91" cy="3749040"/>
           </a:xfrm>
           <a:prstGeom prst="line">
@@ -20387,7 +21764,7 @@
         </p:nvSpPr>
         <p:spPr>
           <a:xfrm>
-            <a:off x="10447020" y="1645920"/>
+            <a:off x="10584180" y="1645920"/>
             <a:ext cx="91" cy="3749040"/>
           </a:xfrm>
           <a:prstGeom prst="line">
@@ -20410,7 +21787,7 @@
         </p:nvSpPr>
         <p:spPr>
           <a:xfrm>
-            <a:off x="11430000" y="1645920"/>
+            <a:off x="11521440" y="1645920"/>
             <a:ext cx="91" cy="3749040"/>
           </a:xfrm>
           <a:prstGeom prst="line">
@@ -20433,8 +21810,8 @@
         </p:nvSpPr>
         <p:spPr>
           <a:xfrm>
-            <a:off x="7498080" y="5394960"/>
-            <a:ext cx="3931920" cy="91"/>
+            <a:off x="7772400" y="5394960"/>
+            <a:ext cx="3749040" cy="91"/>
           </a:xfrm>
           <a:prstGeom prst="line">
             <a:avLst/>
@@ -20456,8 +21833,8 @@
         </p:nvSpPr>
         <p:spPr>
           <a:xfrm>
-            <a:off x="7498080" y="4645152"/>
-            <a:ext cx="3931920" cy="91"/>
+            <a:off x="7772400" y="4645152"/>
+            <a:ext cx="3749040" cy="91"/>
           </a:xfrm>
           <a:prstGeom prst="line">
             <a:avLst/>
@@ -20479,8 +21856,8 @@
         </p:nvSpPr>
         <p:spPr>
           <a:xfrm>
-            <a:off x="7498080" y="3895344"/>
-            <a:ext cx="3931920" cy="91"/>
+            <a:off x="7772400" y="3895344"/>
+            <a:ext cx="3749040" cy="91"/>
           </a:xfrm>
           <a:prstGeom prst="line">
             <a:avLst/>
@@ -20502,8 +21879,8 @@
         </p:nvSpPr>
         <p:spPr>
           <a:xfrm>
-            <a:off x="7498080" y="3145536"/>
-            <a:ext cx="3931920" cy="91"/>
+            <a:off x="7772400" y="3145536"/>
+            <a:ext cx="3749040" cy="91"/>
           </a:xfrm>
           <a:prstGeom prst="line">
             <a:avLst/>
@@ -20525,8 +21902,8 @@
         </p:nvSpPr>
         <p:spPr>
           <a:xfrm>
-            <a:off x="7498080" y="2395728"/>
-            <a:ext cx="3931920" cy="91"/>
+            <a:off x="7772400" y="2395728"/>
+            <a:ext cx="3749040" cy="91"/>
           </a:xfrm>
           <a:prstGeom prst="line">
             <a:avLst/>
@@ -20548,8 +21925,8 @@
         </p:nvSpPr>
         <p:spPr>
           <a:xfrm>
-            <a:off x="7498080" y="1645920"/>
-            <a:ext cx="3931920" cy="91"/>
+            <a:off x="7772400" y="1645920"/>
+            <a:ext cx="3749040" cy="91"/>
           </a:xfrm>
           <a:prstGeom prst="line">
             <a:avLst/>
@@ -20571,7 +21948,7 @@
         </p:nvSpPr>
         <p:spPr>
           <a:xfrm>
-            <a:off x="7498080" y="1645920"/>
+            <a:off x="7772400" y="1645920"/>
             <a:ext cx="91" cy="3749040"/>
           </a:xfrm>
           <a:prstGeom prst="line">
@@ -20594,8 +21971,8 @@
         </p:nvSpPr>
         <p:spPr>
           <a:xfrm>
-            <a:off x="7498080" y="5394960"/>
-            <a:ext cx="3931920" cy="91"/>
+            <a:off x="7772400" y="5394960"/>
+            <a:ext cx="3749040" cy="91"/>
           </a:xfrm>
           <a:prstGeom prst="line">
             <a:avLst/>
@@ -20617,7 +21994,7 @@
         </p:nvSpPr>
         <p:spPr>
           <a:xfrm>
-            <a:off x="8298180" y="5440680"/>
+            <a:off x="8526780" y="5440680"/>
             <a:ext cx="365760" cy="182880"/>
           </a:xfrm>
           <a:prstGeom prst="rect">
@@ -20656,7 +22033,7 @@
         </p:nvSpPr>
         <p:spPr>
           <a:xfrm>
-            <a:off x="9281160" y="5440680"/>
+            <a:off x="9464040" y="5440680"/>
             <a:ext cx="365760" cy="182880"/>
           </a:xfrm>
           <a:prstGeom prst="rect">
@@ -20695,7 +22072,7 @@
         </p:nvSpPr>
         <p:spPr>
           <a:xfrm>
-            <a:off x="10264140" y="5440680"/>
+            <a:off x="10401300" y="5440680"/>
             <a:ext cx="365760" cy="182880"/>
           </a:xfrm>
           <a:prstGeom prst="rect">
@@ -20734,7 +22111,7 @@
         </p:nvSpPr>
         <p:spPr>
           <a:xfrm>
-            <a:off x="11247120" y="5440680"/>
+            <a:off x="11338560" y="5440680"/>
             <a:ext cx="365760" cy="182880"/>
           </a:xfrm>
           <a:prstGeom prst="rect">
@@ -20773,7 +22150,7 @@
         </p:nvSpPr>
         <p:spPr>
           <a:xfrm>
-            <a:off x="7040880" y="4553712"/>
+            <a:off x="7315200" y="4553712"/>
             <a:ext cx="384048" cy="182880"/>
           </a:xfrm>
           <a:prstGeom prst="rect">
@@ -20812,7 +22189,7 @@
         </p:nvSpPr>
         <p:spPr>
           <a:xfrm>
-            <a:off x="7040880" y="3803904"/>
+            <a:off x="7315200" y="3803904"/>
             <a:ext cx="384048" cy="182880"/>
           </a:xfrm>
           <a:prstGeom prst="rect">
@@ -20851,7 +22228,7 @@
         </p:nvSpPr>
         <p:spPr>
           <a:xfrm>
-            <a:off x="7040880" y="3054096"/>
+            <a:off x="7315200" y="3054096"/>
             <a:ext cx="384048" cy="182880"/>
           </a:xfrm>
           <a:prstGeom prst="rect">
@@ -20890,7 +22267,7 @@
         </p:nvSpPr>
         <p:spPr>
           <a:xfrm>
-            <a:off x="7040880" y="2304288"/>
+            <a:off x="7315200" y="2304288"/>
             <a:ext cx="384048" cy="182880"/>
           </a:xfrm>
           <a:prstGeom prst="rect">
@@ -20929,7 +22306,7 @@
         </p:nvSpPr>
         <p:spPr>
           <a:xfrm>
-            <a:off x="7040880" y="1554480"/>
+            <a:off x="7315200" y="1554480"/>
             <a:ext cx="384048" cy="182880"/>
           </a:xfrm>
           <a:prstGeom prst="rect">
@@ -20968,7 +22345,7 @@
         </p:nvSpPr>
         <p:spPr>
           <a:xfrm>
-            <a:off x="10881360" y="5623560"/>
+            <a:off x="10972800" y="5623560"/>
             <a:ext cx="548640" cy="201168"/>
           </a:xfrm>
           <a:prstGeom prst="rect">
@@ -21007,7 +22384,7 @@
         </p:nvSpPr>
         <p:spPr>
           <a:xfrm>
-            <a:off x="6995160" y="1371600"/>
+            <a:off x="7269480" y="1371600"/>
             <a:ext cx="731520" cy="201168"/>
           </a:xfrm>
           <a:prstGeom prst="rect">
@@ -21046,8 +22423,8 @@
         </p:nvSpPr>
         <p:spPr>
           <a:xfrm flipV="1">
-            <a:off x="7498080" y="5102535"/>
-            <a:ext cx="98298" cy="292425"/>
+            <a:off x="7772400" y="5102535"/>
+            <a:ext cx="93726" cy="292425"/>
           </a:xfrm>
           <a:prstGeom prst="line">
             <a:avLst/>
@@ -21069,8 +22446,8 @@
         </p:nvSpPr>
         <p:spPr>
           <a:xfrm flipV="1">
-            <a:off x="7596378" y="4825106"/>
-            <a:ext cx="98298" cy="277429"/>
+            <a:off x="7866126" y="4825106"/>
+            <a:ext cx="93726" cy="277429"/>
           </a:xfrm>
           <a:prstGeom prst="line">
             <a:avLst/>
@@ -21092,8 +22469,8 @@
         </p:nvSpPr>
         <p:spPr>
           <a:xfrm flipV="1">
-            <a:off x="7694676" y="4562673"/>
-            <a:ext cx="98298" cy="262433"/>
+            <a:off x="7959852" y="4562673"/>
+            <a:ext cx="93726" cy="262433"/>
           </a:xfrm>
           <a:prstGeom prst="line">
             <a:avLst/>
@@ -21115,8 +22492,8 @@
         </p:nvSpPr>
         <p:spPr>
           <a:xfrm flipV="1">
-            <a:off x="7792974" y="4315236"/>
-            <a:ext cx="98298" cy="247437"/>
+            <a:off x="8053578" y="4315236"/>
+            <a:ext cx="93726" cy="247437"/>
           </a:xfrm>
           <a:prstGeom prst="line">
             <a:avLst/>
@@ -21138,8 +22515,8 @@
         </p:nvSpPr>
         <p:spPr>
           <a:xfrm flipV="1">
-            <a:off x="7891272" y="4082796"/>
-            <a:ext cx="98298" cy="232440"/>
+            <a:off x="8147304" y="4082796"/>
+            <a:ext cx="93726" cy="232440"/>
           </a:xfrm>
           <a:prstGeom prst="line">
             <a:avLst/>
@@ -21161,8 +22538,8 @@
         </p:nvSpPr>
         <p:spPr>
           <a:xfrm flipV="1">
-            <a:off x="7989570" y="3865352"/>
-            <a:ext cx="98298" cy="217444"/>
+            <a:off x="8241030" y="3865352"/>
+            <a:ext cx="93726" cy="217444"/>
           </a:xfrm>
           <a:prstGeom prst="line">
             <a:avLst/>
@@ -21184,8 +22561,8 @@
         </p:nvSpPr>
         <p:spPr>
           <a:xfrm flipV="1">
-            <a:off x="8087868" y="3662904"/>
-            <a:ext cx="98298" cy="202448"/>
+            <a:off x="8334756" y="3662904"/>
+            <a:ext cx="93726" cy="202448"/>
           </a:xfrm>
           <a:prstGeom prst="line">
             <a:avLst/>
@@ -21207,8 +22584,8 @@
         </p:nvSpPr>
         <p:spPr>
           <a:xfrm flipV="1">
-            <a:off x="8186166" y="3475452"/>
-            <a:ext cx="98298" cy="187452"/>
+            <a:off x="8428482" y="3475452"/>
+            <a:ext cx="93726" cy="187452"/>
           </a:xfrm>
           <a:prstGeom prst="line">
             <a:avLst/>
@@ -21230,8 +22607,8 @@
         </p:nvSpPr>
         <p:spPr>
           <a:xfrm flipV="1">
-            <a:off x="8284464" y="3302996"/>
-            <a:ext cx="98298" cy="172456"/>
+            <a:off x="8522208" y="3302996"/>
+            <a:ext cx="93726" cy="172456"/>
           </a:xfrm>
           <a:prstGeom prst="line">
             <a:avLst/>
@@ -21253,8 +22630,8 @@
         </p:nvSpPr>
         <p:spPr>
           <a:xfrm flipV="1">
-            <a:off x="8382762" y="3145536"/>
-            <a:ext cx="98298" cy="157460"/>
+            <a:off x="8615934" y="3145536"/>
+            <a:ext cx="93726" cy="157460"/>
           </a:xfrm>
           <a:prstGeom prst="line">
             <a:avLst/>
@@ -21276,8 +22653,8 @@
         </p:nvSpPr>
         <p:spPr>
           <a:xfrm flipV="1">
-            <a:off x="8481060" y="3003072"/>
-            <a:ext cx="98298" cy="142464"/>
+            <a:off x="8709660" y="3003072"/>
+            <a:ext cx="93726" cy="142464"/>
           </a:xfrm>
           <a:prstGeom prst="line">
             <a:avLst/>
@@ -21299,8 +22676,8 @@
         </p:nvSpPr>
         <p:spPr>
           <a:xfrm flipV="1">
-            <a:off x="8579358" y="2875605"/>
-            <a:ext cx="98298" cy="127467"/>
+            <a:off x="8803386" y="2875605"/>
+            <a:ext cx="93726" cy="127467"/>
           </a:xfrm>
           <a:prstGeom prst="line">
             <a:avLst/>
@@ -21322,8 +22699,8 @@
         </p:nvSpPr>
         <p:spPr>
           <a:xfrm flipV="1">
-            <a:off x="8677656" y="2763134"/>
-            <a:ext cx="98298" cy="112471"/>
+            <a:off x="8897112" y="2763134"/>
+            <a:ext cx="93726" cy="112471"/>
           </a:xfrm>
           <a:prstGeom prst="line">
             <a:avLst/>
@@ -21345,8 +22722,8 @@
         </p:nvSpPr>
         <p:spPr>
           <a:xfrm flipV="1">
-            <a:off x="8775954" y="2665659"/>
-            <a:ext cx="98298" cy="97475"/>
+            <a:off x="8990838" y="2665659"/>
+            <a:ext cx="93726" cy="97475"/>
           </a:xfrm>
           <a:prstGeom prst="line">
             <a:avLst/>
@@ -21368,8 +22745,8 @@
         </p:nvSpPr>
         <p:spPr>
           <a:xfrm flipV="1">
-            <a:off x="8874252" y="2583180"/>
-            <a:ext cx="98298" cy="82479"/>
+            <a:off x="9084564" y="2583180"/>
+            <a:ext cx="93726" cy="82479"/>
           </a:xfrm>
           <a:prstGeom prst="line">
             <a:avLst/>
@@ -21391,8 +22768,8 @@
         </p:nvSpPr>
         <p:spPr>
           <a:xfrm flipV="1">
-            <a:off x="8972550" y="2515697"/>
-            <a:ext cx="98298" cy="67483"/>
+            <a:off x="9178290" y="2515697"/>
+            <a:ext cx="93726" cy="67483"/>
           </a:xfrm>
           <a:prstGeom prst="line">
             <a:avLst/>
@@ -21414,8 +22791,8 @@
         </p:nvSpPr>
         <p:spPr>
           <a:xfrm flipV="1">
-            <a:off x="9070848" y="2463211"/>
-            <a:ext cx="98298" cy="52487"/>
+            <a:off x="9272016" y="2463211"/>
+            <a:ext cx="93726" cy="52487"/>
           </a:xfrm>
           <a:prstGeom prst="line">
             <a:avLst/>
@@ -21437,8 +22814,8 @@
         </p:nvSpPr>
         <p:spPr>
           <a:xfrm flipV="1">
-            <a:off x="9169146" y="2425720"/>
-            <a:ext cx="98298" cy="37490"/>
+            <a:off x="9365742" y="2425720"/>
+            <a:ext cx="93726" cy="37490"/>
           </a:xfrm>
           <a:prstGeom prst="line">
             <a:avLst/>
@@ -21460,8 +22837,8 @@
         </p:nvSpPr>
         <p:spPr>
           <a:xfrm flipV="1">
-            <a:off x="9267444" y="2403226"/>
-            <a:ext cx="98298" cy="22494"/>
+            <a:off x="9459468" y="2403226"/>
+            <a:ext cx="93726" cy="22494"/>
           </a:xfrm>
           <a:prstGeom prst="line">
             <a:avLst/>
@@ -21483,8 +22860,8 @@
         </p:nvSpPr>
         <p:spPr>
           <a:xfrm flipV="1">
-            <a:off x="9365742" y="2395728"/>
-            <a:ext cx="98298" cy="7498"/>
+            <a:off x="9553194" y="2395728"/>
+            <a:ext cx="93726" cy="7498"/>
           </a:xfrm>
           <a:prstGeom prst="line">
             <a:avLst/>
@@ -21506,8 +22883,8 @@
         </p:nvSpPr>
         <p:spPr>
           <a:xfrm>
-            <a:off x="9464040" y="2395728"/>
-            <a:ext cx="98298" cy="7498"/>
+            <a:off x="9646920" y="2395728"/>
+            <a:ext cx="93726" cy="7498"/>
           </a:xfrm>
           <a:prstGeom prst="line">
             <a:avLst/>
@@ -21529,8 +22906,8 @@
         </p:nvSpPr>
         <p:spPr>
           <a:xfrm>
-            <a:off x="9562338" y="2403226"/>
-            <a:ext cx="98298" cy="22494"/>
+            <a:off x="9740646" y="2403226"/>
+            <a:ext cx="93726" cy="22494"/>
           </a:xfrm>
           <a:prstGeom prst="line">
             <a:avLst/>
@@ -21552,8 +22929,8 @@
         </p:nvSpPr>
         <p:spPr>
           <a:xfrm>
-            <a:off x="9660636" y="2425720"/>
-            <a:ext cx="98298" cy="37490"/>
+            <a:off x="9834372" y="2425720"/>
+            <a:ext cx="93726" cy="37490"/>
           </a:xfrm>
           <a:prstGeom prst="line">
             <a:avLst/>
@@ -21575,8 +22952,8 @@
         </p:nvSpPr>
         <p:spPr>
           <a:xfrm>
-            <a:off x="9758934" y="2463211"/>
-            <a:ext cx="98298" cy="52487"/>
+            <a:off x="9928098" y="2463211"/>
+            <a:ext cx="93726" cy="52487"/>
           </a:xfrm>
           <a:prstGeom prst="line">
             <a:avLst/>
@@ -21598,8 +22975,8 @@
         </p:nvSpPr>
         <p:spPr>
           <a:xfrm>
-            <a:off x="9857232" y="2515697"/>
-            <a:ext cx="98298" cy="67483"/>
+            <a:off x="10021824" y="2515697"/>
+            <a:ext cx="93726" cy="67483"/>
           </a:xfrm>
           <a:prstGeom prst="line">
             <a:avLst/>
@@ -21621,8 +22998,8 @@
         </p:nvSpPr>
         <p:spPr>
           <a:xfrm>
-            <a:off x="9955530" y="2583180"/>
-            <a:ext cx="98298" cy="82479"/>
+            <a:off x="10115550" y="2583180"/>
+            <a:ext cx="93726" cy="82479"/>
           </a:xfrm>
           <a:prstGeom prst="line">
             <a:avLst/>
@@ -21644,8 +23021,8 @@
         </p:nvSpPr>
         <p:spPr>
           <a:xfrm>
-            <a:off x="10053828" y="2665659"/>
-            <a:ext cx="98298" cy="97475"/>
+            <a:off x="10209276" y="2665659"/>
+            <a:ext cx="93726" cy="97475"/>
           </a:xfrm>
           <a:prstGeom prst="line">
             <a:avLst/>
@@ -21667,8 +23044,8 @@
         </p:nvSpPr>
         <p:spPr>
           <a:xfrm>
-            <a:off x="10152126" y="2763134"/>
-            <a:ext cx="98298" cy="112471"/>
+            <a:off x="10303002" y="2763134"/>
+            <a:ext cx="93726" cy="112471"/>
           </a:xfrm>
           <a:prstGeom prst="line">
             <a:avLst/>
@@ -21690,8 +23067,8 @@
         </p:nvSpPr>
         <p:spPr>
           <a:xfrm>
-            <a:off x="10250424" y="2875605"/>
-            <a:ext cx="98298" cy="127467"/>
+            <a:off x="10396728" y="2875605"/>
+            <a:ext cx="93726" cy="127467"/>
           </a:xfrm>
           <a:prstGeom prst="line">
             <a:avLst/>
@@ -21713,8 +23090,8 @@
         </p:nvSpPr>
         <p:spPr>
           <a:xfrm>
-            <a:off x="10348722" y="3003072"/>
-            <a:ext cx="98298" cy="142464"/>
+            <a:off x="10490454" y="3003072"/>
+            <a:ext cx="93726" cy="142464"/>
           </a:xfrm>
           <a:prstGeom prst="line">
             <a:avLst/>
@@ -21736,8 +23113,8 @@
         </p:nvSpPr>
         <p:spPr>
           <a:xfrm>
-            <a:off x="10447020" y="3145536"/>
-            <a:ext cx="98298" cy="157460"/>
+            <a:off x="10584180" y="3145536"/>
+            <a:ext cx="93726" cy="157460"/>
           </a:xfrm>
           <a:prstGeom prst="line">
             <a:avLst/>
@@ -21759,8 +23136,8 @@
         </p:nvSpPr>
         <p:spPr>
           <a:xfrm>
-            <a:off x="10545318" y="3302996"/>
-            <a:ext cx="98298" cy="172456"/>
+            <a:off x="10677906" y="3302996"/>
+            <a:ext cx="93726" cy="172456"/>
           </a:xfrm>
           <a:prstGeom prst="line">
             <a:avLst/>
@@ -21782,8 +23159,8 @@
         </p:nvSpPr>
         <p:spPr>
           <a:xfrm>
-            <a:off x="10643616" y="3475452"/>
-            <a:ext cx="98298" cy="187452"/>
+            <a:off x="10771632" y="3475452"/>
+            <a:ext cx="93726" cy="187452"/>
           </a:xfrm>
           <a:prstGeom prst="line">
             <a:avLst/>
@@ -21805,8 +23182,8 @@
         </p:nvSpPr>
         <p:spPr>
           <a:xfrm>
-            <a:off x="10741914" y="3662904"/>
-            <a:ext cx="98298" cy="202448"/>
+            <a:off x="10865358" y="3662904"/>
+            <a:ext cx="93726" cy="202448"/>
           </a:xfrm>
           <a:prstGeom prst="line">
             <a:avLst/>
@@ -21828,8 +23205,8 @@
         </p:nvSpPr>
         <p:spPr>
           <a:xfrm>
-            <a:off x="10840212" y="3865352"/>
-            <a:ext cx="98298" cy="217444"/>
+            <a:off x="10959084" y="3865352"/>
+            <a:ext cx="93726" cy="217444"/>
           </a:xfrm>
           <a:prstGeom prst="line">
             <a:avLst/>
@@ -21851,8 +23228,8 @@
         </p:nvSpPr>
         <p:spPr>
           <a:xfrm>
-            <a:off x="10938510" y="4082796"/>
-            <a:ext cx="98298" cy="232440"/>
+            <a:off x="11052810" y="4082796"/>
+            <a:ext cx="93726" cy="232440"/>
           </a:xfrm>
           <a:prstGeom prst="line">
             <a:avLst/>
@@ -21874,8 +23251,8 @@
         </p:nvSpPr>
         <p:spPr>
           <a:xfrm>
-            <a:off x="11036808" y="4315236"/>
-            <a:ext cx="98298" cy="247437"/>
+            <a:off x="11146536" y="4315236"/>
+            <a:ext cx="93726" cy="247437"/>
           </a:xfrm>
           <a:prstGeom prst="line">
             <a:avLst/>
@@ -21897,8 +23274,8 @@
         </p:nvSpPr>
         <p:spPr>
           <a:xfrm>
-            <a:off x="11135106" y="4562673"/>
-            <a:ext cx="98298" cy="262433"/>
+            <a:off x="11240262" y="4562673"/>
+            <a:ext cx="93726" cy="262433"/>
           </a:xfrm>
           <a:prstGeom prst="line">
             <a:avLst/>
@@ -21920,8 +23297,8 @@
         </p:nvSpPr>
         <p:spPr>
           <a:xfrm>
-            <a:off x="11233404" y="4825106"/>
-            <a:ext cx="98298" cy="277429"/>
+            <a:off x="11333988" y="4825106"/>
+            <a:ext cx="93726" cy="277429"/>
           </a:xfrm>
           <a:prstGeom prst="line">
             <a:avLst/>
@@ -21943,8 +23320,8 @@
         </p:nvSpPr>
         <p:spPr>
           <a:xfrm>
-            <a:off x="11331702" y="5102535"/>
-            <a:ext cx="98298" cy="292425"/>
+            <a:off x="11427714" y="5102535"/>
+            <a:ext cx="93726" cy="292425"/>
           </a:xfrm>
           <a:prstGeom prst="line">
             <a:avLst/>
@@ -21966,7 +23343,7 @@
         </p:nvSpPr>
         <p:spPr>
           <a:xfrm>
-            <a:off x="9464040" y="2395728"/>
+            <a:off x="9646920" y="2395728"/>
             <a:ext cx="91" cy="2999232"/>
           </a:xfrm>
           <a:prstGeom prst="line">
@@ -21989,8 +23366,8 @@
         </p:nvSpPr>
         <p:spPr>
           <a:xfrm>
-            <a:off x="7498080" y="2395728"/>
-            <a:ext cx="1965960" cy="91"/>
+            <a:off x="7772400" y="2395728"/>
+            <a:ext cx="1874520" cy="91"/>
           </a:xfrm>
           <a:prstGeom prst="line">
             <a:avLst/>
@@ -22012,7 +23389,7 @@
         </p:nvSpPr>
         <p:spPr>
           <a:xfrm>
-            <a:off x="9400032" y="2331720"/>
+            <a:off x="9582912" y="2331720"/>
             <a:ext cx="128016" cy="128016"/>
           </a:xfrm>
           <a:prstGeom prst="ellipse">
@@ -22037,7 +23414,7 @@
         </p:nvSpPr>
         <p:spPr>
           <a:xfrm>
-            <a:off x="9601200" y="2011680"/>
+            <a:off x="9784080" y="2011680"/>
             <a:ext cx="1828800" cy="256032"/>
           </a:xfrm>
           <a:prstGeom prst="rect">
@@ -22076,7 +23453,7 @@
         </p:nvSpPr>
         <p:spPr>
           <a:xfrm>
-            <a:off x="9537192" y="5020056"/>
+            <a:off x="9720072" y="5020056"/>
             <a:ext cx="822960" cy="256032"/>
           </a:xfrm>
           <a:prstGeom prst="rect">
@@ -22880,7 +24257,35 @@
                 <a:ea typeface="Arial" pitchFamily="34" charset="-122"/>
                 <a:cs typeface="Arial" pitchFamily="34" charset="-120"/>
               </a:rPr>
-              <a:t>Writing r instead of r² on the right side</a:t>
+              <a:t>Writing r instead of r</a:t>
+            </a:r>
+            <a:pPr indent="0" marL="0">
+              <a:buNone/>
+            </a:pPr>
+            <a:r>
+              <a:rPr lang="en-US" sz="1400" baseline="30000" dirty="0">
+                <a:solidFill>
+                  <a:srgbClr val="11344E"/>
+                </a:solidFill>
+                <a:latin typeface="Arial" pitchFamily="34" charset="0"/>
+                <a:ea typeface="Arial" pitchFamily="34" charset="-122"/>
+                <a:cs typeface="Arial" pitchFamily="34" charset="-120"/>
+              </a:rPr>
+              <a:t>2</a:t>
+            </a:r>
+            <a:pPr indent="0" marL="0">
+              <a:buNone/>
+            </a:pPr>
+            <a:r>
+              <a:rPr lang="en-US" sz="1400" dirty="0">
+                <a:solidFill>
+                  <a:srgbClr val="11344E"/>
+                </a:solidFill>
+                <a:latin typeface="Arial" pitchFamily="34" charset="0"/>
+                <a:ea typeface="Arial" pitchFamily="34" charset="-122"/>
+                <a:cs typeface="Arial" pitchFamily="34" charset="-120"/>
+              </a:rPr>
+              <a:t> on the right side</a:t>
             </a:r>
             <a:endParaRPr lang="en-US" sz="1400" dirty="0"/>
           </a:p>
@@ -23332,7 +24737,7 @@
           <a:bodyPr wrap="square" lIns="0" tIns="0" rIns="0" bIns="0" rtlCol="0" anchor="t"/>
           <a:lstStyle/>
           <a:p>
-            <a:pPr marL="342900" indent="-342900">
+            <a:pPr algn="l" marL="342900" indent="-342900">
               <a:spcAft>
                 <a:spcPts val="1200"/>
               </a:spcAft>
@@ -23353,7 +24758,7 @@
             <a:endParaRPr lang="en-US" sz="1500" dirty="0"/>
           </a:p>
           <a:p>
-            <a:pPr marL="342900" indent="-342900">
+            <a:pPr algn="l" marL="342900" indent="-342900">
               <a:spcAft>
                 <a:spcPts val="1200"/>
               </a:spcAft>
@@ -23462,7 +24867,7 @@
           <a:bodyPr wrap="square" lIns="0" tIns="0" rIns="0" bIns="0" rtlCol="0" anchor="t"/>
           <a:lstStyle/>
           <a:p>
-            <a:pPr marL="342900" indent="-342900">
+            <a:pPr algn="l" marL="342900" indent="-342900">
               <a:spcAft>
                 <a:spcPts val="1200"/>
               </a:spcAft>
@@ -23483,7 +24888,7 @@
             <a:endParaRPr lang="en-US" sz="1500" dirty="0"/>
           </a:p>
           <a:p>
-            <a:pPr marL="342900" indent="-342900">
+            <a:pPr algn="l" marL="342900" indent="-342900">
               <a:spcAft>
                 <a:spcPts val="1200"/>
               </a:spcAft>
@@ -23504,7 +24909,7 @@
             <a:endParaRPr lang="en-US" sz="1500" dirty="0"/>
           </a:p>
           <a:p>
-            <a:pPr marL="342900" indent="-342900">
+            <a:pPr algn="l" marL="342900" indent="-342900">
               <a:spcAft>
                 <a:spcPts val="1200"/>
               </a:spcAft>
@@ -23525,7 +24930,7 @@
             <a:endParaRPr lang="en-US" sz="1500" dirty="0"/>
           </a:p>
           <a:p>
-            <a:pPr marL="342900" indent="-342900">
+            <a:pPr algn="l" marL="342900" indent="-342900">
               <a:spcAft>
                 <a:spcPts val="1200"/>
               </a:spcAft>
@@ -23634,7 +25039,7 @@
           <a:bodyPr wrap="square" lIns="0" tIns="0" rIns="0" bIns="0" rtlCol="0" anchor="t"/>
           <a:lstStyle/>
           <a:p>
-            <a:pPr marL="342900" indent="-342900">
+            <a:pPr algn="l" marL="342900" indent="-342900">
               <a:spcAft>
                 <a:spcPts val="1200"/>
               </a:spcAft>
@@ -23655,7 +25060,7 @@
             <a:endParaRPr lang="en-US" sz="1500" dirty="0"/>
           </a:p>
           <a:p>
-            <a:pPr marL="342900" indent="-342900">
+            <a:pPr algn="l" marL="342900" indent="-342900">
               <a:spcAft>
                 <a:spcPts val="1200"/>
               </a:spcAft>
@@ -23676,7 +25081,7 @@
             <a:endParaRPr lang="en-US" sz="1500" dirty="0"/>
           </a:p>
           <a:p>
-            <a:pPr marL="342900" indent="-342900">
+            <a:pPr algn="l" marL="342900" indent="-342900">
               <a:spcAft>
                 <a:spcPts val="1200"/>
               </a:spcAft>
@@ -23700,9 +25105,7 @@
       </p:sp>
       <p:sp>
         <p:nvSpPr>
-          <p:cNvPr id="15" name="Text 12">
-            <a:hlinkClick r:id="rId1" tooltip=""/>
-          </p:cNvPr>
+          <p:cNvPr id="15" name="Text 12"/>
           <p:cNvSpPr txBox="1"/>
           <p:nvPr/>
         </p:nvSpPr>
@@ -24099,7 +25502,7 @@
                 <a:ea typeface="Arial" pitchFamily="34" charset="-122"/>
                 <a:cs typeface="Arial" pitchFamily="34" charset="-120"/>
               </a:rPr>
-              <a:t>Plan about four minutes per skill</a:t>
+              <a:t>Plan about three minutes per skill</a:t>
             </a:r>
             <a:endParaRPr lang="en-US" sz="1400" dirty="0"/>
           </a:p>
@@ -24441,7 +25844,7 @@
           <a:bodyPr wrap="square" lIns="0" tIns="0" rIns="0" bIns="0" rtlCol="0" anchor="t"/>
           <a:lstStyle/>
           <a:p>
-            <a:pPr marL="342900" indent="-342900">
+            <a:pPr algn="l" marL="342900" indent="-342900">
               <a:spcAft>
                 <a:spcPts val="600"/>
               </a:spcAft>
@@ -24462,7 +25865,7 @@
             <a:endParaRPr lang="en-US" sz="1500" dirty="0"/>
           </a:p>
           <a:p>
-            <a:pPr marL="342900" indent="-342900">
+            <a:pPr algn="l" marL="342900" indent="-342900">
               <a:spcAft>
                 <a:spcPts val="600"/>
               </a:spcAft>
@@ -24483,7 +25886,7 @@
             <a:endParaRPr lang="en-US" sz="1500" dirty="0"/>
           </a:p>
           <a:p>
-            <a:pPr marL="342900" indent="-342900">
+            <a:pPr algn="l" marL="342900" indent="-342900">
               <a:spcAft>
                 <a:spcPts val="600"/>
               </a:spcAft>
@@ -24728,17 +26131,17 @@
         </p:nvSpPr>
         <p:spPr>
           <a:xfrm>
-            <a:off x="777240" y="2103120"/>
-            <a:ext cx="3200400" cy="548640"/>
-          </a:xfrm>
-          <a:prstGeom prst="rect">
-            <a:avLst/>
-          </a:prstGeom>
-          <a:noFill/>
-          <a:ln/>
-        </p:spPr>
-        <p:txBody>
-          <a:bodyPr wrap="square" lIns="0" tIns="0" rIns="0" bIns="0" rtlCol="0" anchor="ctr"/>
+            <a:off x="777240" y="2194560"/>
+            <a:ext cx="731520" cy="365760"/>
+          </a:xfrm>
+          <a:prstGeom prst="rect">
+            <a:avLst/>
+          </a:prstGeom>
+          <a:noFill/>
+          <a:ln/>
+        </p:spPr>
+        <p:txBody>
+          <a:bodyPr wrap="square" lIns="0" tIns="0" rIns="0" bIns="0" rtlCol="0" anchor="t"/>
           <a:lstStyle/>
           <a:p>
             <a:pPr indent="0" marL="0">
@@ -24753,7 +26156,7 @@
                 <a:ea typeface="Times New Roman" pitchFamily="34" charset="-122"/>
                 <a:cs typeface="Times New Roman" pitchFamily="34" charset="-120"/>
               </a:rPr>
-              <a:t>M = ((x₁ + x₂)/2,  (y₁ + y₂)/2)</a:t>
+              <a:t>M = (</a:t>
             </a:r>
             <a:endParaRPr lang="en-US" sz="1800" dirty="0"/>
           </a:p>
@@ -24761,7 +26164,371 @@
       </p:sp>
       <p:sp>
         <p:nvSpPr>
-          <p:cNvPr id="9" name="Shape 6"/>
+          <p:cNvPr id="9" name="Text 6"/>
+          <p:cNvSpPr txBox="1"/>
+          <p:nvPr/>
+        </p:nvSpPr>
+        <p:spPr>
+          <a:xfrm>
+            <a:off x="1435608" y="2011680"/>
+            <a:ext cx="960120" cy="280670"/>
+          </a:xfrm>
+          <a:prstGeom prst="rect">
+            <a:avLst/>
+          </a:prstGeom>
+          <a:noFill/>
+          <a:ln/>
+        </p:spPr>
+        <p:txBody>
+          <a:bodyPr wrap="square" lIns="0" tIns="0" rIns="0" bIns="0" rtlCol="0" anchor="b"/>
+          <a:lstStyle/>
+          <a:p>
+            <a:pPr algn="ctr" indent="0" marL="0">
+              <a:buNone/>
+            </a:pPr>
+            <a:r>
+              <a:rPr lang="en-US" sz="1700" dirty="0">
+                <a:solidFill>
+                  <a:srgbClr val="11344E"/>
+                </a:solidFill>
+                <a:latin typeface="Times New Roman" pitchFamily="34" charset="0"/>
+                <a:ea typeface="Times New Roman" pitchFamily="34" charset="-122"/>
+                <a:cs typeface="Times New Roman" pitchFamily="34" charset="-120"/>
+              </a:rPr>
+              <a:t>x</a:t>
+            </a:r>
+            <a:pPr algn="ctr" indent="0" marL="0">
+              <a:buNone/>
+            </a:pPr>
+            <a:r>
+              <a:rPr lang="en-US" sz="1700" baseline="-40000" dirty="0">
+                <a:solidFill>
+                  <a:srgbClr val="11344E"/>
+                </a:solidFill>
+                <a:latin typeface="Times New Roman" pitchFamily="34" charset="0"/>
+                <a:ea typeface="Times New Roman" pitchFamily="34" charset="-122"/>
+                <a:cs typeface="Times New Roman" pitchFamily="34" charset="-120"/>
+              </a:rPr>
+              <a:t>1</a:t>
+            </a:r>
+            <a:pPr algn="ctr" indent="0" marL="0">
+              <a:buNone/>
+            </a:pPr>
+            <a:r>
+              <a:rPr lang="en-US" sz="1700" dirty="0">
+                <a:solidFill>
+                  <a:srgbClr val="11344E"/>
+                </a:solidFill>
+                <a:latin typeface="Times New Roman" pitchFamily="34" charset="0"/>
+                <a:ea typeface="Times New Roman" pitchFamily="34" charset="-122"/>
+                <a:cs typeface="Times New Roman" pitchFamily="34" charset="-120"/>
+              </a:rPr>
+              <a:t> + x</a:t>
+            </a:r>
+            <a:pPr algn="ctr" indent="0" marL="0">
+              <a:buNone/>
+            </a:pPr>
+            <a:r>
+              <a:rPr lang="en-US" sz="1700" baseline="-40000" dirty="0">
+                <a:solidFill>
+                  <a:srgbClr val="11344E"/>
+                </a:solidFill>
+                <a:latin typeface="Times New Roman" pitchFamily="34" charset="0"/>
+                <a:ea typeface="Times New Roman" pitchFamily="34" charset="-122"/>
+                <a:cs typeface="Times New Roman" pitchFamily="34" charset="-120"/>
+              </a:rPr>
+              <a:t>2</a:t>
+            </a:r>
+            <a:endParaRPr lang="en-US" sz="1700" dirty="0"/>
+          </a:p>
+        </p:txBody>
+      </p:sp>
+      <p:sp>
+        <p:nvSpPr>
+          <p:cNvPr id="10" name="Shape 7"/>
+          <p:cNvSpPr/>
+          <p:nvPr/>
+        </p:nvSpPr>
+        <p:spPr>
+          <a:xfrm>
+            <a:off x="1481328" y="2319782"/>
+            <a:ext cx="868680" cy="0"/>
+          </a:xfrm>
+          <a:prstGeom prst="line">
+            <a:avLst/>
+          </a:prstGeom>
+          <a:noFill/>
+          <a:ln w="12700">
+            <a:solidFill>
+              <a:srgbClr val="11344E"/>
+            </a:solidFill>
+            <a:prstDash val="solid"/>
+          </a:ln>
+        </p:spPr>
+      </p:sp>
+      <p:sp>
+        <p:nvSpPr>
+          <p:cNvPr id="11" name="Text 8"/>
+          <p:cNvSpPr txBox="1"/>
+          <p:nvPr/>
+        </p:nvSpPr>
+        <p:spPr>
+          <a:xfrm>
+            <a:off x="1435608" y="2356358"/>
+            <a:ext cx="960120" cy="280670"/>
+          </a:xfrm>
+          <a:prstGeom prst="rect">
+            <a:avLst/>
+          </a:prstGeom>
+          <a:noFill/>
+          <a:ln/>
+        </p:spPr>
+        <p:txBody>
+          <a:bodyPr wrap="square" lIns="0" tIns="0" rIns="0" bIns="0" rtlCol="0" anchor="t"/>
+          <a:lstStyle/>
+          <a:p>
+            <a:pPr algn="ctr" indent="0" marL="0">
+              <a:buNone/>
+            </a:pPr>
+            <a:r>
+              <a:rPr lang="en-US" sz="1700" dirty="0">
+                <a:solidFill>
+                  <a:srgbClr val="11344E"/>
+                </a:solidFill>
+                <a:latin typeface="Times New Roman" pitchFamily="34" charset="0"/>
+                <a:ea typeface="Times New Roman" pitchFamily="34" charset="-122"/>
+                <a:cs typeface="Times New Roman" pitchFamily="34" charset="-120"/>
+              </a:rPr>
+              <a:t>2</a:t>
+            </a:r>
+            <a:endParaRPr lang="en-US" sz="1700" dirty="0"/>
+          </a:p>
+        </p:txBody>
+      </p:sp>
+      <p:sp>
+        <p:nvSpPr>
+          <p:cNvPr id="12" name="Text 9"/>
+          <p:cNvSpPr txBox="1"/>
+          <p:nvPr/>
+        </p:nvSpPr>
+        <p:spPr>
+          <a:xfrm>
+            <a:off x="2404872" y="2194560"/>
+            <a:ext cx="182880" cy="365760"/>
+          </a:xfrm>
+          <a:prstGeom prst="rect">
+            <a:avLst/>
+          </a:prstGeom>
+          <a:noFill/>
+          <a:ln/>
+        </p:spPr>
+        <p:txBody>
+          <a:bodyPr wrap="square" lIns="0" tIns="0" rIns="0" bIns="0" rtlCol="0" anchor="t"/>
+          <a:lstStyle/>
+          <a:p>
+            <a:pPr indent="0" marL="0">
+              <a:buNone/>
+            </a:pPr>
+            <a:r>
+              <a:rPr lang="en-US" sz="1800" dirty="0">
+                <a:solidFill>
+                  <a:srgbClr val="11344E"/>
+                </a:solidFill>
+                <a:latin typeface="Times New Roman" pitchFamily="34" charset="0"/>
+                <a:ea typeface="Times New Roman" pitchFamily="34" charset="-122"/>
+                <a:cs typeface="Times New Roman" pitchFamily="34" charset="-120"/>
+              </a:rPr>
+              <a:t>,</a:t>
+            </a:r>
+            <a:endParaRPr lang="en-US" sz="1800" dirty="0"/>
+          </a:p>
+        </p:txBody>
+      </p:sp>
+      <p:sp>
+        <p:nvSpPr>
+          <p:cNvPr id="13" name="Text 10"/>
+          <p:cNvSpPr txBox="1"/>
+          <p:nvPr/>
+        </p:nvSpPr>
+        <p:spPr>
+          <a:xfrm>
+            <a:off x="2560320" y="2011680"/>
+            <a:ext cx="960120" cy="280670"/>
+          </a:xfrm>
+          <a:prstGeom prst="rect">
+            <a:avLst/>
+          </a:prstGeom>
+          <a:noFill/>
+          <a:ln/>
+        </p:spPr>
+        <p:txBody>
+          <a:bodyPr wrap="square" lIns="0" tIns="0" rIns="0" bIns="0" rtlCol="0" anchor="b"/>
+          <a:lstStyle/>
+          <a:p>
+            <a:pPr algn="ctr" indent="0" marL="0">
+              <a:buNone/>
+            </a:pPr>
+            <a:r>
+              <a:rPr lang="en-US" sz="1700" dirty="0">
+                <a:solidFill>
+                  <a:srgbClr val="11344E"/>
+                </a:solidFill>
+                <a:latin typeface="Times New Roman" pitchFamily="34" charset="0"/>
+                <a:ea typeface="Times New Roman" pitchFamily="34" charset="-122"/>
+                <a:cs typeface="Times New Roman" pitchFamily="34" charset="-120"/>
+              </a:rPr>
+              <a:t>y</a:t>
+            </a:r>
+            <a:pPr algn="ctr" indent="0" marL="0">
+              <a:buNone/>
+            </a:pPr>
+            <a:r>
+              <a:rPr lang="en-US" sz="1700" baseline="-40000" dirty="0">
+                <a:solidFill>
+                  <a:srgbClr val="11344E"/>
+                </a:solidFill>
+                <a:latin typeface="Times New Roman" pitchFamily="34" charset="0"/>
+                <a:ea typeface="Times New Roman" pitchFamily="34" charset="-122"/>
+                <a:cs typeface="Times New Roman" pitchFamily="34" charset="-120"/>
+              </a:rPr>
+              <a:t>1</a:t>
+            </a:r>
+            <a:pPr algn="ctr" indent="0" marL="0">
+              <a:buNone/>
+            </a:pPr>
+            <a:r>
+              <a:rPr lang="en-US" sz="1700" dirty="0">
+                <a:solidFill>
+                  <a:srgbClr val="11344E"/>
+                </a:solidFill>
+                <a:latin typeface="Times New Roman" pitchFamily="34" charset="0"/>
+                <a:ea typeface="Times New Roman" pitchFamily="34" charset="-122"/>
+                <a:cs typeface="Times New Roman" pitchFamily="34" charset="-120"/>
+              </a:rPr>
+              <a:t> + y</a:t>
+            </a:r>
+            <a:pPr algn="ctr" indent="0" marL="0">
+              <a:buNone/>
+            </a:pPr>
+            <a:r>
+              <a:rPr lang="en-US" sz="1700" baseline="-40000" dirty="0">
+                <a:solidFill>
+                  <a:srgbClr val="11344E"/>
+                </a:solidFill>
+                <a:latin typeface="Times New Roman" pitchFamily="34" charset="0"/>
+                <a:ea typeface="Times New Roman" pitchFamily="34" charset="-122"/>
+                <a:cs typeface="Times New Roman" pitchFamily="34" charset="-120"/>
+              </a:rPr>
+              <a:t>2</a:t>
+            </a:r>
+            <a:endParaRPr lang="en-US" sz="1700" dirty="0"/>
+          </a:p>
+        </p:txBody>
+      </p:sp>
+      <p:sp>
+        <p:nvSpPr>
+          <p:cNvPr id="14" name="Shape 11"/>
+          <p:cNvSpPr/>
+          <p:nvPr/>
+        </p:nvSpPr>
+        <p:spPr>
+          <a:xfrm>
+            <a:off x="2606040" y="2319782"/>
+            <a:ext cx="868680" cy="0"/>
+          </a:xfrm>
+          <a:prstGeom prst="line">
+            <a:avLst/>
+          </a:prstGeom>
+          <a:noFill/>
+          <a:ln w="12700">
+            <a:solidFill>
+              <a:srgbClr val="11344E"/>
+            </a:solidFill>
+            <a:prstDash val="solid"/>
+          </a:ln>
+        </p:spPr>
+      </p:sp>
+      <p:sp>
+        <p:nvSpPr>
+          <p:cNvPr id="15" name="Text 12"/>
+          <p:cNvSpPr txBox="1"/>
+          <p:nvPr/>
+        </p:nvSpPr>
+        <p:spPr>
+          <a:xfrm>
+            <a:off x="2560320" y="2356358"/>
+            <a:ext cx="960120" cy="280670"/>
+          </a:xfrm>
+          <a:prstGeom prst="rect">
+            <a:avLst/>
+          </a:prstGeom>
+          <a:noFill/>
+          <a:ln/>
+        </p:spPr>
+        <p:txBody>
+          <a:bodyPr wrap="square" lIns="0" tIns="0" rIns="0" bIns="0" rtlCol="0" anchor="t"/>
+          <a:lstStyle/>
+          <a:p>
+            <a:pPr algn="ctr" indent="0" marL="0">
+              <a:buNone/>
+            </a:pPr>
+            <a:r>
+              <a:rPr lang="en-US" sz="1700" dirty="0">
+                <a:solidFill>
+                  <a:srgbClr val="11344E"/>
+                </a:solidFill>
+                <a:latin typeface="Times New Roman" pitchFamily="34" charset="0"/>
+                <a:ea typeface="Times New Roman" pitchFamily="34" charset="-122"/>
+                <a:cs typeface="Times New Roman" pitchFamily="34" charset="-120"/>
+              </a:rPr>
+              <a:t>2</a:t>
+            </a:r>
+            <a:endParaRPr lang="en-US" sz="1700" dirty="0"/>
+          </a:p>
+        </p:txBody>
+      </p:sp>
+      <p:sp>
+        <p:nvSpPr>
+          <p:cNvPr id="16" name="Text 13"/>
+          <p:cNvSpPr txBox="1"/>
+          <p:nvPr/>
+        </p:nvSpPr>
+        <p:spPr>
+          <a:xfrm>
+            <a:off x="3520440" y="2194560"/>
+            <a:ext cx="182880" cy="365760"/>
+          </a:xfrm>
+          <a:prstGeom prst="rect">
+            <a:avLst/>
+          </a:prstGeom>
+          <a:noFill/>
+          <a:ln/>
+        </p:spPr>
+        <p:txBody>
+          <a:bodyPr wrap="square" lIns="0" tIns="0" rIns="0" bIns="0" rtlCol="0" anchor="t"/>
+          <a:lstStyle/>
+          <a:p>
+            <a:pPr indent="0" marL="0">
+              <a:buNone/>
+            </a:pPr>
+            <a:r>
+              <a:rPr lang="en-US" sz="1800" dirty="0">
+                <a:solidFill>
+                  <a:srgbClr val="11344E"/>
+                </a:solidFill>
+                <a:latin typeface="Times New Roman" pitchFamily="34" charset="0"/>
+                <a:ea typeface="Times New Roman" pitchFamily="34" charset="-122"/>
+                <a:cs typeface="Times New Roman" pitchFamily="34" charset="-120"/>
+              </a:rPr>
+              <a:t>)</a:t>
+            </a:r>
+            <a:endParaRPr lang="en-US" sz="1800" dirty="0"/>
+          </a:p>
+        </p:txBody>
+      </p:sp>
+      <p:sp>
+        <p:nvSpPr>
+          <p:cNvPr id="17" name="Shape 14"/>
           <p:cNvSpPr/>
           <p:nvPr/>
         </p:nvSpPr>
@@ -24788,7 +26555,7 @@
       </p:sp>
       <p:sp>
         <p:nvSpPr>
-          <p:cNvPr id="10" name="Text 7"/>
+          <p:cNvPr id="18" name="Text 15"/>
           <p:cNvSpPr txBox="1"/>
           <p:nvPr/>
         </p:nvSpPr>
@@ -24827,7 +26594,7 @@
       </p:sp>
       <p:sp>
         <p:nvSpPr>
-          <p:cNvPr id="11" name="Text 8"/>
+          <p:cNvPr id="19" name="Text 16"/>
           <p:cNvSpPr txBox="1"/>
           <p:nvPr/>
         </p:nvSpPr>
@@ -24858,7 +26625,175 @@
                 <a:ea typeface="Times New Roman" pitchFamily="34" charset="-122"/>
                 <a:cs typeface="Times New Roman" pitchFamily="34" charset="-120"/>
               </a:rPr>
-              <a:t>d = √((x₂ − x₁)² + (y₂ − y₁)²)</a:t>
+              <a:t>d = √((x</a:t>
+            </a:r>
+            <a:pPr indent="0" marL="0">
+              <a:buNone/>
+            </a:pPr>
+            <a:r>
+              <a:rPr lang="en-US" sz="1800" baseline="-40000" dirty="0">
+                <a:solidFill>
+                  <a:srgbClr val="11344E"/>
+                </a:solidFill>
+                <a:latin typeface="Times New Roman" pitchFamily="34" charset="0"/>
+                <a:ea typeface="Times New Roman" pitchFamily="34" charset="-122"/>
+                <a:cs typeface="Times New Roman" pitchFamily="34" charset="-120"/>
+              </a:rPr>
+              <a:t>2</a:t>
+            </a:r>
+            <a:pPr indent="0" marL="0">
+              <a:buNone/>
+            </a:pPr>
+            <a:r>
+              <a:rPr lang="en-US" sz="1800" dirty="0">
+                <a:solidFill>
+                  <a:srgbClr val="11344E"/>
+                </a:solidFill>
+                <a:latin typeface="Times New Roman" pitchFamily="34" charset="0"/>
+                <a:ea typeface="Times New Roman" pitchFamily="34" charset="-122"/>
+                <a:cs typeface="Times New Roman" pitchFamily="34" charset="-120"/>
+              </a:rPr>
+              <a:t> − x</a:t>
+            </a:r>
+            <a:pPr indent="0" marL="0">
+              <a:buNone/>
+            </a:pPr>
+            <a:r>
+              <a:rPr lang="en-US" sz="1800" baseline="-40000" dirty="0">
+                <a:solidFill>
+                  <a:srgbClr val="11344E"/>
+                </a:solidFill>
+                <a:latin typeface="Times New Roman" pitchFamily="34" charset="0"/>
+                <a:ea typeface="Times New Roman" pitchFamily="34" charset="-122"/>
+                <a:cs typeface="Times New Roman" pitchFamily="34" charset="-120"/>
+              </a:rPr>
+              <a:t>1</a:t>
+            </a:r>
+            <a:pPr indent="0" marL="0">
+              <a:buNone/>
+            </a:pPr>
+            <a:r>
+              <a:rPr lang="en-US" sz="1800" dirty="0">
+                <a:solidFill>
+                  <a:srgbClr val="11344E"/>
+                </a:solidFill>
+                <a:latin typeface="Times New Roman" pitchFamily="34" charset="0"/>
+                <a:ea typeface="Times New Roman" pitchFamily="34" charset="-122"/>
+                <a:cs typeface="Times New Roman" pitchFamily="34" charset="-120"/>
+              </a:rPr>
+              <a:t>)</a:t>
+            </a:r>
+            <a:pPr indent="0" marL="0">
+              <a:buNone/>
+            </a:pPr>
+            <a:r>
+              <a:rPr lang="en-US" sz="1800" baseline="30000" dirty="0">
+                <a:solidFill>
+                  <a:srgbClr val="11344E"/>
+                </a:solidFill>
+                <a:latin typeface="Times New Roman" pitchFamily="34" charset="0"/>
+                <a:ea typeface="Times New Roman" pitchFamily="34" charset="-122"/>
+                <a:cs typeface="Times New Roman" pitchFamily="34" charset="-120"/>
+              </a:rPr>
+              <a:t>2</a:t>
+            </a:r>
+            <a:pPr indent="0" marL="0">
+              <a:buNone/>
+            </a:pPr>
+            <a:r>
+              <a:rPr lang="en-US" sz="1800" dirty="0">
+                <a:solidFill>
+                  <a:srgbClr val="11344E"/>
+                </a:solidFill>
+                <a:latin typeface="Times New Roman" pitchFamily="34" charset="0"/>
+                <a:ea typeface="Times New Roman" pitchFamily="34" charset="-122"/>
+                <a:cs typeface="Times New Roman" pitchFamily="34" charset="-120"/>
+              </a:rPr>
+              <a:t> + (y</a:t>
+            </a:r>
+            <a:pPr indent="0" marL="0">
+              <a:buNone/>
+            </a:pPr>
+            <a:r>
+              <a:rPr lang="en-US" sz="1800" baseline="-40000" dirty="0">
+                <a:solidFill>
+                  <a:srgbClr val="11344E"/>
+                </a:solidFill>
+                <a:latin typeface="Times New Roman" pitchFamily="34" charset="0"/>
+                <a:ea typeface="Times New Roman" pitchFamily="34" charset="-122"/>
+                <a:cs typeface="Times New Roman" pitchFamily="34" charset="-120"/>
+              </a:rPr>
+              <a:t>2</a:t>
+            </a:r>
+            <a:pPr indent="0" marL="0">
+              <a:buNone/>
+            </a:pPr>
+            <a:r>
+              <a:rPr lang="en-US" sz="1800" dirty="0">
+                <a:solidFill>
+                  <a:srgbClr val="11344E"/>
+                </a:solidFill>
+                <a:latin typeface="Times New Roman" pitchFamily="34" charset="0"/>
+                <a:ea typeface="Times New Roman" pitchFamily="34" charset="-122"/>
+                <a:cs typeface="Times New Roman" pitchFamily="34" charset="-120"/>
+              </a:rPr>
+              <a:t> − y</a:t>
+            </a:r>
+            <a:pPr indent="0" marL="0">
+              <a:buNone/>
+            </a:pPr>
+            <a:r>
+              <a:rPr lang="en-US" sz="1800" baseline="-40000" dirty="0">
+                <a:solidFill>
+                  <a:srgbClr val="11344E"/>
+                </a:solidFill>
+                <a:latin typeface="Times New Roman" pitchFamily="34" charset="0"/>
+                <a:ea typeface="Times New Roman" pitchFamily="34" charset="-122"/>
+                <a:cs typeface="Times New Roman" pitchFamily="34" charset="-120"/>
+              </a:rPr>
+              <a:t>1</a:t>
+            </a:r>
+            <a:pPr indent="0" marL="0">
+              <a:buNone/>
+            </a:pPr>
+            <a:r>
+              <a:rPr lang="en-US" sz="1800" dirty="0">
+                <a:solidFill>
+                  <a:srgbClr val="11344E"/>
+                </a:solidFill>
+                <a:latin typeface="Times New Roman" pitchFamily="34" charset="0"/>
+                <a:ea typeface="Times New Roman" pitchFamily="34" charset="-122"/>
+                <a:cs typeface="Times New Roman" pitchFamily="34" charset="-120"/>
+              </a:rPr>
+              <a:t>)</a:t>
+            </a:r>
+            <a:pPr indent="0" marL="0">
+              <a:buNone/>
+            </a:pPr>
+            <a:r>
+              <a:rPr lang="en-US" sz="1800" baseline="30000" dirty="0">
+                <a:solidFill>
+                  <a:srgbClr val="11344E"/>
+                </a:solidFill>
+                <a:latin typeface="Times New Roman" pitchFamily="34" charset="0"/>
+                <a:ea typeface="Times New Roman" pitchFamily="34" charset="-122"/>
+                <a:cs typeface="Times New Roman" pitchFamily="34" charset="-120"/>
+              </a:rPr>
+              <a:t>2</a:t>
+            </a:r>
+            <a:pPr indent="0" marL="0">
+              <a:buNone/>
+            </a:pPr>
+            <a:r>
+              <a:rPr lang="en-US" sz="1800" dirty="0">
+                <a:solidFill>
+                  <a:srgbClr val="11344E"/>
+                </a:solidFill>
+                <a:latin typeface="Times New Roman" pitchFamily="34" charset="0"/>
+                <a:ea typeface="Times New Roman" pitchFamily="34" charset="-122"/>
+                <a:cs typeface="Times New Roman" pitchFamily="34" charset="-120"/>
+              </a:rPr>
+              <a:t>)</a:t>
             </a:r>
             <a:endParaRPr lang="en-US" sz="1800" dirty="0"/>
           </a:p>
@@ -24866,7 +26801,7 @@
       </p:sp>
       <p:sp>
         <p:nvSpPr>
-          <p:cNvPr id="12" name="Shape 9"/>
+          <p:cNvPr id="20" name="Shape 17"/>
           <p:cNvSpPr/>
           <p:nvPr/>
         </p:nvSpPr>
@@ -24893,7 +26828,7 @@
       </p:sp>
       <p:sp>
         <p:nvSpPr>
-          <p:cNvPr id="13" name="Text 10"/>
+          <p:cNvPr id="21" name="Text 18"/>
           <p:cNvSpPr txBox="1"/>
           <p:nvPr/>
         </p:nvSpPr>
@@ -24932,23 +26867,23 @@
       </p:sp>
       <p:sp>
         <p:nvSpPr>
-          <p:cNvPr id="14" name="Text 11"/>
-          <p:cNvSpPr txBox="1"/>
-          <p:nvPr/>
-        </p:nvSpPr>
-        <p:spPr>
-          <a:xfrm>
-            <a:off x="8275320" y="2103120"/>
-            <a:ext cx="3200400" cy="548640"/>
-          </a:xfrm>
-          <a:prstGeom prst="rect">
-            <a:avLst/>
-          </a:prstGeom>
-          <a:noFill/>
-          <a:ln/>
-        </p:spPr>
-        <p:txBody>
-          <a:bodyPr wrap="square" lIns="0" tIns="0" rIns="0" bIns="0" rtlCol="0" anchor="ctr"/>
+          <p:cNvPr id="22" name="Text 19"/>
+          <p:cNvSpPr txBox="1"/>
+          <p:nvPr/>
+        </p:nvSpPr>
+        <p:spPr>
+          <a:xfrm>
+            <a:off x="8275320" y="2194560"/>
+            <a:ext cx="548640" cy="365760"/>
+          </a:xfrm>
+          <a:prstGeom prst="rect">
+            <a:avLst/>
+          </a:prstGeom>
+          <a:noFill/>
+          <a:ln/>
+        </p:spPr>
+        <p:txBody>
+          <a:bodyPr wrap="square" lIns="0" tIns="0" rIns="0" bIns="0" rtlCol="0" anchor="t"/>
           <a:lstStyle/>
           <a:p>
             <a:pPr indent="0" marL="0">
@@ -24963,7 +26898,7 @@
                 <a:ea typeface="Times New Roman" pitchFamily="34" charset="-122"/>
                 <a:cs typeface="Times New Roman" pitchFamily="34" charset="-120"/>
               </a:rPr>
-              <a:t>m = (y₂ − y₁) / (x₂ − x₁)</a:t>
+              <a:t>m =</a:t>
             </a:r>
             <a:endParaRPr lang="en-US" sz="1800" dirty="0"/>
           </a:p>
@@ -24971,7 +26906,192 @@
       </p:sp>
       <p:sp>
         <p:nvSpPr>
-          <p:cNvPr id="15" name="Shape 12"/>
+          <p:cNvPr id="23" name="Text 20"/>
+          <p:cNvSpPr txBox="1"/>
+          <p:nvPr/>
+        </p:nvSpPr>
+        <p:spPr>
+          <a:xfrm>
+            <a:off x="8823960" y="2011680"/>
+            <a:ext cx="1097280" cy="280670"/>
+          </a:xfrm>
+          <a:prstGeom prst="rect">
+            <a:avLst/>
+          </a:prstGeom>
+          <a:noFill/>
+          <a:ln/>
+        </p:spPr>
+        <p:txBody>
+          <a:bodyPr wrap="square" lIns="0" tIns="0" rIns="0" bIns="0" rtlCol="0" anchor="b"/>
+          <a:lstStyle/>
+          <a:p>
+            <a:pPr algn="ctr" indent="0" marL="0">
+              <a:buNone/>
+            </a:pPr>
+            <a:r>
+              <a:rPr lang="en-US" sz="1700" dirty="0">
+                <a:solidFill>
+                  <a:srgbClr val="11344E"/>
+                </a:solidFill>
+                <a:latin typeface="Times New Roman" pitchFamily="34" charset="0"/>
+                <a:ea typeface="Times New Roman" pitchFamily="34" charset="-122"/>
+                <a:cs typeface="Times New Roman" pitchFamily="34" charset="-120"/>
+              </a:rPr>
+              <a:t>y</a:t>
+            </a:r>
+            <a:pPr algn="ctr" indent="0" marL="0">
+              <a:buNone/>
+            </a:pPr>
+            <a:r>
+              <a:rPr lang="en-US" sz="1700" baseline="-40000" dirty="0">
+                <a:solidFill>
+                  <a:srgbClr val="11344E"/>
+                </a:solidFill>
+                <a:latin typeface="Times New Roman" pitchFamily="34" charset="0"/>
+                <a:ea typeface="Times New Roman" pitchFamily="34" charset="-122"/>
+                <a:cs typeface="Times New Roman" pitchFamily="34" charset="-120"/>
+              </a:rPr>
+              <a:t>2</a:t>
+            </a:r>
+            <a:pPr algn="ctr" indent="0" marL="0">
+              <a:buNone/>
+            </a:pPr>
+            <a:r>
+              <a:rPr lang="en-US" sz="1700" dirty="0">
+                <a:solidFill>
+                  <a:srgbClr val="11344E"/>
+                </a:solidFill>
+                <a:latin typeface="Times New Roman" pitchFamily="34" charset="0"/>
+                <a:ea typeface="Times New Roman" pitchFamily="34" charset="-122"/>
+                <a:cs typeface="Times New Roman" pitchFamily="34" charset="-120"/>
+              </a:rPr>
+              <a:t> − y</a:t>
+            </a:r>
+            <a:pPr algn="ctr" indent="0" marL="0">
+              <a:buNone/>
+            </a:pPr>
+            <a:r>
+              <a:rPr lang="en-US" sz="1700" baseline="-40000" dirty="0">
+                <a:solidFill>
+                  <a:srgbClr val="11344E"/>
+                </a:solidFill>
+                <a:latin typeface="Times New Roman" pitchFamily="34" charset="0"/>
+                <a:ea typeface="Times New Roman" pitchFamily="34" charset="-122"/>
+                <a:cs typeface="Times New Roman" pitchFamily="34" charset="-120"/>
+              </a:rPr>
+              <a:t>1</a:t>
+            </a:r>
+            <a:endParaRPr lang="en-US" sz="1700" dirty="0"/>
+          </a:p>
+        </p:txBody>
+      </p:sp>
+      <p:sp>
+        <p:nvSpPr>
+          <p:cNvPr id="24" name="Shape 21"/>
+          <p:cNvSpPr/>
+          <p:nvPr/>
+        </p:nvSpPr>
+        <p:spPr>
+          <a:xfrm>
+            <a:off x="8869680" y="2319782"/>
+            <a:ext cx="1005840" cy="0"/>
+          </a:xfrm>
+          <a:prstGeom prst="line">
+            <a:avLst/>
+          </a:prstGeom>
+          <a:noFill/>
+          <a:ln w="12700">
+            <a:solidFill>
+              <a:srgbClr val="11344E"/>
+            </a:solidFill>
+            <a:prstDash val="solid"/>
+          </a:ln>
+        </p:spPr>
+      </p:sp>
+      <p:sp>
+        <p:nvSpPr>
+          <p:cNvPr id="25" name="Text 22"/>
+          <p:cNvSpPr txBox="1"/>
+          <p:nvPr/>
+        </p:nvSpPr>
+        <p:spPr>
+          <a:xfrm>
+            <a:off x="8823960" y="2356358"/>
+            <a:ext cx="1097280" cy="280670"/>
+          </a:xfrm>
+          <a:prstGeom prst="rect">
+            <a:avLst/>
+          </a:prstGeom>
+          <a:noFill/>
+          <a:ln/>
+        </p:spPr>
+        <p:txBody>
+          <a:bodyPr wrap="square" lIns="0" tIns="0" rIns="0" bIns="0" rtlCol="0" anchor="t"/>
+          <a:lstStyle/>
+          <a:p>
+            <a:pPr algn="ctr" indent="0" marL="0">
+              <a:buNone/>
+            </a:pPr>
+            <a:r>
+              <a:rPr lang="en-US" sz="1700" dirty="0">
+                <a:solidFill>
+                  <a:srgbClr val="11344E"/>
+                </a:solidFill>
+                <a:latin typeface="Times New Roman" pitchFamily="34" charset="0"/>
+                <a:ea typeface="Times New Roman" pitchFamily="34" charset="-122"/>
+                <a:cs typeface="Times New Roman" pitchFamily="34" charset="-120"/>
+              </a:rPr>
+              <a:t>x</a:t>
+            </a:r>
+            <a:pPr algn="ctr" indent="0" marL="0">
+              <a:buNone/>
+            </a:pPr>
+            <a:r>
+              <a:rPr lang="en-US" sz="1700" baseline="-40000" dirty="0">
+                <a:solidFill>
+                  <a:srgbClr val="11344E"/>
+                </a:solidFill>
+                <a:latin typeface="Times New Roman" pitchFamily="34" charset="0"/>
+                <a:ea typeface="Times New Roman" pitchFamily="34" charset="-122"/>
+                <a:cs typeface="Times New Roman" pitchFamily="34" charset="-120"/>
+              </a:rPr>
+              <a:t>2</a:t>
+            </a:r>
+            <a:pPr algn="ctr" indent="0" marL="0">
+              <a:buNone/>
+            </a:pPr>
+            <a:r>
+              <a:rPr lang="en-US" sz="1700" dirty="0">
+                <a:solidFill>
+                  <a:srgbClr val="11344E"/>
+                </a:solidFill>
+                <a:latin typeface="Times New Roman" pitchFamily="34" charset="0"/>
+                <a:ea typeface="Times New Roman" pitchFamily="34" charset="-122"/>
+                <a:cs typeface="Times New Roman" pitchFamily="34" charset="-120"/>
+              </a:rPr>
+              <a:t> − x</a:t>
+            </a:r>
+            <a:pPr algn="ctr" indent="0" marL="0">
+              <a:buNone/>
+            </a:pPr>
+            <a:r>
+              <a:rPr lang="en-US" sz="1700" baseline="-40000" dirty="0">
+                <a:solidFill>
+                  <a:srgbClr val="11344E"/>
+                </a:solidFill>
+                <a:latin typeface="Times New Roman" pitchFamily="34" charset="0"/>
+                <a:ea typeface="Times New Roman" pitchFamily="34" charset="-122"/>
+                <a:cs typeface="Times New Roman" pitchFamily="34" charset="-120"/>
+              </a:rPr>
+              <a:t>1</a:t>
+            </a:r>
+            <a:endParaRPr lang="en-US" sz="1700" dirty="0"/>
+          </a:p>
+        </p:txBody>
+      </p:sp>
+      <p:sp>
+        <p:nvSpPr>
+          <p:cNvPr id="26" name="Shape 23"/>
           <p:cNvSpPr/>
           <p:nvPr/>
         </p:nvSpPr>
@@ -24998,7 +27118,7 @@
       </p:sp>
       <p:sp>
         <p:nvSpPr>
-          <p:cNvPr id="16" name="Text 13"/>
+          <p:cNvPr id="27" name="Text 24"/>
           <p:cNvSpPr txBox="1"/>
           <p:nvPr/>
         </p:nvSpPr>
@@ -25037,7 +27157,7 @@
       </p:sp>
       <p:sp>
         <p:nvSpPr>
-          <p:cNvPr id="17" name="Text 14"/>
+          <p:cNvPr id="28" name="Text 25"/>
           <p:cNvSpPr txBox="1"/>
           <p:nvPr/>
         </p:nvSpPr>
@@ -25068,7 +27188,63 @@
                 <a:ea typeface="Times New Roman" pitchFamily="34" charset="-122"/>
                 <a:cs typeface="Times New Roman" pitchFamily="34" charset="-120"/>
               </a:rPr>
-              <a:t>y − y₁ = m(x − x₁)</a:t>
+              <a:t>y − y</a:t>
+            </a:r>
+            <a:pPr indent="0" marL="0">
+              <a:buNone/>
+            </a:pPr>
+            <a:r>
+              <a:rPr lang="en-US" sz="1800" baseline="-40000" dirty="0">
+                <a:solidFill>
+                  <a:srgbClr val="11344E"/>
+                </a:solidFill>
+                <a:latin typeface="Times New Roman" pitchFamily="34" charset="0"/>
+                <a:ea typeface="Times New Roman" pitchFamily="34" charset="-122"/>
+                <a:cs typeface="Times New Roman" pitchFamily="34" charset="-120"/>
+              </a:rPr>
+              <a:t>1</a:t>
+            </a:r>
+            <a:pPr indent="0" marL="0">
+              <a:buNone/>
+            </a:pPr>
+            <a:r>
+              <a:rPr lang="en-US" sz="1800" dirty="0">
+                <a:solidFill>
+                  <a:srgbClr val="11344E"/>
+                </a:solidFill>
+                <a:latin typeface="Times New Roman" pitchFamily="34" charset="0"/>
+                <a:ea typeface="Times New Roman" pitchFamily="34" charset="-122"/>
+                <a:cs typeface="Times New Roman" pitchFamily="34" charset="-120"/>
+              </a:rPr>
+              <a:t> = m(x − x</a:t>
+            </a:r>
+            <a:pPr indent="0" marL="0">
+              <a:buNone/>
+            </a:pPr>
+            <a:r>
+              <a:rPr lang="en-US" sz="1800" baseline="-40000" dirty="0">
+                <a:solidFill>
+                  <a:srgbClr val="11344E"/>
+                </a:solidFill>
+                <a:latin typeface="Times New Roman" pitchFamily="34" charset="0"/>
+                <a:ea typeface="Times New Roman" pitchFamily="34" charset="-122"/>
+                <a:cs typeface="Times New Roman" pitchFamily="34" charset="-120"/>
+              </a:rPr>
+              <a:t>1</a:t>
+            </a:r>
+            <a:pPr indent="0" marL="0">
+              <a:buNone/>
+            </a:pPr>
+            <a:r>
+              <a:rPr lang="en-US" sz="1800" dirty="0">
+                <a:solidFill>
+                  <a:srgbClr val="11344E"/>
+                </a:solidFill>
+                <a:latin typeface="Times New Roman" pitchFamily="34" charset="0"/>
+                <a:ea typeface="Times New Roman" pitchFamily="34" charset="-122"/>
+                <a:cs typeface="Times New Roman" pitchFamily="34" charset="-120"/>
+              </a:rPr>
+              <a:t>)</a:t>
             </a:r>
             <a:endParaRPr lang="en-US" sz="1800" dirty="0"/>
           </a:p>
@@ -25076,7 +27252,7 @@
       </p:sp>
       <p:sp>
         <p:nvSpPr>
-          <p:cNvPr id="18" name="Shape 15"/>
+          <p:cNvPr id="29" name="Shape 26"/>
           <p:cNvSpPr/>
           <p:nvPr/>
         </p:nvSpPr>
@@ -25103,7 +27279,7 @@
       </p:sp>
       <p:sp>
         <p:nvSpPr>
-          <p:cNvPr id="19" name="Text 16"/>
+          <p:cNvPr id="30" name="Text 27"/>
           <p:cNvSpPr txBox="1"/>
           <p:nvPr/>
         </p:nvSpPr>
@@ -25142,7 +27318,7 @@
       </p:sp>
       <p:sp>
         <p:nvSpPr>
-          <p:cNvPr id="20" name="Text 17"/>
+          <p:cNvPr id="31" name="Text 28"/>
           <p:cNvSpPr txBox="1"/>
           <p:nvPr/>
         </p:nvSpPr>
@@ -25173,7 +27349,119 @@
                 <a:ea typeface="Times New Roman" pitchFamily="34" charset="-122"/>
                 <a:cs typeface="Times New Roman" pitchFamily="34" charset="-120"/>
               </a:rPr>
-              <a:t>m₁ = m₂        m₁ · m₂ = −1</a:t>
+              <a:t>m</a:t>
+            </a:r>
+            <a:pPr indent="0" marL="0">
+              <a:buNone/>
+            </a:pPr>
+            <a:r>
+              <a:rPr lang="en-US" sz="1800" baseline="-40000" dirty="0">
+                <a:solidFill>
+                  <a:srgbClr val="11344E"/>
+                </a:solidFill>
+                <a:latin typeface="Times New Roman" pitchFamily="34" charset="0"/>
+                <a:ea typeface="Times New Roman" pitchFamily="34" charset="-122"/>
+                <a:cs typeface="Times New Roman" pitchFamily="34" charset="-120"/>
+              </a:rPr>
+              <a:t>1</a:t>
+            </a:r>
+            <a:pPr indent="0" marL="0">
+              <a:buNone/>
+            </a:pPr>
+            <a:r>
+              <a:rPr lang="en-US" sz="1800" dirty="0">
+                <a:solidFill>
+                  <a:srgbClr val="11344E"/>
+                </a:solidFill>
+                <a:latin typeface="Times New Roman" pitchFamily="34" charset="0"/>
+                <a:ea typeface="Times New Roman" pitchFamily="34" charset="-122"/>
+                <a:cs typeface="Times New Roman" pitchFamily="34" charset="-120"/>
+              </a:rPr>
+              <a:t> = m</a:t>
+            </a:r>
+            <a:pPr indent="0" marL="0">
+              <a:buNone/>
+            </a:pPr>
+            <a:r>
+              <a:rPr lang="en-US" sz="1800" baseline="-40000" dirty="0">
+                <a:solidFill>
+                  <a:srgbClr val="11344E"/>
+                </a:solidFill>
+                <a:latin typeface="Times New Roman" pitchFamily="34" charset="0"/>
+                <a:ea typeface="Times New Roman" pitchFamily="34" charset="-122"/>
+                <a:cs typeface="Times New Roman" pitchFamily="34" charset="-120"/>
+              </a:rPr>
+              <a:t>2</a:t>
+            </a:r>
+            <a:pPr indent="0" marL="0">
+              <a:buNone/>
+            </a:pPr>
+            <a:r>
+              <a:rPr lang="en-US" sz="1800" dirty="0">
+                <a:solidFill>
+                  <a:srgbClr val="11344E"/>
+                </a:solidFill>
+                <a:latin typeface="Times New Roman" pitchFamily="34" charset="0"/>
+                <a:ea typeface="Times New Roman" pitchFamily="34" charset="-122"/>
+                <a:cs typeface="Times New Roman" pitchFamily="34" charset="-120"/>
+              </a:rPr>
+              <a:t>        m</a:t>
+            </a:r>
+            <a:pPr indent="0" marL="0">
+              <a:buNone/>
+            </a:pPr>
+            <a:r>
+              <a:rPr lang="en-US" sz="1800" baseline="-40000" dirty="0">
+                <a:solidFill>
+                  <a:srgbClr val="11344E"/>
+                </a:solidFill>
+                <a:latin typeface="Times New Roman" pitchFamily="34" charset="0"/>
+                <a:ea typeface="Times New Roman" pitchFamily="34" charset="-122"/>
+                <a:cs typeface="Times New Roman" pitchFamily="34" charset="-120"/>
+              </a:rPr>
+              <a:t>1</a:t>
+            </a:r>
+            <a:pPr indent="0" marL="0">
+              <a:buNone/>
+            </a:pPr>
+            <a:r>
+              <a:rPr lang="en-US" sz="1800" dirty="0">
+                <a:solidFill>
+                  <a:srgbClr val="11344E"/>
+                </a:solidFill>
+                <a:latin typeface="Times New Roman" pitchFamily="34" charset="0"/>
+                <a:ea typeface="Times New Roman" pitchFamily="34" charset="-122"/>
+                <a:cs typeface="Times New Roman" pitchFamily="34" charset="-120"/>
+              </a:rPr>
+              <a:t> · m</a:t>
+            </a:r>
+            <a:pPr indent="0" marL="0">
+              <a:buNone/>
+            </a:pPr>
+            <a:r>
+              <a:rPr lang="en-US" sz="1800" baseline="-40000" dirty="0">
+                <a:solidFill>
+                  <a:srgbClr val="11344E"/>
+                </a:solidFill>
+                <a:latin typeface="Times New Roman" pitchFamily="34" charset="0"/>
+                <a:ea typeface="Times New Roman" pitchFamily="34" charset="-122"/>
+                <a:cs typeface="Times New Roman" pitchFamily="34" charset="-120"/>
+              </a:rPr>
+              <a:t>2</a:t>
+            </a:r>
+            <a:pPr indent="0" marL="0">
+              <a:buNone/>
+            </a:pPr>
+            <a:r>
+              <a:rPr lang="en-US" sz="1800" dirty="0">
+                <a:solidFill>
+                  <a:srgbClr val="11344E"/>
+                </a:solidFill>
+                <a:latin typeface="Times New Roman" pitchFamily="34" charset="0"/>
+                <a:ea typeface="Times New Roman" pitchFamily="34" charset="-122"/>
+                <a:cs typeface="Times New Roman" pitchFamily="34" charset="-120"/>
+              </a:rPr>
+              <a:t> = −1</a:t>
             </a:r>
             <a:endParaRPr lang="en-US" sz="1800" dirty="0"/>
           </a:p>
@@ -25181,7 +27469,7 @@
       </p:sp>
       <p:sp>
         <p:nvSpPr>
-          <p:cNvPr id="21" name="Shape 18"/>
+          <p:cNvPr id="32" name="Shape 29"/>
           <p:cNvSpPr/>
           <p:nvPr/>
         </p:nvSpPr>
@@ -25208,7 +27496,7 @@
       </p:sp>
       <p:sp>
         <p:nvSpPr>
-          <p:cNvPr id="22" name="Text 19"/>
+          <p:cNvPr id="33" name="Text 30"/>
           <p:cNvSpPr txBox="1"/>
           <p:nvPr/>
         </p:nvSpPr>
@@ -25247,7 +27535,7 @@
       </p:sp>
       <p:sp>
         <p:nvSpPr>
-          <p:cNvPr id="23" name="Text 20"/>
+          <p:cNvPr id="34" name="Text 31"/>
           <p:cNvSpPr txBox="1"/>
           <p:nvPr/>
         </p:nvSpPr>
@@ -25278,7 +27566,77 @@
                 <a:ea typeface="Times New Roman" pitchFamily="34" charset="-122"/>
                 <a:cs typeface="Times New Roman" pitchFamily="34" charset="-120"/>
               </a:rPr>
-              <a:t>(x − h)² + (y − k)² = r²</a:t>
+              <a:t>(x − h)</a:t>
+            </a:r>
+            <a:pPr indent="0" marL="0">
+              <a:buNone/>
+            </a:pPr>
+            <a:r>
+              <a:rPr lang="en-US" sz="1800" baseline="30000" dirty="0">
+                <a:solidFill>
+                  <a:srgbClr val="11344E"/>
+                </a:solidFill>
+                <a:latin typeface="Times New Roman" pitchFamily="34" charset="0"/>
+                <a:ea typeface="Times New Roman" pitchFamily="34" charset="-122"/>
+                <a:cs typeface="Times New Roman" pitchFamily="34" charset="-120"/>
+              </a:rPr>
+              <a:t>2</a:t>
+            </a:r>
+            <a:pPr indent="0" marL="0">
+              <a:buNone/>
+            </a:pPr>
+            <a:r>
+              <a:rPr lang="en-US" sz="1800" dirty="0">
+                <a:solidFill>
+                  <a:srgbClr val="11344E"/>
+                </a:solidFill>
+                <a:latin typeface="Times New Roman" pitchFamily="34" charset="0"/>
+                <a:ea typeface="Times New Roman" pitchFamily="34" charset="-122"/>
+                <a:cs typeface="Times New Roman" pitchFamily="34" charset="-120"/>
+              </a:rPr>
+              <a:t> + (y − k)</a:t>
+            </a:r>
+            <a:pPr indent="0" marL="0">
+              <a:buNone/>
+            </a:pPr>
+            <a:r>
+              <a:rPr lang="en-US" sz="1800" baseline="30000" dirty="0">
+                <a:solidFill>
+                  <a:srgbClr val="11344E"/>
+                </a:solidFill>
+                <a:latin typeface="Times New Roman" pitchFamily="34" charset="0"/>
+                <a:ea typeface="Times New Roman" pitchFamily="34" charset="-122"/>
+                <a:cs typeface="Times New Roman" pitchFamily="34" charset="-120"/>
+              </a:rPr>
+              <a:t>2</a:t>
+            </a:r>
+            <a:pPr indent="0" marL="0">
+              <a:buNone/>
+            </a:pPr>
+            <a:r>
+              <a:rPr lang="en-US" sz="1800" dirty="0">
+                <a:solidFill>
+                  <a:srgbClr val="11344E"/>
+                </a:solidFill>
+                <a:latin typeface="Times New Roman" pitchFamily="34" charset="0"/>
+                <a:ea typeface="Times New Roman" pitchFamily="34" charset="-122"/>
+                <a:cs typeface="Times New Roman" pitchFamily="34" charset="-120"/>
+              </a:rPr>
+              <a:t> = r</a:t>
+            </a:r>
+            <a:pPr indent="0" marL="0">
+              <a:buNone/>
+            </a:pPr>
+            <a:r>
+              <a:rPr lang="en-US" sz="1800" baseline="30000" dirty="0">
+                <a:solidFill>
+                  <a:srgbClr val="11344E"/>
+                </a:solidFill>
+                <a:latin typeface="Times New Roman" pitchFamily="34" charset="0"/>
+                <a:ea typeface="Times New Roman" pitchFamily="34" charset="-122"/>
+                <a:cs typeface="Times New Roman" pitchFamily="34" charset="-120"/>
+              </a:rPr>
+              <a:t>2</a:t>
             </a:r>
             <a:endParaRPr lang="en-US" sz="1800" dirty="0"/>
           </a:p>
@@ -25286,7 +27644,7 @@
       </p:sp>
       <p:sp>
         <p:nvSpPr>
-          <p:cNvPr id="24" name="Shape 21"/>
+          <p:cNvPr id="35" name="Shape 32"/>
           <p:cNvSpPr/>
           <p:nvPr/>
         </p:nvSpPr>
@@ -25313,7 +27671,7 @@
       </p:sp>
       <p:sp>
         <p:nvSpPr>
-          <p:cNvPr id="25" name="Text 22"/>
+          <p:cNvPr id="36" name="Text 33"/>
           <p:cNvSpPr txBox="1"/>
           <p:nvPr/>
         </p:nvSpPr>
@@ -25352,7 +27710,7 @@
       </p:sp>
       <p:sp>
         <p:nvSpPr>
-          <p:cNvPr id="26" name="Text 23"/>
+          <p:cNvPr id="37" name="Text 34"/>
           <p:cNvSpPr txBox="1"/>
           <p:nvPr/>
         </p:nvSpPr>
@@ -25391,7 +27749,7 @@
       </p:sp>
       <p:sp>
         <p:nvSpPr>
-          <p:cNvPr id="27" name="Shape 24"/>
+          <p:cNvPr id="38" name="Shape 35"/>
           <p:cNvSpPr/>
           <p:nvPr/>
         </p:nvSpPr>
@@ -25418,7 +27776,7 @@
       </p:sp>
       <p:sp>
         <p:nvSpPr>
-          <p:cNvPr id="28" name="Text 25"/>
+          <p:cNvPr id="39" name="Text 36"/>
           <p:cNvSpPr txBox="1"/>
           <p:nvPr/>
         </p:nvSpPr>
@@ -25457,7 +27815,7 @@
       </p:sp>
       <p:sp>
         <p:nvSpPr>
-          <p:cNvPr id="29" name="Text 26"/>
+          <p:cNvPr id="40" name="Text 37"/>
           <p:cNvSpPr txBox="1"/>
           <p:nvPr/>
         </p:nvSpPr>
@@ -25480,7 +27838,7 @@
               <a:buNone/>
             </a:pPr>
             <a:r>
-              <a:rPr lang="en-US" sz="1500" dirty="0">
+              <a:rPr lang="en-US" sz="1700" dirty="0">
                 <a:solidFill>
                   <a:srgbClr val="11344E"/>
                 </a:solidFill>
@@ -25488,15 +27846,225 @@
                 <a:ea typeface="Times New Roman" pitchFamily="34" charset="-122"/>
                 <a:cs typeface="Times New Roman" pitchFamily="34" charset="-120"/>
               </a:rPr>
-              <a:t>aᵐ/aⁿ = aᵐ⁻ⁿ   a⁻ⁿ = 1/aⁿ   (ab)ⁿ = aⁿbⁿ</a:t>
-            </a:r>
-            <a:endParaRPr lang="en-US" sz="1500" dirty="0"/>
-          </a:p>
-        </p:txBody>
-      </p:sp>
-      <p:sp>
-        <p:nvSpPr>
-          <p:cNvPr id="30" name="Shape 27"/>
+              <a:t>a</a:t>
+            </a:r>
+            <a:pPr indent="0" marL="0">
+              <a:buNone/>
+            </a:pPr>
+            <a:r>
+              <a:rPr lang="en-US" sz="1700" baseline="30000" dirty="0">
+                <a:solidFill>
+                  <a:srgbClr val="11344E"/>
+                </a:solidFill>
+                <a:latin typeface="Times New Roman" pitchFamily="34" charset="0"/>
+                <a:ea typeface="Times New Roman" pitchFamily="34" charset="-122"/>
+                <a:cs typeface="Times New Roman" pitchFamily="34" charset="-120"/>
+              </a:rPr>
+              <a:t>m</a:t>
+            </a:r>
+            <a:pPr indent="0" marL="0">
+              <a:buNone/>
+            </a:pPr>
+            <a:r>
+              <a:rPr lang="en-US" sz="1700" dirty="0">
+                <a:solidFill>
+                  <a:srgbClr val="11344E"/>
+                </a:solidFill>
+                <a:latin typeface="Times New Roman" pitchFamily="34" charset="0"/>
+                <a:ea typeface="Times New Roman" pitchFamily="34" charset="-122"/>
+                <a:cs typeface="Times New Roman" pitchFamily="34" charset="-120"/>
+              </a:rPr>
+              <a:t>/a</a:t>
+            </a:r>
+            <a:pPr indent="0" marL="0">
+              <a:buNone/>
+            </a:pPr>
+            <a:r>
+              <a:rPr lang="en-US" sz="1700" baseline="30000" dirty="0">
+                <a:solidFill>
+                  <a:srgbClr val="11344E"/>
+                </a:solidFill>
+                <a:latin typeface="Times New Roman" pitchFamily="34" charset="0"/>
+                <a:ea typeface="Times New Roman" pitchFamily="34" charset="-122"/>
+                <a:cs typeface="Times New Roman" pitchFamily="34" charset="-120"/>
+              </a:rPr>
+              <a:t>n</a:t>
+            </a:r>
+            <a:pPr indent="0" marL="0">
+              <a:buNone/>
+            </a:pPr>
+            <a:r>
+              <a:rPr lang="en-US" sz="1700" dirty="0">
+                <a:solidFill>
+                  <a:srgbClr val="11344E"/>
+                </a:solidFill>
+                <a:latin typeface="Times New Roman" pitchFamily="34" charset="0"/>
+                <a:ea typeface="Times New Roman" pitchFamily="34" charset="-122"/>
+                <a:cs typeface="Times New Roman" pitchFamily="34" charset="-120"/>
+              </a:rPr>
+              <a:t> = a</a:t>
+            </a:r>
+            <a:pPr indent="0" marL="0">
+              <a:buNone/>
+            </a:pPr>
+            <a:r>
+              <a:rPr lang="en-US" sz="1700" baseline="30000" dirty="0">
+                <a:solidFill>
+                  <a:srgbClr val="11344E"/>
+                </a:solidFill>
+                <a:latin typeface="Times New Roman" pitchFamily="34" charset="0"/>
+                <a:ea typeface="Times New Roman" pitchFamily="34" charset="-122"/>
+                <a:cs typeface="Times New Roman" pitchFamily="34" charset="-120"/>
+              </a:rPr>
+              <a:t>m−n</a:t>
+            </a:r>
+            <a:pPr indent="0" marL="0">
+              <a:buNone/>
+            </a:pPr>
+            <a:r>
+              <a:rPr lang="en-US" sz="1700" dirty="0">
+                <a:solidFill>
+                  <a:srgbClr val="11344E"/>
+                </a:solidFill>
+                <a:latin typeface="Times New Roman" pitchFamily="34" charset="0"/>
+                <a:ea typeface="Times New Roman" pitchFamily="34" charset="-122"/>
+                <a:cs typeface="Times New Roman" pitchFamily="34" charset="-120"/>
+              </a:rPr>
+              <a:t>    a</a:t>
+            </a:r>
+            <a:pPr indent="0" marL="0">
+              <a:buNone/>
+            </a:pPr>
+            <a:r>
+              <a:rPr lang="en-US" sz="1700" baseline="30000" dirty="0">
+                <a:solidFill>
+                  <a:srgbClr val="11344E"/>
+                </a:solidFill>
+                <a:latin typeface="Times New Roman" pitchFamily="34" charset="0"/>
+                <a:ea typeface="Times New Roman" pitchFamily="34" charset="-122"/>
+                <a:cs typeface="Times New Roman" pitchFamily="34" charset="-120"/>
+              </a:rPr>
+              <a:t>−n</a:t>
+            </a:r>
+            <a:pPr indent="0" marL="0">
+              <a:buNone/>
+            </a:pPr>
+            <a:r>
+              <a:rPr lang="en-US" sz="1700" dirty="0">
+                <a:solidFill>
+                  <a:srgbClr val="11344E"/>
+                </a:solidFill>
+                <a:latin typeface="Times New Roman" pitchFamily="34" charset="0"/>
+                <a:ea typeface="Times New Roman" pitchFamily="34" charset="-122"/>
+                <a:cs typeface="Times New Roman" pitchFamily="34" charset="-120"/>
+              </a:rPr>
+              <a:t> = 1/a</a:t>
+            </a:r>
+            <a:pPr indent="0" marL="0">
+              <a:buNone/>
+            </a:pPr>
+            <a:r>
+              <a:rPr lang="en-US" sz="1700" baseline="30000" dirty="0">
+                <a:solidFill>
+                  <a:srgbClr val="11344E"/>
+                </a:solidFill>
+                <a:latin typeface="Times New Roman" pitchFamily="34" charset="0"/>
+                <a:ea typeface="Times New Roman" pitchFamily="34" charset="-122"/>
+                <a:cs typeface="Times New Roman" pitchFamily="34" charset="-120"/>
+              </a:rPr>
+              <a:t>n</a:t>
+            </a:r>
+            <a:pPr indent="0" marL="0">
+              <a:buNone/>
+            </a:pPr>
+            <a:r>
+              <a:rPr lang="en-US" sz="1700" dirty="0">
+                <a:solidFill>
+                  <a:srgbClr val="11344E"/>
+                </a:solidFill>
+                <a:latin typeface="Times New Roman" pitchFamily="34" charset="0"/>
+                <a:ea typeface="Times New Roman" pitchFamily="34" charset="-122"/>
+                <a:cs typeface="Times New Roman" pitchFamily="34" charset="-120"/>
+              </a:rPr>
+              <a:t>    (ab)</a:t>
+            </a:r>
+            <a:pPr indent="0" marL="0">
+              <a:buNone/>
+            </a:pPr>
+            <a:r>
+              <a:rPr lang="en-US" sz="1700" baseline="30000" dirty="0">
+                <a:solidFill>
+                  <a:srgbClr val="11344E"/>
+                </a:solidFill>
+                <a:latin typeface="Times New Roman" pitchFamily="34" charset="0"/>
+                <a:ea typeface="Times New Roman" pitchFamily="34" charset="-122"/>
+                <a:cs typeface="Times New Roman" pitchFamily="34" charset="-120"/>
+              </a:rPr>
+              <a:t>n</a:t>
+            </a:r>
+            <a:pPr indent="0" marL="0">
+              <a:buNone/>
+            </a:pPr>
+            <a:r>
+              <a:rPr lang="en-US" sz="1700" dirty="0">
+                <a:solidFill>
+                  <a:srgbClr val="11344E"/>
+                </a:solidFill>
+                <a:latin typeface="Times New Roman" pitchFamily="34" charset="0"/>
+                <a:ea typeface="Times New Roman" pitchFamily="34" charset="-122"/>
+                <a:cs typeface="Times New Roman" pitchFamily="34" charset="-120"/>
+              </a:rPr>
+              <a:t> = a</a:t>
+            </a:r>
+            <a:pPr indent="0" marL="0">
+              <a:buNone/>
+            </a:pPr>
+            <a:r>
+              <a:rPr lang="en-US" sz="1700" baseline="30000" dirty="0">
+                <a:solidFill>
+                  <a:srgbClr val="11344E"/>
+                </a:solidFill>
+                <a:latin typeface="Times New Roman" pitchFamily="34" charset="0"/>
+                <a:ea typeface="Times New Roman" pitchFamily="34" charset="-122"/>
+                <a:cs typeface="Times New Roman" pitchFamily="34" charset="-120"/>
+              </a:rPr>
+              <a:t>n</a:t>
+            </a:r>
+            <a:pPr indent="0" marL="0">
+              <a:buNone/>
+            </a:pPr>
+            <a:r>
+              <a:rPr lang="en-US" sz="1700" dirty="0">
+                <a:solidFill>
+                  <a:srgbClr val="11344E"/>
+                </a:solidFill>
+                <a:latin typeface="Times New Roman" pitchFamily="34" charset="0"/>
+                <a:ea typeface="Times New Roman" pitchFamily="34" charset="-122"/>
+                <a:cs typeface="Times New Roman" pitchFamily="34" charset="-120"/>
+              </a:rPr>
+              <a:t>b</a:t>
+            </a:r>
+            <a:pPr indent="0" marL="0">
+              <a:buNone/>
+            </a:pPr>
+            <a:r>
+              <a:rPr lang="en-US" sz="1700" baseline="30000" dirty="0">
+                <a:solidFill>
+                  <a:srgbClr val="11344E"/>
+                </a:solidFill>
+                <a:latin typeface="Times New Roman" pitchFamily="34" charset="0"/>
+                <a:ea typeface="Times New Roman" pitchFamily="34" charset="-122"/>
+                <a:cs typeface="Times New Roman" pitchFamily="34" charset="-120"/>
+              </a:rPr>
+              <a:t>n</a:t>
+            </a:r>
+            <a:endParaRPr lang="en-US" sz="1700" dirty="0"/>
+          </a:p>
+        </p:txBody>
+      </p:sp>
+      <p:sp>
+        <p:nvSpPr>
+          <p:cNvPr id="41" name="Shape 38"/>
           <p:cNvSpPr/>
           <p:nvPr/>
         </p:nvSpPr>
@@ -25523,7 +28091,7 @@
       </p:sp>
       <p:sp>
         <p:nvSpPr>
-          <p:cNvPr id="31" name="Text 28"/>
+          <p:cNvPr id="42" name="Text 39"/>
           <p:cNvSpPr txBox="1"/>
           <p:nvPr/>
         </p:nvSpPr>
@@ -25562,23 +28130,23 @@
       </p:sp>
       <p:sp>
         <p:nvSpPr>
-          <p:cNvPr id="32" name="Text 29"/>
-          <p:cNvSpPr txBox="1"/>
-          <p:nvPr/>
-        </p:nvSpPr>
-        <p:spPr>
-          <a:xfrm>
-            <a:off x="8275320" y="5212080"/>
-            <a:ext cx="3200400" cy="548640"/>
-          </a:xfrm>
-          <a:prstGeom prst="rect">
-            <a:avLst/>
-          </a:prstGeom>
-          <a:noFill/>
-          <a:ln/>
-        </p:spPr>
-        <p:txBody>
-          <a:bodyPr wrap="square" lIns="0" tIns="0" rIns="0" bIns="0" rtlCol="0" anchor="ctr"/>
+          <p:cNvPr id="43" name="Text 40"/>
+          <p:cNvSpPr txBox="1"/>
+          <p:nvPr/>
+        </p:nvSpPr>
+        <p:spPr>
+          <a:xfrm>
+            <a:off x="8275320" y="5303520"/>
+            <a:ext cx="457200" cy="365760"/>
+          </a:xfrm>
+          <a:prstGeom prst="rect">
+            <a:avLst/>
+          </a:prstGeom>
+          <a:noFill/>
+          <a:ln/>
+        </p:spPr>
+        <p:txBody>
+          <a:bodyPr wrap="square" lIns="0" tIns="0" rIns="0" bIns="0" rtlCol="0" anchor="t"/>
           <a:lstStyle/>
           <a:p>
             <a:pPr indent="0" marL="0">
@@ -25593,9 +28161,138 @@
                 <a:ea typeface="Times New Roman" pitchFamily="34" charset="-122"/>
                 <a:cs typeface="Times New Roman" pitchFamily="34" charset="-120"/>
               </a:rPr>
-              <a:t>x = (−b ± √(b² − 4ac)) / (2a)</a:t>
+              <a:t>x =</a:t>
             </a:r>
             <a:endParaRPr lang="en-US" sz="1800" dirty="0"/>
+          </a:p>
+        </p:txBody>
+      </p:sp>
+      <p:sp>
+        <p:nvSpPr>
+          <p:cNvPr id="44" name="Text 41"/>
+          <p:cNvSpPr txBox="1"/>
+          <p:nvPr/>
+        </p:nvSpPr>
+        <p:spPr>
+          <a:xfrm>
+            <a:off x="8732520" y="5120640"/>
+            <a:ext cx="2011680" cy="280670"/>
+          </a:xfrm>
+          <a:prstGeom prst="rect">
+            <a:avLst/>
+          </a:prstGeom>
+          <a:noFill/>
+          <a:ln/>
+        </p:spPr>
+        <p:txBody>
+          <a:bodyPr wrap="square" lIns="0" tIns="0" rIns="0" bIns="0" rtlCol="0" anchor="b"/>
+          <a:lstStyle/>
+          <a:p>
+            <a:pPr algn="ctr" indent="0" marL="0">
+              <a:buNone/>
+            </a:pPr>
+            <a:r>
+              <a:rPr lang="en-US" sz="1700" dirty="0">
+                <a:solidFill>
+                  <a:srgbClr val="11344E"/>
+                </a:solidFill>
+                <a:latin typeface="Times New Roman" pitchFamily="34" charset="0"/>
+                <a:ea typeface="Times New Roman" pitchFamily="34" charset="-122"/>
+                <a:cs typeface="Times New Roman" pitchFamily="34" charset="-120"/>
+              </a:rPr>
+              <a:t>−b ± √(b</a:t>
+            </a:r>
+            <a:pPr algn="ctr" indent="0" marL="0">
+              <a:buNone/>
+            </a:pPr>
+            <a:r>
+              <a:rPr lang="en-US" sz="1700" baseline="30000" dirty="0">
+                <a:solidFill>
+                  <a:srgbClr val="11344E"/>
+                </a:solidFill>
+                <a:latin typeface="Times New Roman" pitchFamily="34" charset="0"/>
+                <a:ea typeface="Times New Roman" pitchFamily="34" charset="-122"/>
+                <a:cs typeface="Times New Roman" pitchFamily="34" charset="-120"/>
+              </a:rPr>
+              <a:t>2</a:t>
+            </a:r>
+            <a:pPr algn="ctr" indent="0" marL="0">
+              <a:buNone/>
+            </a:pPr>
+            <a:r>
+              <a:rPr lang="en-US" sz="1700" dirty="0">
+                <a:solidFill>
+                  <a:srgbClr val="11344E"/>
+                </a:solidFill>
+                <a:latin typeface="Times New Roman" pitchFamily="34" charset="0"/>
+                <a:ea typeface="Times New Roman" pitchFamily="34" charset="-122"/>
+                <a:cs typeface="Times New Roman" pitchFamily="34" charset="-120"/>
+              </a:rPr>
+              <a:t> − 4ac)</a:t>
+            </a:r>
+            <a:endParaRPr lang="en-US" sz="1700" dirty="0"/>
+          </a:p>
+        </p:txBody>
+      </p:sp>
+      <p:sp>
+        <p:nvSpPr>
+          <p:cNvPr id="45" name="Shape 42"/>
+          <p:cNvSpPr/>
+          <p:nvPr/>
+        </p:nvSpPr>
+        <p:spPr>
+          <a:xfrm>
+            <a:off x="8778240" y="5428742"/>
+            <a:ext cx="1920240" cy="0"/>
+          </a:xfrm>
+          <a:prstGeom prst="line">
+            <a:avLst/>
+          </a:prstGeom>
+          <a:noFill/>
+          <a:ln w="12700">
+            <a:solidFill>
+              <a:srgbClr val="11344E"/>
+            </a:solidFill>
+            <a:prstDash val="solid"/>
+          </a:ln>
+        </p:spPr>
+      </p:sp>
+      <p:sp>
+        <p:nvSpPr>
+          <p:cNvPr id="46" name="Text 43"/>
+          <p:cNvSpPr txBox="1"/>
+          <p:nvPr/>
+        </p:nvSpPr>
+        <p:spPr>
+          <a:xfrm>
+            <a:off x="8732520" y="5465318"/>
+            <a:ext cx="2011680" cy="280670"/>
+          </a:xfrm>
+          <a:prstGeom prst="rect">
+            <a:avLst/>
+          </a:prstGeom>
+          <a:noFill/>
+          <a:ln/>
+        </p:spPr>
+        <p:txBody>
+          <a:bodyPr wrap="square" lIns="0" tIns="0" rIns="0" bIns="0" rtlCol="0" anchor="t"/>
+          <a:lstStyle/>
+          <a:p>
+            <a:pPr algn="ctr" indent="0" marL="0">
+              <a:buNone/>
+            </a:pPr>
+            <a:r>
+              <a:rPr lang="en-US" sz="1700" dirty="0">
+                <a:solidFill>
+                  <a:srgbClr val="11344E"/>
+                </a:solidFill>
+                <a:latin typeface="Times New Roman" pitchFamily="34" charset="0"/>
+                <a:ea typeface="Times New Roman" pitchFamily="34" charset="-122"/>
+                <a:cs typeface="Times New Roman" pitchFamily="34" charset="-120"/>
+              </a:rPr>
+              <a:t>2a</a:t>
+            </a:r>
+            <a:endParaRPr lang="en-US" sz="1700" dirty="0"/>
           </a:p>
         </p:txBody>
       </p:sp>
@@ -25899,7 +28596,7 @@
           <a:bodyPr wrap="square" lIns="0" tIns="0" rIns="0" bIns="0" rtlCol="0" anchor="t"/>
           <a:lstStyle/>
           <a:p>
-            <a:pPr marL="342900" indent="-342900">
+            <a:pPr algn="l" marL="342900" indent="-342900">
               <a:spcAft>
                 <a:spcPts val="1000"/>
               </a:spcAft>
@@ -25920,7 +28617,7 @@
             <a:endParaRPr lang="en-US" sz="1300" dirty="0"/>
           </a:p>
           <a:p>
-            <a:pPr marL="342900" indent="-342900">
+            <a:pPr algn="l" marL="342900" indent="-342900">
               <a:spcAft>
                 <a:spcPts val="1000"/>
               </a:spcAft>
@@ -25941,7 +28638,7 @@
             <a:endParaRPr lang="en-US" sz="1300" dirty="0"/>
           </a:p>
           <a:p>
-            <a:pPr marL="342900" indent="-342900">
+            <a:pPr algn="l" marL="342900" indent="-342900">
               <a:spcAft>
                 <a:spcPts val="1000"/>
               </a:spcAft>
@@ -26114,7 +28811,7 @@
           <a:bodyPr wrap="square" lIns="0" tIns="0" rIns="0" bIns="0" rtlCol="0" anchor="t"/>
           <a:lstStyle/>
           <a:p>
-            <a:pPr marL="342900" indent="-342900">
+            <a:pPr algn="l" marL="342900" indent="-342900">
               <a:spcAft>
                 <a:spcPts val="1000"/>
               </a:spcAft>
@@ -26135,7 +28832,7 @@
             <a:endParaRPr lang="en-US" sz="1300" dirty="0"/>
           </a:p>
           <a:p>
-            <a:pPr marL="342900" indent="-342900">
+            <a:pPr algn="l" marL="342900" indent="-342900">
               <a:spcAft>
                 <a:spcPts val="1000"/>
               </a:spcAft>
@@ -26308,7 +29005,7 @@
           <a:bodyPr wrap="square" lIns="0" tIns="0" rIns="0" bIns="0" rtlCol="0" anchor="t"/>
           <a:lstStyle/>
           <a:p>
-            <a:pPr marL="342900" indent="-342900">
+            <a:pPr algn="l" marL="342900" indent="-342900">
               <a:spcAft>
                 <a:spcPts val="1000"/>
               </a:spcAft>
@@ -26329,7 +29026,7 @@
             <a:endParaRPr lang="en-US" sz="1300" dirty="0"/>
           </a:p>
           <a:p>
-            <a:pPr marL="342900" indent="-342900">
+            <a:pPr algn="l" marL="342900" indent="-342900">
               <a:spcAft>
                 <a:spcPts val="1000"/>
               </a:spcAft>
@@ -26350,7 +29047,7 @@
             <a:endParaRPr lang="en-US" sz="1300" dirty="0"/>
           </a:p>
           <a:p>
-            <a:pPr marL="342900" indent="-342900">
+            <a:pPr algn="l" marL="342900" indent="-342900">
               <a:spcAft>
                 <a:spcPts val="1000"/>
               </a:spcAft>
@@ -26523,7 +29220,7 @@
           <a:bodyPr wrap="square" lIns="0" tIns="0" rIns="0" bIns="0" rtlCol="0" anchor="t"/>
           <a:lstStyle/>
           <a:p>
-            <a:pPr marL="342900" indent="-342900">
+            <a:pPr algn="l" marL="342900" indent="-342900">
               <a:spcAft>
                 <a:spcPts val="1000"/>
               </a:spcAft>
@@ -26544,7 +29241,7 @@
             <a:endParaRPr lang="en-US" sz="1300" dirty="0"/>
           </a:p>
           <a:p>
-            <a:pPr marL="342900" indent="-342900">
+            <a:pPr algn="l" marL="342900" indent="-342900">
               <a:spcAft>
                 <a:spcPts val="1000"/>
               </a:spcAft>
@@ -26565,7 +29262,7 @@
             <a:endParaRPr lang="en-US" sz="1300" dirty="0"/>
           </a:p>
           <a:p>
-            <a:pPr marL="342900" indent="-342900">
+            <a:pPr algn="l" marL="342900" indent="-342900">
               <a:spcAft>
                 <a:spcPts val="1000"/>
               </a:spcAft>
@@ -26738,7 +29435,7 @@
           <a:bodyPr wrap="square" lIns="0" tIns="0" rIns="0" bIns="0" rtlCol="0" anchor="t"/>
           <a:lstStyle/>
           <a:p>
-            <a:pPr marL="342900" indent="-342900">
+            <a:pPr algn="l" marL="342900" indent="-342900">
               <a:spcAft>
                 <a:spcPts val="1000"/>
               </a:spcAft>
@@ -28286,7 +30983,7 @@
                 <a:ea typeface="Arial" pitchFamily="34" charset="-122"/>
                 <a:cs typeface="Arial" pitchFamily="34" charset="-120"/>
               </a:rPr>
-              <a:t>About four minutes per skill. Skip and return rather than stall.</a:t>
+              <a:t>About three minutes per skill. Skip and return rather than stall.</a:t>
             </a:r>
             <a:endParaRPr lang="en-US" sz="1500" dirty="0"/>
           </a:p>
@@ -28684,38 +31381,13 @@
                 <a:ea typeface="Times New Roman" pitchFamily="34" charset="-122"/>
                 <a:cs typeface="Times New Roman" pitchFamily="34" charset="-120"/>
               </a:rPr>
-              <a:t>1.   5x² + 5x − 30</a:t>
-            </a:r>
-            <a:endParaRPr lang="en-US" sz="2600" dirty="0"/>
-          </a:p>
-        </p:txBody>
-      </p:sp>
-      <p:sp>
-        <p:nvSpPr>
-          <p:cNvPr id="10" name="Text 7"/>
-          <p:cNvSpPr txBox="1"/>
-          <p:nvPr/>
-        </p:nvSpPr>
-        <p:spPr>
-          <a:xfrm>
-            <a:off x="548640" y="2926080"/>
-            <a:ext cx="5029200" cy="457200"/>
-          </a:xfrm>
-          <a:prstGeom prst="rect">
-            <a:avLst/>
-          </a:prstGeom>
-          <a:noFill/>
-          <a:ln/>
-        </p:spPr>
-        <p:txBody>
-          <a:bodyPr wrap="square" lIns="0" tIns="0" rIns="0" bIns="0" rtlCol="0" anchor="t"/>
-          <a:lstStyle/>
-          <a:p>
-            <a:pPr indent="0" marL="0">
-              <a:buNone/>
-            </a:pPr>
-            <a:r>
-              <a:rPr lang="en-US" sz="2600" dirty="0">
+              <a:t>1.   5x</a:t>
+            </a:r>
+            <a:pPr indent="0" marL="0">
+              <a:buNone/>
+            </a:pPr>
+            <a:r>
+              <a:rPr lang="en-US" sz="2600" baseline="30000" dirty="0">
                 <a:solidFill>
                   <a:srgbClr val="11344E"/>
                 </a:solidFill>
@@ -28723,72 +31395,8 @@
                 <a:ea typeface="Times New Roman" pitchFamily="34" charset="-122"/>
                 <a:cs typeface="Times New Roman" pitchFamily="34" charset="-120"/>
               </a:rPr>
-              <a:t>2.   3x⁴ − 21x³ + 30x²</a:t>
-            </a:r>
-            <a:endParaRPr lang="en-US" sz="2600" dirty="0"/>
-          </a:p>
-        </p:txBody>
-      </p:sp>
-      <p:sp>
-        <p:nvSpPr>
-          <p:cNvPr id="11" name="Text 8"/>
-          <p:cNvSpPr txBox="1"/>
-          <p:nvPr/>
-        </p:nvSpPr>
-        <p:spPr>
-          <a:xfrm>
-            <a:off x="6217920" y="1554480"/>
-            <a:ext cx="5394960" cy="365760"/>
-          </a:xfrm>
-          <a:prstGeom prst="rect">
-            <a:avLst/>
-          </a:prstGeom>
-          <a:noFill/>
-          <a:ln/>
-        </p:spPr>
-        <p:txBody>
-          <a:bodyPr wrap="square" lIns="0" tIns="0" rIns="0" bIns="0" rtlCol="0" anchor="t"/>
-          <a:lstStyle/>
-          <a:p>
-            <a:pPr indent="0" marL="0">
-              <a:buNone/>
-            </a:pPr>
-            <a:r>
-              <a:rPr lang="en-US" sz="1600" b="1" dirty="0">
-                <a:solidFill>
-                  <a:srgbClr val="1777B4"/>
-                </a:solidFill>
-                <a:latin typeface="Arial" pitchFamily="34" charset="0"/>
-                <a:ea typeface="Arial" pitchFamily="34" charset="-122"/>
-                <a:cs typeface="Arial" pitchFamily="34" charset="-120"/>
-              </a:rPr>
-              <a:t>Simplify (all variables nonzero)</a:t>
-            </a:r>
-            <a:endParaRPr lang="en-US" sz="1600" dirty="0"/>
-          </a:p>
-        </p:txBody>
-      </p:sp>
-      <p:sp>
-        <p:nvSpPr>
-          <p:cNvPr id="12" name="Text 9"/>
-          <p:cNvSpPr txBox="1"/>
-          <p:nvPr/>
-        </p:nvSpPr>
-        <p:spPr>
-          <a:xfrm>
-            <a:off x="6217920" y="2377440"/>
-            <a:ext cx="457200" cy="457200"/>
-          </a:xfrm>
-          <a:prstGeom prst="rect">
-            <a:avLst/>
-          </a:prstGeom>
-          <a:noFill/>
-          <a:ln/>
-        </p:spPr>
-        <p:txBody>
-          <a:bodyPr wrap="square" lIns="0" tIns="0" rIns="0" bIns="0" rtlCol="0" anchor="t"/>
-          <a:lstStyle/>
-          <a:p>
+              <a:t>2</a:t>
+            </a:r>
             <a:pPr indent="0" marL="0">
               <a:buNone/>
             </a:pPr>
@@ -28801,7 +31409,7 @@
                 <a:ea typeface="Times New Roman" pitchFamily="34" charset="-122"/>
                 <a:cs typeface="Times New Roman" pitchFamily="34" charset="-120"/>
               </a:rPr>
-              <a:t>3.</a:t>
+              <a:t> + 5x − 30</a:t>
             </a:r>
             <a:endParaRPr lang="en-US" sz="2600" dirty="0"/>
           </a:p>
@@ -28809,26 +31417,26 @@
       </p:sp>
       <p:sp>
         <p:nvSpPr>
-          <p:cNvPr id="13" name="Text 10"/>
-          <p:cNvSpPr txBox="1"/>
-          <p:nvPr/>
-        </p:nvSpPr>
-        <p:spPr>
-          <a:xfrm>
-            <a:off x="6720840" y="2011680"/>
-            <a:ext cx="2194560" cy="429260"/>
-          </a:xfrm>
-          <a:prstGeom prst="rect">
-            <a:avLst/>
-          </a:prstGeom>
-          <a:noFill/>
-          <a:ln/>
-        </p:spPr>
-        <p:txBody>
-          <a:bodyPr wrap="square" lIns="0" tIns="0" rIns="0" bIns="0" rtlCol="0" anchor="b"/>
-          <a:lstStyle/>
-          <a:p>
-            <a:pPr algn="ctr" indent="0" marL="0">
+          <p:cNvPr id="10" name="Text 7"/>
+          <p:cNvSpPr txBox="1"/>
+          <p:nvPr/>
+        </p:nvSpPr>
+        <p:spPr>
+          <a:xfrm>
+            <a:off x="548640" y="2926080"/>
+            <a:ext cx="5029200" cy="457200"/>
+          </a:xfrm>
+          <a:prstGeom prst="rect">
+            <a:avLst/>
+          </a:prstGeom>
+          <a:noFill/>
+          <a:ln/>
+        </p:spPr>
+        <p:txBody>
+          <a:bodyPr wrap="square" lIns="0" tIns="0" rIns="0" bIns="0" rtlCol="0" anchor="t"/>
+          <a:lstStyle/>
+          <a:p>
+            <a:pPr indent="0" marL="0">
               <a:buNone/>
             </a:pPr>
             <a:r>
@@ -28840,7 +31448,264 @@
                 <a:ea typeface="Times New Roman" pitchFamily="34" charset="-122"/>
                 <a:cs typeface="Times New Roman" pitchFamily="34" charset="-120"/>
               </a:rPr>
-              <a:t>x⁻⁴ y⁶ z⁻²</a:t>
+              <a:t>2.   3x</a:t>
+            </a:r>
+            <a:pPr indent="0" marL="0">
+              <a:buNone/>
+            </a:pPr>
+            <a:r>
+              <a:rPr lang="en-US" sz="2600" baseline="30000" dirty="0">
+                <a:solidFill>
+                  <a:srgbClr val="11344E"/>
+                </a:solidFill>
+                <a:latin typeface="Times New Roman" pitchFamily="34" charset="0"/>
+                <a:ea typeface="Times New Roman" pitchFamily="34" charset="-122"/>
+                <a:cs typeface="Times New Roman" pitchFamily="34" charset="-120"/>
+              </a:rPr>
+              <a:t>4</a:t>
+            </a:r>
+            <a:pPr indent="0" marL="0">
+              <a:buNone/>
+            </a:pPr>
+            <a:r>
+              <a:rPr lang="en-US" sz="2600" dirty="0">
+                <a:solidFill>
+                  <a:srgbClr val="11344E"/>
+                </a:solidFill>
+                <a:latin typeface="Times New Roman" pitchFamily="34" charset="0"/>
+                <a:ea typeface="Times New Roman" pitchFamily="34" charset="-122"/>
+                <a:cs typeface="Times New Roman" pitchFamily="34" charset="-120"/>
+              </a:rPr>
+              <a:t> − 21x</a:t>
+            </a:r>
+            <a:pPr indent="0" marL="0">
+              <a:buNone/>
+            </a:pPr>
+            <a:r>
+              <a:rPr lang="en-US" sz="2600" baseline="30000" dirty="0">
+                <a:solidFill>
+                  <a:srgbClr val="11344E"/>
+                </a:solidFill>
+                <a:latin typeface="Times New Roman" pitchFamily="34" charset="0"/>
+                <a:ea typeface="Times New Roman" pitchFamily="34" charset="-122"/>
+                <a:cs typeface="Times New Roman" pitchFamily="34" charset="-120"/>
+              </a:rPr>
+              <a:t>3</a:t>
+            </a:r>
+            <a:pPr indent="0" marL="0">
+              <a:buNone/>
+            </a:pPr>
+            <a:r>
+              <a:rPr lang="en-US" sz="2600" dirty="0">
+                <a:solidFill>
+                  <a:srgbClr val="11344E"/>
+                </a:solidFill>
+                <a:latin typeface="Times New Roman" pitchFamily="34" charset="0"/>
+                <a:ea typeface="Times New Roman" pitchFamily="34" charset="-122"/>
+                <a:cs typeface="Times New Roman" pitchFamily="34" charset="-120"/>
+              </a:rPr>
+              <a:t> + 30x</a:t>
+            </a:r>
+            <a:pPr indent="0" marL="0">
+              <a:buNone/>
+            </a:pPr>
+            <a:r>
+              <a:rPr lang="en-US" sz="2600" baseline="30000" dirty="0">
+                <a:solidFill>
+                  <a:srgbClr val="11344E"/>
+                </a:solidFill>
+                <a:latin typeface="Times New Roman" pitchFamily="34" charset="0"/>
+                <a:ea typeface="Times New Roman" pitchFamily="34" charset="-122"/>
+                <a:cs typeface="Times New Roman" pitchFamily="34" charset="-120"/>
+              </a:rPr>
+              <a:t>2</a:t>
+            </a:r>
+            <a:endParaRPr lang="en-US" sz="2600" dirty="0"/>
+          </a:p>
+        </p:txBody>
+      </p:sp>
+      <p:sp>
+        <p:nvSpPr>
+          <p:cNvPr id="11" name="Text 8"/>
+          <p:cNvSpPr txBox="1"/>
+          <p:nvPr/>
+        </p:nvSpPr>
+        <p:spPr>
+          <a:xfrm>
+            <a:off x="6217920" y="1554480"/>
+            <a:ext cx="5394960" cy="365760"/>
+          </a:xfrm>
+          <a:prstGeom prst="rect">
+            <a:avLst/>
+          </a:prstGeom>
+          <a:noFill/>
+          <a:ln/>
+        </p:spPr>
+        <p:txBody>
+          <a:bodyPr wrap="square" lIns="0" tIns="0" rIns="0" bIns="0" rtlCol="0" anchor="t"/>
+          <a:lstStyle/>
+          <a:p>
+            <a:pPr indent="0" marL="0">
+              <a:buNone/>
+            </a:pPr>
+            <a:r>
+              <a:rPr lang="en-US" sz="1600" b="1" dirty="0">
+                <a:solidFill>
+                  <a:srgbClr val="1777B4"/>
+                </a:solidFill>
+                <a:latin typeface="Arial" pitchFamily="34" charset="0"/>
+                <a:ea typeface="Arial" pitchFamily="34" charset="-122"/>
+                <a:cs typeface="Arial" pitchFamily="34" charset="-120"/>
+              </a:rPr>
+              <a:t>Simplify (all variables nonzero)</a:t>
+            </a:r>
+            <a:endParaRPr lang="en-US" sz="1600" dirty="0"/>
+          </a:p>
+        </p:txBody>
+      </p:sp>
+      <p:sp>
+        <p:nvSpPr>
+          <p:cNvPr id="12" name="Text 9"/>
+          <p:cNvSpPr txBox="1"/>
+          <p:nvPr/>
+        </p:nvSpPr>
+        <p:spPr>
+          <a:xfrm>
+            <a:off x="6217920" y="2377440"/>
+            <a:ext cx="457200" cy="457200"/>
+          </a:xfrm>
+          <a:prstGeom prst="rect">
+            <a:avLst/>
+          </a:prstGeom>
+          <a:noFill/>
+          <a:ln/>
+        </p:spPr>
+        <p:txBody>
+          <a:bodyPr wrap="square" lIns="0" tIns="0" rIns="0" bIns="0" rtlCol="0" anchor="t"/>
+          <a:lstStyle/>
+          <a:p>
+            <a:pPr indent="0" marL="0">
+              <a:buNone/>
+            </a:pPr>
+            <a:r>
+              <a:rPr lang="en-US" sz="2600" dirty="0">
+                <a:solidFill>
+                  <a:srgbClr val="11344E"/>
+                </a:solidFill>
+                <a:latin typeface="Times New Roman" pitchFamily="34" charset="0"/>
+                <a:ea typeface="Times New Roman" pitchFamily="34" charset="-122"/>
+                <a:cs typeface="Times New Roman" pitchFamily="34" charset="-120"/>
+              </a:rPr>
+              <a:t>3.</a:t>
+            </a:r>
+            <a:endParaRPr lang="en-US" sz="2600" dirty="0"/>
+          </a:p>
+        </p:txBody>
+      </p:sp>
+      <p:sp>
+        <p:nvSpPr>
+          <p:cNvPr id="13" name="Text 10"/>
+          <p:cNvSpPr txBox="1"/>
+          <p:nvPr/>
+        </p:nvSpPr>
+        <p:spPr>
+          <a:xfrm>
+            <a:off x="6720840" y="2011680"/>
+            <a:ext cx="2011680" cy="429260"/>
+          </a:xfrm>
+          <a:prstGeom prst="rect">
+            <a:avLst/>
+          </a:prstGeom>
+          <a:noFill/>
+          <a:ln/>
+        </p:spPr>
+        <p:txBody>
+          <a:bodyPr wrap="square" lIns="0" tIns="0" rIns="0" bIns="0" rtlCol="0" anchor="b"/>
+          <a:lstStyle/>
+          <a:p>
+            <a:pPr algn="ctr" indent="0" marL="0">
+              <a:buNone/>
+            </a:pPr>
+            <a:r>
+              <a:rPr lang="en-US" sz="2600" dirty="0">
+                <a:solidFill>
+                  <a:srgbClr val="11344E"/>
+                </a:solidFill>
+                <a:latin typeface="Times New Roman" pitchFamily="34" charset="0"/>
+                <a:ea typeface="Times New Roman" pitchFamily="34" charset="-122"/>
+                <a:cs typeface="Times New Roman" pitchFamily="34" charset="-120"/>
+              </a:rPr>
+              <a:t>x</a:t>
+            </a:r>
+            <a:pPr algn="ctr" indent="0" marL="0">
+              <a:buNone/>
+            </a:pPr>
+            <a:r>
+              <a:rPr lang="en-US" sz="2600" baseline="30000" dirty="0">
+                <a:solidFill>
+                  <a:srgbClr val="11344E"/>
+                </a:solidFill>
+                <a:latin typeface="Times New Roman" pitchFamily="34" charset="0"/>
+                <a:ea typeface="Times New Roman" pitchFamily="34" charset="-122"/>
+                <a:cs typeface="Times New Roman" pitchFamily="34" charset="-120"/>
+              </a:rPr>
+              <a:t>−4</a:t>
+            </a:r>
+            <a:pPr algn="ctr" indent="0" marL="0">
+              <a:buNone/>
+            </a:pPr>
+            <a:r>
+              <a:rPr lang="en-US" sz="2600" dirty="0">
+                <a:solidFill>
+                  <a:srgbClr val="11344E"/>
+                </a:solidFill>
+                <a:latin typeface="Times New Roman" pitchFamily="34" charset="0"/>
+                <a:ea typeface="Times New Roman" pitchFamily="34" charset="-122"/>
+                <a:cs typeface="Times New Roman" pitchFamily="34" charset="-120"/>
+              </a:rPr>
+              <a:t>y</a:t>
+            </a:r>
+            <a:pPr algn="ctr" indent="0" marL="0">
+              <a:buNone/>
+            </a:pPr>
+            <a:r>
+              <a:rPr lang="en-US" sz="2600" baseline="30000" dirty="0">
+                <a:solidFill>
+                  <a:srgbClr val="11344E"/>
+                </a:solidFill>
+                <a:latin typeface="Times New Roman" pitchFamily="34" charset="0"/>
+                <a:ea typeface="Times New Roman" pitchFamily="34" charset="-122"/>
+                <a:cs typeface="Times New Roman" pitchFamily="34" charset="-120"/>
+              </a:rPr>
+              <a:t>6</a:t>
+            </a:r>
+            <a:pPr algn="ctr" indent="0" marL="0">
+              <a:buNone/>
+            </a:pPr>
+            <a:r>
+              <a:rPr lang="en-US" sz="2600" dirty="0">
+                <a:solidFill>
+                  <a:srgbClr val="11344E"/>
+                </a:solidFill>
+                <a:latin typeface="Times New Roman" pitchFamily="34" charset="0"/>
+                <a:ea typeface="Times New Roman" pitchFamily="34" charset="-122"/>
+                <a:cs typeface="Times New Roman" pitchFamily="34" charset="-120"/>
+              </a:rPr>
+              <a:t>z</a:t>
+            </a:r>
+            <a:pPr algn="ctr" indent="0" marL="0">
+              <a:buNone/>
+            </a:pPr>
+            <a:r>
+              <a:rPr lang="en-US" sz="2600" baseline="30000" dirty="0">
+                <a:solidFill>
+                  <a:srgbClr val="11344E"/>
+                </a:solidFill>
+                <a:latin typeface="Times New Roman" pitchFamily="34" charset="0"/>
+                <a:ea typeface="Times New Roman" pitchFamily="34" charset="-122"/>
+                <a:cs typeface="Times New Roman" pitchFamily="34" charset="-120"/>
+              </a:rPr>
+              <a:t>−2</a:t>
             </a:r>
             <a:endParaRPr lang="en-US" sz="2600" dirty="0"/>
           </a:p>
@@ -28855,7 +31720,7 @@
         <p:spPr>
           <a:xfrm>
             <a:off x="6766560" y="2468372"/>
-            <a:ext cx="2103120" cy="0"/>
+            <a:ext cx="1920240" cy="0"/>
           </a:xfrm>
           <a:prstGeom prst="line">
             <a:avLst/>
@@ -28878,7 +31743,7 @@
         <p:spPr>
           <a:xfrm>
             <a:off x="6720840" y="2504948"/>
-            <a:ext cx="2194560" cy="429260"/>
+            <a:ext cx="2011680" cy="429260"/>
           </a:xfrm>
           <a:prstGeom prst="rect">
             <a:avLst/>
@@ -28902,38 +31767,13 @@
                 <a:ea typeface="Times New Roman" pitchFamily="34" charset="-122"/>
                 <a:cs typeface="Times New Roman" pitchFamily="34" charset="-120"/>
               </a:rPr>
-              <a:t>x³ y⁻² z⁵</a:t>
-            </a:r>
-            <a:endParaRPr lang="en-US" sz="2600" dirty="0"/>
-          </a:p>
-        </p:txBody>
-      </p:sp>
-      <p:sp>
-        <p:nvSpPr>
-          <p:cNvPr id="16" name="Text 13"/>
-          <p:cNvSpPr txBox="1"/>
-          <p:nvPr/>
-        </p:nvSpPr>
-        <p:spPr>
-          <a:xfrm>
-            <a:off x="6217920" y="3886200"/>
-            <a:ext cx="457200" cy="457200"/>
-          </a:xfrm>
-          <a:prstGeom prst="rect">
-            <a:avLst/>
-          </a:prstGeom>
-          <a:noFill/>
-          <a:ln/>
-        </p:spPr>
-        <p:txBody>
-          <a:bodyPr wrap="square" lIns="0" tIns="0" rIns="0" bIns="0" rtlCol="0" anchor="t"/>
-          <a:lstStyle/>
-          <a:p>
-            <a:pPr indent="0" marL="0">
-              <a:buNone/>
-            </a:pPr>
-            <a:r>
-              <a:rPr lang="en-US" sz="2600" dirty="0">
+              <a:t>x</a:t>
+            </a:r>
+            <a:pPr algn="ctr" indent="0" marL="0">
+              <a:buNone/>
+            </a:pPr>
+            <a:r>
+              <a:rPr lang="en-US" sz="2600" baseline="30000" dirty="0">
                 <a:solidFill>
                   <a:srgbClr val="11344E"/>
                 </a:solidFill>
@@ -28941,38 +31781,13 @@
                 <a:ea typeface="Times New Roman" pitchFamily="34" charset="-122"/>
                 <a:cs typeface="Times New Roman" pitchFamily="34" charset="-120"/>
               </a:rPr>
-              <a:t>4.</a:t>
-            </a:r>
-            <a:endParaRPr lang="en-US" sz="2600" dirty="0"/>
-          </a:p>
-        </p:txBody>
-      </p:sp>
-      <p:sp>
-        <p:nvSpPr>
-          <p:cNvPr id="17" name="Text 14"/>
-          <p:cNvSpPr txBox="1"/>
-          <p:nvPr/>
-        </p:nvSpPr>
-        <p:spPr>
-          <a:xfrm>
-            <a:off x="6675120" y="3566160"/>
-            <a:ext cx="274320" cy="1005840"/>
-          </a:xfrm>
-          <a:prstGeom prst="rect">
-            <a:avLst/>
-          </a:prstGeom>
-          <a:noFill/>
-          <a:ln/>
-        </p:spPr>
-        <p:txBody>
-          <a:bodyPr wrap="square" lIns="0" tIns="0" rIns="0" bIns="0" rtlCol="0" anchor="ctr"/>
-          <a:lstStyle/>
-          <a:p>
-            <a:pPr indent="0" marL="0">
-              <a:buNone/>
-            </a:pPr>
-            <a:r>
-              <a:rPr lang="en-US" sz="4800" dirty="0">
+              <a:t>3</a:t>
+            </a:r>
+            <a:pPr algn="ctr" indent="0" marL="0">
+              <a:buNone/>
+            </a:pPr>
+            <a:r>
+              <a:rPr lang="en-US" sz="2600" dirty="0">
                 <a:solidFill>
                   <a:srgbClr val="11344E"/>
                 </a:solidFill>
@@ -28980,38 +31795,13 @@
                 <a:ea typeface="Times New Roman" pitchFamily="34" charset="-122"/>
                 <a:cs typeface="Times New Roman" pitchFamily="34" charset="-120"/>
               </a:rPr>
-              <a:t>(</a:t>
-            </a:r>
-            <a:endParaRPr lang="en-US" sz="4800" dirty="0"/>
-          </a:p>
-        </p:txBody>
-      </p:sp>
-      <p:sp>
-        <p:nvSpPr>
-          <p:cNvPr id="18" name="Text 15"/>
-          <p:cNvSpPr txBox="1"/>
-          <p:nvPr/>
-        </p:nvSpPr>
-        <p:spPr>
-          <a:xfrm>
-            <a:off x="6903720" y="3520440"/>
-            <a:ext cx="1554480" cy="429260"/>
-          </a:xfrm>
-          <a:prstGeom prst="rect">
-            <a:avLst/>
-          </a:prstGeom>
-          <a:noFill/>
-          <a:ln/>
-        </p:spPr>
-        <p:txBody>
-          <a:bodyPr wrap="square" lIns="0" tIns="0" rIns="0" bIns="0" rtlCol="0" anchor="b"/>
-          <a:lstStyle/>
-          <a:p>
+              <a:t>y</a:t>
+            </a:r>
             <a:pPr algn="ctr" indent="0" marL="0">
               <a:buNone/>
             </a:pPr>
             <a:r>
-              <a:rPr lang="en-US" sz="2600" dirty="0">
+              <a:rPr lang="en-US" sz="2600" baseline="30000" dirty="0">
                 <a:solidFill>
                   <a:srgbClr val="11344E"/>
                 </a:solidFill>
@@ -29019,7 +31809,166 @@
                 <a:ea typeface="Times New Roman" pitchFamily="34" charset="-122"/>
                 <a:cs typeface="Times New Roman" pitchFamily="34" charset="-120"/>
               </a:rPr>
-              <a:t>9x y⁻²</a:t>
+              <a:t>−2</a:t>
+            </a:r>
+            <a:pPr algn="ctr" indent="0" marL="0">
+              <a:buNone/>
+            </a:pPr>
+            <a:r>
+              <a:rPr lang="en-US" sz="2600" dirty="0">
+                <a:solidFill>
+                  <a:srgbClr val="11344E"/>
+                </a:solidFill>
+                <a:latin typeface="Times New Roman" pitchFamily="34" charset="0"/>
+                <a:ea typeface="Times New Roman" pitchFamily="34" charset="-122"/>
+                <a:cs typeface="Times New Roman" pitchFamily="34" charset="-120"/>
+              </a:rPr>
+              <a:t>z</a:t>
+            </a:r>
+            <a:pPr algn="ctr" indent="0" marL="0">
+              <a:buNone/>
+            </a:pPr>
+            <a:r>
+              <a:rPr lang="en-US" sz="2600" baseline="30000" dirty="0">
+                <a:solidFill>
+                  <a:srgbClr val="11344E"/>
+                </a:solidFill>
+                <a:latin typeface="Times New Roman" pitchFamily="34" charset="0"/>
+                <a:ea typeface="Times New Roman" pitchFamily="34" charset="-122"/>
+                <a:cs typeface="Times New Roman" pitchFamily="34" charset="-120"/>
+              </a:rPr>
+              <a:t>5</a:t>
+            </a:r>
+            <a:endParaRPr lang="en-US" sz="2600" dirty="0"/>
+          </a:p>
+        </p:txBody>
+      </p:sp>
+      <p:sp>
+        <p:nvSpPr>
+          <p:cNvPr id="16" name="Text 13"/>
+          <p:cNvSpPr txBox="1"/>
+          <p:nvPr/>
+        </p:nvSpPr>
+        <p:spPr>
+          <a:xfrm>
+            <a:off x="6217920" y="3886200"/>
+            <a:ext cx="457200" cy="457200"/>
+          </a:xfrm>
+          <a:prstGeom prst="rect">
+            <a:avLst/>
+          </a:prstGeom>
+          <a:noFill/>
+          <a:ln/>
+        </p:spPr>
+        <p:txBody>
+          <a:bodyPr wrap="square" lIns="0" tIns="0" rIns="0" bIns="0" rtlCol="0" anchor="t"/>
+          <a:lstStyle/>
+          <a:p>
+            <a:pPr indent="0" marL="0">
+              <a:buNone/>
+            </a:pPr>
+            <a:r>
+              <a:rPr lang="en-US" sz="2600" dirty="0">
+                <a:solidFill>
+                  <a:srgbClr val="11344E"/>
+                </a:solidFill>
+                <a:latin typeface="Times New Roman" pitchFamily="34" charset="0"/>
+                <a:ea typeface="Times New Roman" pitchFamily="34" charset="-122"/>
+                <a:cs typeface="Times New Roman" pitchFamily="34" charset="-120"/>
+              </a:rPr>
+              <a:t>4.</a:t>
+            </a:r>
+            <a:endParaRPr lang="en-US" sz="2600" dirty="0"/>
+          </a:p>
+        </p:txBody>
+      </p:sp>
+      <p:sp>
+        <p:nvSpPr>
+          <p:cNvPr id="17" name="Text 14"/>
+          <p:cNvSpPr txBox="1"/>
+          <p:nvPr/>
+        </p:nvSpPr>
+        <p:spPr>
+          <a:xfrm>
+            <a:off x="6720840" y="3611880"/>
+            <a:ext cx="274320" cy="914400"/>
+          </a:xfrm>
+          <a:prstGeom prst="rect">
+            <a:avLst/>
+          </a:prstGeom>
+          <a:noFill/>
+          <a:ln/>
+        </p:spPr>
+        <p:txBody>
+          <a:bodyPr wrap="square" lIns="0" tIns="0" rIns="0" bIns="0" rtlCol="0" anchor="ctr"/>
+          <a:lstStyle/>
+          <a:p>
+            <a:pPr indent="0" marL="0">
+              <a:buNone/>
+            </a:pPr>
+            <a:r>
+              <a:rPr lang="en-US" sz="5000" dirty="0">
+                <a:solidFill>
+                  <a:srgbClr val="11344E"/>
+                </a:solidFill>
+                <a:latin typeface="Times New Roman" pitchFamily="34" charset="0"/>
+                <a:ea typeface="Times New Roman" pitchFamily="34" charset="-122"/>
+                <a:cs typeface="Times New Roman" pitchFamily="34" charset="-120"/>
+              </a:rPr>
+              <a:t>(</a:t>
+            </a:r>
+            <a:endParaRPr lang="en-US" sz="5000" dirty="0"/>
+          </a:p>
+        </p:txBody>
+      </p:sp>
+      <p:sp>
+        <p:nvSpPr>
+          <p:cNvPr id="18" name="Text 15"/>
+          <p:cNvSpPr txBox="1"/>
+          <p:nvPr/>
+        </p:nvSpPr>
+        <p:spPr>
+          <a:xfrm>
+            <a:off x="6949440" y="3520440"/>
+            <a:ext cx="1371600" cy="429260"/>
+          </a:xfrm>
+          <a:prstGeom prst="rect">
+            <a:avLst/>
+          </a:prstGeom>
+          <a:noFill/>
+          <a:ln/>
+        </p:spPr>
+        <p:txBody>
+          <a:bodyPr wrap="square" lIns="0" tIns="0" rIns="0" bIns="0" rtlCol="0" anchor="b"/>
+          <a:lstStyle/>
+          <a:p>
+            <a:pPr algn="ctr" indent="0" marL="0">
+              <a:buNone/>
+            </a:pPr>
+            <a:r>
+              <a:rPr lang="en-US" sz="2600" dirty="0">
+                <a:solidFill>
+                  <a:srgbClr val="11344E"/>
+                </a:solidFill>
+                <a:latin typeface="Times New Roman" pitchFamily="34" charset="0"/>
+                <a:ea typeface="Times New Roman" pitchFamily="34" charset="-122"/>
+                <a:cs typeface="Times New Roman" pitchFamily="34" charset="-120"/>
+              </a:rPr>
+              <a:t>9xy</a:t>
+            </a:r>
+            <a:pPr algn="ctr" indent="0" marL="0">
+              <a:buNone/>
+            </a:pPr>
+            <a:r>
+              <a:rPr lang="en-US" sz="2600" baseline="30000" dirty="0">
+                <a:solidFill>
+                  <a:srgbClr val="11344E"/>
+                </a:solidFill>
+                <a:latin typeface="Times New Roman" pitchFamily="34" charset="0"/>
+                <a:ea typeface="Times New Roman" pitchFamily="34" charset="-122"/>
+                <a:cs typeface="Times New Roman" pitchFamily="34" charset="-120"/>
+              </a:rPr>
+              <a:t>−2</a:t>
             </a:r>
             <a:endParaRPr lang="en-US" sz="2600" dirty="0"/>
           </a:p>
@@ -29033,8 +31982,8 @@
         </p:nvSpPr>
         <p:spPr>
           <a:xfrm>
-            <a:off x="6949440" y="3977132"/>
-            <a:ext cx="1463040" cy="0"/>
+            <a:off x="6995160" y="3977132"/>
+            <a:ext cx="1280160" cy="0"/>
           </a:xfrm>
           <a:prstGeom prst="line">
             <a:avLst/>
@@ -29056,8 +32005,8 @@
         </p:nvSpPr>
         <p:spPr>
           <a:xfrm>
-            <a:off x="6903720" y="4013708"/>
-            <a:ext cx="1554480" cy="429260"/>
+            <a:off x="6949440" y="4013708"/>
+            <a:ext cx="1371600" cy="429260"/>
           </a:xfrm>
           <a:prstGeom prst="rect">
             <a:avLst/>
@@ -29081,38 +32030,13 @@
                 <a:ea typeface="Times New Roman" pitchFamily="34" charset="-122"/>
                 <a:cs typeface="Times New Roman" pitchFamily="34" charset="-120"/>
               </a:rPr>
-              <a:t>3z³</a:t>
-            </a:r>
-            <a:endParaRPr lang="en-US" sz="2600" dirty="0"/>
-          </a:p>
-        </p:txBody>
-      </p:sp>
-      <p:sp>
-        <p:nvSpPr>
-          <p:cNvPr id="21" name="Text 18"/>
-          <p:cNvSpPr txBox="1"/>
-          <p:nvPr/>
-        </p:nvSpPr>
-        <p:spPr>
-          <a:xfrm>
-            <a:off x="8412480" y="3566160"/>
-            <a:ext cx="274320" cy="1005840"/>
-          </a:xfrm>
-          <a:prstGeom prst="rect">
-            <a:avLst/>
-          </a:prstGeom>
-          <a:noFill/>
-          <a:ln/>
-        </p:spPr>
-        <p:txBody>
-          <a:bodyPr wrap="square" lIns="0" tIns="0" rIns="0" bIns="0" rtlCol="0" anchor="ctr"/>
-          <a:lstStyle/>
-          <a:p>
-            <a:pPr indent="0" marL="0">
-              <a:buNone/>
-            </a:pPr>
-            <a:r>
-              <a:rPr lang="en-US" sz="4800" dirty="0">
+              <a:t>3z</a:t>
+            </a:r>
+            <a:pPr algn="ctr" indent="0" marL="0">
+              <a:buNone/>
+            </a:pPr>
+            <a:r>
+              <a:rPr lang="en-US" sz="2600" baseline="30000" dirty="0">
                 <a:solidFill>
                   <a:srgbClr val="11344E"/>
                 </a:solidFill>
@@ -29120,38 +32044,38 @@
                 <a:ea typeface="Times New Roman" pitchFamily="34" charset="-122"/>
                 <a:cs typeface="Times New Roman" pitchFamily="34" charset="-120"/>
               </a:rPr>
-              <a:t>)</a:t>
-            </a:r>
-            <a:endParaRPr lang="en-US" sz="4800" dirty="0"/>
-          </a:p>
-        </p:txBody>
-      </p:sp>
-      <p:sp>
-        <p:nvSpPr>
-          <p:cNvPr id="22" name="Text 19"/>
-          <p:cNvSpPr txBox="1"/>
-          <p:nvPr/>
-        </p:nvSpPr>
-        <p:spPr>
-          <a:xfrm>
-            <a:off x="8613648" y="3639312"/>
-            <a:ext cx="365760" cy="365760"/>
-          </a:xfrm>
-          <a:prstGeom prst="rect">
-            <a:avLst/>
-          </a:prstGeom>
-          <a:noFill/>
-          <a:ln/>
-        </p:spPr>
-        <p:txBody>
-          <a:bodyPr wrap="square" lIns="0" tIns="0" rIns="0" bIns="0" rtlCol="0" anchor="t"/>
-          <a:lstStyle/>
-          <a:p>
-            <a:pPr indent="0" marL="0">
-              <a:buNone/>
-            </a:pPr>
-            <a:r>
-              <a:rPr lang="en-US" sz="2200" dirty="0">
+              <a:t>3</a:t>
+            </a:r>
+            <a:endParaRPr lang="en-US" sz="2600" dirty="0"/>
+          </a:p>
+        </p:txBody>
+      </p:sp>
+      <p:sp>
+        <p:nvSpPr>
+          <p:cNvPr id="21" name="Text 18"/>
+          <p:cNvSpPr txBox="1"/>
+          <p:nvPr/>
+        </p:nvSpPr>
+        <p:spPr>
+          <a:xfrm>
+            <a:off x="8321040" y="3611880"/>
+            <a:ext cx="274320" cy="914400"/>
+          </a:xfrm>
+          <a:prstGeom prst="rect">
+            <a:avLst/>
+          </a:prstGeom>
+          <a:noFill/>
+          <a:ln/>
+        </p:spPr>
+        <p:txBody>
+          <a:bodyPr wrap="square" lIns="0" tIns="0" rIns="0" bIns="0" rtlCol="0" anchor="ctr"/>
+          <a:lstStyle/>
+          <a:p>
+            <a:pPr indent="0" marL="0">
+              <a:buNone/>
+            </a:pPr>
+            <a:r>
+              <a:rPr lang="en-US" sz="5000" dirty="0">
                 <a:solidFill>
                   <a:srgbClr val="11344E"/>
                 </a:solidFill>
@@ -29159,9 +32083,48 @@
                 <a:ea typeface="Times New Roman" pitchFamily="34" charset="-122"/>
                 <a:cs typeface="Times New Roman" pitchFamily="34" charset="-120"/>
               </a:rPr>
+              <a:t>)</a:t>
+            </a:r>
+            <a:endParaRPr lang="en-US" sz="5000" dirty="0"/>
+          </a:p>
+        </p:txBody>
+      </p:sp>
+      <p:sp>
+        <p:nvSpPr>
+          <p:cNvPr id="22" name="Text 19"/>
+          <p:cNvSpPr txBox="1"/>
+          <p:nvPr/>
+        </p:nvSpPr>
+        <p:spPr>
+          <a:xfrm>
+            <a:off x="8577072" y="3566160"/>
+            <a:ext cx="365760" cy="365760"/>
+          </a:xfrm>
+          <a:prstGeom prst="rect">
+            <a:avLst/>
+          </a:prstGeom>
+          <a:noFill/>
+          <a:ln/>
+        </p:spPr>
+        <p:txBody>
+          <a:bodyPr wrap="square" lIns="0" tIns="0" rIns="0" bIns="0" rtlCol="0" anchor="t"/>
+          <a:lstStyle/>
+          <a:p>
+            <a:pPr indent="0" marL="0">
+              <a:buNone/>
+            </a:pPr>
+            <a:r>
+              <a:rPr lang="en-US" sz="2400" dirty="0">
+                <a:solidFill>
+                  <a:srgbClr val="11344E"/>
+                </a:solidFill>
+                <a:latin typeface="Times New Roman" pitchFamily="34" charset="0"/>
+                <a:ea typeface="Times New Roman" pitchFamily="34" charset="-122"/>
+                <a:cs typeface="Times New Roman" pitchFamily="34" charset="-120"/>
+              </a:rPr>
               <a:t>3</a:t>
             </a:r>
-            <a:endParaRPr lang="en-US" sz="2200" dirty="0"/>
+            <a:endParaRPr lang="en-US" sz="2400" dirty="0"/>
           </a:p>
         </p:txBody>
       </p:sp>
@@ -29413,38 +32376,13 @@
                 <a:ea typeface="Times New Roman" pitchFamily="34" charset="-122"/>
                 <a:cs typeface="Times New Roman" pitchFamily="34" charset="-120"/>
               </a:rPr>
-              <a:t>1.   5(x² + x − 6) = 5(x + 3)(x − 2)</a:t>
-            </a:r>
-            <a:endParaRPr lang="en-US" sz="2200" dirty="0"/>
-          </a:p>
-        </p:txBody>
-      </p:sp>
-      <p:sp>
-        <p:nvSpPr>
-          <p:cNvPr id="7" name="Text 4"/>
-          <p:cNvSpPr txBox="1"/>
-          <p:nvPr/>
-        </p:nvSpPr>
-        <p:spPr>
-          <a:xfrm>
-            <a:off x="548640" y="2331720"/>
-            <a:ext cx="5760720" cy="457200"/>
-          </a:xfrm>
-          <a:prstGeom prst="rect">
-            <a:avLst/>
-          </a:prstGeom>
-          <a:noFill/>
-          <a:ln/>
-        </p:spPr>
-        <p:txBody>
-          <a:bodyPr wrap="square" lIns="0" tIns="0" rIns="0" bIns="0" rtlCol="0" anchor="t"/>
-          <a:lstStyle/>
-          <a:p>
-            <a:pPr indent="0" marL="0">
-              <a:buNone/>
-            </a:pPr>
-            <a:r>
-              <a:rPr lang="en-US" sz="2200" dirty="0">
+              <a:t>1.   5(x</a:t>
+            </a:r>
+            <a:pPr indent="0" marL="0">
+              <a:buNone/>
+            </a:pPr>
+            <a:r>
+              <a:rPr lang="en-US" sz="2200" baseline="30000" dirty="0">
                 <a:solidFill>
                   <a:srgbClr val="11344E"/>
                 </a:solidFill>
@@ -29452,33 +32390,8 @@
                 <a:ea typeface="Times New Roman" pitchFamily="34" charset="-122"/>
                 <a:cs typeface="Times New Roman" pitchFamily="34" charset="-120"/>
               </a:rPr>
-              <a:t>2.   3x²(x² − 7x + 10) = 3x²(x − 2)(x − 5)</a:t>
-            </a:r>
-            <a:endParaRPr lang="en-US" sz="2200" dirty="0"/>
-          </a:p>
-        </p:txBody>
-      </p:sp>
-      <p:sp>
-        <p:nvSpPr>
-          <p:cNvPr id="8" name="Text 5"/>
-          <p:cNvSpPr txBox="1"/>
-          <p:nvPr/>
-        </p:nvSpPr>
-        <p:spPr>
-          <a:xfrm>
-            <a:off x="548640" y="3429000"/>
-            <a:ext cx="4572000" cy="457200"/>
-          </a:xfrm>
-          <a:prstGeom prst="rect">
-            <a:avLst/>
-          </a:prstGeom>
-          <a:noFill/>
-          <a:ln/>
-        </p:spPr>
-        <p:txBody>
-          <a:bodyPr wrap="square" lIns="0" tIns="0" rIns="0" bIns="0" rtlCol="0" anchor="t"/>
-          <a:lstStyle/>
-          <a:p>
+              <a:t>2</a:t>
+            </a:r>
             <a:pPr indent="0" marL="0">
               <a:buNone/>
             </a:pPr>
@@ -29491,7 +32404,7 @@
                 <a:ea typeface="Times New Roman" pitchFamily="34" charset="-122"/>
                 <a:cs typeface="Times New Roman" pitchFamily="34" charset="-120"/>
               </a:rPr>
-              <a:t>3.   Subtract exponents:  x⁻⁷ y⁸ z⁻⁷  =</a:t>
+              <a:t> + x − 6) = 5(x + 3)(x − 2)</a:t>
             </a:r>
             <a:endParaRPr lang="en-US" sz="2200" dirty="0"/>
           </a:p>
@@ -29499,26 +32412,26 @@
       </p:sp>
       <p:sp>
         <p:nvSpPr>
-          <p:cNvPr id="9" name="Text 6"/>
-          <p:cNvSpPr txBox="1"/>
-          <p:nvPr/>
-        </p:nvSpPr>
-        <p:spPr>
-          <a:xfrm>
-            <a:off x="4937760" y="3154680"/>
-            <a:ext cx="1097280" cy="363220"/>
-          </a:xfrm>
-          <a:prstGeom prst="rect">
-            <a:avLst/>
-          </a:prstGeom>
-          <a:noFill/>
-          <a:ln/>
-        </p:spPr>
-        <p:txBody>
-          <a:bodyPr wrap="square" lIns="0" tIns="0" rIns="0" bIns="0" rtlCol="0" anchor="b"/>
-          <a:lstStyle/>
-          <a:p>
-            <a:pPr algn="ctr" indent="0" marL="0">
+          <p:cNvPr id="7" name="Text 4"/>
+          <p:cNvSpPr txBox="1"/>
+          <p:nvPr/>
+        </p:nvSpPr>
+        <p:spPr>
+          <a:xfrm>
+            <a:off x="548640" y="2331720"/>
+            <a:ext cx="5760720" cy="457200"/>
+          </a:xfrm>
+          <a:prstGeom prst="rect">
+            <a:avLst/>
+          </a:prstGeom>
+          <a:noFill/>
+          <a:ln/>
+        </p:spPr>
+        <p:txBody>
+          <a:bodyPr wrap="square" lIns="0" tIns="0" rIns="0" bIns="0" rtlCol="0" anchor="t"/>
+          <a:lstStyle/>
+          <a:p>
+            <a:pPr indent="0" marL="0">
               <a:buNone/>
             </a:pPr>
             <a:r>
@@ -29530,7 +32443,379 @@
                 <a:ea typeface="Times New Roman" pitchFamily="34" charset="-122"/>
                 <a:cs typeface="Times New Roman" pitchFamily="34" charset="-120"/>
               </a:rPr>
-              <a:t>y⁸</a:t>
+              <a:t>2.   3x</a:t>
+            </a:r>
+            <a:pPr indent="0" marL="0">
+              <a:buNone/>
+            </a:pPr>
+            <a:r>
+              <a:rPr lang="en-US" sz="2200" baseline="30000" dirty="0">
+                <a:solidFill>
+                  <a:srgbClr val="11344E"/>
+                </a:solidFill>
+                <a:latin typeface="Times New Roman" pitchFamily="34" charset="0"/>
+                <a:ea typeface="Times New Roman" pitchFamily="34" charset="-122"/>
+                <a:cs typeface="Times New Roman" pitchFamily="34" charset="-120"/>
+              </a:rPr>
+              <a:t>2</a:t>
+            </a:r>
+            <a:pPr indent="0" marL="0">
+              <a:buNone/>
+            </a:pPr>
+            <a:r>
+              <a:rPr lang="en-US" sz="2200" dirty="0">
+                <a:solidFill>
+                  <a:srgbClr val="11344E"/>
+                </a:solidFill>
+                <a:latin typeface="Times New Roman" pitchFamily="34" charset="0"/>
+                <a:ea typeface="Times New Roman" pitchFamily="34" charset="-122"/>
+                <a:cs typeface="Times New Roman" pitchFamily="34" charset="-120"/>
+              </a:rPr>
+              <a:t>(x</a:t>
+            </a:r>
+            <a:pPr indent="0" marL="0">
+              <a:buNone/>
+            </a:pPr>
+            <a:r>
+              <a:rPr lang="en-US" sz="2200" baseline="30000" dirty="0">
+                <a:solidFill>
+                  <a:srgbClr val="11344E"/>
+                </a:solidFill>
+                <a:latin typeface="Times New Roman" pitchFamily="34" charset="0"/>
+                <a:ea typeface="Times New Roman" pitchFamily="34" charset="-122"/>
+                <a:cs typeface="Times New Roman" pitchFamily="34" charset="-120"/>
+              </a:rPr>
+              <a:t>2</a:t>
+            </a:r>
+            <a:pPr indent="0" marL="0">
+              <a:buNone/>
+            </a:pPr>
+            <a:r>
+              <a:rPr lang="en-US" sz="2200" dirty="0">
+                <a:solidFill>
+                  <a:srgbClr val="11344E"/>
+                </a:solidFill>
+                <a:latin typeface="Times New Roman" pitchFamily="34" charset="0"/>
+                <a:ea typeface="Times New Roman" pitchFamily="34" charset="-122"/>
+                <a:cs typeface="Times New Roman" pitchFamily="34" charset="-120"/>
+              </a:rPr>
+              <a:t> − 7x + 10) = 3x</a:t>
+            </a:r>
+            <a:pPr indent="0" marL="0">
+              <a:buNone/>
+            </a:pPr>
+            <a:r>
+              <a:rPr lang="en-US" sz="2200" baseline="30000" dirty="0">
+                <a:solidFill>
+                  <a:srgbClr val="11344E"/>
+                </a:solidFill>
+                <a:latin typeface="Times New Roman" pitchFamily="34" charset="0"/>
+                <a:ea typeface="Times New Roman" pitchFamily="34" charset="-122"/>
+                <a:cs typeface="Times New Roman" pitchFamily="34" charset="-120"/>
+              </a:rPr>
+              <a:t>2</a:t>
+            </a:r>
+            <a:pPr indent="0" marL="0">
+              <a:buNone/>
+            </a:pPr>
+            <a:r>
+              <a:rPr lang="en-US" sz="2200" dirty="0">
+                <a:solidFill>
+                  <a:srgbClr val="11344E"/>
+                </a:solidFill>
+                <a:latin typeface="Times New Roman" pitchFamily="34" charset="0"/>
+                <a:ea typeface="Times New Roman" pitchFamily="34" charset="-122"/>
+                <a:cs typeface="Times New Roman" pitchFamily="34" charset="-120"/>
+              </a:rPr>
+              <a:t>(x − 2)(x − 5)</a:t>
+            </a:r>
+            <a:endParaRPr lang="en-US" sz="2200" dirty="0"/>
+          </a:p>
+        </p:txBody>
+      </p:sp>
+      <p:sp>
+        <p:nvSpPr>
+          <p:cNvPr id="8" name="Text 5"/>
+          <p:cNvSpPr txBox="1"/>
+          <p:nvPr/>
+        </p:nvSpPr>
+        <p:spPr>
+          <a:xfrm>
+            <a:off x="548640" y="3429000"/>
+            <a:ext cx="4572000" cy="457200"/>
+          </a:xfrm>
+          <a:prstGeom prst="rect">
+            <a:avLst/>
+          </a:prstGeom>
+          <a:noFill/>
+          <a:ln/>
+        </p:spPr>
+        <p:txBody>
+          <a:bodyPr wrap="square" lIns="0" tIns="0" rIns="0" bIns="0" rtlCol="0" anchor="t"/>
+          <a:lstStyle/>
+          <a:p>
+            <a:pPr indent="0" marL="0">
+              <a:buNone/>
+            </a:pPr>
+            <a:r>
+              <a:rPr lang="en-US" sz="2200" dirty="0">
+                <a:solidFill>
+                  <a:srgbClr val="11344E"/>
+                </a:solidFill>
+                <a:latin typeface="Times New Roman" pitchFamily="34" charset="0"/>
+                <a:ea typeface="Times New Roman" pitchFamily="34" charset="-122"/>
+                <a:cs typeface="Times New Roman" pitchFamily="34" charset="-120"/>
+              </a:rPr>
+              <a:t>3.   x</a:t>
+            </a:r>
+            <a:pPr indent="0" marL="0">
+              <a:buNone/>
+            </a:pPr>
+            <a:r>
+              <a:rPr lang="en-US" sz="2200" baseline="30000" dirty="0">
+                <a:solidFill>
+                  <a:srgbClr val="11344E"/>
+                </a:solidFill>
+                <a:latin typeface="Times New Roman" pitchFamily="34" charset="0"/>
+                <a:ea typeface="Times New Roman" pitchFamily="34" charset="-122"/>
+                <a:cs typeface="Times New Roman" pitchFamily="34" charset="-120"/>
+              </a:rPr>
+              <a:t>−4−3</a:t>
+            </a:r>
+            <a:pPr indent="0" marL="0">
+              <a:buNone/>
+            </a:pPr>
+            <a:r>
+              <a:rPr lang="en-US" sz="2200" dirty="0">
+                <a:solidFill>
+                  <a:srgbClr val="11344E"/>
+                </a:solidFill>
+                <a:latin typeface="Times New Roman" pitchFamily="34" charset="0"/>
+                <a:ea typeface="Times New Roman" pitchFamily="34" charset="-122"/>
+                <a:cs typeface="Times New Roman" pitchFamily="34" charset="-120"/>
+              </a:rPr>
+              <a:t> y</a:t>
+            </a:r>
+            <a:pPr indent="0" marL="0">
+              <a:buNone/>
+            </a:pPr>
+            <a:r>
+              <a:rPr lang="en-US" sz="2200" baseline="30000" dirty="0">
+                <a:solidFill>
+                  <a:srgbClr val="11344E"/>
+                </a:solidFill>
+                <a:latin typeface="Times New Roman" pitchFamily="34" charset="0"/>
+                <a:ea typeface="Times New Roman" pitchFamily="34" charset="-122"/>
+                <a:cs typeface="Times New Roman" pitchFamily="34" charset="-120"/>
+              </a:rPr>
+              <a:t>6</a:t>
+            </a:r>
+            <a:pPr indent="0" marL="0">
+              <a:buNone/>
+            </a:pPr>
+            <a:r>
+              <a:rPr lang="en-US" sz="2200" dirty="0">
+                <a:solidFill>
+                  <a:srgbClr val="11344E"/>
+                </a:solidFill>
+                <a:latin typeface="Times New Roman" pitchFamily="34" charset="0"/>
+                <a:ea typeface="Times New Roman" pitchFamily="34" charset="-122"/>
+                <a:cs typeface="Times New Roman" pitchFamily="34" charset="-120"/>
+              </a:rPr>
+              <a:t>⁺</a:t>
+            </a:r>
+            <a:pPr indent="0" marL="0">
+              <a:buNone/>
+            </a:pPr>
+            <a:r>
+              <a:rPr lang="en-US" sz="2200" baseline="30000" dirty="0">
+                <a:solidFill>
+                  <a:srgbClr val="11344E"/>
+                </a:solidFill>
+                <a:latin typeface="Times New Roman" pitchFamily="34" charset="0"/>
+                <a:ea typeface="Times New Roman" pitchFamily="34" charset="-122"/>
+                <a:cs typeface="Times New Roman" pitchFamily="34" charset="-120"/>
+              </a:rPr>
+              <a:t>2</a:t>
+            </a:r>
+            <a:pPr indent="0" marL="0">
+              <a:buNone/>
+            </a:pPr>
+            <a:r>
+              <a:rPr lang="en-US" sz="2200" dirty="0">
+                <a:solidFill>
+                  <a:srgbClr val="11344E"/>
+                </a:solidFill>
+                <a:latin typeface="Times New Roman" pitchFamily="34" charset="0"/>
+                <a:ea typeface="Times New Roman" pitchFamily="34" charset="-122"/>
+                <a:cs typeface="Times New Roman" pitchFamily="34" charset="-120"/>
+              </a:rPr>
+              <a:t> z</a:t>
+            </a:r>
+            <a:pPr indent="0" marL="0">
+              <a:buNone/>
+            </a:pPr>
+            <a:r>
+              <a:rPr lang="en-US" sz="2200" baseline="30000" dirty="0">
+                <a:solidFill>
+                  <a:srgbClr val="11344E"/>
+                </a:solidFill>
+                <a:latin typeface="Times New Roman" pitchFamily="34" charset="0"/>
+                <a:ea typeface="Times New Roman" pitchFamily="34" charset="-122"/>
+                <a:cs typeface="Times New Roman" pitchFamily="34" charset="-120"/>
+              </a:rPr>
+              <a:t>−2−5</a:t>
+            </a:r>
+            <a:pPr indent="0" marL="0">
+              <a:buNone/>
+            </a:pPr>
+            <a:r>
+              <a:rPr lang="en-US" sz="2200" dirty="0">
+                <a:solidFill>
+                  <a:srgbClr val="11344E"/>
+                </a:solidFill>
+                <a:latin typeface="Times New Roman" pitchFamily="34" charset="0"/>
+                <a:ea typeface="Times New Roman" pitchFamily="34" charset="-122"/>
+                <a:cs typeface="Times New Roman" pitchFamily="34" charset="-120"/>
+              </a:rPr>
+              <a:t> = x</a:t>
+            </a:r>
+            <a:pPr indent="0" marL="0">
+              <a:buNone/>
+            </a:pPr>
+            <a:r>
+              <a:rPr lang="en-US" sz="2200" baseline="30000" dirty="0">
+                <a:solidFill>
+                  <a:srgbClr val="11344E"/>
+                </a:solidFill>
+                <a:latin typeface="Times New Roman" pitchFamily="34" charset="0"/>
+                <a:ea typeface="Times New Roman" pitchFamily="34" charset="-122"/>
+                <a:cs typeface="Times New Roman" pitchFamily="34" charset="-120"/>
+              </a:rPr>
+              <a:t>−7</a:t>
+            </a:r>
+            <a:pPr indent="0" marL="0">
+              <a:buNone/>
+            </a:pPr>
+            <a:r>
+              <a:rPr lang="en-US" sz="2200" dirty="0">
+                <a:solidFill>
+                  <a:srgbClr val="11344E"/>
+                </a:solidFill>
+                <a:latin typeface="Times New Roman" pitchFamily="34" charset="0"/>
+                <a:ea typeface="Times New Roman" pitchFamily="34" charset="-122"/>
+                <a:cs typeface="Times New Roman" pitchFamily="34" charset="-120"/>
+              </a:rPr>
+              <a:t>y</a:t>
+            </a:r>
+            <a:pPr indent="0" marL="0">
+              <a:buNone/>
+            </a:pPr>
+            <a:r>
+              <a:rPr lang="en-US" sz="2200" baseline="30000" dirty="0">
+                <a:solidFill>
+                  <a:srgbClr val="11344E"/>
+                </a:solidFill>
+                <a:latin typeface="Times New Roman" pitchFamily="34" charset="0"/>
+                <a:ea typeface="Times New Roman" pitchFamily="34" charset="-122"/>
+                <a:cs typeface="Times New Roman" pitchFamily="34" charset="-120"/>
+              </a:rPr>
+              <a:t>8</a:t>
+            </a:r>
+            <a:pPr indent="0" marL="0">
+              <a:buNone/>
+            </a:pPr>
+            <a:r>
+              <a:rPr lang="en-US" sz="2200" dirty="0">
+                <a:solidFill>
+                  <a:srgbClr val="11344E"/>
+                </a:solidFill>
+                <a:latin typeface="Times New Roman" pitchFamily="34" charset="0"/>
+                <a:ea typeface="Times New Roman" pitchFamily="34" charset="-122"/>
+                <a:cs typeface="Times New Roman" pitchFamily="34" charset="-120"/>
+              </a:rPr>
+              <a:t>z</a:t>
+            </a:r>
+            <a:pPr indent="0" marL="0">
+              <a:buNone/>
+            </a:pPr>
+            <a:r>
+              <a:rPr lang="en-US" sz="2200" baseline="30000" dirty="0">
+                <a:solidFill>
+                  <a:srgbClr val="11344E"/>
+                </a:solidFill>
+                <a:latin typeface="Times New Roman" pitchFamily="34" charset="0"/>
+                <a:ea typeface="Times New Roman" pitchFamily="34" charset="-122"/>
+                <a:cs typeface="Times New Roman" pitchFamily="34" charset="-120"/>
+              </a:rPr>
+              <a:t>−7</a:t>
+            </a:r>
+            <a:pPr indent="0" marL="0">
+              <a:buNone/>
+            </a:pPr>
+            <a:r>
+              <a:rPr lang="en-US" sz="2200" dirty="0">
+                <a:solidFill>
+                  <a:srgbClr val="11344E"/>
+                </a:solidFill>
+                <a:latin typeface="Times New Roman" pitchFamily="34" charset="0"/>
+                <a:ea typeface="Times New Roman" pitchFamily="34" charset="-122"/>
+                <a:cs typeface="Times New Roman" pitchFamily="34" charset="-120"/>
+              </a:rPr>
+              <a:t> =</a:t>
+            </a:r>
+            <a:endParaRPr lang="en-US" sz="2200" dirty="0"/>
+          </a:p>
+        </p:txBody>
+      </p:sp>
+      <p:sp>
+        <p:nvSpPr>
+          <p:cNvPr id="9" name="Text 6"/>
+          <p:cNvSpPr txBox="1"/>
+          <p:nvPr/>
+        </p:nvSpPr>
+        <p:spPr>
+          <a:xfrm>
+            <a:off x="3977640" y="3154680"/>
+            <a:ext cx="1005840" cy="363220"/>
+          </a:xfrm>
+          <a:prstGeom prst="rect">
+            <a:avLst/>
+          </a:prstGeom>
+          <a:noFill/>
+          <a:ln/>
+        </p:spPr>
+        <p:txBody>
+          <a:bodyPr wrap="square" lIns="0" tIns="0" rIns="0" bIns="0" rtlCol="0" anchor="b"/>
+          <a:lstStyle/>
+          <a:p>
+            <a:pPr algn="ctr" indent="0" marL="0">
+              <a:buNone/>
+            </a:pPr>
+            <a:r>
+              <a:rPr lang="en-US" sz="2200" dirty="0">
+                <a:solidFill>
+                  <a:srgbClr val="1777B4"/>
+                </a:solidFill>
+                <a:latin typeface="Times New Roman" pitchFamily="34" charset="0"/>
+                <a:ea typeface="Times New Roman" pitchFamily="34" charset="-122"/>
+                <a:cs typeface="Times New Roman" pitchFamily="34" charset="-120"/>
+              </a:rPr>
+              <a:t>y</a:t>
+            </a:r>
+            <a:pPr algn="ctr" indent="0" marL="0">
+              <a:buNone/>
+            </a:pPr>
+            <a:r>
+              <a:rPr lang="en-US" sz="2200" baseline="30000" dirty="0">
+                <a:solidFill>
+                  <a:srgbClr val="1777B4"/>
+                </a:solidFill>
+                <a:latin typeface="Times New Roman" pitchFamily="34" charset="0"/>
+                <a:ea typeface="Times New Roman" pitchFamily="34" charset="-122"/>
+                <a:cs typeface="Times New Roman" pitchFamily="34" charset="-120"/>
+              </a:rPr>
+              <a:t>8</a:t>
             </a:r>
             <a:endParaRPr lang="en-US" sz="2200" dirty="0"/>
           </a:p>
@@ -29544,8 +32829,229 @@
         </p:nvSpPr>
         <p:spPr>
           <a:xfrm>
-            <a:off x="4983480" y="3545332"/>
-            <a:ext cx="1005840" cy="0"/>
+            <a:off x="4023360" y="3545332"/>
+            <a:ext cx="914400" cy="0"/>
+          </a:xfrm>
+          <a:prstGeom prst="line">
+            <a:avLst/>
+          </a:prstGeom>
+          <a:noFill/>
+          <a:ln w="12700">
+            <a:solidFill>
+              <a:srgbClr val="1777B4"/>
+            </a:solidFill>
+            <a:prstDash val="solid"/>
+          </a:ln>
+        </p:spPr>
+      </p:sp>
+      <p:sp>
+        <p:nvSpPr>
+          <p:cNvPr id="11" name="Text 8"/>
+          <p:cNvSpPr txBox="1"/>
+          <p:nvPr/>
+        </p:nvSpPr>
+        <p:spPr>
+          <a:xfrm>
+            <a:off x="3977640" y="3581908"/>
+            <a:ext cx="1005840" cy="363220"/>
+          </a:xfrm>
+          <a:prstGeom prst="rect">
+            <a:avLst/>
+          </a:prstGeom>
+          <a:noFill/>
+          <a:ln/>
+        </p:spPr>
+        <p:txBody>
+          <a:bodyPr wrap="square" lIns="0" tIns="0" rIns="0" bIns="0" rtlCol="0" anchor="t"/>
+          <a:lstStyle/>
+          <a:p>
+            <a:pPr algn="ctr" indent="0" marL="0">
+              <a:buNone/>
+            </a:pPr>
+            <a:r>
+              <a:rPr lang="en-US" sz="2200" dirty="0">
+                <a:solidFill>
+                  <a:srgbClr val="1777B4"/>
+                </a:solidFill>
+                <a:latin typeface="Times New Roman" pitchFamily="34" charset="0"/>
+                <a:ea typeface="Times New Roman" pitchFamily="34" charset="-122"/>
+                <a:cs typeface="Times New Roman" pitchFamily="34" charset="-120"/>
+              </a:rPr>
+              <a:t>x</a:t>
+            </a:r>
+            <a:pPr algn="ctr" indent="0" marL="0">
+              <a:buNone/>
+            </a:pPr>
+            <a:r>
+              <a:rPr lang="en-US" sz="2200" baseline="30000" dirty="0">
+                <a:solidFill>
+                  <a:srgbClr val="1777B4"/>
+                </a:solidFill>
+                <a:latin typeface="Times New Roman" pitchFamily="34" charset="0"/>
+                <a:ea typeface="Times New Roman" pitchFamily="34" charset="-122"/>
+                <a:cs typeface="Times New Roman" pitchFamily="34" charset="-120"/>
+              </a:rPr>
+              <a:t>7</a:t>
+            </a:r>
+            <a:pPr algn="ctr" indent="0" marL="0">
+              <a:buNone/>
+            </a:pPr>
+            <a:r>
+              <a:rPr lang="en-US" sz="2200" dirty="0">
+                <a:solidFill>
+                  <a:srgbClr val="1777B4"/>
+                </a:solidFill>
+                <a:latin typeface="Times New Roman" pitchFamily="34" charset="0"/>
+                <a:ea typeface="Times New Roman" pitchFamily="34" charset="-122"/>
+                <a:cs typeface="Times New Roman" pitchFamily="34" charset="-120"/>
+              </a:rPr>
+              <a:t>z</a:t>
+            </a:r>
+            <a:pPr algn="ctr" indent="0" marL="0">
+              <a:buNone/>
+            </a:pPr>
+            <a:r>
+              <a:rPr lang="en-US" sz="2200" baseline="30000" dirty="0">
+                <a:solidFill>
+                  <a:srgbClr val="1777B4"/>
+                </a:solidFill>
+                <a:latin typeface="Times New Roman" pitchFamily="34" charset="0"/>
+                <a:ea typeface="Times New Roman" pitchFamily="34" charset="-122"/>
+                <a:cs typeface="Times New Roman" pitchFamily="34" charset="-120"/>
+              </a:rPr>
+              <a:t>7</a:t>
+            </a:r>
+            <a:endParaRPr lang="en-US" sz="2200" dirty="0"/>
+          </a:p>
+        </p:txBody>
+      </p:sp>
+      <p:sp>
+        <p:nvSpPr>
+          <p:cNvPr id="12" name="Text 9"/>
+          <p:cNvSpPr txBox="1"/>
+          <p:nvPr/>
+        </p:nvSpPr>
+        <p:spPr>
+          <a:xfrm>
+            <a:off x="548640" y="4572000"/>
+            <a:ext cx="2194560" cy="457200"/>
+          </a:xfrm>
+          <a:prstGeom prst="rect">
+            <a:avLst/>
+          </a:prstGeom>
+          <a:noFill/>
+          <a:ln/>
+        </p:spPr>
+        <p:txBody>
+          <a:bodyPr wrap="square" lIns="0" tIns="0" rIns="0" bIns="0" rtlCol="0" anchor="t"/>
+          <a:lstStyle/>
+          <a:p>
+            <a:pPr indent="0" marL="0">
+              <a:buNone/>
+            </a:pPr>
+            <a:r>
+              <a:rPr lang="en-US" sz="2200" dirty="0">
+                <a:solidFill>
+                  <a:srgbClr val="11344E"/>
+                </a:solidFill>
+                <a:latin typeface="Times New Roman" pitchFamily="34" charset="0"/>
+                <a:ea typeface="Times New Roman" pitchFamily="34" charset="-122"/>
+                <a:cs typeface="Times New Roman" pitchFamily="34" charset="-120"/>
+              </a:rPr>
+              <a:t>4.   Inside first:</a:t>
+            </a:r>
+            <a:endParaRPr lang="en-US" sz="2200" dirty="0"/>
+          </a:p>
+        </p:txBody>
+      </p:sp>
+      <p:sp>
+        <p:nvSpPr>
+          <p:cNvPr id="13" name="Text 10"/>
+          <p:cNvSpPr txBox="1"/>
+          <p:nvPr/>
+        </p:nvSpPr>
+        <p:spPr>
+          <a:xfrm>
+            <a:off x="2697480" y="4315968"/>
+            <a:ext cx="228600" cy="868680"/>
+          </a:xfrm>
+          <a:prstGeom prst="rect">
+            <a:avLst/>
+          </a:prstGeom>
+          <a:noFill/>
+          <a:ln/>
+        </p:spPr>
+        <p:txBody>
+          <a:bodyPr wrap="square" lIns="0" tIns="0" rIns="0" bIns="0" rtlCol="0" anchor="ctr"/>
+          <a:lstStyle/>
+          <a:p>
+            <a:pPr indent="0" marL="0">
+              <a:buNone/>
+            </a:pPr>
+            <a:r>
+              <a:rPr lang="en-US" sz="4000" dirty="0">
+                <a:solidFill>
+                  <a:srgbClr val="11344E"/>
+                </a:solidFill>
+                <a:latin typeface="Times New Roman" pitchFamily="34" charset="0"/>
+                <a:ea typeface="Times New Roman" pitchFamily="34" charset="-122"/>
+                <a:cs typeface="Times New Roman" pitchFamily="34" charset="-120"/>
+              </a:rPr>
+              <a:t>(</a:t>
+            </a:r>
+            <a:endParaRPr lang="en-US" sz="4000" dirty="0"/>
+          </a:p>
+        </p:txBody>
+      </p:sp>
+      <p:sp>
+        <p:nvSpPr>
+          <p:cNvPr id="14" name="Text 11"/>
+          <p:cNvSpPr txBox="1"/>
+          <p:nvPr/>
+        </p:nvSpPr>
+        <p:spPr>
+          <a:xfrm>
+            <a:off x="2880360" y="4297680"/>
+            <a:ext cx="868680" cy="363220"/>
+          </a:xfrm>
+          <a:prstGeom prst="rect">
+            <a:avLst/>
+          </a:prstGeom>
+          <a:noFill/>
+          <a:ln/>
+        </p:spPr>
+        <p:txBody>
+          <a:bodyPr wrap="square" lIns="0" tIns="0" rIns="0" bIns="0" rtlCol="0" anchor="b"/>
+          <a:lstStyle/>
+          <a:p>
+            <a:pPr algn="ctr" indent="0" marL="0">
+              <a:buNone/>
+            </a:pPr>
+            <a:r>
+              <a:rPr lang="en-US" sz="2200" dirty="0">
+                <a:solidFill>
+                  <a:srgbClr val="11344E"/>
+                </a:solidFill>
+                <a:latin typeface="Times New Roman" pitchFamily="34" charset="0"/>
+                <a:ea typeface="Times New Roman" pitchFamily="34" charset="-122"/>
+                <a:cs typeface="Times New Roman" pitchFamily="34" charset="-120"/>
+              </a:rPr>
+              <a:t>3x</a:t>
+            </a:r>
+            <a:endParaRPr lang="en-US" sz="2200" dirty="0"/>
+          </a:p>
+        </p:txBody>
+      </p:sp>
+      <p:sp>
+        <p:nvSpPr>
+          <p:cNvPr id="15" name="Shape 12"/>
+          <p:cNvSpPr/>
+          <p:nvPr/>
+        </p:nvSpPr>
+        <p:spPr>
+          <a:xfrm>
+            <a:off x="2926080" y="4688332"/>
+            <a:ext cx="777240" cy="0"/>
           </a:xfrm>
           <a:prstGeom prst="line">
             <a:avLst/>
@@ -29561,14 +33067,14 @@
       </p:sp>
       <p:sp>
         <p:nvSpPr>
-          <p:cNvPr id="11" name="Text 8"/>
-          <p:cNvSpPr txBox="1"/>
-          <p:nvPr/>
-        </p:nvSpPr>
-        <p:spPr>
-          <a:xfrm>
-            <a:off x="4937760" y="3581908"/>
-            <a:ext cx="1097280" cy="363220"/>
+          <p:cNvPr id="16" name="Text 13"/>
+          <p:cNvSpPr txBox="1"/>
+          <p:nvPr/>
+        </p:nvSpPr>
+        <p:spPr>
+          <a:xfrm>
+            <a:off x="2880360" y="4724908"/>
+            <a:ext cx="868680" cy="363220"/>
           </a:xfrm>
           <a:prstGeom prst="rect">
             <a:avLst/>
@@ -29592,38 +33098,13 @@
                 <a:ea typeface="Times New Roman" pitchFamily="34" charset="-122"/>
                 <a:cs typeface="Times New Roman" pitchFamily="34" charset="-120"/>
               </a:rPr>
-              <a:t>x⁷ z⁷</a:t>
-            </a:r>
-            <a:endParaRPr lang="en-US" sz="2200" dirty="0"/>
-          </a:p>
-        </p:txBody>
-      </p:sp>
-      <p:sp>
-        <p:nvSpPr>
-          <p:cNvPr id="12" name="Text 9"/>
-          <p:cNvSpPr txBox="1"/>
-          <p:nvPr/>
-        </p:nvSpPr>
-        <p:spPr>
-          <a:xfrm>
-            <a:off x="548640" y="4572000"/>
-            <a:ext cx="4572000" cy="457200"/>
-          </a:xfrm>
-          <a:prstGeom prst="rect">
-            <a:avLst/>
-          </a:prstGeom>
-          <a:noFill/>
-          <a:ln/>
-        </p:spPr>
-        <p:txBody>
-          <a:bodyPr wrap="square" lIns="0" tIns="0" rIns="0" bIns="0" rtlCol="0" anchor="t"/>
-          <a:lstStyle/>
-          <a:p>
-            <a:pPr indent="0" marL="0">
-              <a:buNone/>
-            </a:pPr>
-            <a:r>
-              <a:rPr lang="en-US" sz="2200" dirty="0">
+              <a:t>y</a:t>
+            </a:r>
+            <a:pPr algn="ctr" indent="0" marL="0">
+              <a:buNone/>
+            </a:pPr>
+            <a:r>
+              <a:rPr lang="en-US" sz="2200" baseline="30000" dirty="0">
                 <a:solidFill>
                   <a:srgbClr val="11344E"/>
                 </a:solidFill>
@@ -29631,33 +33112,8 @@
                 <a:ea typeface="Times New Roman" pitchFamily="34" charset="-122"/>
                 <a:cs typeface="Times New Roman" pitchFamily="34" charset="-120"/>
               </a:rPr>
-              <a:t>4.   Inside first:  (3x / (y² z³))³  =</a:t>
-            </a:r>
-            <a:endParaRPr lang="en-US" sz="2200" dirty="0"/>
-          </a:p>
-        </p:txBody>
-      </p:sp>
-      <p:sp>
-        <p:nvSpPr>
-          <p:cNvPr id="13" name="Text 10"/>
-          <p:cNvSpPr txBox="1"/>
-          <p:nvPr/>
-        </p:nvSpPr>
-        <p:spPr>
-          <a:xfrm>
-            <a:off x="4937760" y="4297680"/>
-            <a:ext cx="1097280" cy="363220"/>
-          </a:xfrm>
-          <a:prstGeom prst="rect">
-            <a:avLst/>
-          </a:prstGeom>
-          <a:noFill/>
-          <a:ln/>
-        </p:spPr>
-        <p:txBody>
-          <a:bodyPr wrap="square" lIns="0" tIns="0" rIns="0" bIns="0" rtlCol="0" anchor="b"/>
-          <a:lstStyle/>
-          <a:p>
+              <a:t>2</a:t>
+            </a:r>
             <a:pPr algn="ctr" indent="0" marL="0">
               <a:buNone/>
             </a:pPr>
@@ -29670,7 +33126,21 @@
                 <a:ea typeface="Times New Roman" pitchFamily="34" charset="-122"/>
                 <a:cs typeface="Times New Roman" pitchFamily="34" charset="-120"/>
               </a:rPr>
-              <a:t>27x³</a:t>
+              <a:t>z</a:t>
+            </a:r>
+            <a:pPr algn="ctr" indent="0" marL="0">
+              <a:buNone/>
+            </a:pPr>
+            <a:r>
+              <a:rPr lang="en-US" sz="2200" baseline="30000" dirty="0">
+                <a:solidFill>
+                  <a:srgbClr val="11344E"/>
+                </a:solidFill>
+                <a:latin typeface="Times New Roman" pitchFamily="34" charset="0"/>
+                <a:ea typeface="Times New Roman" pitchFamily="34" charset="-122"/>
+                <a:cs typeface="Times New Roman" pitchFamily="34" charset="-120"/>
+              </a:rPr>
+              <a:t>3</a:t>
             </a:r>
             <a:endParaRPr lang="en-US" sz="2200" dirty="0"/>
           </a:p>
@@ -29678,14 +33148,184 @@
       </p:sp>
       <p:sp>
         <p:nvSpPr>
-          <p:cNvPr id="14" name="Shape 11"/>
+          <p:cNvPr id="17" name="Text 14"/>
+          <p:cNvSpPr txBox="1"/>
+          <p:nvPr/>
+        </p:nvSpPr>
+        <p:spPr>
+          <a:xfrm>
+            <a:off x="3730752" y="4315968"/>
+            <a:ext cx="228600" cy="868680"/>
+          </a:xfrm>
+          <a:prstGeom prst="rect">
+            <a:avLst/>
+          </a:prstGeom>
+          <a:noFill/>
+          <a:ln/>
+        </p:spPr>
+        <p:txBody>
+          <a:bodyPr wrap="square" lIns="0" tIns="0" rIns="0" bIns="0" rtlCol="0" anchor="ctr"/>
+          <a:lstStyle/>
+          <a:p>
+            <a:pPr indent="0" marL="0">
+              <a:buNone/>
+            </a:pPr>
+            <a:r>
+              <a:rPr lang="en-US" sz="4000" dirty="0">
+                <a:solidFill>
+                  <a:srgbClr val="11344E"/>
+                </a:solidFill>
+                <a:latin typeface="Times New Roman" pitchFamily="34" charset="0"/>
+                <a:ea typeface="Times New Roman" pitchFamily="34" charset="-122"/>
+                <a:cs typeface="Times New Roman" pitchFamily="34" charset="-120"/>
+              </a:rPr>
+              <a:t>)</a:t>
+            </a:r>
+            <a:endParaRPr lang="en-US" sz="4000" dirty="0"/>
+          </a:p>
+        </p:txBody>
+      </p:sp>
+      <p:sp>
+        <p:nvSpPr>
+          <p:cNvPr id="18" name="Text 15"/>
+          <p:cNvSpPr txBox="1"/>
+          <p:nvPr/>
+        </p:nvSpPr>
+        <p:spPr>
+          <a:xfrm>
+            <a:off x="3931920" y="4279392"/>
+            <a:ext cx="274320" cy="320040"/>
+          </a:xfrm>
+          <a:prstGeom prst="rect">
+            <a:avLst/>
+          </a:prstGeom>
+          <a:noFill/>
+          <a:ln/>
+        </p:spPr>
+        <p:txBody>
+          <a:bodyPr wrap="square" lIns="0" tIns="0" rIns="0" bIns="0" rtlCol="0" anchor="t"/>
+          <a:lstStyle/>
+          <a:p>
+            <a:pPr indent="0" marL="0">
+              <a:buNone/>
+            </a:pPr>
+            <a:r>
+              <a:rPr lang="en-US" sz="1800" dirty="0">
+                <a:solidFill>
+                  <a:srgbClr val="11344E"/>
+                </a:solidFill>
+                <a:latin typeface="Times New Roman" pitchFamily="34" charset="0"/>
+                <a:ea typeface="Times New Roman" pitchFamily="34" charset="-122"/>
+                <a:cs typeface="Times New Roman" pitchFamily="34" charset="-120"/>
+              </a:rPr>
+              <a:t>3</a:t>
+            </a:r>
+            <a:endParaRPr lang="en-US" sz="1800" dirty="0"/>
+          </a:p>
+        </p:txBody>
+      </p:sp>
+      <p:sp>
+        <p:nvSpPr>
+          <p:cNvPr id="19" name="Text 16"/>
+          <p:cNvSpPr txBox="1"/>
+          <p:nvPr/>
+        </p:nvSpPr>
+        <p:spPr>
+          <a:xfrm>
+            <a:off x="4389120" y="4572000"/>
+            <a:ext cx="365760" cy="457200"/>
+          </a:xfrm>
+          <a:prstGeom prst="rect">
+            <a:avLst/>
+          </a:prstGeom>
+          <a:noFill/>
+          <a:ln/>
+        </p:spPr>
+        <p:txBody>
+          <a:bodyPr wrap="square" lIns="0" tIns="0" rIns="0" bIns="0" rtlCol="0" anchor="t"/>
+          <a:lstStyle/>
+          <a:p>
+            <a:pPr algn="ctr" indent="0" marL="0">
+              <a:buNone/>
+            </a:pPr>
+            <a:r>
+              <a:rPr lang="en-US" sz="2200" dirty="0">
+                <a:solidFill>
+                  <a:srgbClr val="11344E"/>
+                </a:solidFill>
+                <a:latin typeface="Times New Roman" pitchFamily="34" charset="0"/>
+                <a:ea typeface="Times New Roman" pitchFamily="34" charset="-122"/>
+                <a:cs typeface="Times New Roman" pitchFamily="34" charset="-120"/>
+              </a:rPr>
+              <a:t>=</a:t>
+            </a:r>
+            <a:endParaRPr lang="en-US" sz="2200" dirty="0"/>
+          </a:p>
+        </p:txBody>
+      </p:sp>
+      <p:sp>
+        <p:nvSpPr>
+          <p:cNvPr id="20" name="Text 17"/>
+          <p:cNvSpPr txBox="1"/>
+          <p:nvPr/>
+        </p:nvSpPr>
+        <p:spPr>
+          <a:xfrm>
+            <a:off x="4983480" y="4297680"/>
+            <a:ext cx="1005840" cy="363220"/>
+          </a:xfrm>
+          <a:prstGeom prst="rect">
+            <a:avLst/>
+          </a:prstGeom>
+          <a:noFill/>
+          <a:ln/>
+        </p:spPr>
+        <p:txBody>
+          <a:bodyPr wrap="square" lIns="0" tIns="0" rIns="0" bIns="0" rtlCol="0" anchor="b"/>
+          <a:lstStyle/>
+          <a:p>
+            <a:pPr algn="ctr" indent="0" marL="0">
+              <a:buNone/>
+            </a:pPr>
+            <a:r>
+              <a:rPr lang="en-US" sz="2200" dirty="0">
+                <a:solidFill>
+                  <a:srgbClr val="1777B4"/>
+                </a:solidFill>
+                <a:latin typeface="Times New Roman" pitchFamily="34" charset="0"/>
+                <a:ea typeface="Times New Roman" pitchFamily="34" charset="-122"/>
+                <a:cs typeface="Times New Roman" pitchFamily="34" charset="-120"/>
+              </a:rPr>
+              <a:t>27x</a:t>
+            </a:r>
+            <a:pPr algn="ctr" indent="0" marL="0">
+              <a:buNone/>
+            </a:pPr>
+            <a:r>
+              <a:rPr lang="en-US" sz="2200" baseline="30000" dirty="0">
+                <a:solidFill>
+                  <a:srgbClr val="1777B4"/>
+                </a:solidFill>
+                <a:latin typeface="Times New Roman" pitchFamily="34" charset="0"/>
+                <a:ea typeface="Times New Roman" pitchFamily="34" charset="-122"/>
+                <a:cs typeface="Times New Roman" pitchFamily="34" charset="-120"/>
+              </a:rPr>
+              <a:t>3</a:t>
+            </a:r>
+            <a:endParaRPr lang="en-US" sz="2200" dirty="0"/>
+          </a:p>
+        </p:txBody>
+      </p:sp>
+      <p:sp>
+        <p:nvSpPr>
+          <p:cNvPr id="21" name="Shape 18"/>
           <p:cNvSpPr/>
           <p:nvPr/>
         </p:nvSpPr>
         <p:spPr>
           <a:xfrm>
-            <a:off x="4983480" y="4688332"/>
-            <a:ext cx="1005840" cy="0"/>
+            <a:off x="5029200" y="4688332"/>
+            <a:ext cx="914400" cy="0"/>
           </a:xfrm>
           <a:prstGeom prst="line">
             <a:avLst/>
@@ -29693,7 +33333,7 @@
           <a:noFill/>
           <a:ln w="12700">
             <a:solidFill>
-              <a:srgbClr val="11344E"/>
+              <a:srgbClr val="1777B4"/>
             </a:solidFill>
             <a:prstDash val="solid"/>
           </a:ln>
@@ -29701,14 +33341,14 @@
       </p:sp>
       <p:sp>
         <p:nvSpPr>
-          <p:cNvPr id="15" name="Text 12"/>
-          <p:cNvSpPr txBox="1"/>
-          <p:nvPr/>
-        </p:nvSpPr>
-        <p:spPr>
-          <a:xfrm>
-            <a:off x="4937760" y="4724908"/>
-            <a:ext cx="1097280" cy="363220"/>
+          <p:cNvPr id="22" name="Text 19"/>
+          <p:cNvSpPr txBox="1"/>
+          <p:nvPr/>
+        </p:nvSpPr>
+        <p:spPr>
+          <a:xfrm>
+            <a:off x="4983480" y="4724908"/>
+            <a:ext cx="1005840" cy="363220"/>
           </a:xfrm>
           <a:prstGeom prst="rect">
             <a:avLst/>
@@ -29726,13 +33366,55 @@
             <a:r>
               <a:rPr lang="en-US" sz="2200" dirty="0">
                 <a:solidFill>
-                  <a:srgbClr val="11344E"/>
+                  <a:srgbClr val="1777B4"/>
                 </a:solidFill>
                 <a:latin typeface="Times New Roman" pitchFamily="34" charset="0"/>
                 <a:ea typeface="Times New Roman" pitchFamily="34" charset="-122"/>
                 <a:cs typeface="Times New Roman" pitchFamily="34" charset="-120"/>
               </a:rPr>
-              <a:t>y⁶ z⁹</a:t>
+              <a:t>y</a:t>
+            </a:r>
+            <a:pPr algn="ctr" indent="0" marL="0">
+              <a:buNone/>
+            </a:pPr>
+            <a:r>
+              <a:rPr lang="en-US" sz="2200" baseline="30000" dirty="0">
+                <a:solidFill>
+                  <a:srgbClr val="1777B4"/>
+                </a:solidFill>
+                <a:latin typeface="Times New Roman" pitchFamily="34" charset="0"/>
+                <a:ea typeface="Times New Roman" pitchFamily="34" charset="-122"/>
+                <a:cs typeface="Times New Roman" pitchFamily="34" charset="-120"/>
+              </a:rPr>
+              <a:t>6</a:t>
+            </a:r>
+            <a:pPr algn="ctr" indent="0" marL="0">
+              <a:buNone/>
+            </a:pPr>
+            <a:r>
+              <a:rPr lang="en-US" sz="2200" dirty="0">
+                <a:solidFill>
+                  <a:srgbClr val="1777B4"/>
+                </a:solidFill>
+                <a:latin typeface="Times New Roman" pitchFamily="34" charset="0"/>
+                <a:ea typeface="Times New Roman" pitchFamily="34" charset="-122"/>
+                <a:cs typeface="Times New Roman" pitchFamily="34" charset="-120"/>
+              </a:rPr>
+              <a:t>z</a:t>
+            </a:r>
+            <a:pPr algn="ctr" indent="0" marL="0">
+              <a:buNone/>
+            </a:pPr>
+            <a:r>
+              <a:rPr lang="en-US" sz="2200" baseline="30000" dirty="0">
+                <a:solidFill>
+                  <a:srgbClr val="1777B4"/>
+                </a:solidFill>
+                <a:latin typeface="Times New Roman" pitchFamily="34" charset="0"/>
+                <a:ea typeface="Times New Roman" pitchFamily="34" charset="-122"/>
+                <a:cs typeface="Times New Roman" pitchFamily="34" charset="-120"/>
+              </a:rPr>
+              <a:t>9</a:t>
             </a:r>
             <a:endParaRPr lang="en-US" sz="2200" dirty="0"/>
           </a:p>
@@ -29740,7 +33422,7 @@
       </p:sp>
       <p:sp>
         <p:nvSpPr>
-          <p:cNvPr id="16" name="Shape 13"/>
+          <p:cNvPr id="23" name="Shape 20"/>
           <p:cNvSpPr/>
           <p:nvPr/>
         </p:nvSpPr>
@@ -29767,7 +33449,7 @@
       </p:sp>
       <p:sp>
         <p:nvSpPr>
-          <p:cNvPr id="17" name="Text 14"/>
+          <p:cNvPr id="24" name="Text 21"/>
           <p:cNvSpPr txBox="1"/>
           <p:nvPr/>
         </p:nvSpPr>
@@ -29806,7 +33488,7 @@
       </p:sp>
       <p:sp>
         <p:nvSpPr>
-          <p:cNvPr id="18" name="Text 15"/>
+          <p:cNvPr id="25" name="Text 22"/>
           <p:cNvSpPr txBox="1"/>
           <p:nvPr/>
         </p:nvSpPr>
@@ -29825,7 +33507,7 @@
           <a:bodyPr wrap="square" lIns="0" tIns="0" rIns="0" bIns="0" rtlCol="0" anchor="t"/>
           <a:lstStyle/>
           <a:p>
-            <a:pPr marL="342900" indent="-342900">
+            <a:pPr algn="l" marL="342900" indent="-342900">
               <a:spcAft>
                 <a:spcPts val="1200"/>
               </a:spcAft>
@@ -29846,7 +33528,7 @@
             <a:endParaRPr lang="en-US" sz="1500" dirty="0"/>
           </a:p>
           <a:p>
-            <a:pPr marL="342900" indent="-342900">
+            <a:pPr algn="l" marL="342900" indent="-342900">
               <a:spcAft>
                 <a:spcPts val="1200"/>
               </a:spcAft>
@@ -29867,7 +33549,7 @@
             <a:endParaRPr lang="en-US" sz="1500" dirty="0"/>
           </a:p>
           <a:p>
-            <a:pPr marL="342900" indent="-342900">
+            <a:pPr algn="l" marL="342900" indent="-342900">
               <a:spcAft>
                 <a:spcPts val="1200"/>
               </a:spcAft>
@@ -29883,12 +33565,9 @@
                 <a:ea typeface="Arial" pitchFamily="34" charset="-122"/>
                 <a:cs typeface="Arial" pitchFamily="34" charset="-120"/>
               </a:rPr>
-              <a:t>Reading x⁻⁴ as a negative coefficient; it means 1/x⁴</a:t>
-            </a:r>
-            <a:endParaRPr lang="en-US" sz="1500" dirty="0"/>
-          </a:p>
-          <a:p>
-            <a:pPr marL="342900" indent="-342900">
+              <a:t>Reading x</a:t>
+            </a:r>
+            <a:pPr algn="l" marL="342900" indent="-342900">
               <a:spcAft>
                 <a:spcPts val="1200"/>
               </a:spcAft>
@@ -29896,6 +33575,24 @@
               <a:buChar char="•"/>
             </a:pPr>
             <a:r>
+              <a:rPr lang="en-US" sz="1500" baseline="30000" dirty="0">
+                <a:solidFill>
+                  <a:srgbClr val="11344E"/>
+                </a:solidFill>
+                <a:latin typeface="Arial" pitchFamily="34" charset="0"/>
+                <a:ea typeface="Arial" pitchFamily="34" charset="-122"/>
+                <a:cs typeface="Arial" pitchFamily="34" charset="-120"/>
+              </a:rPr>
+              <a:t>−4</a:t>
+            </a:r>
+            <a:pPr algn="l" marL="342900" indent="-342900">
+              <a:spcAft>
+                <a:spcPts val="1200"/>
+              </a:spcAft>
+              <a:buSzPct val="100000"/>
+              <a:buChar char="•"/>
+            </a:pPr>
+            <a:r>
               <a:rPr lang="en-US" sz="1500" dirty="0">
                 <a:solidFill>
                   <a:srgbClr val="11344E"/>
@@ -29904,7 +33601,118 @@
                 <a:ea typeface="Arial" pitchFamily="34" charset="-122"/>
                 <a:cs typeface="Arial" pitchFamily="34" charset="-120"/>
               </a:rPr>
-              <a:t>Forgetting to raise the coefficient: 3³ = 27</a:t>
+              <a:t> as −x</a:t>
+            </a:r>
+            <a:pPr algn="l" marL="342900" indent="-342900">
+              <a:spcAft>
+                <a:spcPts val="1200"/>
+              </a:spcAft>
+              <a:buSzPct val="100000"/>
+              <a:buChar char="•"/>
+            </a:pPr>
+            <a:r>
+              <a:rPr lang="en-US" sz="1500" baseline="30000" dirty="0">
+                <a:solidFill>
+                  <a:srgbClr val="11344E"/>
+                </a:solidFill>
+                <a:latin typeface="Arial" pitchFamily="34" charset="0"/>
+                <a:ea typeface="Arial" pitchFamily="34" charset="-122"/>
+                <a:cs typeface="Arial" pitchFamily="34" charset="-120"/>
+              </a:rPr>
+              <a:t>4</a:t>
+            </a:r>
+            <a:pPr algn="l" marL="342900" indent="-342900">
+              <a:spcAft>
+                <a:spcPts val="1200"/>
+              </a:spcAft>
+              <a:buSzPct val="100000"/>
+              <a:buChar char="•"/>
+            </a:pPr>
+            <a:r>
+              <a:rPr lang="en-US" sz="1500" dirty="0">
+                <a:solidFill>
+                  <a:srgbClr val="11344E"/>
+                </a:solidFill>
+                <a:latin typeface="Arial" pitchFamily="34" charset="0"/>
+                <a:ea typeface="Arial" pitchFamily="34" charset="-122"/>
+                <a:cs typeface="Arial" pitchFamily="34" charset="-120"/>
+              </a:rPr>
+              <a:t>; it means 1/x</a:t>
+            </a:r>
+            <a:pPr algn="l" marL="342900" indent="-342900">
+              <a:spcAft>
+                <a:spcPts val="1200"/>
+              </a:spcAft>
+              <a:buSzPct val="100000"/>
+              <a:buChar char="•"/>
+            </a:pPr>
+            <a:r>
+              <a:rPr lang="en-US" sz="1500" baseline="30000" dirty="0">
+                <a:solidFill>
+                  <a:srgbClr val="11344E"/>
+                </a:solidFill>
+                <a:latin typeface="Arial" pitchFamily="34" charset="0"/>
+                <a:ea typeface="Arial" pitchFamily="34" charset="-122"/>
+                <a:cs typeface="Arial" pitchFamily="34" charset="-120"/>
+              </a:rPr>
+              <a:t>4</a:t>
+            </a:r>
+            <a:endParaRPr lang="en-US" sz="1500" dirty="0"/>
+          </a:p>
+          <a:p>
+            <a:pPr algn="l" marL="342900" indent="-342900">
+              <a:spcAft>
+                <a:spcPts val="1200"/>
+              </a:spcAft>
+              <a:buSzPct val="100000"/>
+              <a:buChar char="•"/>
+            </a:pPr>
+            <a:r>
+              <a:rPr lang="en-US" sz="1500" dirty="0">
+                <a:solidFill>
+                  <a:srgbClr val="11344E"/>
+                </a:solidFill>
+                <a:latin typeface="Arial" pitchFamily="34" charset="0"/>
+                <a:ea typeface="Arial" pitchFamily="34" charset="-122"/>
+                <a:cs typeface="Arial" pitchFamily="34" charset="-120"/>
+              </a:rPr>
+              <a:t>Forgetting to raise the coefficient: 3</a:t>
+            </a:r>
+            <a:pPr algn="l" marL="342900" indent="-342900">
+              <a:spcAft>
+                <a:spcPts val="1200"/>
+              </a:spcAft>
+              <a:buSzPct val="100000"/>
+              <a:buChar char="•"/>
+            </a:pPr>
+            <a:r>
+              <a:rPr lang="en-US" sz="1500" baseline="30000" dirty="0">
+                <a:solidFill>
+                  <a:srgbClr val="11344E"/>
+                </a:solidFill>
+                <a:latin typeface="Arial" pitchFamily="34" charset="0"/>
+                <a:ea typeface="Arial" pitchFamily="34" charset="-122"/>
+                <a:cs typeface="Arial" pitchFamily="34" charset="-120"/>
+              </a:rPr>
+              <a:t>3</a:t>
+            </a:r>
+            <a:pPr algn="l" marL="342900" indent="-342900">
+              <a:spcAft>
+                <a:spcPts val="1200"/>
+              </a:spcAft>
+              <a:buSzPct val="100000"/>
+              <a:buChar char="•"/>
+            </a:pPr>
+            <a:r>
+              <a:rPr lang="en-US" sz="1500" dirty="0">
+                <a:solidFill>
+                  <a:srgbClr val="11344E"/>
+                </a:solidFill>
+                <a:latin typeface="Arial" pitchFamily="34" charset="0"/>
+                <a:ea typeface="Arial" pitchFamily="34" charset="-122"/>
+                <a:cs typeface="Arial" pitchFamily="34" charset="-120"/>
+              </a:rPr>
+              <a:t> = 27</a:t>
             </a:r>
             <a:endParaRPr lang="en-US" sz="1500" dirty="0"/>
           </a:p>

--- a/slides/Math130Test1Review_2026-09-23.pptx
+++ b/slides/Math130Test1Review_2026-09-23.pptx
@@ -876,7 +876,7 @@
           <a:p>
             <a:r>
               <a:rPr lang="en-US" dirty="0"/>
-              <a:t>For problem 2, A lies entirely inside B, so the union is simply B. For problem 7, the sets share no elements, so the intersection is the empty set. List each element of a union once.</a:t>
+              <a:t>For problem 2, B and C do not overlap, so the union is written as two intervals joined by the union symbol. For problem 3, C extends A to the left, so the union runs from negative infinity to 3. For problem 7, the sets share no elements, so the intersection is the empty set.</a:t>
             </a:r>
             <a:endParaRPr lang="en-US" dirty="0"/>
           </a:p>
@@ -964,7 +964,7 @@
           <a:p>
             <a:r>
               <a:rPr lang="en-US" dirty="0"/>
-              <a:t>Allow about 8 minutes. Require students to write the restrictions before clearing denominators in problems 1 and 4. Problem 2 should be rewritten with zero on one side before factoring.</a:t>
+              <a:t>Allow about 8 minutes. Require students to write the restrictions before clearing denominators in problems 1 and 4. In problem 1, factor x² − 1 to find both restrictions and the LCD. Problem 2 should be rewritten with zero on one side before factoring.</a:t>
             </a:r>
             <a:endParaRPr lang="en-US" dirty="0"/>
           </a:p>
@@ -1052,7 +1052,7 @@
           <a:p>
             <a:r>
               <a:rPr lang="en-US" dirty="0"/>
-              <a:t>In problem 1 the only candidate is excluded, so the equation has no solution. Students must write both the restriction and the conclusion. In problem 2 the trinomial is a perfect square, so there is exactly one solution.</a:t>
+              <a:t>In problem 1, factoring x² − 1 = (x − 1)(x + 1) gives both restrictions and the LCD. Clearing denominators produces two candidates; x = 1 is excluded, so only x = −3 is a solution. Check it: 2/(−4) + 1 = 1/2 and 4/8 = 1/2. In problem 2, both factors give a solution.</a:t>
             </a:r>
             <a:endParaRPr lang="en-US" dirty="0"/>
           </a:p>
@@ -6900,8 +6900,8 @@
         </p:nvSpPr>
         <p:spPr>
           <a:xfrm>
-            <a:off x="2813538" y="1874520"/>
-            <a:ext cx="3228535" cy="0"/>
+            <a:off x="2454812" y="1874520"/>
+            <a:ext cx="2511083" cy="0"/>
           </a:xfrm>
           <a:prstGeom prst="line">
             <a:avLst/>
@@ -6923,7 +6923,32 @@
         </p:nvSpPr>
         <p:spPr>
           <a:xfrm>
-            <a:off x="2731242" y="1792224"/>
+            <a:off x="2372516" y="1792224"/>
+            <a:ext cx="164592" cy="164592"/>
+          </a:xfrm>
+          <a:prstGeom prst="ellipse">
+            <a:avLst/>
+          </a:prstGeom>
+          <a:solidFill>
+            <a:srgbClr val="1777B4"/>
+          </a:solidFill>
+          <a:ln w="25400">
+            <a:solidFill>
+              <a:srgbClr val="1777B4"/>
+            </a:solidFill>
+            <a:prstDash val="solid"/>
+          </a:ln>
+        </p:spPr>
+      </p:sp>
+      <p:sp>
+        <p:nvSpPr>
+          <p:cNvPr id="40" name="Shape 37"/>
+          <p:cNvSpPr/>
+          <p:nvPr/>
+        </p:nvSpPr>
+        <p:spPr>
+          <a:xfrm>
+            <a:off x="4883599" y="1792224"/>
             <a:ext cx="164592" cy="164592"/>
           </a:xfrm>
           <a:prstGeom prst="ellipse">
@@ -6942,13 +6967,2028 @@
       </p:sp>
       <p:sp>
         <p:nvSpPr>
-          <p:cNvPr id="40" name="Shape 37"/>
+          <p:cNvPr id="41" name="Text 38"/>
+          <p:cNvSpPr txBox="1"/>
+          <p:nvPr/>
+        </p:nvSpPr>
+        <p:spPr>
+          <a:xfrm>
+            <a:off x="548640" y="2039112"/>
+            <a:ext cx="1097280" cy="274320"/>
+          </a:xfrm>
+          <a:prstGeom prst="rect">
+            <a:avLst/>
+          </a:prstGeom>
+          <a:noFill/>
+          <a:ln/>
+        </p:spPr>
+        <p:txBody>
+          <a:bodyPr wrap="square" lIns="0" tIns="0" rIns="0" bIns="0" rtlCol="0" anchor="t"/>
+          <a:lstStyle/>
+          <a:p>
+            <a:pPr indent="0" marL="0">
+              <a:buNone/>
+            </a:pPr>
+            <a:r>
+              <a:rPr lang="en-US" sz="1300" dirty="0">
+                <a:solidFill>
+                  <a:srgbClr val="687783"/>
+                </a:solidFill>
+                <a:latin typeface="Times New Roman" pitchFamily="34" charset="0"/>
+                <a:ea typeface="Times New Roman" pitchFamily="34" charset="-122"/>
+                <a:cs typeface="Times New Roman" pitchFamily="34" charset="-120"/>
+              </a:rPr>
+              <a:t>−4 ≤ x &lt; 3</a:t>
+            </a:r>
+            <a:endParaRPr lang="en-US" sz="1300" dirty="0"/>
+          </a:p>
+        </p:txBody>
+      </p:sp>
+      <p:sp>
+        <p:nvSpPr>
+          <p:cNvPr id="42" name="Shape 39"/>
           <p:cNvSpPr/>
           <p:nvPr/>
         </p:nvSpPr>
         <p:spPr>
           <a:xfrm>
-            <a:off x="5959778" y="1792224"/>
+            <a:off x="1600200" y="2788920"/>
+            <a:ext cx="4937760" cy="91"/>
+          </a:xfrm>
+          <a:prstGeom prst="line">
+            <a:avLst/>
+          </a:prstGeom>
+          <a:noFill/>
+          <a:ln w="15875">
+            <a:solidFill>
+              <a:srgbClr val="687783"/>
+            </a:solidFill>
+            <a:prstDash val="solid"/>
+            <a:headEnd type="triangle"/>
+            <a:tailEnd type="triangle"/>
+          </a:ln>
+        </p:spPr>
+      </p:sp>
+      <p:sp>
+        <p:nvSpPr>
+          <p:cNvPr id="43" name="Shape 40"/>
+          <p:cNvSpPr/>
+          <p:nvPr/>
+        </p:nvSpPr>
+        <p:spPr>
+          <a:xfrm>
+            <a:off x="1737360" y="2734056"/>
+            <a:ext cx="91" cy="109728"/>
+          </a:xfrm>
+          <a:prstGeom prst="line">
+            <a:avLst/>
+          </a:prstGeom>
+          <a:noFill/>
+          <a:ln w="12700">
+            <a:solidFill>
+              <a:srgbClr val="687783"/>
+            </a:solidFill>
+            <a:prstDash val="solid"/>
+          </a:ln>
+        </p:spPr>
+      </p:sp>
+      <p:sp>
+        <p:nvSpPr>
+          <p:cNvPr id="44" name="Text 41"/>
+          <p:cNvSpPr txBox="1"/>
+          <p:nvPr/>
+        </p:nvSpPr>
+        <p:spPr>
+          <a:xfrm>
+            <a:off x="1554480" y="2880360"/>
+            <a:ext cx="365760" cy="201168"/>
+          </a:xfrm>
+          <a:prstGeom prst="rect">
+            <a:avLst/>
+          </a:prstGeom>
+          <a:noFill/>
+          <a:ln/>
+        </p:spPr>
+        <p:txBody>
+          <a:bodyPr wrap="square" lIns="0" tIns="0" rIns="0" bIns="0" rtlCol="0" anchor="t"/>
+          <a:lstStyle/>
+          <a:p>
+            <a:pPr algn="ctr" indent="0" marL="0">
+              <a:buNone/>
+            </a:pPr>
+            <a:r>
+              <a:rPr lang="en-US" sz="900" dirty="0">
+                <a:solidFill>
+                  <a:srgbClr val="687783"/>
+                </a:solidFill>
+                <a:latin typeface="Arial" pitchFamily="34" charset="0"/>
+                <a:ea typeface="Arial" pitchFamily="34" charset="-122"/>
+                <a:cs typeface="Arial" pitchFamily="34" charset="-120"/>
+              </a:rPr>
+              <a:t>−6</a:t>
+            </a:r>
+            <a:endParaRPr lang="en-US" sz="900" dirty="0"/>
+          </a:p>
+        </p:txBody>
+      </p:sp>
+      <p:sp>
+        <p:nvSpPr>
+          <p:cNvPr id="45" name="Shape 42"/>
+          <p:cNvSpPr/>
+          <p:nvPr/>
+        </p:nvSpPr>
+        <p:spPr>
+          <a:xfrm>
+            <a:off x="2096086" y="2734056"/>
+            <a:ext cx="91" cy="109728"/>
+          </a:xfrm>
+          <a:prstGeom prst="line">
+            <a:avLst/>
+          </a:prstGeom>
+          <a:noFill/>
+          <a:ln w="12700">
+            <a:solidFill>
+              <a:srgbClr val="687783"/>
+            </a:solidFill>
+            <a:prstDash val="solid"/>
+          </a:ln>
+        </p:spPr>
+      </p:sp>
+      <p:sp>
+        <p:nvSpPr>
+          <p:cNvPr id="46" name="Text 43"/>
+          <p:cNvSpPr txBox="1"/>
+          <p:nvPr/>
+        </p:nvSpPr>
+        <p:spPr>
+          <a:xfrm>
+            <a:off x="1913206" y="2880360"/>
+            <a:ext cx="365760" cy="201168"/>
+          </a:xfrm>
+          <a:prstGeom prst="rect">
+            <a:avLst/>
+          </a:prstGeom>
+          <a:noFill/>
+          <a:ln/>
+        </p:spPr>
+        <p:txBody>
+          <a:bodyPr wrap="square" lIns="0" tIns="0" rIns="0" bIns="0" rtlCol="0" anchor="t"/>
+          <a:lstStyle/>
+          <a:p>
+            <a:pPr algn="ctr" indent="0" marL="0">
+              <a:buNone/>
+            </a:pPr>
+            <a:r>
+              <a:rPr lang="en-US" sz="900" dirty="0">
+                <a:solidFill>
+                  <a:srgbClr val="687783"/>
+                </a:solidFill>
+                <a:latin typeface="Arial" pitchFamily="34" charset="0"/>
+                <a:ea typeface="Arial" pitchFamily="34" charset="-122"/>
+                <a:cs typeface="Arial" pitchFamily="34" charset="-120"/>
+              </a:rPr>
+              <a:t>−5</a:t>
+            </a:r>
+            <a:endParaRPr lang="en-US" sz="900" dirty="0"/>
+          </a:p>
+        </p:txBody>
+      </p:sp>
+      <p:sp>
+        <p:nvSpPr>
+          <p:cNvPr id="47" name="Shape 44"/>
+          <p:cNvSpPr/>
+          <p:nvPr/>
+        </p:nvSpPr>
+        <p:spPr>
+          <a:xfrm>
+            <a:off x="2454812" y="2734056"/>
+            <a:ext cx="91" cy="109728"/>
+          </a:xfrm>
+          <a:prstGeom prst="line">
+            <a:avLst/>
+          </a:prstGeom>
+          <a:noFill/>
+          <a:ln w="12700">
+            <a:solidFill>
+              <a:srgbClr val="687783"/>
+            </a:solidFill>
+            <a:prstDash val="solid"/>
+          </a:ln>
+        </p:spPr>
+      </p:sp>
+      <p:sp>
+        <p:nvSpPr>
+          <p:cNvPr id="48" name="Text 45"/>
+          <p:cNvSpPr txBox="1"/>
+          <p:nvPr/>
+        </p:nvSpPr>
+        <p:spPr>
+          <a:xfrm>
+            <a:off x="2271932" y="2880360"/>
+            <a:ext cx="365760" cy="201168"/>
+          </a:xfrm>
+          <a:prstGeom prst="rect">
+            <a:avLst/>
+          </a:prstGeom>
+          <a:noFill/>
+          <a:ln/>
+        </p:spPr>
+        <p:txBody>
+          <a:bodyPr wrap="square" lIns="0" tIns="0" rIns="0" bIns="0" rtlCol="0" anchor="t"/>
+          <a:lstStyle/>
+          <a:p>
+            <a:pPr algn="ctr" indent="0" marL="0">
+              <a:buNone/>
+            </a:pPr>
+            <a:r>
+              <a:rPr lang="en-US" sz="900" dirty="0">
+                <a:solidFill>
+                  <a:srgbClr val="687783"/>
+                </a:solidFill>
+                <a:latin typeface="Arial" pitchFamily="34" charset="0"/>
+                <a:ea typeface="Arial" pitchFamily="34" charset="-122"/>
+                <a:cs typeface="Arial" pitchFamily="34" charset="-120"/>
+              </a:rPr>
+              <a:t>−4</a:t>
+            </a:r>
+            <a:endParaRPr lang="en-US" sz="900" dirty="0"/>
+          </a:p>
+        </p:txBody>
+      </p:sp>
+      <p:sp>
+        <p:nvSpPr>
+          <p:cNvPr id="49" name="Shape 46"/>
+          <p:cNvSpPr/>
+          <p:nvPr/>
+        </p:nvSpPr>
+        <p:spPr>
+          <a:xfrm>
+            <a:off x="2813538" y="2734056"/>
+            <a:ext cx="91" cy="109728"/>
+          </a:xfrm>
+          <a:prstGeom prst="line">
+            <a:avLst/>
+          </a:prstGeom>
+          <a:noFill/>
+          <a:ln w="12700">
+            <a:solidFill>
+              <a:srgbClr val="687783"/>
+            </a:solidFill>
+            <a:prstDash val="solid"/>
+          </a:ln>
+        </p:spPr>
+      </p:sp>
+      <p:sp>
+        <p:nvSpPr>
+          <p:cNvPr id="50" name="Text 47"/>
+          <p:cNvSpPr txBox="1"/>
+          <p:nvPr/>
+        </p:nvSpPr>
+        <p:spPr>
+          <a:xfrm>
+            <a:off x="2630658" y="2880360"/>
+            <a:ext cx="365760" cy="201168"/>
+          </a:xfrm>
+          <a:prstGeom prst="rect">
+            <a:avLst/>
+          </a:prstGeom>
+          <a:noFill/>
+          <a:ln/>
+        </p:spPr>
+        <p:txBody>
+          <a:bodyPr wrap="square" lIns="0" tIns="0" rIns="0" bIns="0" rtlCol="0" anchor="t"/>
+          <a:lstStyle/>
+          <a:p>
+            <a:pPr algn="ctr" indent="0" marL="0">
+              <a:buNone/>
+            </a:pPr>
+            <a:r>
+              <a:rPr lang="en-US" sz="900" dirty="0">
+                <a:solidFill>
+                  <a:srgbClr val="687783"/>
+                </a:solidFill>
+                <a:latin typeface="Arial" pitchFamily="34" charset="0"/>
+                <a:ea typeface="Arial" pitchFamily="34" charset="-122"/>
+                <a:cs typeface="Arial" pitchFamily="34" charset="-120"/>
+              </a:rPr>
+              <a:t>−3</a:t>
+            </a:r>
+            <a:endParaRPr lang="en-US" sz="900" dirty="0"/>
+          </a:p>
+        </p:txBody>
+      </p:sp>
+      <p:sp>
+        <p:nvSpPr>
+          <p:cNvPr id="51" name="Shape 48"/>
+          <p:cNvSpPr/>
+          <p:nvPr/>
+        </p:nvSpPr>
+        <p:spPr>
+          <a:xfrm>
+            <a:off x="3172265" y="2734056"/>
+            <a:ext cx="91" cy="109728"/>
+          </a:xfrm>
+          <a:prstGeom prst="line">
+            <a:avLst/>
+          </a:prstGeom>
+          <a:noFill/>
+          <a:ln w="12700">
+            <a:solidFill>
+              <a:srgbClr val="687783"/>
+            </a:solidFill>
+            <a:prstDash val="solid"/>
+          </a:ln>
+        </p:spPr>
+      </p:sp>
+      <p:sp>
+        <p:nvSpPr>
+          <p:cNvPr id="52" name="Text 49"/>
+          <p:cNvSpPr txBox="1"/>
+          <p:nvPr/>
+        </p:nvSpPr>
+        <p:spPr>
+          <a:xfrm>
+            <a:off x="2989385" y="2880360"/>
+            <a:ext cx="365760" cy="201168"/>
+          </a:xfrm>
+          <a:prstGeom prst="rect">
+            <a:avLst/>
+          </a:prstGeom>
+          <a:noFill/>
+          <a:ln/>
+        </p:spPr>
+        <p:txBody>
+          <a:bodyPr wrap="square" lIns="0" tIns="0" rIns="0" bIns="0" rtlCol="0" anchor="t"/>
+          <a:lstStyle/>
+          <a:p>
+            <a:pPr algn="ctr" indent="0" marL="0">
+              <a:buNone/>
+            </a:pPr>
+            <a:r>
+              <a:rPr lang="en-US" sz="900" dirty="0">
+                <a:solidFill>
+                  <a:srgbClr val="687783"/>
+                </a:solidFill>
+                <a:latin typeface="Arial" pitchFamily="34" charset="0"/>
+                <a:ea typeface="Arial" pitchFamily="34" charset="-122"/>
+                <a:cs typeface="Arial" pitchFamily="34" charset="-120"/>
+              </a:rPr>
+              <a:t>−2</a:t>
+            </a:r>
+            <a:endParaRPr lang="en-US" sz="900" dirty="0"/>
+          </a:p>
+        </p:txBody>
+      </p:sp>
+      <p:sp>
+        <p:nvSpPr>
+          <p:cNvPr id="53" name="Shape 50"/>
+          <p:cNvSpPr/>
+          <p:nvPr/>
+        </p:nvSpPr>
+        <p:spPr>
+          <a:xfrm>
+            <a:off x="3530991" y="2734056"/>
+            <a:ext cx="91" cy="109728"/>
+          </a:xfrm>
+          <a:prstGeom prst="line">
+            <a:avLst/>
+          </a:prstGeom>
+          <a:noFill/>
+          <a:ln w="12700">
+            <a:solidFill>
+              <a:srgbClr val="687783"/>
+            </a:solidFill>
+            <a:prstDash val="solid"/>
+          </a:ln>
+        </p:spPr>
+      </p:sp>
+      <p:sp>
+        <p:nvSpPr>
+          <p:cNvPr id="54" name="Text 51"/>
+          <p:cNvSpPr txBox="1"/>
+          <p:nvPr/>
+        </p:nvSpPr>
+        <p:spPr>
+          <a:xfrm>
+            <a:off x="3348111" y="2880360"/>
+            <a:ext cx="365760" cy="201168"/>
+          </a:xfrm>
+          <a:prstGeom prst="rect">
+            <a:avLst/>
+          </a:prstGeom>
+          <a:noFill/>
+          <a:ln/>
+        </p:spPr>
+        <p:txBody>
+          <a:bodyPr wrap="square" lIns="0" tIns="0" rIns="0" bIns="0" rtlCol="0" anchor="t"/>
+          <a:lstStyle/>
+          <a:p>
+            <a:pPr algn="ctr" indent="0" marL="0">
+              <a:buNone/>
+            </a:pPr>
+            <a:r>
+              <a:rPr lang="en-US" sz="900" dirty="0">
+                <a:solidFill>
+                  <a:srgbClr val="687783"/>
+                </a:solidFill>
+                <a:latin typeface="Arial" pitchFamily="34" charset="0"/>
+                <a:ea typeface="Arial" pitchFamily="34" charset="-122"/>
+                <a:cs typeface="Arial" pitchFamily="34" charset="-120"/>
+              </a:rPr>
+              <a:t>−1</a:t>
+            </a:r>
+            <a:endParaRPr lang="en-US" sz="900" dirty="0"/>
+          </a:p>
+        </p:txBody>
+      </p:sp>
+      <p:sp>
+        <p:nvSpPr>
+          <p:cNvPr id="55" name="Shape 52"/>
+          <p:cNvSpPr/>
+          <p:nvPr/>
+        </p:nvSpPr>
+        <p:spPr>
+          <a:xfrm>
+            <a:off x="3889717" y="2734056"/>
+            <a:ext cx="91" cy="109728"/>
+          </a:xfrm>
+          <a:prstGeom prst="line">
+            <a:avLst/>
+          </a:prstGeom>
+          <a:noFill/>
+          <a:ln w="12700">
+            <a:solidFill>
+              <a:srgbClr val="687783"/>
+            </a:solidFill>
+            <a:prstDash val="solid"/>
+          </a:ln>
+        </p:spPr>
+      </p:sp>
+      <p:sp>
+        <p:nvSpPr>
+          <p:cNvPr id="56" name="Text 53"/>
+          <p:cNvSpPr txBox="1"/>
+          <p:nvPr/>
+        </p:nvSpPr>
+        <p:spPr>
+          <a:xfrm>
+            <a:off x="3706837" y="2880360"/>
+            <a:ext cx="365760" cy="201168"/>
+          </a:xfrm>
+          <a:prstGeom prst="rect">
+            <a:avLst/>
+          </a:prstGeom>
+          <a:noFill/>
+          <a:ln/>
+        </p:spPr>
+        <p:txBody>
+          <a:bodyPr wrap="square" lIns="0" tIns="0" rIns="0" bIns="0" rtlCol="0" anchor="t"/>
+          <a:lstStyle/>
+          <a:p>
+            <a:pPr algn="ctr" indent="0" marL="0">
+              <a:buNone/>
+            </a:pPr>
+            <a:r>
+              <a:rPr lang="en-US" sz="900" dirty="0">
+                <a:solidFill>
+                  <a:srgbClr val="687783"/>
+                </a:solidFill>
+                <a:latin typeface="Arial" pitchFamily="34" charset="0"/>
+                <a:ea typeface="Arial" pitchFamily="34" charset="-122"/>
+                <a:cs typeface="Arial" pitchFamily="34" charset="-120"/>
+              </a:rPr>
+              <a:t>0</a:t>
+            </a:r>
+            <a:endParaRPr lang="en-US" sz="900" dirty="0"/>
+          </a:p>
+        </p:txBody>
+      </p:sp>
+      <p:sp>
+        <p:nvSpPr>
+          <p:cNvPr id="57" name="Shape 54"/>
+          <p:cNvSpPr/>
+          <p:nvPr/>
+        </p:nvSpPr>
+        <p:spPr>
+          <a:xfrm>
+            <a:off x="4248443" y="2734056"/>
+            <a:ext cx="91" cy="109728"/>
+          </a:xfrm>
+          <a:prstGeom prst="line">
+            <a:avLst/>
+          </a:prstGeom>
+          <a:noFill/>
+          <a:ln w="12700">
+            <a:solidFill>
+              <a:srgbClr val="687783"/>
+            </a:solidFill>
+            <a:prstDash val="solid"/>
+          </a:ln>
+        </p:spPr>
+      </p:sp>
+      <p:sp>
+        <p:nvSpPr>
+          <p:cNvPr id="58" name="Text 55"/>
+          <p:cNvSpPr txBox="1"/>
+          <p:nvPr/>
+        </p:nvSpPr>
+        <p:spPr>
+          <a:xfrm>
+            <a:off x="4065563" y="2880360"/>
+            <a:ext cx="365760" cy="201168"/>
+          </a:xfrm>
+          <a:prstGeom prst="rect">
+            <a:avLst/>
+          </a:prstGeom>
+          <a:noFill/>
+          <a:ln/>
+        </p:spPr>
+        <p:txBody>
+          <a:bodyPr wrap="square" lIns="0" tIns="0" rIns="0" bIns="0" rtlCol="0" anchor="t"/>
+          <a:lstStyle/>
+          <a:p>
+            <a:pPr algn="ctr" indent="0" marL="0">
+              <a:buNone/>
+            </a:pPr>
+            <a:r>
+              <a:rPr lang="en-US" sz="900" dirty="0">
+                <a:solidFill>
+                  <a:srgbClr val="687783"/>
+                </a:solidFill>
+                <a:latin typeface="Arial" pitchFamily="34" charset="0"/>
+                <a:ea typeface="Arial" pitchFamily="34" charset="-122"/>
+                <a:cs typeface="Arial" pitchFamily="34" charset="-120"/>
+              </a:rPr>
+              <a:t>1</a:t>
+            </a:r>
+            <a:endParaRPr lang="en-US" sz="900" dirty="0"/>
+          </a:p>
+        </p:txBody>
+      </p:sp>
+      <p:sp>
+        <p:nvSpPr>
+          <p:cNvPr id="59" name="Shape 56"/>
+          <p:cNvSpPr/>
+          <p:nvPr/>
+        </p:nvSpPr>
+        <p:spPr>
+          <a:xfrm>
+            <a:off x="4607169" y="2734056"/>
+            <a:ext cx="91" cy="109728"/>
+          </a:xfrm>
+          <a:prstGeom prst="line">
+            <a:avLst/>
+          </a:prstGeom>
+          <a:noFill/>
+          <a:ln w="12700">
+            <a:solidFill>
+              <a:srgbClr val="687783"/>
+            </a:solidFill>
+            <a:prstDash val="solid"/>
+          </a:ln>
+        </p:spPr>
+      </p:sp>
+      <p:sp>
+        <p:nvSpPr>
+          <p:cNvPr id="60" name="Text 57"/>
+          <p:cNvSpPr txBox="1"/>
+          <p:nvPr/>
+        </p:nvSpPr>
+        <p:spPr>
+          <a:xfrm>
+            <a:off x="4424289" y="2880360"/>
+            <a:ext cx="365760" cy="201168"/>
+          </a:xfrm>
+          <a:prstGeom prst="rect">
+            <a:avLst/>
+          </a:prstGeom>
+          <a:noFill/>
+          <a:ln/>
+        </p:spPr>
+        <p:txBody>
+          <a:bodyPr wrap="square" lIns="0" tIns="0" rIns="0" bIns="0" rtlCol="0" anchor="t"/>
+          <a:lstStyle/>
+          <a:p>
+            <a:pPr algn="ctr" indent="0" marL="0">
+              <a:buNone/>
+            </a:pPr>
+            <a:r>
+              <a:rPr lang="en-US" sz="900" dirty="0">
+                <a:solidFill>
+                  <a:srgbClr val="687783"/>
+                </a:solidFill>
+                <a:latin typeface="Arial" pitchFamily="34" charset="0"/>
+                <a:ea typeface="Arial" pitchFamily="34" charset="-122"/>
+                <a:cs typeface="Arial" pitchFamily="34" charset="-120"/>
+              </a:rPr>
+              <a:t>2</a:t>
+            </a:r>
+            <a:endParaRPr lang="en-US" sz="900" dirty="0"/>
+          </a:p>
+        </p:txBody>
+      </p:sp>
+      <p:sp>
+        <p:nvSpPr>
+          <p:cNvPr id="61" name="Shape 58"/>
+          <p:cNvSpPr/>
+          <p:nvPr/>
+        </p:nvSpPr>
+        <p:spPr>
+          <a:xfrm>
+            <a:off x="4965895" y="2734056"/>
+            <a:ext cx="91" cy="109728"/>
+          </a:xfrm>
+          <a:prstGeom prst="line">
+            <a:avLst/>
+          </a:prstGeom>
+          <a:noFill/>
+          <a:ln w="12700">
+            <a:solidFill>
+              <a:srgbClr val="687783"/>
+            </a:solidFill>
+            <a:prstDash val="solid"/>
+          </a:ln>
+        </p:spPr>
+      </p:sp>
+      <p:sp>
+        <p:nvSpPr>
+          <p:cNvPr id="62" name="Text 59"/>
+          <p:cNvSpPr txBox="1"/>
+          <p:nvPr/>
+        </p:nvSpPr>
+        <p:spPr>
+          <a:xfrm>
+            <a:off x="4783015" y="2880360"/>
+            <a:ext cx="365760" cy="201168"/>
+          </a:xfrm>
+          <a:prstGeom prst="rect">
+            <a:avLst/>
+          </a:prstGeom>
+          <a:noFill/>
+          <a:ln/>
+        </p:spPr>
+        <p:txBody>
+          <a:bodyPr wrap="square" lIns="0" tIns="0" rIns="0" bIns="0" rtlCol="0" anchor="t"/>
+          <a:lstStyle/>
+          <a:p>
+            <a:pPr algn="ctr" indent="0" marL="0">
+              <a:buNone/>
+            </a:pPr>
+            <a:r>
+              <a:rPr lang="en-US" sz="900" dirty="0">
+                <a:solidFill>
+                  <a:srgbClr val="687783"/>
+                </a:solidFill>
+                <a:latin typeface="Arial" pitchFamily="34" charset="0"/>
+                <a:ea typeface="Arial" pitchFamily="34" charset="-122"/>
+                <a:cs typeface="Arial" pitchFamily="34" charset="-120"/>
+              </a:rPr>
+              <a:t>3</a:t>
+            </a:r>
+            <a:endParaRPr lang="en-US" sz="900" dirty="0"/>
+          </a:p>
+        </p:txBody>
+      </p:sp>
+      <p:sp>
+        <p:nvSpPr>
+          <p:cNvPr id="63" name="Shape 60"/>
+          <p:cNvSpPr/>
+          <p:nvPr/>
+        </p:nvSpPr>
+        <p:spPr>
+          <a:xfrm>
+            <a:off x="5324622" y="2734056"/>
+            <a:ext cx="91" cy="109728"/>
+          </a:xfrm>
+          <a:prstGeom prst="line">
+            <a:avLst/>
+          </a:prstGeom>
+          <a:noFill/>
+          <a:ln w="12700">
+            <a:solidFill>
+              <a:srgbClr val="687783"/>
+            </a:solidFill>
+            <a:prstDash val="solid"/>
+          </a:ln>
+        </p:spPr>
+      </p:sp>
+      <p:sp>
+        <p:nvSpPr>
+          <p:cNvPr id="64" name="Text 61"/>
+          <p:cNvSpPr txBox="1"/>
+          <p:nvPr/>
+        </p:nvSpPr>
+        <p:spPr>
+          <a:xfrm>
+            <a:off x="5141742" y="2880360"/>
+            <a:ext cx="365760" cy="201168"/>
+          </a:xfrm>
+          <a:prstGeom prst="rect">
+            <a:avLst/>
+          </a:prstGeom>
+          <a:noFill/>
+          <a:ln/>
+        </p:spPr>
+        <p:txBody>
+          <a:bodyPr wrap="square" lIns="0" tIns="0" rIns="0" bIns="0" rtlCol="0" anchor="t"/>
+          <a:lstStyle/>
+          <a:p>
+            <a:pPr algn="ctr" indent="0" marL="0">
+              <a:buNone/>
+            </a:pPr>
+            <a:r>
+              <a:rPr lang="en-US" sz="900" dirty="0">
+                <a:solidFill>
+                  <a:srgbClr val="687783"/>
+                </a:solidFill>
+                <a:latin typeface="Arial" pitchFamily="34" charset="0"/>
+                <a:ea typeface="Arial" pitchFamily="34" charset="-122"/>
+                <a:cs typeface="Arial" pitchFamily="34" charset="-120"/>
+              </a:rPr>
+              <a:t>4</a:t>
+            </a:r>
+            <a:endParaRPr lang="en-US" sz="900" dirty="0"/>
+          </a:p>
+        </p:txBody>
+      </p:sp>
+      <p:sp>
+        <p:nvSpPr>
+          <p:cNvPr id="65" name="Shape 62"/>
+          <p:cNvSpPr/>
+          <p:nvPr/>
+        </p:nvSpPr>
+        <p:spPr>
+          <a:xfrm>
+            <a:off x="5683348" y="2734056"/>
+            <a:ext cx="91" cy="109728"/>
+          </a:xfrm>
+          <a:prstGeom prst="line">
+            <a:avLst/>
+          </a:prstGeom>
+          <a:noFill/>
+          <a:ln w="12700">
+            <a:solidFill>
+              <a:srgbClr val="687783"/>
+            </a:solidFill>
+            <a:prstDash val="solid"/>
+          </a:ln>
+        </p:spPr>
+      </p:sp>
+      <p:sp>
+        <p:nvSpPr>
+          <p:cNvPr id="66" name="Text 63"/>
+          <p:cNvSpPr txBox="1"/>
+          <p:nvPr/>
+        </p:nvSpPr>
+        <p:spPr>
+          <a:xfrm>
+            <a:off x="5500468" y="2880360"/>
+            <a:ext cx="365760" cy="201168"/>
+          </a:xfrm>
+          <a:prstGeom prst="rect">
+            <a:avLst/>
+          </a:prstGeom>
+          <a:noFill/>
+          <a:ln/>
+        </p:spPr>
+        <p:txBody>
+          <a:bodyPr wrap="square" lIns="0" tIns="0" rIns="0" bIns="0" rtlCol="0" anchor="t"/>
+          <a:lstStyle/>
+          <a:p>
+            <a:pPr algn="ctr" indent="0" marL="0">
+              <a:buNone/>
+            </a:pPr>
+            <a:r>
+              <a:rPr lang="en-US" sz="900" dirty="0">
+                <a:solidFill>
+                  <a:srgbClr val="687783"/>
+                </a:solidFill>
+                <a:latin typeface="Arial" pitchFamily="34" charset="0"/>
+                <a:ea typeface="Arial" pitchFamily="34" charset="-122"/>
+                <a:cs typeface="Arial" pitchFamily="34" charset="-120"/>
+              </a:rPr>
+              <a:t>5</a:t>
+            </a:r>
+            <a:endParaRPr lang="en-US" sz="900" dirty="0"/>
+          </a:p>
+        </p:txBody>
+      </p:sp>
+      <p:sp>
+        <p:nvSpPr>
+          <p:cNvPr id="67" name="Shape 64"/>
+          <p:cNvSpPr/>
+          <p:nvPr/>
+        </p:nvSpPr>
+        <p:spPr>
+          <a:xfrm>
+            <a:off x="6042074" y="2734056"/>
+            <a:ext cx="91" cy="109728"/>
+          </a:xfrm>
+          <a:prstGeom prst="line">
+            <a:avLst/>
+          </a:prstGeom>
+          <a:noFill/>
+          <a:ln w="12700">
+            <a:solidFill>
+              <a:srgbClr val="687783"/>
+            </a:solidFill>
+            <a:prstDash val="solid"/>
+          </a:ln>
+        </p:spPr>
+      </p:sp>
+      <p:sp>
+        <p:nvSpPr>
+          <p:cNvPr id="68" name="Text 65"/>
+          <p:cNvSpPr txBox="1"/>
+          <p:nvPr/>
+        </p:nvSpPr>
+        <p:spPr>
+          <a:xfrm>
+            <a:off x="5859194" y="2880360"/>
+            <a:ext cx="365760" cy="201168"/>
+          </a:xfrm>
+          <a:prstGeom prst="rect">
+            <a:avLst/>
+          </a:prstGeom>
+          <a:noFill/>
+          <a:ln/>
+        </p:spPr>
+        <p:txBody>
+          <a:bodyPr wrap="square" lIns="0" tIns="0" rIns="0" bIns="0" rtlCol="0" anchor="t"/>
+          <a:lstStyle/>
+          <a:p>
+            <a:pPr algn="ctr" indent="0" marL="0">
+              <a:buNone/>
+            </a:pPr>
+            <a:r>
+              <a:rPr lang="en-US" sz="900" dirty="0">
+                <a:solidFill>
+                  <a:srgbClr val="687783"/>
+                </a:solidFill>
+                <a:latin typeface="Arial" pitchFamily="34" charset="0"/>
+                <a:ea typeface="Arial" pitchFamily="34" charset="-122"/>
+                <a:cs typeface="Arial" pitchFamily="34" charset="-120"/>
+              </a:rPr>
+              <a:t>6</a:t>
+            </a:r>
+            <a:endParaRPr lang="en-US" sz="900" dirty="0"/>
+          </a:p>
+        </p:txBody>
+      </p:sp>
+      <p:sp>
+        <p:nvSpPr>
+          <p:cNvPr id="69" name="Shape 66"/>
+          <p:cNvSpPr/>
+          <p:nvPr/>
+        </p:nvSpPr>
+        <p:spPr>
+          <a:xfrm>
+            <a:off x="6400800" y="2734056"/>
+            <a:ext cx="91" cy="109728"/>
+          </a:xfrm>
+          <a:prstGeom prst="line">
+            <a:avLst/>
+          </a:prstGeom>
+          <a:noFill/>
+          <a:ln w="12700">
+            <a:solidFill>
+              <a:srgbClr val="687783"/>
+            </a:solidFill>
+            <a:prstDash val="solid"/>
+          </a:ln>
+        </p:spPr>
+      </p:sp>
+      <p:sp>
+        <p:nvSpPr>
+          <p:cNvPr id="70" name="Text 67"/>
+          <p:cNvSpPr txBox="1"/>
+          <p:nvPr/>
+        </p:nvSpPr>
+        <p:spPr>
+          <a:xfrm>
+            <a:off x="6217920" y="2880360"/>
+            <a:ext cx="365760" cy="201168"/>
+          </a:xfrm>
+          <a:prstGeom prst="rect">
+            <a:avLst/>
+          </a:prstGeom>
+          <a:noFill/>
+          <a:ln/>
+        </p:spPr>
+        <p:txBody>
+          <a:bodyPr wrap="square" lIns="0" tIns="0" rIns="0" bIns="0" rtlCol="0" anchor="t"/>
+          <a:lstStyle/>
+          <a:p>
+            <a:pPr algn="ctr" indent="0" marL="0">
+              <a:buNone/>
+            </a:pPr>
+            <a:r>
+              <a:rPr lang="en-US" sz="900" dirty="0">
+                <a:solidFill>
+                  <a:srgbClr val="687783"/>
+                </a:solidFill>
+                <a:latin typeface="Arial" pitchFamily="34" charset="0"/>
+                <a:ea typeface="Arial" pitchFamily="34" charset="-122"/>
+                <a:cs typeface="Arial" pitchFamily="34" charset="-120"/>
+              </a:rPr>
+              <a:t>7</a:t>
+            </a:r>
+            <a:endParaRPr lang="en-US" sz="900" dirty="0"/>
+          </a:p>
+        </p:txBody>
+      </p:sp>
+      <p:sp>
+        <p:nvSpPr>
+          <p:cNvPr id="71" name="Text 68"/>
+          <p:cNvSpPr txBox="1"/>
+          <p:nvPr/>
+        </p:nvSpPr>
+        <p:spPr>
+          <a:xfrm>
+            <a:off x="685800" y="2606040"/>
+            <a:ext cx="777240" cy="365760"/>
+          </a:xfrm>
+          <a:prstGeom prst="rect">
+            <a:avLst/>
+          </a:prstGeom>
+          <a:noFill/>
+          <a:ln/>
+        </p:spPr>
+        <p:txBody>
+          <a:bodyPr wrap="square" lIns="0" tIns="0" rIns="0" bIns="0" rtlCol="0" anchor="ctr"/>
+          <a:lstStyle/>
+          <a:p>
+            <a:pPr indent="0" marL="0">
+              <a:buNone/>
+            </a:pPr>
+            <a:r>
+              <a:rPr lang="en-US" sz="1500" b="1" dirty="0">
+                <a:solidFill>
+                  <a:srgbClr val="11344E"/>
+                </a:solidFill>
+                <a:latin typeface="Times New Roman" pitchFamily="34" charset="0"/>
+                <a:ea typeface="Times New Roman" pitchFamily="34" charset="-122"/>
+                <a:cs typeface="Times New Roman" pitchFamily="34" charset="-120"/>
+              </a:rPr>
+              <a:t>B:</a:t>
+            </a:r>
+            <a:endParaRPr lang="en-US" sz="1500" dirty="0"/>
+          </a:p>
+        </p:txBody>
+      </p:sp>
+      <p:sp>
+        <p:nvSpPr>
+          <p:cNvPr id="72" name="Shape 69"/>
+          <p:cNvSpPr/>
+          <p:nvPr/>
+        </p:nvSpPr>
+        <p:spPr>
+          <a:xfrm>
+            <a:off x="4248443" y="2788920"/>
+            <a:ext cx="2289517" cy="0"/>
+          </a:xfrm>
+          <a:prstGeom prst="line">
+            <a:avLst/>
+          </a:prstGeom>
+          <a:noFill/>
+          <a:ln w="63500">
+            <a:solidFill>
+              <a:srgbClr val="1777B4"/>
+            </a:solidFill>
+            <a:prstDash val="solid"/>
+            <a:tailEnd type="triangle"/>
+          </a:ln>
+        </p:spPr>
+      </p:sp>
+      <p:sp>
+        <p:nvSpPr>
+          <p:cNvPr id="73" name="Shape 70"/>
+          <p:cNvSpPr/>
+          <p:nvPr/>
+        </p:nvSpPr>
+        <p:spPr>
+          <a:xfrm>
+            <a:off x="4166147" y="2706624"/>
+            <a:ext cx="164592" cy="164592"/>
+          </a:xfrm>
+          <a:prstGeom prst="ellipse">
+            <a:avLst/>
+          </a:prstGeom>
+          <a:solidFill>
+            <a:srgbClr val="FFFFFF"/>
+          </a:solidFill>
+          <a:ln w="25400">
+            <a:solidFill>
+              <a:srgbClr val="1777B4"/>
+            </a:solidFill>
+            <a:prstDash val="solid"/>
+          </a:ln>
+        </p:spPr>
+      </p:sp>
+      <p:sp>
+        <p:nvSpPr>
+          <p:cNvPr id="74" name="Text 71"/>
+          <p:cNvSpPr txBox="1"/>
+          <p:nvPr/>
+        </p:nvSpPr>
+        <p:spPr>
+          <a:xfrm>
+            <a:off x="548640" y="2953512"/>
+            <a:ext cx="1097280" cy="274320"/>
+          </a:xfrm>
+          <a:prstGeom prst="rect">
+            <a:avLst/>
+          </a:prstGeom>
+          <a:noFill/>
+          <a:ln/>
+        </p:spPr>
+        <p:txBody>
+          <a:bodyPr wrap="square" lIns="0" tIns="0" rIns="0" bIns="0" rtlCol="0" anchor="t"/>
+          <a:lstStyle/>
+          <a:p>
+            <a:pPr indent="0" marL="0">
+              <a:buNone/>
+            </a:pPr>
+            <a:r>
+              <a:rPr lang="en-US" sz="1300" dirty="0">
+                <a:solidFill>
+                  <a:srgbClr val="687783"/>
+                </a:solidFill>
+                <a:latin typeface="Times New Roman" pitchFamily="34" charset="0"/>
+                <a:ea typeface="Times New Roman" pitchFamily="34" charset="-122"/>
+                <a:cs typeface="Times New Roman" pitchFamily="34" charset="-120"/>
+              </a:rPr>
+              <a:t>x &gt; 1</a:t>
+            </a:r>
+            <a:endParaRPr lang="en-US" sz="1300" dirty="0"/>
+          </a:p>
+        </p:txBody>
+      </p:sp>
+      <p:sp>
+        <p:nvSpPr>
+          <p:cNvPr id="75" name="Shape 72"/>
+          <p:cNvSpPr/>
+          <p:nvPr/>
+        </p:nvSpPr>
+        <p:spPr>
+          <a:xfrm>
+            <a:off x="1600200" y="3703320"/>
+            <a:ext cx="4937760" cy="91"/>
+          </a:xfrm>
+          <a:prstGeom prst="line">
+            <a:avLst/>
+          </a:prstGeom>
+          <a:noFill/>
+          <a:ln w="15875">
+            <a:solidFill>
+              <a:srgbClr val="687783"/>
+            </a:solidFill>
+            <a:prstDash val="solid"/>
+            <a:headEnd type="triangle"/>
+            <a:tailEnd type="triangle"/>
+          </a:ln>
+        </p:spPr>
+      </p:sp>
+      <p:sp>
+        <p:nvSpPr>
+          <p:cNvPr id="76" name="Shape 73"/>
+          <p:cNvSpPr/>
+          <p:nvPr/>
+        </p:nvSpPr>
+        <p:spPr>
+          <a:xfrm>
+            <a:off x="1737360" y="3648456"/>
+            <a:ext cx="91" cy="109728"/>
+          </a:xfrm>
+          <a:prstGeom prst="line">
+            <a:avLst/>
+          </a:prstGeom>
+          <a:noFill/>
+          <a:ln w="12700">
+            <a:solidFill>
+              <a:srgbClr val="687783"/>
+            </a:solidFill>
+            <a:prstDash val="solid"/>
+          </a:ln>
+        </p:spPr>
+      </p:sp>
+      <p:sp>
+        <p:nvSpPr>
+          <p:cNvPr id="77" name="Text 74"/>
+          <p:cNvSpPr txBox="1"/>
+          <p:nvPr/>
+        </p:nvSpPr>
+        <p:spPr>
+          <a:xfrm>
+            <a:off x="1554480" y="3794760"/>
+            <a:ext cx="365760" cy="201168"/>
+          </a:xfrm>
+          <a:prstGeom prst="rect">
+            <a:avLst/>
+          </a:prstGeom>
+          <a:noFill/>
+          <a:ln/>
+        </p:spPr>
+        <p:txBody>
+          <a:bodyPr wrap="square" lIns="0" tIns="0" rIns="0" bIns="0" rtlCol="0" anchor="t"/>
+          <a:lstStyle/>
+          <a:p>
+            <a:pPr algn="ctr" indent="0" marL="0">
+              <a:buNone/>
+            </a:pPr>
+            <a:r>
+              <a:rPr lang="en-US" sz="900" dirty="0">
+                <a:solidFill>
+                  <a:srgbClr val="687783"/>
+                </a:solidFill>
+                <a:latin typeface="Arial" pitchFamily="34" charset="0"/>
+                <a:ea typeface="Arial" pitchFamily="34" charset="-122"/>
+                <a:cs typeface="Arial" pitchFamily="34" charset="-120"/>
+              </a:rPr>
+              <a:t>−6</a:t>
+            </a:r>
+            <a:endParaRPr lang="en-US" sz="900" dirty="0"/>
+          </a:p>
+        </p:txBody>
+      </p:sp>
+      <p:sp>
+        <p:nvSpPr>
+          <p:cNvPr id="78" name="Shape 75"/>
+          <p:cNvSpPr/>
+          <p:nvPr/>
+        </p:nvSpPr>
+        <p:spPr>
+          <a:xfrm>
+            <a:off x="2096086" y="3648456"/>
+            <a:ext cx="91" cy="109728"/>
+          </a:xfrm>
+          <a:prstGeom prst="line">
+            <a:avLst/>
+          </a:prstGeom>
+          <a:noFill/>
+          <a:ln w="12700">
+            <a:solidFill>
+              <a:srgbClr val="687783"/>
+            </a:solidFill>
+            <a:prstDash val="solid"/>
+          </a:ln>
+        </p:spPr>
+      </p:sp>
+      <p:sp>
+        <p:nvSpPr>
+          <p:cNvPr id="79" name="Text 76"/>
+          <p:cNvSpPr txBox="1"/>
+          <p:nvPr/>
+        </p:nvSpPr>
+        <p:spPr>
+          <a:xfrm>
+            <a:off x="1913206" y="3794760"/>
+            <a:ext cx="365760" cy="201168"/>
+          </a:xfrm>
+          <a:prstGeom prst="rect">
+            <a:avLst/>
+          </a:prstGeom>
+          <a:noFill/>
+          <a:ln/>
+        </p:spPr>
+        <p:txBody>
+          <a:bodyPr wrap="square" lIns="0" tIns="0" rIns="0" bIns="0" rtlCol="0" anchor="t"/>
+          <a:lstStyle/>
+          <a:p>
+            <a:pPr algn="ctr" indent="0" marL="0">
+              <a:buNone/>
+            </a:pPr>
+            <a:r>
+              <a:rPr lang="en-US" sz="900" dirty="0">
+                <a:solidFill>
+                  <a:srgbClr val="687783"/>
+                </a:solidFill>
+                <a:latin typeface="Arial" pitchFamily="34" charset="0"/>
+                <a:ea typeface="Arial" pitchFamily="34" charset="-122"/>
+                <a:cs typeface="Arial" pitchFamily="34" charset="-120"/>
+              </a:rPr>
+              <a:t>−5</a:t>
+            </a:r>
+            <a:endParaRPr lang="en-US" sz="900" dirty="0"/>
+          </a:p>
+        </p:txBody>
+      </p:sp>
+      <p:sp>
+        <p:nvSpPr>
+          <p:cNvPr id="80" name="Shape 77"/>
+          <p:cNvSpPr/>
+          <p:nvPr/>
+        </p:nvSpPr>
+        <p:spPr>
+          <a:xfrm>
+            <a:off x="2454812" y="3648456"/>
+            <a:ext cx="91" cy="109728"/>
+          </a:xfrm>
+          <a:prstGeom prst="line">
+            <a:avLst/>
+          </a:prstGeom>
+          <a:noFill/>
+          <a:ln w="12700">
+            <a:solidFill>
+              <a:srgbClr val="687783"/>
+            </a:solidFill>
+            <a:prstDash val="solid"/>
+          </a:ln>
+        </p:spPr>
+      </p:sp>
+      <p:sp>
+        <p:nvSpPr>
+          <p:cNvPr id="81" name="Text 78"/>
+          <p:cNvSpPr txBox="1"/>
+          <p:nvPr/>
+        </p:nvSpPr>
+        <p:spPr>
+          <a:xfrm>
+            <a:off x="2271932" y="3794760"/>
+            <a:ext cx="365760" cy="201168"/>
+          </a:xfrm>
+          <a:prstGeom prst="rect">
+            <a:avLst/>
+          </a:prstGeom>
+          <a:noFill/>
+          <a:ln/>
+        </p:spPr>
+        <p:txBody>
+          <a:bodyPr wrap="square" lIns="0" tIns="0" rIns="0" bIns="0" rtlCol="0" anchor="t"/>
+          <a:lstStyle/>
+          <a:p>
+            <a:pPr algn="ctr" indent="0" marL="0">
+              <a:buNone/>
+            </a:pPr>
+            <a:r>
+              <a:rPr lang="en-US" sz="900" dirty="0">
+                <a:solidFill>
+                  <a:srgbClr val="687783"/>
+                </a:solidFill>
+                <a:latin typeface="Arial" pitchFamily="34" charset="0"/>
+                <a:ea typeface="Arial" pitchFamily="34" charset="-122"/>
+                <a:cs typeface="Arial" pitchFamily="34" charset="-120"/>
+              </a:rPr>
+              <a:t>−4</a:t>
+            </a:r>
+            <a:endParaRPr lang="en-US" sz="900" dirty="0"/>
+          </a:p>
+        </p:txBody>
+      </p:sp>
+      <p:sp>
+        <p:nvSpPr>
+          <p:cNvPr id="82" name="Shape 79"/>
+          <p:cNvSpPr/>
+          <p:nvPr/>
+        </p:nvSpPr>
+        <p:spPr>
+          <a:xfrm>
+            <a:off x="2813538" y="3648456"/>
+            <a:ext cx="91" cy="109728"/>
+          </a:xfrm>
+          <a:prstGeom prst="line">
+            <a:avLst/>
+          </a:prstGeom>
+          <a:noFill/>
+          <a:ln w="12700">
+            <a:solidFill>
+              <a:srgbClr val="687783"/>
+            </a:solidFill>
+            <a:prstDash val="solid"/>
+          </a:ln>
+        </p:spPr>
+      </p:sp>
+      <p:sp>
+        <p:nvSpPr>
+          <p:cNvPr id="83" name="Text 80"/>
+          <p:cNvSpPr txBox="1"/>
+          <p:nvPr/>
+        </p:nvSpPr>
+        <p:spPr>
+          <a:xfrm>
+            <a:off x="2630658" y="3794760"/>
+            <a:ext cx="365760" cy="201168"/>
+          </a:xfrm>
+          <a:prstGeom prst="rect">
+            <a:avLst/>
+          </a:prstGeom>
+          <a:noFill/>
+          <a:ln/>
+        </p:spPr>
+        <p:txBody>
+          <a:bodyPr wrap="square" lIns="0" tIns="0" rIns="0" bIns="0" rtlCol="0" anchor="t"/>
+          <a:lstStyle/>
+          <a:p>
+            <a:pPr algn="ctr" indent="0" marL="0">
+              <a:buNone/>
+            </a:pPr>
+            <a:r>
+              <a:rPr lang="en-US" sz="900" dirty="0">
+                <a:solidFill>
+                  <a:srgbClr val="687783"/>
+                </a:solidFill>
+                <a:latin typeface="Arial" pitchFamily="34" charset="0"/>
+                <a:ea typeface="Arial" pitchFamily="34" charset="-122"/>
+                <a:cs typeface="Arial" pitchFamily="34" charset="-120"/>
+              </a:rPr>
+              <a:t>−3</a:t>
+            </a:r>
+            <a:endParaRPr lang="en-US" sz="900" dirty="0"/>
+          </a:p>
+        </p:txBody>
+      </p:sp>
+      <p:sp>
+        <p:nvSpPr>
+          <p:cNvPr id="84" name="Shape 81"/>
+          <p:cNvSpPr/>
+          <p:nvPr/>
+        </p:nvSpPr>
+        <p:spPr>
+          <a:xfrm>
+            <a:off x="3172265" y="3648456"/>
+            <a:ext cx="91" cy="109728"/>
+          </a:xfrm>
+          <a:prstGeom prst="line">
+            <a:avLst/>
+          </a:prstGeom>
+          <a:noFill/>
+          <a:ln w="12700">
+            <a:solidFill>
+              <a:srgbClr val="687783"/>
+            </a:solidFill>
+            <a:prstDash val="solid"/>
+          </a:ln>
+        </p:spPr>
+      </p:sp>
+      <p:sp>
+        <p:nvSpPr>
+          <p:cNvPr id="85" name="Text 82"/>
+          <p:cNvSpPr txBox="1"/>
+          <p:nvPr/>
+        </p:nvSpPr>
+        <p:spPr>
+          <a:xfrm>
+            <a:off x="2989385" y="3794760"/>
+            <a:ext cx="365760" cy="201168"/>
+          </a:xfrm>
+          <a:prstGeom prst="rect">
+            <a:avLst/>
+          </a:prstGeom>
+          <a:noFill/>
+          <a:ln/>
+        </p:spPr>
+        <p:txBody>
+          <a:bodyPr wrap="square" lIns="0" tIns="0" rIns="0" bIns="0" rtlCol="0" anchor="t"/>
+          <a:lstStyle/>
+          <a:p>
+            <a:pPr algn="ctr" indent="0" marL="0">
+              <a:buNone/>
+            </a:pPr>
+            <a:r>
+              <a:rPr lang="en-US" sz="900" dirty="0">
+                <a:solidFill>
+                  <a:srgbClr val="687783"/>
+                </a:solidFill>
+                <a:latin typeface="Arial" pitchFamily="34" charset="0"/>
+                <a:ea typeface="Arial" pitchFamily="34" charset="-122"/>
+                <a:cs typeface="Arial" pitchFamily="34" charset="-120"/>
+              </a:rPr>
+              <a:t>−2</a:t>
+            </a:r>
+            <a:endParaRPr lang="en-US" sz="900" dirty="0"/>
+          </a:p>
+        </p:txBody>
+      </p:sp>
+      <p:sp>
+        <p:nvSpPr>
+          <p:cNvPr id="86" name="Shape 83"/>
+          <p:cNvSpPr/>
+          <p:nvPr/>
+        </p:nvSpPr>
+        <p:spPr>
+          <a:xfrm>
+            <a:off x="3530991" y="3648456"/>
+            <a:ext cx="91" cy="109728"/>
+          </a:xfrm>
+          <a:prstGeom prst="line">
+            <a:avLst/>
+          </a:prstGeom>
+          <a:noFill/>
+          <a:ln w="12700">
+            <a:solidFill>
+              <a:srgbClr val="687783"/>
+            </a:solidFill>
+            <a:prstDash val="solid"/>
+          </a:ln>
+        </p:spPr>
+      </p:sp>
+      <p:sp>
+        <p:nvSpPr>
+          <p:cNvPr id="87" name="Text 84"/>
+          <p:cNvSpPr txBox="1"/>
+          <p:nvPr/>
+        </p:nvSpPr>
+        <p:spPr>
+          <a:xfrm>
+            <a:off x="3348111" y="3794760"/>
+            <a:ext cx="365760" cy="201168"/>
+          </a:xfrm>
+          <a:prstGeom prst="rect">
+            <a:avLst/>
+          </a:prstGeom>
+          <a:noFill/>
+          <a:ln/>
+        </p:spPr>
+        <p:txBody>
+          <a:bodyPr wrap="square" lIns="0" tIns="0" rIns="0" bIns="0" rtlCol="0" anchor="t"/>
+          <a:lstStyle/>
+          <a:p>
+            <a:pPr algn="ctr" indent="0" marL="0">
+              <a:buNone/>
+            </a:pPr>
+            <a:r>
+              <a:rPr lang="en-US" sz="900" dirty="0">
+                <a:solidFill>
+                  <a:srgbClr val="687783"/>
+                </a:solidFill>
+                <a:latin typeface="Arial" pitchFamily="34" charset="0"/>
+                <a:ea typeface="Arial" pitchFamily="34" charset="-122"/>
+                <a:cs typeface="Arial" pitchFamily="34" charset="-120"/>
+              </a:rPr>
+              <a:t>−1</a:t>
+            </a:r>
+            <a:endParaRPr lang="en-US" sz="900" dirty="0"/>
+          </a:p>
+        </p:txBody>
+      </p:sp>
+      <p:sp>
+        <p:nvSpPr>
+          <p:cNvPr id="88" name="Shape 85"/>
+          <p:cNvSpPr/>
+          <p:nvPr/>
+        </p:nvSpPr>
+        <p:spPr>
+          <a:xfrm>
+            <a:off x="3889717" y="3648456"/>
+            <a:ext cx="91" cy="109728"/>
+          </a:xfrm>
+          <a:prstGeom prst="line">
+            <a:avLst/>
+          </a:prstGeom>
+          <a:noFill/>
+          <a:ln w="12700">
+            <a:solidFill>
+              <a:srgbClr val="687783"/>
+            </a:solidFill>
+            <a:prstDash val="solid"/>
+          </a:ln>
+        </p:spPr>
+      </p:sp>
+      <p:sp>
+        <p:nvSpPr>
+          <p:cNvPr id="89" name="Text 86"/>
+          <p:cNvSpPr txBox="1"/>
+          <p:nvPr/>
+        </p:nvSpPr>
+        <p:spPr>
+          <a:xfrm>
+            <a:off x="3706837" y="3794760"/>
+            <a:ext cx="365760" cy="201168"/>
+          </a:xfrm>
+          <a:prstGeom prst="rect">
+            <a:avLst/>
+          </a:prstGeom>
+          <a:noFill/>
+          <a:ln/>
+        </p:spPr>
+        <p:txBody>
+          <a:bodyPr wrap="square" lIns="0" tIns="0" rIns="0" bIns="0" rtlCol="0" anchor="t"/>
+          <a:lstStyle/>
+          <a:p>
+            <a:pPr algn="ctr" indent="0" marL="0">
+              <a:buNone/>
+            </a:pPr>
+            <a:r>
+              <a:rPr lang="en-US" sz="900" dirty="0">
+                <a:solidFill>
+                  <a:srgbClr val="687783"/>
+                </a:solidFill>
+                <a:latin typeface="Arial" pitchFamily="34" charset="0"/>
+                <a:ea typeface="Arial" pitchFamily="34" charset="-122"/>
+                <a:cs typeface="Arial" pitchFamily="34" charset="-120"/>
+              </a:rPr>
+              <a:t>0</a:t>
+            </a:r>
+            <a:endParaRPr lang="en-US" sz="900" dirty="0"/>
+          </a:p>
+        </p:txBody>
+      </p:sp>
+      <p:sp>
+        <p:nvSpPr>
+          <p:cNvPr id="90" name="Shape 87"/>
+          <p:cNvSpPr/>
+          <p:nvPr/>
+        </p:nvSpPr>
+        <p:spPr>
+          <a:xfrm>
+            <a:off x="4248443" y="3648456"/>
+            <a:ext cx="91" cy="109728"/>
+          </a:xfrm>
+          <a:prstGeom prst="line">
+            <a:avLst/>
+          </a:prstGeom>
+          <a:noFill/>
+          <a:ln w="12700">
+            <a:solidFill>
+              <a:srgbClr val="687783"/>
+            </a:solidFill>
+            <a:prstDash val="solid"/>
+          </a:ln>
+        </p:spPr>
+      </p:sp>
+      <p:sp>
+        <p:nvSpPr>
+          <p:cNvPr id="91" name="Text 88"/>
+          <p:cNvSpPr txBox="1"/>
+          <p:nvPr/>
+        </p:nvSpPr>
+        <p:spPr>
+          <a:xfrm>
+            <a:off x="4065563" y="3794760"/>
+            <a:ext cx="365760" cy="201168"/>
+          </a:xfrm>
+          <a:prstGeom prst="rect">
+            <a:avLst/>
+          </a:prstGeom>
+          <a:noFill/>
+          <a:ln/>
+        </p:spPr>
+        <p:txBody>
+          <a:bodyPr wrap="square" lIns="0" tIns="0" rIns="0" bIns="0" rtlCol="0" anchor="t"/>
+          <a:lstStyle/>
+          <a:p>
+            <a:pPr algn="ctr" indent="0" marL="0">
+              <a:buNone/>
+            </a:pPr>
+            <a:r>
+              <a:rPr lang="en-US" sz="900" dirty="0">
+                <a:solidFill>
+                  <a:srgbClr val="687783"/>
+                </a:solidFill>
+                <a:latin typeface="Arial" pitchFamily="34" charset="0"/>
+                <a:ea typeface="Arial" pitchFamily="34" charset="-122"/>
+                <a:cs typeface="Arial" pitchFamily="34" charset="-120"/>
+              </a:rPr>
+              <a:t>1</a:t>
+            </a:r>
+            <a:endParaRPr lang="en-US" sz="900" dirty="0"/>
+          </a:p>
+        </p:txBody>
+      </p:sp>
+      <p:sp>
+        <p:nvSpPr>
+          <p:cNvPr id="92" name="Shape 89"/>
+          <p:cNvSpPr/>
+          <p:nvPr/>
+        </p:nvSpPr>
+        <p:spPr>
+          <a:xfrm>
+            <a:off x="4607169" y="3648456"/>
+            <a:ext cx="91" cy="109728"/>
+          </a:xfrm>
+          <a:prstGeom prst="line">
+            <a:avLst/>
+          </a:prstGeom>
+          <a:noFill/>
+          <a:ln w="12700">
+            <a:solidFill>
+              <a:srgbClr val="687783"/>
+            </a:solidFill>
+            <a:prstDash val="solid"/>
+          </a:ln>
+        </p:spPr>
+      </p:sp>
+      <p:sp>
+        <p:nvSpPr>
+          <p:cNvPr id="93" name="Text 90"/>
+          <p:cNvSpPr txBox="1"/>
+          <p:nvPr/>
+        </p:nvSpPr>
+        <p:spPr>
+          <a:xfrm>
+            <a:off x="4424289" y="3794760"/>
+            <a:ext cx="365760" cy="201168"/>
+          </a:xfrm>
+          <a:prstGeom prst="rect">
+            <a:avLst/>
+          </a:prstGeom>
+          <a:noFill/>
+          <a:ln/>
+        </p:spPr>
+        <p:txBody>
+          <a:bodyPr wrap="square" lIns="0" tIns="0" rIns="0" bIns="0" rtlCol="0" anchor="t"/>
+          <a:lstStyle/>
+          <a:p>
+            <a:pPr algn="ctr" indent="0" marL="0">
+              <a:buNone/>
+            </a:pPr>
+            <a:r>
+              <a:rPr lang="en-US" sz="900" dirty="0">
+                <a:solidFill>
+                  <a:srgbClr val="687783"/>
+                </a:solidFill>
+                <a:latin typeface="Arial" pitchFamily="34" charset="0"/>
+                <a:ea typeface="Arial" pitchFamily="34" charset="-122"/>
+                <a:cs typeface="Arial" pitchFamily="34" charset="-120"/>
+              </a:rPr>
+              <a:t>2</a:t>
+            </a:r>
+            <a:endParaRPr lang="en-US" sz="900" dirty="0"/>
+          </a:p>
+        </p:txBody>
+      </p:sp>
+      <p:sp>
+        <p:nvSpPr>
+          <p:cNvPr id="94" name="Shape 91"/>
+          <p:cNvSpPr/>
+          <p:nvPr/>
+        </p:nvSpPr>
+        <p:spPr>
+          <a:xfrm>
+            <a:off x="4965895" y="3648456"/>
+            <a:ext cx="91" cy="109728"/>
+          </a:xfrm>
+          <a:prstGeom prst="line">
+            <a:avLst/>
+          </a:prstGeom>
+          <a:noFill/>
+          <a:ln w="12700">
+            <a:solidFill>
+              <a:srgbClr val="687783"/>
+            </a:solidFill>
+            <a:prstDash val="solid"/>
+          </a:ln>
+        </p:spPr>
+      </p:sp>
+      <p:sp>
+        <p:nvSpPr>
+          <p:cNvPr id="95" name="Text 92"/>
+          <p:cNvSpPr txBox="1"/>
+          <p:nvPr/>
+        </p:nvSpPr>
+        <p:spPr>
+          <a:xfrm>
+            <a:off x="4783015" y="3794760"/>
+            <a:ext cx="365760" cy="201168"/>
+          </a:xfrm>
+          <a:prstGeom prst="rect">
+            <a:avLst/>
+          </a:prstGeom>
+          <a:noFill/>
+          <a:ln/>
+        </p:spPr>
+        <p:txBody>
+          <a:bodyPr wrap="square" lIns="0" tIns="0" rIns="0" bIns="0" rtlCol="0" anchor="t"/>
+          <a:lstStyle/>
+          <a:p>
+            <a:pPr algn="ctr" indent="0" marL="0">
+              <a:buNone/>
+            </a:pPr>
+            <a:r>
+              <a:rPr lang="en-US" sz="900" dirty="0">
+                <a:solidFill>
+                  <a:srgbClr val="687783"/>
+                </a:solidFill>
+                <a:latin typeface="Arial" pitchFamily="34" charset="0"/>
+                <a:ea typeface="Arial" pitchFamily="34" charset="-122"/>
+                <a:cs typeface="Arial" pitchFamily="34" charset="-120"/>
+              </a:rPr>
+              <a:t>3</a:t>
+            </a:r>
+            <a:endParaRPr lang="en-US" sz="900" dirty="0"/>
+          </a:p>
+        </p:txBody>
+      </p:sp>
+      <p:sp>
+        <p:nvSpPr>
+          <p:cNvPr id="96" name="Shape 93"/>
+          <p:cNvSpPr/>
+          <p:nvPr/>
+        </p:nvSpPr>
+        <p:spPr>
+          <a:xfrm>
+            <a:off x="5324622" y="3648456"/>
+            <a:ext cx="91" cy="109728"/>
+          </a:xfrm>
+          <a:prstGeom prst="line">
+            <a:avLst/>
+          </a:prstGeom>
+          <a:noFill/>
+          <a:ln w="12700">
+            <a:solidFill>
+              <a:srgbClr val="687783"/>
+            </a:solidFill>
+            <a:prstDash val="solid"/>
+          </a:ln>
+        </p:spPr>
+      </p:sp>
+      <p:sp>
+        <p:nvSpPr>
+          <p:cNvPr id="97" name="Text 94"/>
+          <p:cNvSpPr txBox="1"/>
+          <p:nvPr/>
+        </p:nvSpPr>
+        <p:spPr>
+          <a:xfrm>
+            <a:off x="5141742" y="3794760"/>
+            <a:ext cx="365760" cy="201168"/>
+          </a:xfrm>
+          <a:prstGeom prst="rect">
+            <a:avLst/>
+          </a:prstGeom>
+          <a:noFill/>
+          <a:ln/>
+        </p:spPr>
+        <p:txBody>
+          <a:bodyPr wrap="square" lIns="0" tIns="0" rIns="0" bIns="0" rtlCol="0" anchor="t"/>
+          <a:lstStyle/>
+          <a:p>
+            <a:pPr algn="ctr" indent="0" marL="0">
+              <a:buNone/>
+            </a:pPr>
+            <a:r>
+              <a:rPr lang="en-US" sz="900" dirty="0">
+                <a:solidFill>
+                  <a:srgbClr val="687783"/>
+                </a:solidFill>
+                <a:latin typeface="Arial" pitchFamily="34" charset="0"/>
+                <a:ea typeface="Arial" pitchFamily="34" charset="-122"/>
+                <a:cs typeface="Arial" pitchFamily="34" charset="-120"/>
+              </a:rPr>
+              <a:t>4</a:t>
+            </a:r>
+            <a:endParaRPr lang="en-US" sz="900" dirty="0"/>
+          </a:p>
+        </p:txBody>
+      </p:sp>
+      <p:sp>
+        <p:nvSpPr>
+          <p:cNvPr id="98" name="Shape 95"/>
+          <p:cNvSpPr/>
+          <p:nvPr/>
+        </p:nvSpPr>
+        <p:spPr>
+          <a:xfrm>
+            <a:off x="5683348" y="3648456"/>
+            <a:ext cx="91" cy="109728"/>
+          </a:xfrm>
+          <a:prstGeom prst="line">
+            <a:avLst/>
+          </a:prstGeom>
+          <a:noFill/>
+          <a:ln w="12700">
+            <a:solidFill>
+              <a:srgbClr val="687783"/>
+            </a:solidFill>
+            <a:prstDash val="solid"/>
+          </a:ln>
+        </p:spPr>
+      </p:sp>
+      <p:sp>
+        <p:nvSpPr>
+          <p:cNvPr id="99" name="Text 96"/>
+          <p:cNvSpPr txBox="1"/>
+          <p:nvPr/>
+        </p:nvSpPr>
+        <p:spPr>
+          <a:xfrm>
+            <a:off x="5500468" y="3794760"/>
+            <a:ext cx="365760" cy="201168"/>
+          </a:xfrm>
+          <a:prstGeom prst="rect">
+            <a:avLst/>
+          </a:prstGeom>
+          <a:noFill/>
+          <a:ln/>
+        </p:spPr>
+        <p:txBody>
+          <a:bodyPr wrap="square" lIns="0" tIns="0" rIns="0" bIns="0" rtlCol="0" anchor="t"/>
+          <a:lstStyle/>
+          <a:p>
+            <a:pPr algn="ctr" indent="0" marL="0">
+              <a:buNone/>
+            </a:pPr>
+            <a:r>
+              <a:rPr lang="en-US" sz="900" dirty="0">
+                <a:solidFill>
+                  <a:srgbClr val="687783"/>
+                </a:solidFill>
+                <a:latin typeface="Arial" pitchFamily="34" charset="0"/>
+                <a:ea typeface="Arial" pitchFamily="34" charset="-122"/>
+                <a:cs typeface="Arial" pitchFamily="34" charset="-120"/>
+              </a:rPr>
+              <a:t>5</a:t>
+            </a:r>
+            <a:endParaRPr lang="en-US" sz="900" dirty="0"/>
+          </a:p>
+        </p:txBody>
+      </p:sp>
+      <p:sp>
+        <p:nvSpPr>
+          <p:cNvPr id="100" name="Shape 97"/>
+          <p:cNvSpPr/>
+          <p:nvPr/>
+        </p:nvSpPr>
+        <p:spPr>
+          <a:xfrm>
+            <a:off x="6042074" y="3648456"/>
+            <a:ext cx="91" cy="109728"/>
+          </a:xfrm>
+          <a:prstGeom prst="line">
+            <a:avLst/>
+          </a:prstGeom>
+          <a:noFill/>
+          <a:ln w="12700">
+            <a:solidFill>
+              <a:srgbClr val="687783"/>
+            </a:solidFill>
+            <a:prstDash val="solid"/>
+          </a:ln>
+        </p:spPr>
+      </p:sp>
+      <p:sp>
+        <p:nvSpPr>
+          <p:cNvPr id="101" name="Text 98"/>
+          <p:cNvSpPr txBox="1"/>
+          <p:nvPr/>
+        </p:nvSpPr>
+        <p:spPr>
+          <a:xfrm>
+            <a:off x="5859194" y="3794760"/>
+            <a:ext cx="365760" cy="201168"/>
+          </a:xfrm>
+          <a:prstGeom prst="rect">
+            <a:avLst/>
+          </a:prstGeom>
+          <a:noFill/>
+          <a:ln/>
+        </p:spPr>
+        <p:txBody>
+          <a:bodyPr wrap="square" lIns="0" tIns="0" rIns="0" bIns="0" rtlCol="0" anchor="t"/>
+          <a:lstStyle/>
+          <a:p>
+            <a:pPr algn="ctr" indent="0" marL="0">
+              <a:buNone/>
+            </a:pPr>
+            <a:r>
+              <a:rPr lang="en-US" sz="900" dirty="0">
+                <a:solidFill>
+                  <a:srgbClr val="687783"/>
+                </a:solidFill>
+                <a:latin typeface="Arial" pitchFamily="34" charset="0"/>
+                <a:ea typeface="Arial" pitchFamily="34" charset="-122"/>
+                <a:cs typeface="Arial" pitchFamily="34" charset="-120"/>
+              </a:rPr>
+              <a:t>6</a:t>
+            </a:r>
+            <a:endParaRPr lang="en-US" sz="900" dirty="0"/>
+          </a:p>
+        </p:txBody>
+      </p:sp>
+      <p:sp>
+        <p:nvSpPr>
+          <p:cNvPr id="102" name="Shape 99"/>
+          <p:cNvSpPr/>
+          <p:nvPr/>
+        </p:nvSpPr>
+        <p:spPr>
+          <a:xfrm>
+            <a:off x="6400800" y="3648456"/>
+            <a:ext cx="91" cy="109728"/>
+          </a:xfrm>
+          <a:prstGeom prst="line">
+            <a:avLst/>
+          </a:prstGeom>
+          <a:noFill/>
+          <a:ln w="12700">
+            <a:solidFill>
+              <a:srgbClr val="687783"/>
+            </a:solidFill>
+            <a:prstDash val="solid"/>
+          </a:ln>
+        </p:spPr>
+      </p:sp>
+      <p:sp>
+        <p:nvSpPr>
+          <p:cNvPr id="103" name="Text 100"/>
+          <p:cNvSpPr txBox="1"/>
+          <p:nvPr/>
+        </p:nvSpPr>
+        <p:spPr>
+          <a:xfrm>
+            <a:off x="6217920" y="3794760"/>
+            <a:ext cx="365760" cy="201168"/>
+          </a:xfrm>
+          <a:prstGeom prst="rect">
+            <a:avLst/>
+          </a:prstGeom>
+          <a:noFill/>
+          <a:ln/>
+        </p:spPr>
+        <p:txBody>
+          <a:bodyPr wrap="square" lIns="0" tIns="0" rIns="0" bIns="0" rtlCol="0" anchor="t"/>
+          <a:lstStyle/>
+          <a:p>
+            <a:pPr algn="ctr" indent="0" marL="0">
+              <a:buNone/>
+            </a:pPr>
+            <a:r>
+              <a:rPr lang="en-US" sz="900" dirty="0">
+                <a:solidFill>
+                  <a:srgbClr val="687783"/>
+                </a:solidFill>
+                <a:latin typeface="Arial" pitchFamily="34" charset="0"/>
+                <a:ea typeface="Arial" pitchFamily="34" charset="-122"/>
+                <a:cs typeface="Arial" pitchFamily="34" charset="-120"/>
+              </a:rPr>
+              <a:t>7</a:t>
+            </a:r>
+            <a:endParaRPr lang="en-US" sz="900" dirty="0"/>
+          </a:p>
+        </p:txBody>
+      </p:sp>
+      <p:sp>
+        <p:nvSpPr>
+          <p:cNvPr id="104" name="Text 101"/>
+          <p:cNvSpPr txBox="1"/>
+          <p:nvPr/>
+        </p:nvSpPr>
+        <p:spPr>
+          <a:xfrm>
+            <a:off x="685800" y="3520440"/>
+            <a:ext cx="777240" cy="365760"/>
+          </a:xfrm>
+          <a:prstGeom prst="rect">
+            <a:avLst/>
+          </a:prstGeom>
+          <a:noFill/>
+          <a:ln/>
+        </p:spPr>
+        <p:txBody>
+          <a:bodyPr wrap="square" lIns="0" tIns="0" rIns="0" bIns="0" rtlCol="0" anchor="ctr"/>
+          <a:lstStyle/>
+          <a:p>
+            <a:pPr indent="0" marL="0">
+              <a:buNone/>
+            </a:pPr>
+            <a:r>
+              <a:rPr lang="en-US" sz="1500" b="1" dirty="0">
+                <a:solidFill>
+                  <a:srgbClr val="11344E"/>
+                </a:solidFill>
+                <a:latin typeface="Times New Roman" pitchFamily="34" charset="0"/>
+                <a:ea typeface="Times New Roman" pitchFamily="34" charset="-122"/>
+                <a:cs typeface="Times New Roman" pitchFamily="34" charset="-120"/>
+              </a:rPr>
+              <a:t>C:</a:t>
+            </a:r>
+            <a:endParaRPr lang="en-US" sz="1500" dirty="0"/>
+          </a:p>
+        </p:txBody>
+      </p:sp>
+      <p:sp>
+        <p:nvSpPr>
+          <p:cNvPr id="105" name="Shape 102"/>
+          <p:cNvSpPr/>
+          <p:nvPr/>
+        </p:nvSpPr>
+        <p:spPr>
+          <a:xfrm>
+            <a:off x="1600200" y="3703320"/>
+            <a:ext cx="1572065" cy="0"/>
+          </a:xfrm>
+          <a:prstGeom prst="line">
+            <a:avLst/>
+          </a:prstGeom>
+          <a:noFill/>
+          <a:ln w="63500">
+            <a:solidFill>
+              <a:srgbClr val="1777B4"/>
+            </a:solidFill>
+            <a:prstDash val="solid"/>
+            <a:headEnd type="triangle"/>
+          </a:ln>
+        </p:spPr>
+      </p:sp>
+      <p:sp>
+        <p:nvSpPr>
+          <p:cNvPr id="106" name="Shape 103"/>
+          <p:cNvSpPr/>
+          <p:nvPr/>
+        </p:nvSpPr>
+        <p:spPr>
+          <a:xfrm>
+            <a:off x="3089969" y="3621024"/>
             <a:ext cx="164592" cy="164592"/>
           </a:xfrm>
           <a:prstGeom prst="ellipse">
@@ -6967,13 +9007,13 @@
       </p:sp>
       <p:sp>
         <p:nvSpPr>
-          <p:cNvPr id="41" name="Text 38"/>
-          <p:cNvSpPr txBox="1"/>
-          <p:nvPr/>
-        </p:nvSpPr>
-        <p:spPr>
-          <a:xfrm>
-            <a:off x="548640" y="2039112"/>
+          <p:cNvPr id="107" name="Text 104"/>
+          <p:cNvSpPr txBox="1"/>
+          <p:nvPr/>
+        </p:nvSpPr>
+        <p:spPr>
+          <a:xfrm>
+            <a:off x="548640" y="3867912"/>
             <a:ext cx="1097280" cy="274320"/>
           </a:xfrm>
           <a:prstGeom prst="rect">
@@ -6998,7 +9038,7 @@
                 <a:ea typeface="Times New Roman" pitchFamily="34" charset="-122"/>
                 <a:cs typeface="Times New Roman" pitchFamily="34" charset="-120"/>
               </a:rPr>
-              <a:t>−3 &lt; x ≤ 6</a:t>
+              <a:t>x ≤ −2</a:t>
             </a:r>
             <a:endParaRPr lang="en-US" sz="1300" dirty="0"/>
           </a:p>
@@ -7006,923 +9046,69 @@
       </p:sp>
       <p:sp>
         <p:nvSpPr>
-          <p:cNvPr id="42" name="Shape 39"/>
-          <p:cNvSpPr/>
-          <p:nvPr/>
-        </p:nvSpPr>
-        <p:spPr>
-          <a:xfrm>
-            <a:off x="1600200" y="2788920"/>
-            <a:ext cx="4937760" cy="91"/>
-          </a:xfrm>
-          <a:prstGeom prst="line">
-            <a:avLst/>
-          </a:prstGeom>
-          <a:noFill/>
-          <a:ln w="15875">
-            <a:solidFill>
-              <a:srgbClr val="687783"/>
-            </a:solidFill>
-            <a:prstDash val="solid"/>
-            <a:headEnd type="triangle"/>
-            <a:tailEnd type="triangle"/>
-          </a:ln>
-        </p:spPr>
-      </p:sp>
-      <p:sp>
-        <p:nvSpPr>
-          <p:cNvPr id="43" name="Shape 40"/>
-          <p:cNvSpPr/>
-          <p:nvPr/>
-        </p:nvSpPr>
-        <p:spPr>
-          <a:xfrm>
-            <a:off x="1737360" y="2734056"/>
-            <a:ext cx="91" cy="109728"/>
-          </a:xfrm>
-          <a:prstGeom prst="line">
-            <a:avLst/>
-          </a:prstGeom>
-          <a:noFill/>
-          <a:ln w="12700">
-            <a:solidFill>
-              <a:srgbClr val="687783"/>
-            </a:solidFill>
-            <a:prstDash val="solid"/>
-          </a:ln>
-        </p:spPr>
-      </p:sp>
-      <p:sp>
-        <p:nvSpPr>
-          <p:cNvPr id="44" name="Text 41"/>
-          <p:cNvSpPr txBox="1"/>
-          <p:nvPr/>
-        </p:nvSpPr>
-        <p:spPr>
-          <a:xfrm>
-            <a:off x="1554480" y="2880360"/>
-            <a:ext cx="365760" cy="201168"/>
-          </a:xfrm>
-          <a:prstGeom prst="rect">
-            <a:avLst/>
-          </a:prstGeom>
-          <a:noFill/>
-          <a:ln/>
-        </p:spPr>
-        <p:txBody>
-          <a:bodyPr wrap="square" lIns="0" tIns="0" rIns="0" bIns="0" rtlCol="0" anchor="t"/>
-          <a:lstStyle/>
-          <a:p>
-            <a:pPr algn="ctr" indent="0" marL="0">
-              <a:buNone/>
-            </a:pPr>
-            <a:r>
-              <a:rPr lang="en-US" sz="900" dirty="0">
-                <a:solidFill>
-                  <a:srgbClr val="687783"/>
-                </a:solidFill>
-                <a:latin typeface="Arial" pitchFamily="34" charset="0"/>
-                <a:ea typeface="Arial" pitchFamily="34" charset="-122"/>
-                <a:cs typeface="Arial" pitchFamily="34" charset="-120"/>
-              </a:rPr>
-              <a:t>−6</a:t>
-            </a:r>
-            <a:endParaRPr lang="en-US" sz="900" dirty="0"/>
-          </a:p>
-        </p:txBody>
-      </p:sp>
-      <p:sp>
-        <p:nvSpPr>
-          <p:cNvPr id="45" name="Shape 42"/>
-          <p:cNvSpPr/>
-          <p:nvPr/>
-        </p:nvSpPr>
-        <p:spPr>
-          <a:xfrm>
-            <a:off x="2096086" y="2734056"/>
-            <a:ext cx="91" cy="109728"/>
-          </a:xfrm>
-          <a:prstGeom prst="line">
-            <a:avLst/>
-          </a:prstGeom>
-          <a:noFill/>
-          <a:ln w="12700">
-            <a:solidFill>
-              <a:srgbClr val="687783"/>
-            </a:solidFill>
-            <a:prstDash val="solid"/>
-          </a:ln>
-        </p:spPr>
-      </p:sp>
-      <p:sp>
-        <p:nvSpPr>
-          <p:cNvPr id="46" name="Text 43"/>
-          <p:cNvSpPr txBox="1"/>
-          <p:nvPr/>
-        </p:nvSpPr>
-        <p:spPr>
-          <a:xfrm>
-            <a:off x="1913206" y="2880360"/>
-            <a:ext cx="365760" cy="201168"/>
-          </a:xfrm>
-          <a:prstGeom prst="rect">
-            <a:avLst/>
-          </a:prstGeom>
-          <a:noFill/>
-          <a:ln/>
-        </p:spPr>
-        <p:txBody>
-          <a:bodyPr wrap="square" lIns="0" tIns="0" rIns="0" bIns="0" rtlCol="0" anchor="t"/>
-          <a:lstStyle/>
-          <a:p>
-            <a:pPr algn="ctr" indent="0" marL="0">
-              <a:buNone/>
-            </a:pPr>
-            <a:r>
-              <a:rPr lang="en-US" sz="900" dirty="0">
-                <a:solidFill>
-                  <a:srgbClr val="687783"/>
-                </a:solidFill>
-                <a:latin typeface="Arial" pitchFamily="34" charset="0"/>
-                <a:ea typeface="Arial" pitchFamily="34" charset="-122"/>
-                <a:cs typeface="Arial" pitchFamily="34" charset="-120"/>
-              </a:rPr>
-              <a:t>−5</a:t>
-            </a:r>
-            <a:endParaRPr lang="en-US" sz="900" dirty="0"/>
-          </a:p>
-        </p:txBody>
-      </p:sp>
-      <p:sp>
-        <p:nvSpPr>
-          <p:cNvPr id="47" name="Shape 44"/>
-          <p:cNvSpPr/>
-          <p:nvPr/>
-        </p:nvSpPr>
-        <p:spPr>
-          <a:xfrm>
-            <a:off x="2454812" y="2734056"/>
-            <a:ext cx="91" cy="109728"/>
-          </a:xfrm>
-          <a:prstGeom prst="line">
-            <a:avLst/>
-          </a:prstGeom>
-          <a:noFill/>
-          <a:ln w="12700">
-            <a:solidFill>
-              <a:srgbClr val="687783"/>
-            </a:solidFill>
-            <a:prstDash val="solid"/>
-          </a:ln>
-        </p:spPr>
-      </p:sp>
-      <p:sp>
-        <p:nvSpPr>
-          <p:cNvPr id="48" name="Text 45"/>
-          <p:cNvSpPr txBox="1"/>
-          <p:nvPr/>
-        </p:nvSpPr>
-        <p:spPr>
-          <a:xfrm>
-            <a:off x="2271932" y="2880360"/>
-            <a:ext cx="365760" cy="201168"/>
-          </a:xfrm>
-          <a:prstGeom prst="rect">
-            <a:avLst/>
-          </a:prstGeom>
-          <a:noFill/>
-          <a:ln/>
-        </p:spPr>
-        <p:txBody>
-          <a:bodyPr wrap="square" lIns="0" tIns="0" rIns="0" bIns="0" rtlCol="0" anchor="t"/>
-          <a:lstStyle/>
-          <a:p>
-            <a:pPr algn="ctr" indent="0" marL="0">
-              <a:buNone/>
-            </a:pPr>
-            <a:r>
-              <a:rPr lang="en-US" sz="900" dirty="0">
-                <a:solidFill>
-                  <a:srgbClr val="687783"/>
-                </a:solidFill>
-                <a:latin typeface="Arial" pitchFamily="34" charset="0"/>
-                <a:ea typeface="Arial" pitchFamily="34" charset="-122"/>
-                <a:cs typeface="Arial" pitchFamily="34" charset="-120"/>
-              </a:rPr>
-              <a:t>−4</a:t>
-            </a:r>
-            <a:endParaRPr lang="en-US" sz="900" dirty="0"/>
-          </a:p>
-        </p:txBody>
-      </p:sp>
-      <p:sp>
-        <p:nvSpPr>
-          <p:cNvPr id="49" name="Shape 46"/>
-          <p:cNvSpPr/>
-          <p:nvPr/>
-        </p:nvSpPr>
-        <p:spPr>
-          <a:xfrm>
-            <a:off x="2813538" y="2734056"/>
-            <a:ext cx="91" cy="109728"/>
-          </a:xfrm>
-          <a:prstGeom prst="line">
-            <a:avLst/>
-          </a:prstGeom>
-          <a:noFill/>
-          <a:ln w="12700">
-            <a:solidFill>
-              <a:srgbClr val="687783"/>
-            </a:solidFill>
-            <a:prstDash val="solid"/>
-          </a:ln>
-        </p:spPr>
-      </p:sp>
-      <p:sp>
-        <p:nvSpPr>
-          <p:cNvPr id="50" name="Text 47"/>
-          <p:cNvSpPr txBox="1"/>
-          <p:nvPr/>
-        </p:nvSpPr>
-        <p:spPr>
-          <a:xfrm>
-            <a:off x="2630658" y="2880360"/>
-            <a:ext cx="365760" cy="201168"/>
-          </a:xfrm>
-          <a:prstGeom prst="rect">
-            <a:avLst/>
-          </a:prstGeom>
-          <a:noFill/>
-          <a:ln/>
-        </p:spPr>
-        <p:txBody>
-          <a:bodyPr wrap="square" lIns="0" tIns="0" rIns="0" bIns="0" rtlCol="0" anchor="t"/>
-          <a:lstStyle/>
-          <a:p>
-            <a:pPr algn="ctr" indent="0" marL="0">
-              <a:buNone/>
-            </a:pPr>
-            <a:r>
-              <a:rPr lang="en-US" sz="900" dirty="0">
-                <a:solidFill>
-                  <a:srgbClr val="687783"/>
-                </a:solidFill>
-                <a:latin typeface="Arial" pitchFamily="34" charset="0"/>
-                <a:ea typeface="Arial" pitchFamily="34" charset="-122"/>
-                <a:cs typeface="Arial" pitchFamily="34" charset="-120"/>
-              </a:rPr>
-              <a:t>−3</a:t>
-            </a:r>
-            <a:endParaRPr lang="en-US" sz="900" dirty="0"/>
-          </a:p>
-        </p:txBody>
-      </p:sp>
-      <p:sp>
-        <p:nvSpPr>
-          <p:cNvPr id="51" name="Shape 48"/>
-          <p:cNvSpPr/>
-          <p:nvPr/>
-        </p:nvSpPr>
-        <p:spPr>
-          <a:xfrm>
-            <a:off x="3172265" y="2734056"/>
-            <a:ext cx="91" cy="109728"/>
-          </a:xfrm>
-          <a:prstGeom prst="line">
-            <a:avLst/>
-          </a:prstGeom>
-          <a:noFill/>
-          <a:ln w="12700">
-            <a:solidFill>
-              <a:srgbClr val="687783"/>
-            </a:solidFill>
-            <a:prstDash val="solid"/>
-          </a:ln>
-        </p:spPr>
-      </p:sp>
-      <p:sp>
-        <p:nvSpPr>
-          <p:cNvPr id="52" name="Text 49"/>
-          <p:cNvSpPr txBox="1"/>
-          <p:nvPr/>
-        </p:nvSpPr>
-        <p:spPr>
-          <a:xfrm>
-            <a:off x="2989385" y="2880360"/>
-            <a:ext cx="365760" cy="201168"/>
-          </a:xfrm>
-          <a:prstGeom prst="rect">
-            <a:avLst/>
-          </a:prstGeom>
-          <a:noFill/>
-          <a:ln/>
-        </p:spPr>
-        <p:txBody>
-          <a:bodyPr wrap="square" lIns="0" tIns="0" rIns="0" bIns="0" rtlCol="0" anchor="t"/>
-          <a:lstStyle/>
-          <a:p>
-            <a:pPr algn="ctr" indent="0" marL="0">
-              <a:buNone/>
-            </a:pPr>
-            <a:r>
-              <a:rPr lang="en-US" sz="900" dirty="0">
-                <a:solidFill>
-                  <a:srgbClr val="687783"/>
-                </a:solidFill>
-                <a:latin typeface="Arial" pitchFamily="34" charset="0"/>
-                <a:ea typeface="Arial" pitchFamily="34" charset="-122"/>
-                <a:cs typeface="Arial" pitchFamily="34" charset="-120"/>
-              </a:rPr>
-              <a:t>−2</a:t>
-            </a:r>
-            <a:endParaRPr lang="en-US" sz="900" dirty="0"/>
-          </a:p>
-        </p:txBody>
-      </p:sp>
-      <p:sp>
-        <p:nvSpPr>
-          <p:cNvPr id="53" name="Shape 50"/>
-          <p:cNvSpPr/>
-          <p:nvPr/>
-        </p:nvSpPr>
-        <p:spPr>
-          <a:xfrm>
-            <a:off x="3530991" y="2734056"/>
-            <a:ext cx="91" cy="109728"/>
-          </a:xfrm>
-          <a:prstGeom prst="line">
-            <a:avLst/>
-          </a:prstGeom>
-          <a:noFill/>
-          <a:ln w="12700">
-            <a:solidFill>
-              <a:srgbClr val="687783"/>
-            </a:solidFill>
-            <a:prstDash val="solid"/>
-          </a:ln>
-        </p:spPr>
-      </p:sp>
-      <p:sp>
-        <p:nvSpPr>
-          <p:cNvPr id="54" name="Text 51"/>
-          <p:cNvSpPr txBox="1"/>
-          <p:nvPr/>
-        </p:nvSpPr>
-        <p:spPr>
-          <a:xfrm>
-            <a:off x="3348111" y="2880360"/>
-            <a:ext cx="365760" cy="201168"/>
-          </a:xfrm>
-          <a:prstGeom prst="rect">
-            <a:avLst/>
-          </a:prstGeom>
-          <a:noFill/>
-          <a:ln/>
-        </p:spPr>
-        <p:txBody>
-          <a:bodyPr wrap="square" lIns="0" tIns="0" rIns="0" bIns="0" rtlCol="0" anchor="t"/>
-          <a:lstStyle/>
-          <a:p>
-            <a:pPr algn="ctr" indent="0" marL="0">
-              <a:buNone/>
-            </a:pPr>
-            <a:r>
-              <a:rPr lang="en-US" sz="900" dirty="0">
-                <a:solidFill>
-                  <a:srgbClr val="687783"/>
-                </a:solidFill>
-                <a:latin typeface="Arial" pitchFamily="34" charset="0"/>
-                <a:ea typeface="Arial" pitchFamily="34" charset="-122"/>
-                <a:cs typeface="Arial" pitchFamily="34" charset="-120"/>
-              </a:rPr>
-              <a:t>−1</a:t>
-            </a:r>
-            <a:endParaRPr lang="en-US" sz="900" dirty="0"/>
-          </a:p>
-        </p:txBody>
-      </p:sp>
-      <p:sp>
-        <p:nvSpPr>
-          <p:cNvPr id="55" name="Shape 52"/>
-          <p:cNvSpPr/>
-          <p:nvPr/>
-        </p:nvSpPr>
-        <p:spPr>
-          <a:xfrm>
-            <a:off x="3889717" y="2734056"/>
-            <a:ext cx="91" cy="109728"/>
-          </a:xfrm>
-          <a:prstGeom prst="line">
-            <a:avLst/>
-          </a:prstGeom>
-          <a:noFill/>
-          <a:ln w="12700">
-            <a:solidFill>
-              <a:srgbClr val="687783"/>
-            </a:solidFill>
-            <a:prstDash val="solid"/>
-          </a:ln>
-        </p:spPr>
-      </p:sp>
-      <p:sp>
-        <p:nvSpPr>
-          <p:cNvPr id="56" name="Text 53"/>
-          <p:cNvSpPr txBox="1"/>
-          <p:nvPr/>
-        </p:nvSpPr>
-        <p:spPr>
-          <a:xfrm>
-            <a:off x="3706837" y="2880360"/>
-            <a:ext cx="365760" cy="201168"/>
-          </a:xfrm>
-          <a:prstGeom prst="rect">
-            <a:avLst/>
-          </a:prstGeom>
-          <a:noFill/>
-          <a:ln/>
-        </p:spPr>
-        <p:txBody>
-          <a:bodyPr wrap="square" lIns="0" tIns="0" rIns="0" bIns="0" rtlCol="0" anchor="t"/>
-          <a:lstStyle/>
-          <a:p>
-            <a:pPr algn="ctr" indent="0" marL="0">
-              <a:buNone/>
-            </a:pPr>
-            <a:r>
-              <a:rPr lang="en-US" sz="900" dirty="0">
-                <a:solidFill>
-                  <a:srgbClr val="687783"/>
-                </a:solidFill>
-                <a:latin typeface="Arial" pitchFamily="34" charset="0"/>
-                <a:ea typeface="Arial" pitchFamily="34" charset="-122"/>
-                <a:cs typeface="Arial" pitchFamily="34" charset="-120"/>
-              </a:rPr>
-              <a:t>0</a:t>
-            </a:r>
-            <a:endParaRPr lang="en-US" sz="900" dirty="0"/>
-          </a:p>
-        </p:txBody>
-      </p:sp>
-      <p:sp>
-        <p:nvSpPr>
-          <p:cNvPr id="57" name="Shape 54"/>
-          <p:cNvSpPr/>
-          <p:nvPr/>
-        </p:nvSpPr>
-        <p:spPr>
-          <a:xfrm>
-            <a:off x="4248443" y="2734056"/>
-            <a:ext cx="91" cy="109728"/>
-          </a:xfrm>
-          <a:prstGeom prst="line">
-            <a:avLst/>
-          </a:prstGeom>
-          <a:noFill/>
-          <a:ln w="12700">
-            <a:solidFill>
-              <a:srgbClr val="687783"/>
-            </a:solidFill>
-            <a:prstDash val="solid"/>
-          </a:ln>
-        </p:spPr>
-      </p:sp>
-      <p:sp>
-        <p:nvSpPr>
-          <p:cNvPr id="58" name="Text 55"/>
-          <p:cNvSpPr txBox="1"/>
-          <p:nvPr/>
-        </p:nvSpPr>
-        <p:spPr>
-          <a:xfrm>
-            <a:off x="4065563" y="2880360"/>
-            <a:ext cx="365760" cy="201168"/>
-          </a:xfrm>
-          <a:prstGeom prst="rect">
-            <a:avLst/>
-          </a:prstGeom>
-          <a:noFill/>
-          <a:ln/>
-        </p:spPr>
-        <p:txBody>
-          <a:bodyPr wrap="square" lIns="0" tIns="0" rIns="0" bIns="0" rtlCol="0" anchor="t"/>
-          <a:lstStyle/>
-          <a:p>
-            <a:pPr algn="ctr" indent="0" marL="0">
-              <a:buNone/>
-            </a:pPr>
-            <a:r>
-              <a:rPr lang="en-US" sz="900" dirty="0">
-                <a:solidFill>
-                  <a:srgbClr val="687783"/>
-                </a:solidFill>
-                <a:latin typeface="Arial" pitchFamily="34" charset="0"/>
-                <a:ea typeface="Arial" pitchFamily="34" charset="-122"/>
-                <a:cs typeface="Arial" pitchFamily="34" charset="-120"/>
-              </a:rPr>
-              <a:t>1</a:t>
-            </a:r>
-            <a:endParaRPr lang="en-US" sz="900" dirty="0"/>
-          </a:p>
-        </p:txBody>
-      </p:sp>
-      <p:sp>
-        <p:nvSpPr>
-          <p:cNvPr id="59" name="Shape 56"/>
-          <p:cNvSpPr/>
-          <p:nvPr/>
-        </p:nvSpPr>
-        <p:spPr>
-          <a:xfrm>
-            <a:off x="4607169" y="2734056"/>
-            <a:ext cx="91" cy="109728"/>
-          </a:xfrm>
-          <a:prstGeom prst="line">
-            <a:avLst/>
-          </a:prstGeom>
-          <a:noFill/>
-          <a:ln w="12700">
-            <a:solidFill>
-              <a:srgbClr val="687783"/>
-            </a:solidFill>
-            <a:prstDash val="solid"/>
-          </a:ln>
-        </p:spPr>
-      </p:sp>
-      <p:sp>
-        <p:nvSpPr>
-          <p:cNvPr id="60" name="Text 57"/>
-          <p:cNvSpPr txBox="1"/>
-          <p:nvPr/>
-        </p:nvSpPr>
-        <p:spPr>
-          <a:xfrm>
-            <a:off x="4424289" y="2880360"/>
-            <a:ext cx="365760" cy="201168"/>
-          </a:xfrm>
-          <a:prstGeom prst="rect">
-            <a:avLst/>
-          </a:prstGeom>
-          <a:noFill/>
-          <a:ln/>
-        </p:spPr>
-        <p:txBody>
-          <a:bodyPr wrap="square" lIns="0" tIns="0" rIns="0" bIns="0" rtlCol="0" anchor="t"/>
-          <a:lstStyle/>
-          <a:p>
-            <a:pPr algn="ctr" indent="0" marL="0">
-              <a:buNone/>
-            </a:pPr>
-            <a:r>
-              <a:rPr lang="en-US" sz="900" dirty="0">
-                <a:solidFill>
-                  <a:srgbClr val="687783"/>
-                </a:solidFill>
-                <a:latin typeface="Arial" pitchFamily="34" charset="0"/>
-                <a:ea typeface="Arial" pitchFamily="34" charset="-122"/>
-                <a:cs typeface="Arial" pitchFamily="34" charset="-120"/>
-              </a:rPr>
-              <a:t>2</a:t>
-            </a:r>
-            <a:endParaRPr lang="en-US" sz="900" dirty="0"/>
-          </a:p>
-        </p:txBody>
-      </p:sp>
-      <p:sp>
-        <p:nvSpPr>
-          <p:cNvPr id="61" name="Shape 58"/>
-          <p:cNvSpPr/>
-          <p:nvPr/>
-        </p:nvSpPr>
-        <p:spPr>
-          <a:xfrm>
-            <a:off x="4965895" y="2734056"/>
-            <a:ext cx="91" cy="109728"/>
-          </a:xfrm>
-          <a:prstGeom prst="line">
-            <a:avLst/>
-          </a:prstGeom>
-          <a:noFill/>
-          <a:ln w="12700">
-            <a:solidFill>
-              <a:srgbClr val="687783"/>
-            </a:solidFill>
-            <a:prstDash val="solid"/>
-          </a:ln>
-        </p:spPr>
-      </p:sp>
-      <p:sp>
-        <p:nvSpPr>
-          <p:cNvPr id="62" name="Text 59"/>
-          <p:cNvSpPr txBox="1"/>
-          <p:nvPr/>
-        </p:nvSpPr>
-        <p:spPr>
-          <a:xfrm>
-            <a:off x="4783015" y="2880360"/>
-            <a:ext cx="365760" cy="201168"/>
-          </a:xfrm>
-          <a:prstGeom prst="rect">
-            <a:avLst/>
-          </a:prstGeom>
-          <a:noFill/>
-          <a:ln/>
-        </p:spPr>
-        <p:txBody>
-          <a:bodyPr wrap="square" lIns="0" tIns="0" rIns="0" bIns="0" rtlCol="0" anchor="t"/>
-          <a:lstStyle/>
-          <a:p>
-            <a:pPr algn="ctr" indent="0" marL="0">
-              <a:buNone/>
-            </a:pPr>
-            <a:r>
-              <a:rPr lang="en-US" sz="900" dirty="0">
-                <a:solidFill>
-                  <a:srgbClr val="687783"/>
-                </a:solidFill>
-                <a:latin typeface="Arial" pitchFamily="34" charset="0"/>
-                <a:ea typeface="Arial" pitchFamily="34" charset="-122"/>
-                <a:cs typeface="Arial" pitchFamily="34" charset="-120"/>
-              </a:rPr>
-              <a:t>3</a:t>
-            </a:r>
-            <a:endParaRPr lang="en-US" sz="900" dirty="0"/>
-          </a:p>
-        </p:txBody>
-      </p:sp>
-      <p:sp>
-        <p:nvSpPr>
-          <p:cNvPr id="63" name="Shape 60"/>
-          <p:cNvSpPr/>
-          <p:nvPr/>
-        </p:nvSpPr>
-        <p:spPr>
-          <a:xfrm>
-            <a:off x="5324622" y="2734056"/>
-            <a:ext cx="91" cy="109728"/>
-          </a:xfrm>
-          <a:prstGeom prst="line">
-            <a:avLst/>
-          </a:prstGeom>
-          <a:noFill/>
-          <a:ln w="12700">
-            <a:solidFill>
-              <a:srgbClr val="687783"/>
-            </a:solidFill>
-            <a:prstDash val="solid"/>
-          </a:ln>
-        </p:spPr>
-      </p:sp>
-      <p:sp>
-        <p:nvSpPr>
-          <p:cNvPr id="64" name="Text 61"/>
-          <p:cNvSpPr txBox="1"/>
-          <p:nvPr/>
-        </p:nvSpPr>
-        <p:spPr>
-          <a:xfrm>
-            <a:off x="5141742" y="2880360"/>
-            <a:ext cx="365760" cy="201168"/>
-          </a:xfrm>
-          <a:prstGeom prst="rect">
-            <a:avLst/>
-          </a:prstGeom>
-          <a:noFill/>
-          <a:ln/>
-        </p:spPr>
-        <p:txBody>
-          <a:bodyPr wrap="square" lIns="0" tIns="0" rIns="0" bIns="0" rtlCol="0" anchor="t"/>
-          <a:lstStyle/>
-          <a:p>
-            <a:pPr algn="ctr" indent="0" marL="0">
-              <a:buNone/>
-            </a:pPr>
-            <a:r>
-              <a:rPr lang="en-US" sz="900" dirty="0">
-                <a:solidFill>
-                  <a:srgbClr val="687783"/>
-                </a:solidFill>
-                <a:latin typeface="Arial" pitchFamily="34" charset="0"/>
-                <a:ea typeface="Arial" pitchFamily="34" charset="-122"/>
-                <a:cs typeface="Arial" pitchFamily="34" charset="-120"/>
-              </a:rPr>
-              <a:t>4</a:t>
-            </a:r>
-            <a:endParaRPr lang="en-US" sz="900" dirty="0"/>
-          </a:p>
-        </p:txBody>
-      </p:sp>
-      <p:sp>
-        <p:nvSpPr>
-          <p:cNvPr id="65" name="Shape 62"/>
-          <p:cNvSpPr/>
-          <p:nvPr/>
-        </p:nvSpPr>
-        <p:spPr>
-          <a:xfrm>
-            <a:off x="5683348" y="2734056"/>
-            <a:ext cx="91" cy="109728"/>
-          </a:xfrm>
-          <a:prstGeom prst="line">
-            <a:avLst/>
-          </a:prstGeom>
-          <a:noFill/>
-          <a:ln w="12700">
-            <a:solidFill>
-              <a:srgbClr val="687783"/>
-            </a:solidFill>
-            <a:prstDash val="solid"/>
-          </a:ln>
-        </p:spPr>
-      </p:sp>
-      <p:sp>
-        <p:nvSpPr>
-          <p:cNvPr id="66" name="Text 63"/>
-          <p:cNvSpPr txBox="1"/>
-          <p:nvPr/>
-        </p:nvSpPr>
-        <p:spPr>
-          <a:xfrm>
-            <a:off x="5500468" y="2880360"/>
-            <a:ext cx="365760" cy="201168"/>
-          </a:xfrm>
-          <a:prstGeom prst="rect">
-            <a:avLst/>
-          </a:prstGeom>
-          <a:noFill/>
-          <a:ln/>
-        </p:spPr>
-        <p:txBody>
-          <a:bodyPr wrap="square" lIns="0" tIns="0" rIns="0" bIns="0" rtlCol="0" anchor="t"/>
-          <a:lstStyle/>
-          <a:p>
-            <a:pPr algn="ctr" indent="0" marL="0">
-              <a:buNone/>
-            </a:pPr>
-            <a:r>
-              <a:rPr lang="en-US" sz="900" dirty="0">
-                <a:solidFill>
-                  <a:srgbClr val="687783"/>
-                </a:solidFill>
-                <a:latin typeface="Arial" pitchFamily="34" charset="0"/>
-                <a:ea typeface="Arial" pitchFamily="34" charset="-122"/>
-                <a:cs typeface="Arial" pitchFamily="34" charset="-120"/>
-              </a:rPr>
-              <a:t>5</a:t>
-            </a:r>
-            <a:endParaRPr lang="en-US" sz="900" dirty="0"/>
-          </a:p>
-        </p:txBody>
-      </p:sp>
-      <p:sp>
-        <p:nvSpPr>
-          <p:cNvPr id="67" name="Shape 64"/>
-          <p:cNvSpPr/>
-          <p:nvPr/>
-        </p:nvSpPr>
-        <p:spPr>
-          <a:xfrm>
-            <a:off x="6042074" y="2734056"/>
-            <a:ext cx="91" cy="109728"/>
-          </a:xfrm>
-          <a:prstGeom prst="line">
-            <a:avLst/>
-          </a:prstGeom>
-          <a:noFill/>
-          <a:ln w="12700">
-            <a:solidFill>
-              <a:srgbClr val="687783"/>
-            </a:solidFill>
-            <a:prstDash val="solid"/>
-          </a:ln>
-        </p:spPr>
-      </p:sp>
-      <p:sp>
-        <p:nvSpPr>
-          <p:cNvPr id="68" name="Text 65"/>
-          <p:cNvSpPr txBox="1"/>
-          <p:nvPr/>
-        </p:nvSpPr>
-        <p:spPr>
-          <a:xfrm>
-            <a:off x="5859194" y="2880360"/>
-            <a:ext cx="365760" cy="201168"/>
-          </a:xfrm>
-          <a:prstGeom prst="rect">
-            <a:avLst/>
-          </a:prstGeom>
-          <a:noFill/>
-          <a:ln/>
-        </p:spPr>
-        <p:txBody>
-          <a:bodyPr wrap="square" lIns="0" tIns="0" rIns="0" bIns="0" rtlCol="0" anchor="t"/>
-          <a:lstStyle/>
-          <a:p>
-            <a:pPr algn="ctr" indent="0" marL="0">
-              <a:buNone/>
-            </a:pPr>
-            <a:r>
-              <a:rPr lang="en-US" sz="900" dirty="0">
-                <a:solidFill>
-                  <a:srgbClr val="687783"/>
-                </a:solidFill>
-                <a:latin typeface="Arial" pitchFamily="34" charset="0"/>
-                <a:ea typeface="Arial" pitchFamily="34" charset="-122"/>
-                <a:cs typeface="Arial" pitchFamily="34" charset="-120"/>
-              </a:rPr>
-              <a:t>6</a:t>
-            </a:r>
-            <a:endParaRPr lang="en-US" sz="900" dirty="0"/>
-          </a:p>
-        </p:txBody>
-      </p:sp>
-      <p:sp>
-        <p:nvSpPr>
-          <p:cNvPr id="69" name="Shape 66"/>
-          <p:cNvSpPr/>
-          <p:nvPr/>
-        </p:nvSpPr>
-        <p:spPr>
-          <a:xfrm>
-            <a:off x="6400800" y="2734056"/>
-            <a:ext cx="91" cy="109728"/>
-          </a:xfrm>
-          <a:prstGeom prst="line">
-            <a:avLst/>
-          </a:prstGeom>
-          <a:noFill/>
-          <a:ln w="12700">
-            <a:solidFill>
-              <a:srgbClr val="687783"/>
-            </a:solidFill>
-            <a:prstDash val="solid"/>
-          </a:ln>
-        </p:spPr>
-      </p:sp>
-      <p:sp>
-        <p:nvSpPr>
-          <p:cNvPr id="70" name="Text 67"/>
-          <p:cNvSpPr txBox="1"/>
-          <p:nvPr/>
-        </p:nvSpPr>
-        <p:spPr>
-          <a:xfrm>
-            <a:off x="6217920" y="2880360"/>
-            <a:ext cx="365760" cy="201168"/>
-          </a:xfrm>
-          <a:prstGeom prst="rect">
-            <a:avLst/>
-          </a:prstGeom>
-          <a:noFill/>
-          <a:ln/>
-        </p:spPr>
-        <p:txBody>
-          <a:bodyPr wrap="square" lIns="0" tIns="0" rIns="0" bIns="0" rtlCol="0" anchor="t"/>
-          <a:lstStyle/>
-          <a:p>
-            <a:pPr algn="ctr" indent="0" marL="0">
-              <a:buNone/>
-            </a:pPr>
-            <a:r>
-              <a:rPr lang="en-US" sz="900" dirty="0">
-                <a:solidFill>
-                  <a:srgbClr val="687783"/>
-                </a:solidFill>
-                <a:latin typeface="Arial" pitchFamily="34" charset="0"/>
-                <a:ea typeface="Arial" pitchFamily="34" charset="-122"/>
-                <a:cs typeface="Arial" pitchFamily="34" charset="-120"/>
-              </a:rPr>
-              <a:t>7</a:t>
-            </a:r>
-            <a:endParaRPr lang="en-US" sz="900" dirty="0"/>
-          </a:p>
-        </p:txBody>
-      </p:sp>
-      <p:sp>
-        <p:nvSpPr>
-          <p:cNvPr id="71" name="Text 68"/>
-          <p:cNvSpPr txBox="1"/>
-          <p:nvPr/>
-        </p:nvSpPr>
-        <p:spPr>
-          <a:xfrm>
-            <a:off x="685800" y="2606040"/>
-            <a:ext cx="777240" cy="365760"/>
-          </a:xfrm>
-          <a:prstGeom prst="rect">
-            <a:avLst/>
-          </a:prstGeom>
-          <a:noFill/>
-          <a:ln/>
-        </p:spPr>
-        <p:txBody>
-          <a:bodyPr wrap="square" lIns="0" tIns="0" rIns="0" bIns="0" rtlCol="0" anchor="ctr"/>
-          <a:lstStyle/>
-          <a:p>
-            <a:pPr indent="0" marL="0">
-              <a:buNone/>
-            </a:pPr>
-            <a:r>
-              <a:rPr lang="en-US" sz="1500" b="1" dirty="0">
+          <p:cNvPr id="108" name="Text 105"/>
+          <p:cNvSpPr txBox="1"/>
+          <p:nvPr/>
+        </p:nvSpPr>
+        <p:spPr>
+          <a:xfrm>
+            <a:off x="548640" y="4572000"/>
+            <a:ext cx="914400" cy="365760"/>
+          </a:xfrm>
+          <a:prstGeom prst="rect">
+            <a:avLst/>
+          </a:prstGeom>
+          <a:noFill/>
+          <a:ln/>
+        </p:spPr>
+        <p:txBody>
+          <a:bodyPr wrap="square" lIns="0" tIns="0" rIns="0" bIns="0" rtlCol="0" anchor="t"/>
+          <a:lstStyle/>
+          <a:p>
+            <a:pPr indent="0" marL="0">
+              <a:buNone/>
+            </a:pPr>
+            <a:r>
+              <a:rPr lang="en-US" sz="1600" b="1" dirty="0">
+                <a:solidFill>
+                  <a:srgbClr val="1777B4"/>
+                </a:solidFill>
+                <a:latin typeface="Arial" pitchFamily="34" charset="0"/>
+                <a:ea typeface="Arial" pitchFamily="34" charset="-122"/>
+                <a:cs typeface="Arial" pitchFamily="34" charset="-120"/>
+              </a:rPr>
+              <a:t>Find:</a:t>
+            </a:r>
+            <a:endParaRPr lang="en-US" sz="1600" dirty="0"/>
+          </a:p>
+        </p:txBody>
+      </p:sp>
+      <p:sp>
+        <p:nvSpPr>
+          <p:cNvPr id="109" name="Text 106"/>
+          <p:cNvSpPr txBox="1"/>
+          <p:nvPr/>
+        </p:nvSpPr>
+        <p:spPr>
+          <a:xfrm>
+            <a:off x="1463040" y="4526280"/>
+            <a:ext cx="5486400" cy="457200"/>
+          </a:xfrm>
+          <a:prstGeom prst="rect">
+            <a:avLst/>
+          </a:prstGeom>
+          <a:noFill/>
+          <a:ln/>
+        </p:spPr>
+        <p:txBody>
+          <a:bodyPr wrap="square" lIns="0" tIns="0" rIns="0" bIns="0" rtlCol="0" anchor="t"/>
+          <a:lstStyle/>
+          <a:p>
+            <a:pPr indent="0" marL="0">
+              <a:buNone/>
+            </a:pPr>
+            <a:r>
+              <a:rPr lang="en-US" sz="2200" dirty="0">
                 <a:solidFill>
                   <a:srgbClr val="11344E"/>
                 </a:solidFill>
@@ -7930,1193 +9116,7 @@
                 <a:ea typeface="Times New Roman" pitchFamily="34" charset="-122"/>
                 <a:cs typeface="Times New Roman" pitchFamily="34" charset="-120"/>
               </a:rPr>
-              <a:t>B:</a:t>
-            </a:r>
-            <a:endParaRPr lang="en-US" sz="1500" dirty="0"/>
-          </a:p>
-        </p:txBody>
-      </p:sp>
-      <p:sp>
-        <p:nvSpPr>
-          <p:cNvPr id="72" name="Shape 69"/>
-          <p:cNvSpPr/>
-          <p:nvPr/>
-        </p:nvSpPr>
-        <p:spPr>
-          <a:xfrm>
-            <a:off x="2096086" y="2788920"/>
-            <a:ext cx="4441874" cy="0"/>
-          </a:xfrm>
-          <a:prstGeom prst="line">
-            <a:avLst/>
-          </a:prstGeom>
-          <a:noFill/>
-          <a:ln w="63500">
-            <a:solidFill>
-              <a:srgbClr val="1777B4"/>
-            </a:solidFill>
-            <a:prstDash val="solid"/>
-            <a:tailEnd type="triangle"/>
-          </a:ln>
-        </p:spPr>
-      </p:sp>
-      <p:sp>
-        <p:nvSpPr>
-          <p:cNvPr id="73" name="Shape 70"/>
-          <p:cNvSpPr/>
-          <p:nvPr/>
-        </p:nvSpPr>
-        <p:spPr>
-          <a:xfrm>
-            <a:off x="2013790" y="2706624"/>
-            <a:ext cx="164592" cy="164592"/>
-          </a:xfrm>
-          <a:prstGeom prst="ellipse">
-            <a:avLst/>
-          </a:prstGeom>
-          <a:solidFill>
-            <a:srgbClr val="1777B4"/>
-          </a:solidFill>
-          <a:ln w="25400">
-            <a:solidFill>
-              <a:srgbClr val="1777B4"/>
-            </a:solidFill>
-            <a:prstDash val="solid"/>
-          </a:ln>
-        </p:spPr>
-      </p:sp>
-      <p:sp>
-        <p:nvSpPr>
-          <p:cNvPr id="74" name="Text 71"/>
-          <p:cNvSpPr txBox="1"/>
-          <p:nvPr/>
-        </p:nvSpPr>
-        <p:spPr>
-          <a:xfrm>
-            <a:off x="548640" y="2953512"/>
-            <a:ext cx="1097280" cy="274320"/>
-          </a:xfrm>
-          <a:prstGeom prst="rect">
-            <a:avLst/>
-          </a:prstGeom>
-          <a:noFill/>
-          <a:ln/>
-        </p:spPr>
-        <p:txBody>
-          <a:bodyPr wrap="square" lIns="0" tIns="0" rIns="0" bIns="0" rtlCol="0" anchor="t"/>
-          <a:lstStyle/>
-          <a:p>
-            <a:pPr indent="0" marL="0">
-              <a:buNone/>
-            </a:pPr>
-            <a:r>
-              <a:rPr lang="en-US" sz="1300" dirty="0">
-                <a:solidFill>
-                  <a:srgbClr val="687783"/>
-                </a:solidFill>
-                <a:latin typeface="Times New Roman" pitchFamily="34" charset="0"/>
-                <a:ea typeface="Times New Roman" pitchFamily="34" charset="-122"/>
-                <a:cs typeface="Times New Roman" pitchFamily="34" charset="-120"/>
-              </a:rPr>
-              <a:t>x ≥ −5</a:t>
-            </a:r>
-            <a:endParaRPr lang="en-US" sz="1300" dirty="0"/>
-          </a:p>
-        </p:txBody>
-      </p:sp>
-      <p:sp>
-        <p:nvSpPr>
-          <p:cNvPr id="75" name="Shape 72"/>
-          <p:cNvSpPr/>
-          <p:nvPr/>
-        </p:nvSpPr>
-        <p:spPr>
-          <a:xfrm>
-            <a:off x="1600200" y="3703320"/>
-            <a:ext cx="4937760" cy="91"/>
-          </a:xfrm>
-          <a:prstGeom prst="line">
-            <a:avLst/>
-          </a:prstGeom>
-          <a:noFill/>
-          <a:ln w="15875">
-            <a:solidFill>
-              <a:srgbClr val="687783"/>
-            </a:solidFill>
-            <a:prstDash val="solid"/>
-            <a:headEnd type="triangle"/>
-            <a:tailEnd type="triangle"/>
-          </a:ln>
-        </p:spPr>
-      </p:sp>
-      <p:sp>
-        <p:nvSpPr>
-          <p:cNvPr id="76" name="Shape 73"/>
-          <p:cNvSpPr/>
-          <p:nvPr/>
-        </p:nvSpPr>
-        <p:spPr>
-          <a:xfrm>
-            <a:off x="1737360" y="3648456"/>
-            <a:ext cx="91" cy="109728"/>
-          </a:xfrm>
-          <a:prstGeom prst="line">
-            <a:avLst/>
-          </a:prstGeom>
-          <a:noFill/>
-          <a:ln w="12700">
-            <a:solidFill>
-              <a:srgbClr val="687783"/>
-            </a:solidFill>
-            <a:prstDash val="solid"/>
-          </a:ln>
-        </p:spPr>
-      </p:sp>
-      <p:sp>
-        <p:nvSpPr>
-          <p:cNvPr id="77" name="Text 74"/>
-          <p:cNvSpPr txBox="1"/>
-          <p:nvPr/>
-        </p:nvSpPr>
-        <p:spPr>
-          <a:xfrm>
-            <a:off x="1554480" y="3794760"/>
-            <a:ext cx="365760" cy="201168"/>
-          </a:xfrm>
-          <a:prstGeom prst="rect">
-            <a:avLst/>
-          </a:prstGeom>
-          <a:noFill/>
-          <a:ln/>
-        </p:spPr>
-        <p:txBody>
-          <a:bodyPr wrap="square" lIns="0" tIns="0" rIns="0" bIns="0" rtlCol="0" anchor="t"/>
-          <a:lstStyle/>
-          <a:p>
-            <a:pPr algn="ctr" indent="0" marL="0">
-              <a:buNone/>
-            </a:pPr>
-            <a:r>
-              <a:rPr lang="en-US" sz="900" dirty="0">
-                <a:solidFill>
-                  <a:srgbClr val="687783"/>
-                </a:solidFill>
-                <a:latin typeface="Arial" pitchFamily="34" charset="0"/>
-                <a:ea typeface="Arial" pitchFamily="34" charset="-122"/>
-                <a:cs typeface="Arial" pitchFamily="34" charset="-120"/>
-              </a:rPr>
-              <a:t>−6</a:t>
-            </a:r>
-            <a:endParaRPr lang="en-US" sz="900" dirty="0"/>
-          </a:p>
-        </p:txBody>
-      </p:sp>
-      <p:sp>
-        <p:nvSpPr>
-          <p:cNvPr id="78" name="Shape 75"/>
-          <p:cNvSpPr/>
-          <p:nvPr/>
-        </p:nvSpPr>
-        <p:spPr>
-          <a:xfrm>
-            <a:off x="2096086" y="3648456"/>
-            <a:ext cx="91" cy="109728"/>
-          </a:xfrm>
-          <a:prstGeom prst="line">
-            <a:avLst/>
-          </a:prstGeom>
-          <a:noFill/>
-          <a:ln w="12700">
-            <a:solidFill>
-              <a:srgbClr val="687783"/>
-            </a:solidFill>
-            <a:prstDash val="solid"/>
-          </a:ln>
-        </p:spPr>
-      </p:sp>
-      <p:sp>
-        <p:nvSpPr>
-          <p:cNvPr id="79" name="Text 76"/>
-          <p:cNvSpPr txBox="1"/>
-          <p:nvPr/>
-        </p:nvSpPr>
-        <p:spPr>
-          <a:xfrm>
-            <a:off x="1913206" y="3794760"/>
-            <a:ext cx="365760" cy="201168"/>
-          </a:xfrm>
-          <a:prstGeom prst="rect">
-            <a:avLst/>
-          </a:prstGeom>
-          <a:noFill/>
-          <a:ln/>
-        </p:spPr>
-        <p:txBody>
-          <a:bodyPr wrap="square" lIns="0" tIns="0" rIns="0" bIns="0" rtlCol="0" anchor="t"/>
-          <a:lstStyle/>
-          <a:p>
-            <a:pPr algn="ctr" indent="0" marL="0">
-              <a:buNone/>
-            </a:pPr>
-            <a:r>
-              <a:rPr lang="en-US" sz="900" dirty="0">
-                <a:solidFill>
-                  <a:srgbClr val="687783"/>
-                </a:solidFill>
-                <a:latin typeface="Arial" pitchFamily="34" charset="0"/>
-                <a:ea typeface="Arial" pitchFamily="34" charset="-122"/>
-                <a:cs typeface="Arial" pitchFamily="34" charset="-120"/>
-              </a:rPr>
-              <a:t>−5</a:t>
-            </a:r>
-            <a:endParaRPr lang="en-US" sz="900" dirty="0"/>
-          </a:p>
-        </p:txBody>
-      </p:sp>
-      <p:sp>
-        <p:nvSpPr>
-          <p:cNvPr id="80" name="Shape 77"/>
-          <p:cNvSpPr/>
-          <p:nvPr/>
-        </p:nvSpPr>
-        <p:spPr>
-          <a:xfrm>
-            <a:off x="2454812" y="3648456"/>
-            <a:ext cx="91" cy="109728"/>
-          </a:xfrm>
-          <a:prstGeom prst="line">
-            <a:avLst/>
-          </a:prstGeom>
-          <a:noFill/>
-          <a:ln w="12700">
-            <a:solidFill>
-              <a:srgbClr val="687783"/>
-            </a:solidFill>
-            <a:prstDash val="solid"/>
-          </a:ln>
-        </p:spPr>
-      </p:sp>
-      <p:sp>
-        <p:nvSpPr>
-          <p:cNvPr id="81" name="Text 78"/>
-          <p:cNvSpPr txBox="1"/>
-          <p:nvPr/>
-        </p:nvSpPr>
-        <p:spPr>
-          <a:xfrm>
-            <a:off x="2271932" y="3794760"/>
-            <a:ext cx="365760" cy="201168"/>
-          </a:xfrm>
-          <a:prstGeom prst="rect">
-            <a:avLst/>
-          </a:prstGeom>
-          <a:noFill/>
-          <a:ln/>
-        </p:spPr>
-        <p:txBody>
-          <a:bodyPr wrap="square" lIns="0" tIns="0" rIns="0" bIns="0" rtlCol="0" anchor="t"/>
-          <a:lstStyle/>
-          <a:p>
-            <a:pPr algn="ctr" indent="0" marL="0">
-              <a:buNone/>
-            </a:pPr>
-            <a:r>
-              <a:rPr lang="en-US" sz="900" dirty="0">
-                <a:solidFill>
-                  <a:srgbClr val="687783"/>
-                </a:solidFill>
-                <a:latin typeface="Arial" pitchFamily="34" charset="0"/>
-                <a:ea typeface="Arial" pitchFamily="34" charset="-122"/>
-                <a:cs typeface="Arial" pitchFamily="34" charset="-120"/>
-              </a:rPr>
-              <a:t>−4</a:t>
-            </a:r>
-            <a:endParaRPr lang="en-US" sz="900" dirty="0"/>
-          </a:p>
-        </p:txBody>
-      </p:sp>
-      <p:sp>
-        <p:nvSpPr>
-          <p:cNvPr id="82" name="Shape 79"/>
-          <p:cNvSpPr/>
-          <p:nvPr/>
-        </p:nvSpPr>
-        <p:spPr>
-          <a:xfrm>
-            <a:off x="2813538" y="3648456"/>
-            <a:ext cx="91" cy="109728"/>
-          </a:xfrm>
-          <a:prstGeom prst="line">
-            <a:avLst/>
-          </a:prstGeom>
-          <a:noFill/>
-          <a:ln w="12700">
-            <a:solidFill>
-              <a:srgbClr val="687783"/>
-            </a:solidFill>
-            <a:prstDash val="solid"/>
-          </a:ln>
-        </p:spPr>
-      </p:sp>
-      <p:sp>
-        <p:nvSpPr>
-          <p:cNvPr id="83" name="Text 80"/>
-          <p:cNvSpPr txBox="1"/>
-          <p:nvPr/>
-        </p:nvSpPr>
-        <p:spPr>
-          <a:xfrm>
-            <a:off x="2630658" y="3794760"/>
-            <a:ext cx="365760" cy="201168"/>
-          </a:xfrm>
-          <a:prstGeom prst="rect">
-            <a:avLst/>
-          </a:prstGeom>
-          <a:noFill/>
-          <a:ln/>
-        </p:spPr>
-        <p:txBody>
-          <a:bodyPr wrap="square" lIns="0" tIns="0" rIns="0" bIns="0" rtlCol="0" anchor="t"/>
-          <a:lstStyle/>
-          <a:p>
-            <a:pPr algn="ctr" indent="0" marL="0">
-              <a:buNone/>
-            </a:pPr>
-            <a:r>
-              <a:rPr lang="en-US" sz="900" dirty="0">
-                <a:solidFill>
-                  <a:srgbClr val="687783"/>
-                </a:solidFill>
-                <a:latin typeface="Arial" pitchFamily="34" charset="0"/>
-                <a:ea typeface="Arial" pitchFamily="34" charset="-122"/>
-                <a:cs typeface="Arial" pitchFamily="34" charset="-120"/>
-              </a:rPr>
-              <a:t>−3</a:t>
-            </a:r>
-            <a:endParaRPr lang="en-US" sz="900" dirty="0"/>
-          </a:p>
-        </p:txBody>
-      </p:sp>
-      <p:sp>
-        <p:nvSpPr>
-          <p:cNvPr id="84" name="Shape 81"/>
-          <p:cNvSpPr/>
-          <p:nvPr/>
-        </p:nvSpPr>
-        <p:spPr>
-          <a:xfrm>
-            <a:off x="3172265" y="3648456"/>
-            <a:ext cx="91" cy="109728"/>
-          </a:xfrm>
-          <a:prstGeom prst="line">
-            <a:avLst/>
-          </a:prstGeom>
-          <a:noFill/>
-          <a:ln w="12700">
-            <a:solidFill>
-              <a:srgbClr val="687783"/>
-            </a:solidFill>
-            <a:prstDash val="solid"/>
-          </a:ln>
-        </p:spPr>
-      </p:sp>
-      <p:sp>
-        <p:nvSpPr>
-          <p:cNvPr id="85" name="Text 82"/>
-          <p:cNvSpPr txBox="1"/>
-          <p:nvPr/>
-        </p:nvSpPr>
-        <p:spPr>
-          <a:xfrm>
-            <a:off x="2989385" y="3794760"/>
-            <a:ext cx="365760" cy="201168"/>
-          </a:xfrm>
-          <a:prstGeom prst="rect">
-            <a:avLst/>
-          </a:prstGeom>
-          <a:noFill/>
-          <a:ln/>
-        </p:spPr>
-        <p:txBody>
-          <a:bodyPr wrap="square" lIns="0" tIns="0" rIns="0" bIns="0" rtlCol="0" anchor="t"/>
-          <a:lstStyle/>
-          <a:p>
-            <a:pPr algn="ctr" indent="0" marL="0">
-              <a:buNone/>
-            </a:pPr>
-            <a:r>
-              <a:rPr lang="en-US" sz="900" dirty="0">
-                <a:solidFill>
-                  <a:srgbClr val="687783"/>
-                </a:solidFill>
-                <a:latin typeface="Arial" pitchFamily="34" charset="0"/>
-                <a:ea typeface="Arial" pitchFamily="34" charset="-122"/>
-                <a:cs typeface="Arial" pitchFamily="34" charset="-120"/>
-              </a:rPr>
-              <a:t>−2</a:t>
-            </a:r>
-            <a:endParaRPr lang="en-US" sz="900" dirty="0"/>
-          </a:p>
-        </p:txBody>
-      </p:sp>
-      <p:sp>
-        <p:nvSpPr>
-          <p:cNvPr id="86" name="Shape 83"/>
-          <p:cNvSpPr/>
-          <p:nvPr/>
-        </p:nvSpPr>
-        <p:spPr>
-          <a:xfrm>
-            <a:off x="3530991" y="3648456"/>
-            <a:ext cx="91" cy="109728"/>
-          </a:xfrm>
-          <a:prstGeom prst="line">
-            <a:avLst/>
-          </a:prstGeom>
-          <a:noFill/>
-          <a:ln w="12700">
-            <a:solidFill>
-              <a:srgbClr val="687783"/>
-            </a:solidFill>
-            <a:prstDash val="solid"/>
-          </a:ln>
-        </p:spPr>
-      </p:sp>
-      <p:sp>
-        <p:nvSpPr>
-          <p:cNvPr id="87" name="Text 84"/>
-          <p:cNvSpPr txBox="1"/>
-          <p:nvPr/>
-        </p:nvSpPr>
-        <p:spPr>
-          <a:xfrm>
-            <a:off x="3348111" y="3794760"/>
-            <a:ext cx="365760" cy="201168"/>
-          </a:xfrm>
-          <a:prstGeom prst="rect">
-            <a:avLst/>
-          </a:prstGeom>
-          <a:noFill/>
-          <a:ln/>
-        </p:spPr>
-        <p:txBody>
-          <a:bodyPr wrap="square" lIns="0" tIns="0" rIns="0" bIns="0" rtlCol="0" anchor="t"/>
-          <a:lstStyle/>
-          <a:p>
-            <a:pPr algn="ctr" indent="0" marL="0">
-              <a:buNone/>
-            </a:pPr>
-            <a:r>
-              <a:rPr lang="en-US" sz="900" dirty="0">
-                <a:solidFill>
-                  <a:srgbClr val="687783"/>
-                </a:solidFill>
-                <a:latin typeface="Arial" pitchFamily="34" charset="0"/>
-                <a:ea typeface="Arial" pitchFamily="34" charset="-122"/>
-                <a:cs typeface="Arial" pitchFamily="34" charset="-120"/>
-              </a:rPr>
-              <a:t>−1</a:t>
-            </a:r>
-            <a:endParaRPr lang="en-US" sz="900" dirty="0"/>
-          </a:p>
-        </p:txBody>
-      </p:sp>
-      <p:sp>
-        <p:nvSpPr>
-          <p:cNvPr id="88" name="Shape 85"/>
-          <p:cNvSpPr/>
-          <p:nvPr/>
-        </p:nvSpPr>
-        <p:spPr>
-          <a:xfrm>
-            <a:off x="3889717" y="3648456"/>
-            <a:ext cx="91" cy="109728"/>
-          </a:xfrm>
-          <a:prstGeom prst="line">
-            <a:avLst/>
-          </a:prstGeom>
-          <a:noFill/>
-          <a:ln w="12700">
-            <a:solidFill>
-              <a:srgbClr val="687783"/>
-            </a:solidFill>
-            <a:prstDash val="solid"/>
-          </a:ln>
-        </p:spPr>
-      </p:sp>
-      <p:sp>
-        <p:nvSpPr>
-          <p:cNvPr id="89" name="Text 86"/>
-          <p:cNvSpPr txBox="1"/>
-          <p:nvPr/>
-        </p:nvSpPr>
-        <p:spPr>
-          <a:xfrm>
-            <a:off x="3706837" y="3794760"/>
-            <a:ext cx="365760" cy="201168"/>
-          </a:xfrm>
-          <a:prstGeom prst="rect">
-            <a:avLst/>
-          </a:prstGeom>
-          <a:noFill/>
-          <a:ln/>
-        </p:spPr>
-        <p:txBody>
-          <a:bodyPr wrap="square" lIns="0" tIns="0" rIns="0" bIns="0" rtlCol="0" anchor="t"/>
-          <a:lstStyle/>
-          <a:p>
-            <a:pPr algn="ctr" indent="0" marL="0">
-              <a:buNone/>
-            </a:pPr>
-            <a:r>
-              <a:rPr lang="en-US" sz="900" dirty="0">
-                <a:solidFill>
-                  <a:srgbClr val="687783"/>
-                </a:solidFill>
-                <a:latin typeface="Arial" pitchFamily="34" charset="0"/>
-                <a:ea typeface="Arial" pitchFamily="34" charset="-122"/>
-                <a:cs typeface="Arial" pitchFamily="34" charset="-120"/>
-              </a:rPr>
-              <a:t>0</a:t>
-            </a:r>
-            <a:endParaRPr lang="en-US" sz="900" dirty="0"/>
-          </a:p>
-        </p:txBody>
-      </p:sp>
-      <p:sp>
-        <p:nvSpPr>
-          <p:cNvPr id="90" name="Shape 87"/>
-          <p:cNvSpPr/>
-          <p:nvPr/>
-        </p:nvSpPr>
-        <p:spPr>
-          <a:xfrm>
-            <a:off x="4248443" y="3648456"/>
-            <a:ext cx="91" cy="109728"/>
-          </a:xfrm>
-          <a:prstGeom prst="line">
-            <a:avLst/>
-          </a:prstGeom>
-          <a:noFill/>
-          <a:ln w="12700">
-            <a:solidFill>
-              <a:srgbClr val="687783"/>
-            </a:solidFill>
-            <a:prstDash val="solid"/>
-          </a:ln>
-        </p:spPr>
-      </p:sp>
-      <p:sp>
-        <p:nvSpPr>
-          <p:cNvPr id="91" name="Text 88"/>
-          <p:cNvSpPr txBox="1"/>
-          <p:nvPr/>
-        </p:nvSpPr>
-        <p:spPr>
-          <a:xfrm>
-            <a:off x="4065563" y="3794760"/>
-            <a:ext cx="365760" cy="201168"/>
-          </a:xfrm>
-          <a:prstGeom prst="rect">
-            <a:avLst/>
-          </a:prstGeom>
-          <a:noFill/>
-          <a:ln/>
-        </p:spPr>
-        <p:txBody>
-          <a:bodyPr wrap="square" lIns="0" tIns="0" rIns="0" bIns="0" rtlCol="0" anchor="t"/>
-          <a:lstStyle/>
-          <a:p>
-            <a:pPr algn="ctr" indent="0" marL="0">
-              <a:buNone/>
-            </a:pPr>
-            <a:r>
-              <a:rPr lang="en-US" sz="900" dirty="0">
-                <a:solidFill>
-                  <a:srgbClr val="687783"/>
-                </a:solidFill>
-                <a:latin typeface="Arial" pitchFamily="34" charset="0"/>
-                <a:ea typeface="Arial" pitchFamily="34" charset="-122"/>
-                <a:cs typeface="Arial" pitchFamily="34" charset="-120"/>
-              </a:rPr>
-              <a:t>1</a:t>
-            </a:r>
-            <a:endParaRPr lang="en-US" sz="900" dirty="0"/>
-          </a:p>
-        </p:txBody>
-      </p:sp>
-      <p:sp>
-        <p:nvSpPr>
-          <p:cNvPr id="92" name="Shape 89"/>
-          <p:cNvSpPr/>
-          <p:nvPr/>
-        </p:nvSpPr>
-        <p:spPr>
-          <a:xfrm>
-            <a:off x="4607169" y="3648456"/>
-            <a:ext cx="91" cy="109728"/>
-          </a:xfrm>
-          <a:prstGeom prst="line">
-            <a:avLst/>
-          </a:prstGeom>
-          <a:noFill/>
-          <a:ln w="12700">
-            <a:solidFill>
-              <a:srgbClr val="687783"/>
-            </a:solidFill>
-            <a:prstDash val="solid"/>
-          </a:ln>
-        </p:spPr>
-      </p:sp>
-      <p:sp>
-        <p:nvSpPr>
-          <p:cNvPr id="93" name="Text 90"/>
-          <p:cNvSpPr txBox="1"/>
-          <p:nvPr/>
-        </p:nvSpPr>
-        <p:spPr>
-          <a:xfrm>
-            <a:off x="4424289" y="3794760"/>
-            <a:ext cx="365760" cy="201168"/>
-          </a:xfrm>
-          <a:prstGeom prst="rect">
-            <a:avLst/>
-          </a:prstGeom>
-          <a:noFill/>
-          <a:ln/>
-        </p:spPr>
-        <p:txBody>
-          <a:bodyPr wrap="square" lIns="0" tIns="0" rIns="0" bIns="0" rtlCol="0" anchor="t"/>
-          <a:lstStyle/>
-          <a:p>
-            <a:pPr algn="ctr" indent="0" marL="0">
-              <a:buNone/>
-            </a:pPr>
-            <a:r>
-              <a:rPr lang="en-US" sz="900" dirty="0">
-                <a:solidFill>
-                  <a:srgbClr val="687783"/>
-                </a:solidFill>
-                <a:latin typeface="Arial" pitchFamily="34" charset="0"/>
-                <a:ea typeface="Arial" pitchFamily="34" charset="-122"/>
-                <a:cs typeface="Arial" pitchFamily="34" charset="-120"/>
-              </a:rPr>
-              <a:t>2</a:t>
-            </a:r>
-            <a:endParaRPr lang="en-US" sz="900" dirty="0"/>
-          </a:p>
-        </p:txBody>
-      </p:sp>
-      <p:sp>
-        <p:nvSpPr>
-          <p:cNvPr id="94" name="Shape 91"/>
-          <p:cNvSpPr/>
-          <p:nvPr/>
-        </p:nvSpPr>
-        <p:spPr>
-          <a:xfrm>
-            <a:off x="4965895" y="3648456"/>
-            <a:ext cx="91" cy="109728"/>
-          </a:xfrm>
-          <a:prstGeom prst="line">
-            <a:avLst/>
-          </a:prstGeom>
-          <a:noFill/>
-          <a:ln w="12700">
-            <a:solidFill>
-              <a:srgbClr val="687783"/>
-            </a:solidFill>
-            <a:prstDash val="solid"/>
-          </a:ln>
-        </p:spPr>
-      </p:sp>
-      <p:sp>
-        <p:nvSpPr>
-          <p:cNvPr id="95" name="Text 92"/>
-          <p:cNvSpPr txBox="1"/>
-          <p:nvPr/>
-        </p:nvSpPr>
-        <p:spPr>
-          <a:xfrm>
-            <a:off x="4783015" y="3794760"/>
-            <a:ext cx="365760" cy="201168"/>
-          </a:xfrm>
-          <a:prstGeom prst="rect">
-            <a:avLst/>
-          </a:prstGeom>
-          <a:noFill/>
-          <a:ln/>
-        </p:spPr>
-        <p:txBody>
-          <a:bodyPr wrap="square" lIns="0" tIns="0" rIns="0" bIns="0" rtlCol="0" anchor="t"/>
-          <a:lstStyle/>
-          <a:p>
-            <a:pPr algn="ctr" indent="0" marL="0">
-              <a:buNone/>
-            </a:pPr>
-            <a:r>
-              <a:rPr lang="en-US" sz="900" dirty="0">
-                <a:solidFill>
-                  <a:srgbClr val="687783"/>
-                </a:solidFill>
-                <a:latin typeface="Arial" pitchFamily="34" charset="0"/>
-                <a:ea typeface="Arial" pitchFamily="34" charset="-122"/>
-                <a:cs typeface="Arial" pitchFamily="34" charset="-120"/>
-              </a:rPr>
-              <a:t>3</a:t>
-            </a:r>
-            <a:endParaRPr lang="en-US" sz="900" dirty="0"/>
-          </a:p>
-        </p:txBody>
-      </p:sp>
-      <p:sp>
-        <p:nvSpPr>
-          <p:cNvPr id="96" name="Shape 93"/>
-          <p:cNvSpPr/>
-          <p:nvPr/>
-        </p:nvSpPr>
-        <p:spPr>
-          <a:xfrm>
-            <a:off x="5324622" y="3648456"/>
-            <a:ext cx="91" cy="109728"/>
-          </a:xfrm>
-          <a:prstGeom prst="line">
-            <a:avLst/>
-          </a:prstGeom>
-          <a:noFill/>
-          <a:ln w="12700">
-            <a:solidFill>
-              <a:srgbClr val="687783"/>
-            </a:solidFill>
-            <a:prstDash val="solid"/>
-          </a:ln>
-        </p:spPr>
-      </p:sp>
-      <p:sp>
-        <p:nvSpPr>
-          <p:cNvPr id="97" name="Text 94"/>
-          <p:cNvSpPr txBox="1"/>
-          <p:nvPr/>
-        </p:nvSpPr>
-        <p:spPr>
-          <a:xfrm>
-            <a:off x="5141742" y="3794760"/>
-            <a:ext cx="365760" cy="201168"/>
-          </a:xfrm>
-          <a:prstGeom prst="rect">
-            <a:avLst/>
-          </a:prstGeom>
-          <a:noFill/>
-          <a:ln/>
-        </p:spPr>
-        <p:txBody>
-          <a:bodyPr wrap="square" lIns="0" tIns="0" rIns="0" bIns="0" rtlCol="0" anchor="t"/>
-          <a:lstStyle/>
-          <a:p>
-            <a:pPr algn="ctr" indent="0" marL="0">
-              <a:buNone/>
-            </a:pPr>
-            <a:r>
-              <a:rPr lang="en-US" sz="900" dirty="0">
-                <a:solidFill>
-                  <a:srgbClr val="687783"/>
-                </a:solidFill>
-                <a:latin typeface="Arial" pitchFamily="34" charset="0"/>
-                <a:ea typeface="Arial" pitchFamily="34" charset="-122"/>
-                <a:cs typeface="Arial" pitchFamily="34" charset="-120"/>
-              </a:rPr>
-              <a:t>4</a:t>
-            </a:r>
-            <a:endParaRPr lang="en-US" sz="900" dirty="0"/>
-          </a:p>
-        </p:txBody>
-      </p:sp>
-      <p:sp>
-        <p:nvSpPr>
-          <p:cNvPr id="98" name="Shape 95"/>
-          <p:cNvSpPr/>
-          <p:nvPr/>
-        </p:nvSpPr>
-        <p:spPr>
-          <a:xfrm>
-            <a:off x="5683348" y="3648456"/>
-            <a:ext cx="91" cy="109728"/>
-          </a:xfrm>
-          <a:prstGeom prst="line">
-            <a:avLst/>
-          </a:prstGeom>
-          <a:noFill/>
-          <a:ln w="12700">
-            <a:solidFill>
-              <a:srgbClr val="687783"/>
-            </a:solidFill>
-            <a:prstDash val="solid"/>
-          </a:ln>
-        </p:spPr>
-      </p:sp>
-      <p:sp>
-        <p:nvSpPr>
-          <p:cNvPr id="99" name="Text 96"/>
-          <p:cNvSpPr txBox="1"/>
-          <p:nvPr/>
-        </p:nvSpPr>
-        <p:spPr>
-          <a:xfrm>
-            <a:off x="5500468" y="3794760"/>
-            <a:ext cx="365760" cy="201168"/>
-          </a:xfrm>
-          <a:prstGeom prst="rect">
-            <a:avLst/>
-          </a:prstGeom>
-          <a:noFill/>
-          <a:ln/>
-        </p:spPr>
-        <p:txBody>
-          <a:bodyPr wrap="square" lIns="0" tIns="0" rIns="0" bIns="0" rtlCol="0" anchor="t"/>
-          <a:lstStyle/>
-          <a:p>
-            <a:pPr algn="ctr" indent="0" marL="0">
-              <a:buNone/>
-            </a:pPr>
-            <a:r>
-              <a:rPr lang="en-US" sz="900" dirty="0">
-                <a:solidFill>
-                  <a:srgbClr val="687783"/>
-                </a:solidFill>
-                <a:latin typeface="Arial" pitchFamily="34" charset="0"/>
-                <a:ea typeface="Arial" pitchFamily="34" charset="-122"/>
-                <a:cs typeface="Arial" pitchFamily="34" charset="-120"/>
-              </a:rPr>
-              <a:t>5</a:t>
-            </a:r>
-            <a:endParaRPr lang="en-US" sz="900" dirty="0"/>
-          </a:p>
-        </p:txBody>
-      </p:sp>
-      <p:sp>
-        <p:nvSpPr>
-          <p:cNvPr id="100" name="Shape 97"/>
-          <p:cNvSpPr/>
-          <p:nvPr/>
-        </p:nvSpPr>
-        <p:spPr>
-          <a:xfrm>
-            <a:off x="6042074" y="3648456"/>
-            <a:ext cx="91" cy="109728"/>
-          </a:xfrm>
-          <a:prstGeom prst="line">
-            <a:avLst/>
-          </a:prstGeom>
-          <a:noFill/>
-          <a:ln w="12700">
-            <a:solidFill>
-              <a:srgbClr val="687783"/>
-            </a:solidFill>
-            <a:prstDash val="solid"/>
-          </a:ln>
-        </p:spPr>
-      </p:sp>
-      <p:sp>
-        <p:nvSpPr>
-          <p:cNvPr id="101" name="Text 98"/>
-          <p:cNvSpPr txBox="1"/>
-          <p:nvPr/>
-        </p:nvSpPr>
-        <p:spPr>
-          <a:xfrm>
-            <a:off x="5859194" y="3794760"/>
-            <a:ext cx="365760" cy="201168"/>
-          </a:xfrm>
-          <a:prstGeom prst="rect">
-            <a:avLst/>
-          </a:prstGeom>
-          <a:noFill/>
-          <a:ln/>
-        </p:spPr>
-        <p:txBody>
-          <a:bodyPr wrap="square" lIns="0" tIns="0" rIns="0" bIns="0" rtlCol="0" anchor="t"/>
-          <a:lstStyle/>
-          <a:p>
-            <a:pPr algn="ctr" indent="0" marL="0">
-              <a:buNone/>
-            </a:pPr>
-            <a:r>
-              <a:rPr lang="en-US" sz="900" dirty="0">
-                <a:solidFill>
-                  <a:srgbClr val="687783"/>
-                </a:solidFill>
-                <a:latin typeface="Arial" pitchFamily="34" charset="0"/>
-                <a:ea typeface="Arial" pitchFamily="34" charset="-122"/>
-                <a:cs typeface="Arial" pitchFamily="34" charset="-120"/>
-              </a:rPr>
-              <a:t>6</a:t>
-            </a:r>
-            <a:endParaRPr lang="en-US" sz="900" dirty="0"/>
-          </a:p>
-        </p:txBody>
-      </p:sp>
-      <p:sp>
-        <p:nvSpPr>
-          <p:cNvPr id="102" name="Shape 99"/>
-          <p:cNvSpPr/>
-          <p:nvPr/>
-        </p:nvSpPr>
-        <p:spPr>
-          <a:xfrm>
-            <a:off x="6400800" y="3648456"/>
-            <a:ext cx="91" cy="109728"/>
-          </a:xfrm>
-          <a:prstGeom prst="line">
-            <a:avLst/>
-          </a:prstGeom>
-          <a:noFill/>
-          <a:ln w="12700">
-            <a:solidFill>
-              <a:srgbClr val="687783"/>
-            </a:solidFill>
-            <a:prstDash val="solid"/>
-          </a:ln>
-        </p:spPr>
-      </p:sp>
-      <p:sp>
-        <p:nvSpPr>
-          <p:cNvPr id="103" name="Text 100"/>
-          <p:cNvSpPr txBox="1"/>
-          <p:nvPr/>
-        </p:nvSpPr>
-        <p:spPr>
-          <a:xfrm>
-            <a:off x="6217920" y="3794760"/>
-            <a:ext cx="365760" cy="201168"/>
-          </a:xfrm>
-          <a:prstGeom prst="rect">
-            <a:avLst/>
-          </a:prstGeom>
-          <a:noFill/>
-          <a:ln/>
-        </p:spPr>
-        <p:txBody>
-          <a:bodyPr wrap="square" lIns="0" tIns="0" rIns="0" bIns="0" rtlCol="0" anchor="t"/>
-          <a:lstStyle/>
-          <a:p>
-            <a:pPr algn="ctr" indent="0" marL="0">
-              <a:buNone/>
-            </a:pPr>
-            <a:r>
-              <a:rPr lang="en-US" sz="900" dirty="0">
-                <a:solidFill>
-                  <a:srgbClr val="687783"/>
-                </a:solidFill>
-                <a:latin typeface="Arial" pitchFamily="34" charset="0"/>
-                <a:ea typeface="Arial" pitchFamily="34" charset="-122"/>
-                <a:cs typeface="Arial" pitchFamily="34" charset="-120"/>
-              </a:rPr>
-              <a:t>7</a:t>
-            </a:r>
-            <a:endParaRPr lang="en-US" sz="900" dirty="0"/>
-          </a:p>
-        </p:txBody>
-      </p:sp>
-      <p:sp>
-        <p:nvSpPr>
-          <p:cNvPr id="104" name="Text 101"/>
-          <p:cNvSpPr txBox="1"/>
-          <p:nvPr/>
-        </p:nvSpPr>
-        <p:spPr>
-          <a:xfrm>
-            <a:off x="685800" y="3520440"/>
-            <a:ext cx="777240" cy="365760"/>
-          </a:xfrm>
-          <a:prstGeom prst="rect">
-            <a:avLst/>
-          </a:prstGeom>
-          <a:noFill/>
-          <a:ln/>
-        </p:spPr>
-        <p:txBody>
-          <a:bodyPr wrap="square" lIns="0" tIns="0" rIns="0" bIns="0" rtlCol="0" anchor="ctr"/>
-          <a:lstStyle/>
-          <a:p>
-            <a:pPr indent="0" marL="0">
-              <a:buNone/>
-            </a:pPr>
-            <a:r>
-              <a:rPr lang="en-US" sz="1500" b="1" dirty="0">
-                <a:solidFill>
-                  <a:srgbClr val="11344E"/>
-                </a:solidFill>
-                <a:latin typeface="Times New Roman" pitchFamily="34" charset="0"/>
-                <a:ea typeface="Times New Roman" pitchFamily="34" charset="-122"/>
-                <a:cs typeface="Times New Roman" pitchFamily="34" charset="-120"/>
-              </a:rPr>
-              <a:t>C:</a:t>
-            </a:r>
-            <a:endParaRPr lang="en-US" sz="1500" dirty="0"/>
-          </a:p>
-        </p:txBody>
-      </p:sp>
-      <p:sp>
-        <p:nvSpPr>
-          <p:cNvPr id="105" name="Shape 102"/>
-          <p:cNvSpPr/>
-          <p:nvPr/>
-        </p:nvSpPr>
-        <p:spPr>
-          <a:xfrm>
-            <a:off x="1600200" y="3703320"/>
-            <a:ext cx="3006969" cy="0"/>
-          </a:xfrm>
-          <a:prstGeom prst="line">
-            <a:avLst/>
-          </a:prstGeom>
-          <a:noFill/>
-          <a:ln w="63500">
-            <a:solidFill>
-              <a:srgbClr val="1777B4"/>
-            </a:solidFill>
-            <a:prstDash val="solid"/>
-            <a:headEnd type="triangle"/>
-          </a:ln>
-        </p:spPr>
-      </p:sp>
-      <p:sp>
-        <p:nvSpPr>
-          <p:cNvPr id="106" name="Shape 103"/>
-          <p:cNvSpPr/>
-          <p:nvPr/>
-        </p:nvSpPr>
-        <p:spPr>
-          <a:xfrm>
-            <a:off x="4524873" y="3621024"/>
-            <a:ext cx="164592" cy="164592"/>
-          </a:xfrm>
-          <a:prstGeom prst="ellipse">
-            <a:avLst/>
-          </a:prstGeom>
-          <a:solidFill>
-            <a:srgbClr val="FFFFFF"/>
-          </a:solidFill>
-          <a:ln w="25400">
-            <a:solidFill>
-              <a:srgbClr val="1777B4"/>
-            </a:solidFill>
-            <a:prstDash val="solid"/>
-          </a:ln>
-        </p:spPr>
-      </p:sp>
-      <p:sp>
-        <p:nvSpPr>
-          <p:cNvPr id="107" name="Text 104"/>
-          <p:cNvSpPr txBox="1"/>
-          <p:nvPr/>
-        </p:nvSpPr>
-        <p:spPr>
-          <a:xfrm>
-            <a:off x="548640" y="3867912"/>
-            <a:ext cx="1097280" cy="274320"/>
-          </a:xfrm>
-          <a:prstGeom prst="rect">
-            <a:avLst/>
-          </a:prstGeom>
-          <a:noFill/>
-          <a:ln/>
-        </p:spPr>
-        <p:txBody>
-          <a:bodyPr wrap="square" lIns="0" tIns="0" rIns="0" bIns="0" rtlCol="0" anchor="t"/>
-          <a:lstStyle/>
-          <a:p>
-            <a:pPr indent="0" marL="0">
-              <a:buNone/>
-            </a:pPr>
-            <a:r>
-              <a:rPr lang="en-US" sz="1300" dirty="0">
-                <a:solidFill>
-                  <a:srgbClr val="687783"/>
-                </a:solidFill>
-                <a:latin typeface="Times New Roman" pitchFamily="34" charset="0"/>
-                <a:ea typeface="Times New Roman" pitchFamily="34" charset="-122"/>
-                <a:cs typeface="Times New Roman" pitchFamily="34" charset="-120"/>
-              </a:rPr>
-              <a:t>x &lt; 2</a:t>
-            </a:r>
-            <a:endParaRPr lang="en-US" sz="1300" dirty="0"/>
-          </a:p>
-        </p:txBody>
-      </p:sp>
-      <p:sp>
-        <p:nvSpPr>
-          <p:cNvPr id="108" name="Text 105"/>
-          <p:cNvSpPr txBox="1"/>
-          <p:nvPr/>
-        </p:nvSpPr>
-        <p:spPr>
-          <a:xfrm>
-            <a:off x="548640" y="4572000"/>
-            <a:ext cx="914400" cy="365760"/>
-          </a:xfrm>
-          <a:prstGeom prst="rect">
-            <a:avLst/>
-          </a:prstGeom>
-          <a:noFill/>
-          <a:ln/>
-        </p:spPr>
-        <p:txBody>
-          <a:bodyPr wrap="square" lIns="0" tIns="0" rIns="0" bIns="0" rtlCol="0" anchor="t"/>
-          <a:lstStyle/>
-          <a:p>
-            <a:pPr indent="0" marL="0">
-              <a:buNone/>
-            </a:pPr>
-            <a:r>
-              <a:rPr lang="en-US" sz="1600" b="1" dirty="0">
-                <a:solidFill>
-                  <a:srgbClr val="1777B4"/>
-                </a:solidFill>
-                <a:latin typeface="Arial" pitchFamily="34" charset="0"/>
-                <a:ea typeface="Arial" pitchFamily="34" charset="-122"/>
-                <a:cs typeface="Arial" pitchFamily="34" charset="-120"/>
-              </a:rPr>
-              <a:t>Find:</a:t>
-            </a:r>
-            <a:endParaRPr lang="en-US" sz="1600" dirty="0"/>
-          </a:p>
-        </p:txBody>
-      </p:sp>
-      <p:sp>
-        <p:nvSpPr>
-          <p:cNvPr id="109" name="Text 106"/>
-          <p:cNvSpPr txBox="1"/>
-          <p:nvPr/>
-        </p:nvSpPr>
-        <p:spPr>
-          <a:xfrm>
-            <a:off x="1463040" y="4526280"/>
-            <a:ext cx="5486400" cy="457200"/>
-          </a:xfrm>
-          <a:prstGeom prst="rect">
-            <a:avLst/>
-          </a:prstGeom>
-          <a:noFill/>
-          <a:ln/>
-        </p:spPr>
-        <p:txBody>
-          <a:bodyPr wrap="square" lIns="0" tIns="0" rIns="0" bIns="0" rtlCol="0" anchor="t"/>
-          <a:lstStyle/>
-          <a:p>
-            <a:pPr indent="0" marL="0">
-              <a:buNone/>
-            </a:pPr>
-            <a:r>
-              <a:rPr lang="en-US" sz="2200" dirty="0">
-                <a:solidFill>
-                  <a:srgbClr val="11344E"/>
-                </a:solidFill>
-                <a:latin typeface="Times New Roman" pitchFamily="34" charset="0"/>
-                <a:ea typeface="Times New Roman" pitchFamily="34" charset="-122"/>
-                <a:cs typeface="Times New Roman" pitchFamily="34" charset="-120"/>
-              </a:rPr>
-              <a:t>1.  A ∩ C        2.  A ∪ B        3.  B ∩ C</a:t>
+              <a:t>1.  A ∩ B        2.  B ∪ C        3.  A ∪ C</a:t>
             </a:r>
             <a:endParaRPr lang="en-US" sz="2200" dirty="0"/>
           </a:p>
@@ -10474,8 +10474,8 @@
         </p:nvSpPr>
         <p:spPr>
           <a:xfrm>
-            <a:off x="2813538" y="1874520"/>
-            <a:ext cx="1793631" cy="0"/>
+            <a:off x="4248443" y="1874520"/>
+            <a:ext cx="717452" cy="0"/>
           </a:xfrm>
           <a:prstGeom prst="line">
             <a:avLst/>
@@ -10497,7 +10497,7 @@
         </p:nvSpPr>
         <p:spPr>
           <a:xfrm>
-            <a:off x="2731242" y="1792224"/>
+            <a:off x="4166147" y="1792224"/>
             <a:ext cx="164592" cy="164592"/>
           </a:xfrm>
           <a:prstGeom prst="ellipse">
@@ -10522,7 +10522,7 @@
         </p:nvSpPr>
         <p:spPr>
           <a:xfrm>
-            <a:off x="4524873" y="1792224"/>
+            <a:off x="4883599" y="1792224"/>
             <a:ext cx="164592" cy="164592"/>
           </a:xfrm>
           <a:prstGeom prst="ellipse">
@@ -10548,7 +10548,7 @@
         <p:spPr>
           <a:xfrm>
             <a:off x="1737360" y="2240280"/>
-            <a:ext cx="4572000" cy="365760"/>
+            <a:ext cx="5029200" cy="365760"/>
           </a:xfrm>
           <a:prstGeom prst="rect">
             <a:avLst/>
@@ -10572,7 +10572,7 @@
                 <a:ea typeface="Times New Roman" pitchFamily="34" charset="-122"/>
                 <a:cs typeface="Times New Roman" pitchFamily="34" charset="-120"/>
               </a:rPr>
-              <a:t>A ∩ C = (−3, 2)</a:t>
+              <a:t>A ∩ B = (1, 3)</a:t>
             </a:r>
             <a:endParaRPr lang="en-US" sz="1800" dirty="0"/>
           </a:p>
@@ -11518,8 +11518,8 @@
         </p:nvSpPr>
         <p:spPr>
           <a:xfrm>
-            <a:off x="2096086" y="3017520"/>
-            <a:ext cx="4441874" cy="0"/>
+            <a:off x="1600200" y="3017520"/>
+            <a:ext cx="1572065" cy="0"/>
           </a:xfrm>
           <a:prstGeom prst="line">
             <a:avLst/>
@@ -11530,7 +11530,7 @@
               <a:srgbClr val="1B7F5E"/>
             </a:solidFill>
             <a:prstDash val="solid"/>
-            <a:tailEnd type="triangle"/>
+            <a:headEnd type="triangle"/>
           </a:ln>
         </p:spPr>
       </p:sp>
@@ -11542,7 +11542,7 @@
         </p:nvSpPr>
         <p:spPr>
           <a:xfrm>
-            <a:off x="2013790" y="2935224"/>
+            <a:off x="3089969" y="2935224"/>
             <a:ext cx="164592" cy="164592"/>
           </a:xfrm>
           <a:prstGeom prst="ellipse">
@@ -11561,985 +11561,14 @@
       </p:sp>
       <p:sp>
         <p:nvSpPr>
-          <p:cNvPr id="72" name="Text 69"/>
-          <p:cNvSpPr txBox="1"/>
-          <p:nvPr/>
-        </p:nvSpPr>
-        <p:spPr>
-          <a:xfrm>
-            <a:off x="1737360" y="3383280"/>
-            <a:ext cx="4572000" cy="365760"/>
-          </a:xfrm>
-          <a:prstGeom prst="rect">
-            <a:avLst/>
-          </a:prstGeom>
-          <a:noFill/>
-          <a:ln/>
-        </p:spPr>
-        <p:txBody>
-          <a:bodyPr wrap="square" lIns="0" tIns="0" rIns="0" bIns="0" rtlCol="0" anchor="t"/>
-          <a:lstStyle/>
-          <a:p>
-            <a:pPr indent="0" marL="0">
-              <a:buNone/>
-            </a:pPr>
-            <a:r>
-              <a:rPr lang="en-US" sz="1800" b="1" dirty="0">
-                <a:solidFill>
-                  <a:srgbClr val="1B7F5E"/>
-                </a:solidFill>
-                <a:latin typeface="Times New Roman" pitchFamily="34" charset="0"/>
-                <a:ea typeface="Times New Roman" pitchFamily="34" charset="-122"/>
-                <a:cs typeface="Times New Roman" pitchFamily="34" charset="-120"/>
-              </a:rPr>
-              <a:t>A ∪ B = [−5, ∞)</a:t>
-            </a:r>
-            <a:endParaRPr lang="en-US" sz="1800" dirty="0"/>
-          </a:p>
-        </p:txBody>
-      </p:sp>
-      <p:sp>
-        <p:nvSpPr>
-          <p:cNvPr id="73" name="Shape 70"/>
+          <p:cNvPr id="72" name="Shape 69"/>
           <p:cNvSpPr/>
           <p:nvPr/>
         </p:nvSpPr>
         <p:spPr>
           <a:xfrm>
-            <a:off x="1600200" y="4160520"/>
-            <a:ext cx="4937760" cy="91"/>
-          </a:xfrm>
-          <a:prstGeom prst="line">
-            <a:avLst/>
-          </a:prstGeom>
-          <a:noFill/>
-          <a:ln w="15875">
-            <a:solidFill>
-              <a:srgbClr val="687783"/>
-            </a:solidFill>
-            <a:prstDash val="solid"/>
-            <a:headEnd type="triangle"/>
-            <a:tailEnd type="triangle"/>
-          </a:ln>
-        </p:spPr>
-      </p:sp>
-      <p:sp>
-        <p:nvSpPr>
-          <p:cNvPr id="74" name="Shape 71"/>
-          <p:cNvSpPr/>
-          <p:nvPr/>
-        </p:nvSpPr>
-        <p:spPr>
-          <a:xfrm>
-            <a:off x="1737360" y="4105656"/>
-            <a:ext cx="91" cy="109728"/>
-          </a:xfrm>
-          <a:prstGeom prst="line">
-            <a:avLst/>
-          </a:prstGeom>
-          <a:noFill/>
-          <a:ln w="12700">
-            <a:solidFill>
-              <a:srgbClr val="687783"/>
-            </a:solidFill>
-            <a:prstDash val="solid"/>
-          </a:ln>
-        </p:spPr>
-      </p:sp>
-      <p:sp>
-        <p:nvSpPr>
-          <p:cNvPr id="75" name="Text 72"/>
-          <p:cNvSpPr txBox="1"/>
-          <p:nvPr/>
-        </p:nvSpPr>
-        <p:spPr>
-          <a:xfrm>
-            <a:off x="1554480" y="4251960"/>
-            <a:ext cx="365760" cy="201168"/>
-          </a:xfrm>
-          <a:prstGeom prst="rect">
-            <a:avLst/>
-          </a:prstGeom>
-          <a:noFill/>
-          <a:ln/>
-        </p:spPr>
-        <p:txBody>
-          <a:bodyPr wrap="square" lIns="0" tIns="0" rIns="0" bIns="0" rtlCol="0" anchor="t"/>
-          <a:lstStyle/>
-          <a:p>
-            <a:pPr algn="ctr" indent="0" marL="0">
-              <a:buNone/>
-            </a:pPr>
-            <a:r>
-              <a:rPr lang="en-US" sz="900" dirty="0">
-                <a:solidFill>
-                  <a:srgbClr val="687783"/>
-                </a:solidFill>
-                <a:latin typeface="Arial" pitchFamily="34" charset="0"/>
-                <a:ea typeface="Arial" pitchFamily="34" charset="-122"/>
-                <a:cs typeface="Arial" pitchFamily="34" charset="-120"/>
-              </a:rPr>
-              <a:t>−6</a:t>
-            </a:r>
-            <a:endParaRPr lang="en-US" sz="900" dirty="0"/>
-          </a:p>
-        </p:txBody>
-      </p:sp>
-      <p:sp>
-        <p:nvSpPr>
-          <p:cNvPr id="76" name="Shape 73"/>
-          <p:cNvSpPr/>
-          <p:nvPr/>
-        </p:nvSpPr>
-        <p:spPr>
-          <a:xfrm>
-            <a:off x="2096086" y="4105656"/>
-            <a:ext cx="91" cy="109728"/>
-          </a:xfrm>
-          <a:prstGeom prst="line">
-            <a:avLst/>
-          </a:prstGeom>
-          <a:noFill/>
-          <a:ln w="12700">
-            <a:solidFill>
-              <a:srgbClr val="687783"/>
-            </a:solidFill>
-            <a:prstDash val="solid"/>
-          </a:ln>
-        </p:spPr>
-      </p:sp>
-      <p:sp>
-        <p:nvSpPr>
-          <p:cNvPr id="77" name="Text 74"/>
-          <p:cNvSpPr txBox="1"/>
-          <p:nvPr/>
-        </p:nvSpPr>
-        <p:spPr>
-          <a:xfrm>
-            <a:off x="1913206" y="4251960"/>
-            <a:ext cx="365760" cy="201168"/>
-          </a:xfrm>
-          <a:prstGeom prst="rect">
-            <a:avLst/>
-          </a:prstGeom>
-          <a:noFill/>
-          <a:ln/>
-        </p:spPr>
-        <p:txBody>
-          <a:bodyPr wrap="square" lIns="0" tIns="0" rIns="0" bIns="0" rtlCol="0" anchor="t"/>
-          <a:lstStyle/>
-          <a:p>
-            <a:pPr algn="ctr" indent="0" marL="0">
-              <a:buNone/>
-            </a:pPr>
-            <a:r>
-              <a:rPr lang="en-US" sz="900" dirty="0">
-                <a:solidFill>
-                  <a:srgbClr val="687783"/>
-                </a:solidFill>
-                <a:latin typeface="Arial" pitchFamily="34" charset="0"/>
-                <a:ea typeface="Arial" pitchFamily="34" charset="-122"/>
-                <a:cs typeface="Arial" pitchFamily="34" charset="-120"/>
-              </a:rPr>
-              <a:t>−5</a:t>
-            </a:r>
-            <a:endParaRPr lang="en-US" sz="900" dirty="0"/>
-          </a:p>
-        </p:txBody>
-      </p:sp>
-      <p:sp>
-        <p:nvSpPr>
-          <p:cNvPr id="78" name="Shape 75"/>
-          <p:cNvSpPr/>
-          <p:nvPr/>
-        </p:nvSpPr>
-        <p:spPr>
-          <a:xfrm>
-            <a:off x="2454812" y="4105656"/>
-            <a:ext cx="91" cy="109728"/>
-          </a:xfrm>
-          <a:prstGeom prst="line">
-            <a:avLst/>
-          </a:prstGeom>
-          <a:noFill/>
-          <a:ln w="12700">
-            <a:solidFill>
-              <a:srgbClr val="687783"/>
-            </a:solidFill>
-            <a:prstDash val="solid"/>
-          </a:ln>
-        </p:spPr>
-      </p:sp>
-      <p:sp>
-        <p:nvSpPr>
-          <p:cNvPr id="79" name="Text 76"/>
-          <p:cNvSpPr txBox="1"/>
-          <p:nvPr/>
-        </p:nvSpPr>
-        <p:spPr>
-          <a:xfrm>
-            <a:off x="2271932" y="4251960"/>
-            <a:ext cx="365760" cy="201168"/>
-          </a:xfrm>
-          <a:prstGeom prst="rect">
-            <a:avLst/>
-          </a:prstGeom>
-          <a:noFill/>
-          <a:ln/>
-        </p:spPr>
-        <p:txBody>
-          <a:bodyPr wrap="square" lIns="0" tIns="0" rIns="0" bIns="0" rtlCol="0" anchor="t"/>
-          <a:lstStyle/>
-          <a:p>
-            <a:pPr algn="ctr" indent="0" marL="0">
-              <a:buNone/>
-            </a:pPr>
-            <a:r>
-              <a:rPr lang="en-US" sz="900" dirty="0">
-                <a:solidFill>
-                  <a:srgbClr val="687783"/>
-                </a:solidFill>
-                <a:latin typeface="Arial" pitchFamily="34" charset="0"/>
-                <a:ea typeface="Arial" pitchFamily="34" charset="-122"/>
-                <a:cs typeface="Arial" pitchFamily="34" charset="-120"/>
-              </a:rPr>
-              <a:t>−4</a:t>
-            </a:r>
-            <a:endParaRPr lang="en-US" sz="900" dirty="0"/>
-          </a:p>
-        </p:txBody>
-      </p:sp>
-      <p:sp>
-        <p:nvSpPr>
-          <p:cNvPr id="80" name="Shape 77"/>
-          <p:cNvSpPr/>
-          <p:nvPr/>
-        </p:nvSpPr>
-        <p:spPr>
-          <a:xfrm>
-            <a:off x="2813538" y="4105656"/>
-            <a:ext cx="91" cy="109728"/>
-          </a:xfrm>
-          <a:prstGeom prst="line">
-            <a:avLst/>
-          </a:prstGeom>
-          <a:noFill/>
-          <a:ln w="12700">
-            <a:solidFill>
-              <a:srgbClr val="687783"/>
-            </a:solidFill>
-            <a:prstDash val="solid"/>
-          </a:ln>
-        </p:spPr>
-      </p:sp>
-      <p:sp>
-        <p:nvSpPr>
-          <p:cNvPr id="81" name="Text 78"/>
-          <p:cNvSpPr txBox="1"/>
-          <p:nvPr/>
-        </p:nvSpPr>
-        <p:spPr>
-          <a:xfrm>
-            <a:off x="2630658" y="4251960"/>
-            <a:ext cx="365760" cy="201168"/>
-          </a:xfrm>
-          <a:prstGeom prst="rect">
-            <a:avLst/>
-          </a:prstGeom>
-          <a:noFill/>
-          <a:ln/>
-        </p:spPr>
-        <p:txBody>
-          <a:bodyPr wrap="square" lIns="0" tIns="0" rIns="0" bIns="0" rtlCol="0" anchor="t"/>
-          <a:lstStyle/>
-          <a:p>
-            <a:pPr algn="ctr" indent="0" marL="0">
-              <a:buNone/>
-            </a:pPr>
-            <a:r>
-              <a:rPr lang="en-US" sz="900" dirty="0">
-                <a:solidFill>
-                  <a:srgbClr val="687783"/>
-                </a:solidFill>
-                <a:latin typeface="Arial" pitchFamily="34" charset="0"/>
-                <a:ea typeface="Arial" pitchFamily="34" charset="-122"/>
-                <a:cs typeface="Arial" pitchFamily="34" charset="-120"/>
-              </a:rPr>
-              <a:t>−3</a:t>
-            </a:r>
-            <a:endParaRPr lang="en-US" sz="900" dirty="0"/>
-          </a:p>
-        </p:txBody>
-      </p:sp>
-      <p:sp>
-        <p:nvSpPr>
-          <p:cNvPr id="82" name="Shape 79"/>
-          <p:cNvSpPr/>
-          <p:nvPr/>
-        </p:nvSpPr>
-        <p:spPr>
-          <a:xfrm>
-            <a:off x="3172265" y="4105656"/>
-            <a:ext cx="91" cy="109728"/>
-          </a:xfrm>
-          <a:prstGeom prst="line">
-            <a:avLst/>
-          </a:prstGeom>
-          <a:noFill/>
-          <a:ln w="12700">
-            <a:solidFill>
-              <a:srgbClr val="687783"/>
-            </a:solidFill>
-            <a:prstDash val="solid"/>
-          </a:ln>
-        </p:spPr>
-      </p:sp>
-      <p:sp>
-        <p:nvSpPr>
-          <p:cNvPr id="83" name="Text 80"/>
-          <p:cNvSpPr txBox="1"/>
-          <p:nvPr/>
-        </p:nvSpPr>
-        <p:spPr>
-          <a:xfrm>
-            <a:off x="2989385" y="4251960"/>
-            <a:ext cx="365760" cy="201168"/>
-          </a:xfrm>
-          <a:prstGeom prst="rect">
-            <a:avLst/>
-          </a:prstGeom>
-          <a:noFill/>
-          <a:ln/>
-        </p:spPr>
-        <p:txBody>
-          <a:bodyPr wrap="square" lIns="0" tIns="0" rIns="0" bIns="0" rtlCol="0" anchor="t"/>
-          <a:lstStyle/>
-          <a:p>
-            <a:pPr algn="ctr" indent="0" marL="0">
-              <a:buNone/>
-            </a:pPr>
-            <a:r>
-              <a:rPr lang="en-US" sz="900" dirty="0">
-                <a:solidFill>
-                  <a:srgbClr val="687783"/>
-                </a:solidFill>
-                <a:latin typeface="Arial" pitchFamily="34" charset="0"/>
-                <a:ea typeface="Arial" pitchFamily="34" charset="-122"/>
-                <a:cs typeface="Arial" pitchFamily="34" charset="-120"/>
-              </a:rPr>
-              <a:t>−2</a:t>
-            </a:r>
-            <a:endParaRPr lang="en-US" sz="900" dirty="0"/>
-          </a:p>
-        </p:txBody>
-      </p:sp>
-      <p:sp>
-        <p:nvSpPr>
-          <p:cNvPr id="84" name="Shape 81"/>
-          <p:cNvSpPr/>
-          <p:nvPr/>
-        </p:nvSpPr>
-        <p:spPr>
-          <a:xfrm>
-            <a:off x="3530991" y="4105656"/>
-            <a:ext cx="91" cy="109728"/>
-          </a:xfrm>
-          <a:prstGeom prst="line">
-            <a:avLst/>
-          </a:prstGeom>
-          <a:noFill/>
-          <a:ln w="12700">
-            <a:solidFill>
-              <a:srgbClr val="687783"/>
-            </a:solidFill>
-            <a:prstDash val="solid"/>
-          </a:ln>
-        </p:spPr>
-      </p:sp>
-      <p:sp>
-        <p:nvSpPr>
-          <p:cNvPr id="85" name="Text 82"/>
-          <p:cNvSpPr txBox="1"/>
-          <p:nvPr/>
-        </p:nvSpPr>
-        <p:spPr>
-          <a:xfrm>
-            <a:off x="3348111" y="4251960"/>
-            <a:ext cx="365760" cy="201168"/>
-          </a:xfrm>
-          <a:prstGeom prst="rect">
-            <a:avLst/>
-          </a:prstGeom>
-          <a:noFill/>
-          <a:ln/>
-        </p:spPr>
-        <p:txBody>
-          <a:bodyPr wrap="square" lIns="0" tIns="0" rIns="0" bIns="0" rtlCol="0" anchor="t"/>
-          <a:lstStyle/>
-          <a:p>
-            <a:pPr algn="ctr" indent="0" marL="0">
-              <a:buNone/>
-            </a:pPr>
-            <a:r>
-              <a:rPr lang="en-US" sz="900" dirty="0">
-                <a:solidFill>
-                  <a:srgbClr val="687783"/>
-                </a:solidFill>
-                <a:latin typeface="Arial" pitchFamily="34" charset="0"/>
-                <a:ea typeface="Arial" pitchFamily="34" charset="-122"/>
-                <a:cs typeface="Arial" pitchFamily="34" charset="-120"/>
-              </a:rPr>
-              <a:t>−1</a:t>
-            </a:r>
-            <a:endParaRPr lang="en-US" sz="900" dirty="0"/>
-          </a:p>
-        </p:txBody>
-      </p:sp>
-      <p:sp>
-        <p:nvSpPr>
-          <p:cNvPr id="86" name="Shape 83"/>
-          <p:cNvSpPr/>
-          <p:nvPr/>
-        </p:nvSpPr>
-        <p:spPr>
-          <a:xfrm>
-            <a:off x="3889717" y="4105656"/>
-            <a:ext cx="91" cy="109728"/>
-          </a:xfrm>
-          <a:prstGeom prst="line">
-            <a:avLst/>
-          </a:prstGeom>
-          <a:noFill/>
-          <a:ln w="12700">
-            <a:solidFill>
-              <a:srgbClr val="687783"/>
-            </a:solidFill>
-            <a:prstDash val="solid"/>
-          </a:ln>
-        </p:spPr>
-      </p:sp>
-      <p:sp>
-        <p:nvSpPr>
-          <p:cNvPr id="87" name="Text 84"/>
-          <p:cNvSpPr txBox="1"/>
-          <p:nvPr/>
-        </p:nvSpPr>
-        <p:spPr>
-          <a:xfrm>
-            <a:off x="3706837" y="4251960"/>
-            <a:ext cx="365760" cy="201168"/>
-          </a:xfrm>
-          <a:prstGeom prst="rect">
-            <a:avLst/>
-          </a:prstGeom>
-          <a:noFill/>
-          <a:ln/>
-        </p:spPr>
-        <p:txBody>
-          <a:bodyPr wrap="square" lIns="0" tIns="0" rIns="0" bIns="0" rtlCol="0" anchor="t"/>
-          <a:lstStyle/>
-          <a:p>
-            <a:pPr algn="ctr" indent="0" marL="0">
-              <a:buNone/>
-            </a:pPr>
-            <a:r>
-              <a:rPr lang="en-US" sz="900" dirty="0">
-                <a:solidFill>
-                  <a:srgbClr val="687783"/>
-                </a:solidFill>
-                <a:latin typeface="Arial" pitchFamily="34" charset="0"/>
-                <a:ea typeface="Arial" pitchFamily="34" charset="-122"/>
-                <a:cs typeface="Arial" pitchFamily="34" charset="-120"/>
-              </a:rPr>
-              <a:t>0</a:t>
-            </a:r>
-            <a:endParaRPr lang="en-US" sz="900" dirty="0"/>
-          </a:p>
-        </p:txBody>
-      </p:sp>
-      <p:sp>
-        <p:nvSpPr>
-          <p:cNvPr id="88" name="Shape 85"/>
-          <p:cNvSpPr/>
-          <p:nvPr/>
-        </p:nvSpPr>
-        <p:spPr>
-          <a:xfrm>
-            <a:off x="4248443" y="4105656"/>
-            <a:ext cx="91" cy="109728"/>
-          </a:xfrm>
-          <a:prstGeom prst="line">
-            <a:avLst/>
-          </a:prstGeom>
-          <a:noFill/>
-          <a:ln w="12700">
-            <a:solidFill>
-              <a:srgbClr val="687783"/>
-            </a:solidFill>
-            <a:prstDash val="solid"/>
-          </a:ln>
-        </p:spPr>
-      </p:sp>
-      <p:sp>
-        <p:nvSpPr>
-          <p:cNvPr id="89" name="Text 86"/>
-          <p:cNvSpPr txBox="1"/>
-          <p:nvPr/>
-        </p:nvSpPr>
-        <p:spPr>
-          <a:xfrm>
-            <a:off x="4065563" y="4251960"/>
-            <a:ext cx="365760" cy="201168"/>
-          </a:xfrm>
-          <a:prstGeom prst="rect">
-            <a:avLst/>
-          </a:prstGeom>
-          <a:noFill/>
-          <a:ln/>
-        </p:spPr>
-        <p:txBody>
-          <a:bodyPr wrap="square" lIns="0" tIns="0" rIns="0" bIns="0" rtlCol="0" anchor="t"/>
-          <a:lstStyle/>
-          <a:p>
-            <a:pPr algn="ctr" indent="0" marL="0">
-              <a:buNone/>
-            </a:pPr>
-            <a:r>
-              <a:rPr lang="en-US" sz="900" dirty="0">
-                <a:solidFill>
-                  <a:srgbClr val="687783"/>
-                </a:solidFill>
-                <a:latin typeface="Arial" pitchFamily="34" charset="0"/>
-                <a:ea typeface="Arial" pitchFamily="34" charset="-122"/>
-                <a:cs typeface="Arial" pitchFamily="34" charset="-120"/>
-              </a:rPr>
-              <a:t>1</a:t>
-            </a:r>
-            <a:endParaRPr lang="en-US" sz="900" dirty="0"/>
-          </a:p>
-        </p:txBody>
-      </p:sp>
-      <p:sp>
-        <p:nvSpPr>
-          <p:cNvPr id="90" name="Shape 87"/>
-          <p:cNvSpPr/>
-          <p:nvPr/>
-        </p:nvSpPr>
-        <p:spPr>
-          <a:xfrm>
-            <a:off x="4607169" y="4105656"/>
-            <a:ext cx="91" cy="109728"/>
-          </a:xfrm>
-          <a:prstGeom prst="line">
-            <a:avLst/>
-          </a:prstGeom>
-          <a:noFill/>
-          <a:ln w="12700">
-            <a:solidFill>
-              <a:srgbClr val="687783"/>
-            </a:solidFill>
-            <a:prstDash val="solid"/>
-          </a:ln>
-        </p:spPr>
-      </p:sp>
-      <p:sp>
-        <p:nvSpPr>
-          <p:cNvPr id="91" name="Text 88"/>
-          <p:cNvSpPr txBox="1"/>
-          <p:nvPr/>
-        </p:nvSpPr>
-        <p:spPr>
-          <a:xfrm>
-            <a:off x="4424289" y="4251960"/>
-            <a:ext cx="365760" cy="201168"/>
-          </a:xfrm>
-          <a:prstGeom prst="rect">
-            <a:avLst/>
-          </a:prstGeom>
-          <a:noFill/>
-          <a:ln/>
-        </p:spPr>
-        <p:txBody>
-          <a:bodyPr wrap="square" lIns="0" tIns="0" rIns="0" bIns="0" rtlCol="0" anchor="t"/>
-          <a:lstStyle/>
-          <a:p>
-            <a:pPr algn="ctr" indent="0" marL="0">
-              <a:buNone/>
-            </a:pPr>
-            <a:r>
-              <a:rPr lang="en-US" sz="900" dirty="0">
-                <a:solidFill>
-                  <a:srgbClr val="687783"/>
-                </a:solidFill>
-                <a:latin typeface="Arial" pitchFamily="34" charset="0"/>
-                <a:ea typeface="Arial" pitchFamily="34" charset="-122"/>
-                <a:cs typeface="Arial" pitchFamily="34" charset="-120"/>
-              </a:rPr>
-              <a:t>2</a:t>
-            </a:r>
-            <a:endParaRPr lang="en-US" sz="900" dirty="0"/>
-          </a:p>
-        </p:txBody>
-      </p:sp>
-      <p:sp>
-        <p:nvSpPr>
-          <p:cNvPr id="92" name="Shape 89"/>
-          <p:cNvSpPr/>
-          <p:nvPr/>
-        </p:nvSpPr>
-        <p:spPr>
-          <a:xfrm>
-            <a:off x="4965895" y="4105656"/>
-            <a:ext cx="91" cy="109728"/>
-          </a:xfrm>
-          <a:prstGeom prst="line">
-            <a:avLst/>
-          </a:prstGeom>
-          <a:noFill/>
-          <a:ln w="12700">
-            <a:solidFill>
-              <a:srgbClr val="687783"/>
-            </a:solidFill>
-            <a:prstDash val="solid"/>
-          </a:ln>
-        </p:spPr>
-      </p:sp>
-      <p:sp>
-        <p:nvSpPr>
-          <p:cNvPr id="93" name="Text 90"/>
-          <p:cNvSpPr txBox="1"/>
-          <p:nvPr/>
-        </p:nvSpPr>
-        <p:spPr>
-          <a:xfrm>
-            <a:off x="4783015" y="4251960"/>
-            <a:ext cx="365760" cy="201168"/>
-          </a:xfrm>
-          <a:prstGeom prst="rect">
-            <a:avLst/>
-          </a:prstGeom>
-          <a:noFill/>
-          <a:ln/>
-        </p:spPr>
-        <p:txBody>
-          <a:bodyPr wrap="square" lIns="0" tIns="0" rIns="0" bIns="0" rtlCol="0" anchor="t"/>
-          <a:lstStyle/>
-          <a:p>
-            <a:pPr algn="ctr" indent="0" marL="0">
-              <a:buNone/>
-            </a:pPr>
-            <a:r>
-              <a:rPr lang="en-US" sz="900" dirty="0">
-                <a:solidFill>
-                  <a:srgbClr val="687783"/>
-                </a:solidFill>
-                <a:latin typeface="Arial" pitchFamily="34" charset="0"/>
-                <a:ea typeface="Arial" pitchFamily="34" charset="-122"/>
-                <a:cs typeface="Arial" pitchFamily="34" charset="-120"/>
-              </a:rPr>
-              <a:t>3</a:t>
-            </a:r>
-            <a:endParaRPr lang="en-US" sz="900" dirty="0"/>
-          </a:p>
-        </p:txBody>
-      </p:sp>
-      <p:sp>
-        <p:nvSpPr>
-          <p:cNvPr id="94" name="Shape 91"/>
-          <p:cNvSpPr/>
-          <p:nvPr/>
-        </p:nvSpPr>
-        <p:spPr>
-          <a:xfrm>
-            <a:off x="5324622" y="4105656"/>
-            <a:ext cx="91" cy="109728"/>
-          </a:xfrm>
-          <a:prstGeom prst="line">
-            <a:avLst/>
-          </a:prstGeom>
-          <a:noFill/>
-          <a:ln w="12700">
-            <a:solidFill>
-              <a:srgbClr val="687783"/>
-            </a:solidFill>
-            <a:prstDash val="solid"/>
-          </a:ln>
-        </p:spPr>
-      </p:sp>
-      <p:sp>
-        <p:nvSpPr>
-          <p:cNvPr id="95" name="Text 92"/>
-          <p:cNvSpPr txBox="1"/>
-          <p:nvPr/>
-        </p:nvSpPr>
-        <p:spPr>
-          <a:xfrm>
-            <a:off x="5141742" y="4251960"/>
-            <a:ext cx="365760" cy="201168"/>
-          </a:xfrm>
-          <a:prstGeom prst="rect">
-            <a:avLst/>
-          </a:prstGeom>
-          <a:noFill/>
-          <a:ln/>
-        </p:spPr>
-        <p:txBody>
-          <a:bodyPr wrap="square" lIns="0" tIns="0" rIns="0" bIns="0" rtlCol="0" anchor="t"/>
-          <a:lstStyle/>
-          <a:p>
-            <a:pPr algn="ctr" indent="0" marL="0">
-              <a:buNone/>
-            </a:pPr>
-            <a:r>
-              <a:rPr lang="en-US" sz="900" dirty="0">
-                <a:solidFill>
-                  <a:srgbClr val="687783"/>
-                </a:solidFill>
-                <a:latin typeface="Arial" pitchFamily="34" charset="0"/>
-                <a:ea typeface="Arial" pitchFamily="34" charset="-122"/>
-                <a:cs typeface="Arial" pitchFamily="34" charset="-120"/>
-              </a:rPr>
-              <a:t>4</a:t>
-            </a:r>
-            <a:endParaRPr lang="en-US" sz="900" dirty="0"/>
-          </a:p>
-        </p:txBody>
-      </p:sp>
-      <p:sp>
-        <p:nvSpPr>
-          <p:cNvPr id="96" name="Shape 93"/>
-          <p:cNvSpPr/>
-          <p:nvPr/>
-        </p:nvSpPr>
-        <p:spPr>
-          <a:xfrm>
-            <a:off x="5683348" y="4105656"/>
-            <a:ext cx="91" cy="109728"/>
-          </a:xfrm>
-          <a:prstGeom prst="line">
-            <a:avLst/>
-          </a:prstGeom>
-          <a:noFill/>
-          <a:ln w="12700">
-            <a:solidFill>
-              <a:srgbClr val="687783"/>
-            </a:solidFill>
-            <a:prstDash val="solid"/>
-          </a:ln>
-        </p:spPr>
-      </p:sp>
-      <p:sp>
-        <p:nvSpPr>
-          <p:cNvPr id="97" name="Text 94"/>
-          <p:cNvSpPr txBox="1"/>
-          <p:nvPr/>
-        </p:nvSpPr>
-        <p:spPr>
-          <a:xfrm>
-            <a:off x="5500468" y="4251960"/>
-            <a:ext cx="365760" cy="201168"/>
-          </a:xfrm>
-          <a:prstGeom prst="rect">
-            <a:avLst/>
-          </a:prstGeom>
-          <a:noFill/>
-          <a:ln/>
-        </p:spPr>
-        <p:txBody>
-          <a:bodyPr wrap="square" lIns="0" tIns="0" rIns="0" bIns="0" rtlCol="0" anchor="t"/>
-          <a:lstStyle/>
-          <a:p>
-            <a:pPr algn="ctr" indent="0" marL="0">
-              <a:buNone/>
-            </a:pPr>
-            <a:r>
-              <a:rPr lang="en-US" sz="900" dirty="0">
-                <a:solidFill>
-                  <a:srgbClr val="687783"/>
-                </a:solidFill>
-                <a:latin typeface="Arial" pitchFamily="34" charset="0"/>
-                <a:ea typeface="Arial" pitchFamily="34" charset="-122"/>
-                <a:cs typeface="Arial" pitchFamily="34" charset="-120"/>
-              </a:rPr>
-              <a:t>5</a:t>
-            </a:r>
-            <a:endParaRPr lang="en-US" sz="900" dirty="0"/>
-          </a:p>
-        </p:txBody>
-      </p:sp>
-      <p:sp>
-        <p:nvSpPr>
-          <p:cNvPr id="98" name="Shape 95"/>
-          <p:cNvSpPr/>
-          <p:nvPr/>
-        </p:nvSpPr>
-        <p:spPr>
-          <a:xfrm>
-            <a:off x="6042074" y="4105656"/>
-            <a:ext cx="91" cy="109728"/>
-          </a:xfrm>
-          <a:prstGeom prst="line">
-            <a:avLst/>
-          </a:prstGeom>
-          <a:noFill/>
-          <a:ln w="12700">
-            <a:solidFill>
-              <a:srgbClr val="687783"/>
-            </a:solidFill>
-            <a:prstDash val="solid"/>
-          </a:ln>
-        </p:spPr>
-      </p:sp>
-      <p:sp>
-        <p:nvSpPr>
-          <p:cNvPr id="99" name="Text 96"/>
-          <p:cNvSpPr txBox="1"/>
-          <p:nvPr/>
-        </p:nvSpPr>
-        <p:spPr>
-          <a:xfrm>
-            <a:off x="5859194" y="4251960"/>
-            <a:ext cx="365760" cy="201168"/>
-          </a:xfrm>
-          <a:prstGeom prst="rect">
-            <a:avLst/>
-          </a:prstGeom>
-          <a:noFill/>
-          <a:ln/>
-        </p:spPr>
-        <p:txBody>
-          <a:bodyPr wrap="square" lIns="0" tIns="0" rIns="0" bIns="0" rtlCol="0" anchor="t"/>
-          <a:lstStyle/>
-          <a:p>
-            <a:pPr algn="ctr" indent="0" marL="0">
-              <a:buNone/>
-            </a:pPr>
-            <a:r>
-              <a:rPr lang="en-US" sz="900" dirty="0">
-                <a:solidFill>
-                  <a:srgbClr val="687783"/>
-                </a:solidFill>
-                <a:latin typeface="Arial" pitchFamily="34" charset="0"/>
-                <a:ea typeface="Arial" pitchFamily="34" charset="-122"/>
-                <a:cs typeface="Arial" pitchFamily="34" charset="-120"/>
-              </a:rPr>
-              <a:t>6</a:t>
-            </a:r>
-            <a:endParaRPr lang="en-US" sz="900" dirty="0"/>
-          </a:p>
-        </p:txBody>
-      </p:sp>
-      <p:sp>
-        <p:nvSpPr>
-          <p:cNvPr id="100" name="Shape 97"/>
-          <p:cNvSpPr/>
-          <p:nvPr/>
-        </p:nvSpPr>
-        <p:spPr>
-          <a:xfrm>
-            <a:off x="6400800" y="4105656"/>
-            <a:ext cx="91" cy="109728"/>
-          </a:xfrm>
-          <a:prstGeom prst="line">
-            <a:avLst/>
-          </a:prstGeom>
-          <a:noFill/>
-          <a:ln w="12700">
-            <a:solidFill>
-              <a:srgbClr val="687783"/>
-            </a:solidFill>
-            <a:prstDash val="solid"/>
-          </a:ln>
-        </p:spPr>
-      </p:sp>
-      <p:sp>
-        <p:nvSpPr>
-          <p:cNvPr id="101" name="Text 98"/>
-          <p:cNvSpPr txBox="1"/>
-          <p:nvPr/>
-        </p:nvSpPr>
-        <p:spPr>
-          <a:xfrm>
-            <a:off x="6217920" y="4251960"/>
-            <a:ext cx="365760" cy="201168"/>
-          </a:xfrm>
-          <a:prstGeom prst="rect">
-            <a:avLst/>
-          </a:prstGeom>
-          <a:noFill/>
-          <a:ln/>
-        </p:spPr>
-        <p:txBody>
-          <a:bodyPr wrap="square" lIns="0" tIns="0" rIns="0" bIns="0" rtlCol="0" anchor="t"/>
-          <a:lstStyle/>
-          <a:p>
-            <a:pPr algn="ctr" indent="0" marL="0">
-              <a:buNone/>
-            </a:pPr>
-            <a:r>
-              <a:rPr lang="en-US" sz="900" dirty="0">
-                <a:solidFill>
-                  <a:srgbClr val="687783"/>
-                </a:solidFill>
-                <a:latin typeface="Arial" pitchFamily="34" charset="0"/>
-                <a:ea typeface="Arial" pitchFamily="34" charset="-122"/>
-                <a:cs typeface="Arial" pitchFamily="34" charset="-120"/>
-              </a:rPr>
-              <a:t>7</a:t>
-            </a:r>
-            <a:endParaRPr lang="en-US" sz="900" dirty="0"/>
-          </a:p>
-        </p:txBody>
-      </p:sp>
-      <p:sp>
-        <p:nvSpPr>
-          <p:cNvPr id="102" name="Text 99"/>
-          <p:cNvSpPr txBox="1"/>
-          <p:nvPr/>
-        </p:nvSpPr>
-        <p:spPr>
-          <a:xfrm>
-            <a:off x="685800" y="3977640"/>
-            <a:ext cx="777240" cy="365760"/>
-          </a:xfrm>
-          <a:prstGeom prst="rect">
-            <a:avLst/>
-          </a:prstGeom>
-          <a:noFill/>
-          <a:ln/>
-        </p:spPr>
-        <p:txBody>
-          <a:bodyPr wrap="square" lIns="0" tIns="0" rIns="0" bIns="0" rtlCol="0" anchor="ctr"/>
-          <a:lstStyle/>
-          <a:p>
-            <a:pPr indent="0" marL="0">
-              <a:buNone/>
-            </a:pPr>
-            <a:r>
-              <a:rPr lang="en-US" sz="1500" b="1" dirty="0">
-                <a:solidFill>
-                  <a:srgbClr val="11344E"/>
-                </a:solidFill>
-                <a:latin typeface="Times New Roman" pitchFamily="34" charset="0"/>
-                <a:ea typeface="Times New Roman" pitchFamily="34" charset="-122"/>
-                <a:cs typeface="Times New Roman" pitchFamily="34" charset="-120"/>
-              </a:rPr>
-              <a:t>3.</a:t>
-            </a:r>
-            <a:endParaRPr lang="en-US" sz="1500" dirty="0"/>
-          </a:p>
-        </p:txBody>
-      </p:sp>
-      <p:sp>
-        <p:nvSpPr>
-          <p:cNvPr id="103" name="Shape 100"/>
-          <p:cNvSpPr/>
-          <p:nvPr/>
-        </p:nvSpPr>
-        <p:spPr>
-          <a:xfrm>
-            <a:off x="2096086" y="4160520"/>
-            <a:ext cx="2511083" cy="0"/>
+            <a:off x="4248443" y="3017520"/>
+            <a:ext cx="2289517" cy="0"/>
           </a:xfrm>
           <a:prstGeom prst="line">
             <a:avLst/>
@@ -12550,43 +11579,19 @@
               <a:srgbClr val="1B7F5E"/>
             </a:solidFill>
             <a:prstDash val="solid"/>
+            <a:tailEnd type="triangle"/>
           </a:ln>
         </p:spPr>
       </p:sp>
       <p:sp>
         <p:nvSpPr>
-          <p:cNvPr id="104" name="Shape 101"/>
+          <p:cNvPr id="73" name="Shape 70"/>
           <p:cNvSpPr/>
           <p:nvPr/>
         </p:nvSpPr>
         <p:spPr>
           <a:xfrm>
-            <a:off x="2013790" y="4078224"/>
-            <a:ext cx="164592" cy="164592"/>
-          </a:xfrm>
-          <a:prstGeom prst="ellipse">
-            <a:avLst/>
-          </a:prstGeom>
-          <a:solidFill>
-            <a:srgbClr val="1B7F5E"/>
-          </a:solidFill>
-          <a:ln w="25400">
-            <a:solidFill>
-              <a:srgbClr val="1B7F5E"/>
-            </a:solidFill>
-            <a:prstDash val="solid"/>
-          </a:ln>
-        </p:spPr>
-      </p:sp>
-      <p:sp>
-        <p:nvSpPr>
-          <p:cNvPr id="105" name="Shape 102"/>
-          <p:cNvSpPr/>
-          <p:nvPr/>
-        </p:nvSpPr>
-        <p:spPr>
-          <a:xfrm>
-            <a:off x="4524873" y="4078224"/>
+            <a:off x="4166147" y="2935224"/>
             <a:ext cx="164592" cy="164592"/>
           </a:xfrm>
           <a:prstGeom prst="ellipse">
@@ -12605,14 +11610,14 @@
       </p:sp>
       <p:sp>
         <p:nvSpPr>
-          <p:cNvPr id="106" name="Text 103"/>
-          <p:cNvSpPr txBox="1"/>
-          <p:nvPr/>
-        </p:nvSpPr>
-        <p:spPr>
-          <a:xfrm>
-            <a:off x="1737360" y="4526280"/>
-            <a:ext cx="4572000" cy="365760"/>
+          <p:cNvPr id="74" name="Text 71"/>
+          <p:cNvSpPr txBox="1"/>
+          <p:nvPr/>
+        </p:nvSpPr>
+        <p:spPr>
+          <a:xfrm>
+            <a:off x="1737360" y="3383280"/>
+            <a:ext cx="5029200" cy="365760"/>
           </a:xfrm>
           <a:prstGeom prst="rect">
             <a:avLst/>
@@ -12636,7 +11641,7 @@
                 <a:ea typeface="Times New Roman" pitchFamily="34" charset="-122"/>
                 <a:cs typeface="Times New Roman" pitchFamily="34" charset="-120"/>
               </a:rPr>
-              <a:t>B ∩ C = [−5, 2)</a:t>
+              <a:t>B ∪ C = (−∞, −2] ∪ (1, ∞)</a:t>
             </a:r>
             <a:endParaRPr lang="en-US" sz="1800" dirty="0"/>
           </a:p>
@@ -12644,7 +11649,1027 @@
       </p:sp>
       <p:sp>
         <p:nvSpPr>
-          <p:cNvPr id="107" name="Shape 104"/>
+          <p:cNvPr id="75" name="Shape 72"/>
+          <p:cNvSpPr/>
+          <p:nvPr/>
+        </p:nvSpPr>
+        <p:spPr>
+          <a:xfrm>
+            <a:off x="1600200" y="4160520"/>
+            <a:ext cx="4937760" cy="91"/>
+          </a:xfrm>
+          <a:prstGeom prst="line">
+            <a:avLst/>
+          </a:prstGeom>
+          <a:noFill/>
+          <a:ln w="15875">
+            <a:solidFill>
+              <a:srgbClr val="687783"/>
+            </a:solidFill>
+            <a:prstDash val="solid"/>
+            <a:headEnd type="triangle"/>
+            <a:tailEnd type="triangle"/>
+          </a:ln>
+        </p:spPr>
+      </p:sp>
+      <p:sp>
+        <p:nvSpPr>
+          <p:cNvPr id="76" name="Shape 73"/>
+          <p:cNvSpPr/>
+          <p:nvPr/>
+        </p:nvSpPr>
+        <p:spPr>
+          <a:xfrm>
+            <a:off x="1737360" y="4105656"/>
+            <a:ext cx="91" cy="109728"/>
+          </a:xfrm>
+          <a:prstGeom prst="line">
+            <a:avLst/>
+          </a:prstGeom>
+          <a:noFill/>
+          <a:ln w="12700">
+            <a:solidFill>
+              <a:srgbClr val="687783"/>
+            </a:solidFill>
+            <a:prstDash val="solid"/>
+          </a:ln>
+        </p:spPr>
+      </p:sp>
+      <p:sp>
+        <p:nvSpPr>
+          <p:cNvPr id="77" name="Text 74"/>
+          <p:cNvSpPr txBox="1"/>
+          <p:nvPr/>
+        </p:nvSpPr>
+        <p:spPr>
+          <a:xfrm>
+            <a:off x="1554480" y="4251960"/>
+            <a:ext cx="365760" cy="201168"/>
+          </a:xfrm>
+          <a:prstGeom prst="rect">
+            <a:avLst/>
+          </a:prstGeom>
+          <a:noFill/>
+          <a:ln/>
+        </p:spPr>
+        <p:txBody>
+          <a:bodyPr wrap="square" lIns="0" tIns="0" rIns="0" bIns="0" rtlCol="0" anchor="t"/>
+          <a:lstStyle/>
+          <a:p>
+            <a:pPr algn="ctr" indent="0" marL="0">
+              <a:buNone/>
+            </a:pPr>
+            <a:r>
+              <a:rPr lang="en-US" sz="900" dirty="0">
+                <a:solidFill>
+                  <a:srgbClr val="687783"/>
+                </a:solidFill>
+                <a:latin typeface="Arial" pitchFamily="34" charset="0"/>
+                <a:ea typeface="Arial" pitchFamily="34" charset="-122"/>
+                <a:cs typeface="Arial" pitchFamily="34" charset="-120"/>
+              </a:rPr>
+              <a:t>−6</a:t>
+            </a:r>
+            <a:endParaRPr lang="en-US" sz="900" dirty="0"/>
+          </a:p>
+        </p:txBody>
+      </p:sp>
+      <p:sp>
+        <p:nvSpPr>
+          <p:cNvPr id="78" name="Shape 75"/>
+          <p:cNvSpPr/>
+          <p:nvPr/>
+        </p:nvSpPr>
+        <p:spPr>
+          <a:xfrm>
+            <a:off x="2096086" y="4105656"/>
+            <a:ext cx="91" cy="109728"/>
+          </a:xfrm>
+          <a:prstGeom prst="line">
+            <a:avLst/>
+          </a:prstGeom>
+          <a:noFill/>
+          <a:ln w="12700">
+            <a:solidFill>
+              <a:srgbClr val="687783"/>
+            </a:solidFill>
+            <a:prstDash val="solid"/>
+          </a:ln>
+        </p:spPr>
+      </p:sp>
+      <p:sp>
+        <p:nvSpPr>
+          <p:cNvPr id="79" name="Text 76"/>
+          <p:cNvSpPr txBox="1"/>
+          <p:nvPr/>
+        </p:nvSpPr>
+        <p:spPr>
+          <a:xfrm>
+            <a:off x="1913206" y="4251960"/>
+            <a:ext cx="365760" cy="201168"/>
+          </a:xfrm>
+          <a:prstGeom prst="rect">
+            <a:avLst/>
+          </a:prstGeom>
+          <a:noFill/>
+          <a:ln/>
+        </p:spPr>
+        <p:txBody>
+          <a:bodyPr wrap="square" lIns="0" tIns="0" rIns="0" bIns="0" rtlCol="0" anchor="t"/>
+          <a:lstStyle/>
+          <a:p>
+            <a:pPr algn="ctr" indent="0" marL="0">
+              <a:buNone/>
+            </a:pPr>
+            <a:r>
+              <a:rPr lang="en-US" sz="900" dirty="0">
+                <a:solidFill>
+                  <a:srgbClr val="687783"/>
+                </a:solidFill>
+                <a:latin typeface="Arial" pitchFamily="34" charset="0"/>
+                <a:ea typeface="Arial" pitchFamily="34" charset="-122"/>
+                <a:cs typeface="Arial" pitchFamily="34" charset="-120"/>
+              </a:rPr>
+              <a:t>−5</a:t>
+            </a:r>
+            <a:endParaRPr lang="en-US" sz="900" dirty="0"/>
+          </a:p>
+        </p:txBody>
+      </p:sp>
+      <p:sp>
+        <p:nvSpPr>
+          <p:cNvPr id="80" name="Shape 77"/>
+          <p:cNvSpPr/>
+          <p:nvPr/>
+        </p:nvSpPr>
+        <p:spPr>
+          <a:xfrm>
+            <a:off x="2454812" y="4105656"/>
+            <a:ext cx="91" cy="109728"/>
+          </a:xfrm>
+          <a:prstGeom prst="line">
+            <a:avLst/>
+          </a:prstGeom>
+          <a:noFill/>
+          <a:ln w="12700">
+            <a:solidFill>
+              <a:srgbClr val="687783"/>
+            </a:solidFill>
+            <a:prstDash val="solid"/>
+          </a:ln>
+        </p:spPr>
+      </p:sp>
+      <p:sp>
+        <p:nvSpPr>
+          <p:cNvPr id="81" name="Text 78"/>
+          <p:cNvSpPr txBox="1"/>
+          <p:nvPr/>
+        </p:nvSpPr>
+        <p:spPr>
+          <a:xfrm>
+            <a:off x="2271932" y="4251960"/>
+            <a:ext cx="365760" cy="201168"/>
+          </a:xfrm>
+          <a:prstGeom prst="rect">
+            <a:avLst/>
+          </a:prstGeom>
+          <a:noFill/>
+          <a:ln/>
+        </p:spPr>
+        <p:txBody>
+          <a:bodyPr wrap="square" lIns="0" tIns="0" rIns="0" bIns="0" rtlCol="0" anchor="t"/>
+          <a:lstStyle/>
+          <a:p>
+            <a:pPr algn="ctr" indent="0" marL="0">
+              <a:buNone/>
+            </a:pPr>
+            <a:r>
+              <a:rPr lang="en-US" sz="900" dirty="0">
+                <a:solidFill>
+                  <a:srgbClr val="687783"/>
+                </a:solidFill>
+                <a:latin typeface="Arial" pitchFamily="34" charset="0"/>
+                <a:ea typeface="Arial" pitchFamily="34" charset="-122"/>
+                <a:cs typeface="Arial" pitchFamily="34" charset="-120"/>
+              </a:rPr>
+              <a:t>−4</a:t>
+            </a:r>
+            <a:endParaRPr lang="en-US" sz="900" dirty="0"/>
+          </a:p>
+        </p:txBody>
+      </p:sp>
+      <p:sp>
+        <p:nvSpPr>
+          <p:cNvPr id="82" name="Shape 79"/>
+          <p:cNvSpPr/>
+          <p:nvPr/>
+        </p:nvSpPr>
+        <p:spPr>
+          <a:xfrm>
+            <a:off x="2813538" y="4105656"/>
+            <a:ext cx="91" cy="109728"/>
+          </a:xfrm>
+          <a:prstGeom prst="line">
+            <a:avLst/>
+          </a:prstGeom>
+          <a:noFill/>
+          <a:ln w="12700">
+            <a:solidFill>
+              <a:srgbClr val="687783"/>
+            </a:solidFill>
+            <a:prstDash val="solid"/>
+          </a:ln>
+        </p:spPr>
+      </p:sp>
+      <p:sp>
+        <p:nvSpPr>
+          <p:cNvPr id="83" name="Text 80"/>
+          <p:cNvSpPr txBox="1"/>
+          <p:nvPr/>
+        </p:nvSpPr>
+        <p:spPr>
+          <a:xfrm>
+            <a:off x="2630658" y="4251960"/>
+            <a:ext cx="365760" cy="201168"/>
+          </a:xfrm>
+          <a:prstGeom prst="rect">
+            <a:avLst/>
+          </a:prstGeom>
+          <a:noFill/>
+          <a:ln/>
+        </p:spPr>
+        <p:txBody>
+          <a:bodyPr wrap="square" lIns="0" tIns="0" rIns="0" bIns="0" rtlCol="0" anchor="t"/>
+          <a:lstStyle/>
+          <a:p>
+            <a:pPr algn="ctr" indent="0" marL="0">
+              <a:buNone/>
+            </a:pPr>
+            <a:r>
+              <a:rPr lang="en-US" sz="900" dirty="0">
+                <a:solidFill>
+                  <a:srgbClr val="687783"/>
+                </a:solidFill>
+                <a:latin typeface="Arial" pitchFamily="34" charset="0"/>
+                <a:ea typeface="Arial" pitchFamily="34" charset="-122"/>
+                <a:cs typeface="Arial" pitchFamily="34" charset="-120"/>
+              </a:rPr>
+              <a:t>−3</a:t>
+            </a:r>
+            <a:endParaRPr lang="en-US" sz="900" dirty="0"/>
+          </a:p>
+        </p:txBody>
+      </p:sp>
+      <p:sp>
+        <p:nvSpPr>
+          <p:cNvPr id="84" name="Shape 81"/>
+          <p:cNvSpPr/>
+          <p:nvPr/>
+        </p:nvSpPr>
+        <p:spPr>
+          <a:xfrm>
+            <a:off x="3172265" y="4105656"/>
+            <a:ext cx="91" cy="109728"/>
+          </a:xfrm>
+          <a:prstGeom prst="line">
+            <a:avLst/>
+          </a:prstGeom>
+          <a:noFill/>
+          <a:ln w="12700">
+            <a:solidFill>
+              <a:srgbClr val="687783"/>
+            </a:solidFill>
+            <a:prstDash val="solid"/>
+          </a:ln>
+        </p:spPr>
+      </p:sp>
+      <p:sp>
+        <p:nvSpPr>
+          <p:cNvPr id="85" name="Text 82"/>
+          <p:cNvSpPr txBox="1"/>
+          <p:nvPr/>
+        </p:nvSpPr>
+        <p:spPr>
+          <a:xfrm>
+            <a:off x="2989385" y="4251960"/>
+            <a:ext cx="365760" cy="201168"/>
+          </a:xfrm>
+          <a:prstGeom prst="rect">
+            <a:avLst/>
+          </a:prstGeom>
+          <a:noFill/>
+          <a:ln/>
+        </p:spPr>
+        <p:txBody>
+          <a:bodyPr wrap="square" lIns="0" tIns="0" rIns="0" bIns="0" rtlCol="0" anchor="t"/>
+          <a:lstStyle/>
+          <a:p>
+            <a:pPr algn="ctr" indent="0" marL="0">
+              <a:buNone/>
+            </a:pPr>
+            <a:r>
+              <a:rPr lang="en-US" sz="900" dirty="0">
+                <a:solidFill>
+                  <a:srgbClr val="687783"/>
+                </a:solidFill>
+                <a:latin typeface="Arial" pitchFamily="34" charset="0"/>
+                <a:ea typeface="Arial" pitchFamily="34" charset="-122"/>
+                <a:cs typeface="Arial" pitchFamily="34" charset="-120"/>
+              </a:rPr>
+              <a:t>−2</a:t>
+            </a:r>
+            <a:endParaRPr lang="en-US" sz="900" dirty="0"/>
+          </a:p>
+        </p:txBody>
+      </p:sp>
+      <p:sp>
+        <p:nvSpPr>
+          <p:cNvPr id="86" name="Shape 83"/>
+          <p:cNvSpPr/>
+          <p:nvPr/>
+        </p:nvSpPr>
+        <p:spPr>
+          <a:xfrm>
+            <a:off x="3530991" y="4105656"/>
+            <a:ext cx="91" cy="109728"/>
+          </a:xfrm>
+          <a:prstGeom prst="line">
+            <a:avLst/>
+          </a:prstGeom>
+          <a:noFill/>
+          <a:ln w="12700">
+            <a:solidFill>
+              <a:srgbClr val="687783"/>
+            </a:solidFill>
+            <a:prstDash val="solid"/>
+          </a:ln>
+        </p:spPr>
+      </p:sp>
+      <p:sp>
+        <p:nvSpPr>
+          <p:cNvPr id="87" name="Text 84"/>
+          <p:cNvSpPr txBox="1"/>
+          <p:nvPr/>
+        </p:nvSpPr>
+        <p:spPr>
+          <a:xfrm>
+            <a:off x="3348111" y="4251960"/>
+            <a:ext cx="365760" cy="201168"/>
+          </a:xfrm>
+          <a:prstGeom prst="rect">
+            <a:avLst/>
+          </a:prstGeom>
+          <a:noFill/>
+          <a:ln/>
+        </p:spPr>
+        <p:txBody>
+          <a:bodyPr wrap="square" lIns="0" tIns="0" rIns="0" bIns="0" rtlCol="0" anchor="t"/>
+          <a:lstStyle/>
+          <a:p>
+            <a:pPr algn="ctr" indent="0" marL="0">
+              <a:buNone/>
+            </a:pPr>
+            <a:r>
+              <a:rPr lang="en-US" sz="900" dirty="0">
+                <a:solidFill>
+                  <a:srgbClr val="687783"/>
+                </a:solidFill>
+                <a:latin typeface="Arial" pitchFamily="34" charset="0"/>
+                <a:ea typeface="Arial" pitchFamily="34" charset="-122"/>
+                <a:cs typeface="Arial" pitchFamily="34" charset="-120"/>
+              </a:rPr>
+              <a:t>−1</a:t>
+            </a:r>
+            <a:endParaRPr lang="en-US" sz="900" dirty="0"/>
+          </a:p>
+        </p:txBody>
+      </p:sp>
+      <p:sp>
+        <p:nvSpPr>
+          <p:cNvPr id="88" name="Shape 85"/>
+          <p:cNvSpPr/>
+          <p:nvPr/>
+        </p:nvSpPr>
+        <p:spPr>
+          <a:xfrm>
+            <a:off x="3889717" y="4105656"/>
+            <a:ext cx="91" cy="109728"/>
+          </a:xfrm>
+          <a:prstGeom prst="line">
+            <a:avLst/>
+          </a:prstGeom>
+          <a:noFill/>
+          <a:ln w="12700">
+            <a:solidFill>
+              <a:srgbClr val="687783"/>
+            </a:solidFill>
+            <a:prstDash val="solid"/>
+          </a:ln>
+        </p:spPr>
+      </p:sp>
+      <p:sp>
+        <p:nvSpPr>
+          <p:cNvPr id="89" name="Text 86"/>
+          <p:cNvSpPr txBox="1"/>
+          <p:nvPr/>
+        </p:nvSpPr>
+        <p:spPr>
+          <a:xfrm>
+            <a:off x="3706837" y="4251960"/>
+            <a:ext cx="365760" cy="201168"/>
+          </a:xfrm>
+          <a:prstGeom prst="rect">
+            <a:avLst/>
+          </a:prstGeom>
+          <a:noFill/>
+          <a:ln/>
+        </p:spPr>
+        <p:txBody>
+          <a:bodyPr wrap="square" lIns="0" tIns="0" rIns="0" bIns="0" rtlCol="0" anchor="t"/>
+          <a:lstStyle/>
+          <a:p>
+            <a:pPr algn="ctr" indent="0" marL="0">
+              <a:buNone/>
+            </a:pPr>
+            <a:r>
+              <a:rPr lang="en-US" sz="900" dirty="0">
+                <a:solidFill>
+                  <a:srgbClr val="687783"/>
+                </a:solidFill>
+                <a:latin typeface="Arial" pitchFamily="34" charset="0"/>
+                <a:ea typeface="Arial" pitchFamily="34" charset="-122"/>
+                <a:cs typeface="Arial" pitchFamily="34" charset="-120"/>
+              </a:rPr>
+              <a:t>0</a:t>
+            </a:r>
+            <a:endParaRPr lang="en-US" sz="900" dirty="0"/>
+          </a:p>
+        </p:txBody>
+      </p:sp>
+      <p:sp>
+        <p:nvSpPr>
+          <p:cNvPr id="90" name="Shape 87"/>
+          <p:cNvSpPr/>
+          <p:nvPr/>
+        </p:nvSpPr>
+        <p:spPr>
+          <a:xfrm>
+            <a:off x="4248443" y="4105656"/>
+            <a:ext cx="91" cy="109728"/>
+          </a:xfrm>
+          <a:prstGeom prst="line">
+            <a:avLst/>
+          </a:prstGeom>
+          <a:noFill/>
+          <a:ln w="12700">
+            <a:solidFill>
+              <a:srgbClr val="687783"/>
+            </a:solidFill>
+            <a:prstDash val="solid"/>
+          </a:ln>
+        </p:spPr>
+      </p:sp>
+      <p:sp>
+        <p:nvSpPr>
+          <p:cNvPr id="91" name="Text 88"/>
+          <p:cNvSpPr txBox="1"/>
+          <p:nvPr/>
+        </p:nvSpPr>
+        <p:spPr>
+          <a:xfrm>
+            <a:off x="4065563" y="4251960"/>
+            <a:ext cx="365760" cy="201168"/>
+          </a:xfrm>
+          <a:prstGeom prst="rect">
+            <a:avLst/>
+          </a:prstGeom>
+          <a:noFill/>
+          <a:ln/>
+        </p:spPr>
+        <p:txBody>
+          <a:bodyPr wrap="square" lIns="0" tIns="0" rIns="0" bIns="0" rtlCol="0" anchor="t"/>
+          <a:lstStyle/>
+          <a:p>
+            <a:pPr algn="ctr" indent="0" marL="0">
+              <a:buNone/>
+            </a:pPr>
+            <a:r>
+              <a:rPr lang="en-US" sz="900" dirty="0">
+                <a:solidFill>
+                  <a:srgbClr val="687783"/>
+                </a:solidFill>
+                <a:latin typeface="Arial" pitchFamily="34" charset="0"/>
+                <a:ea typeface="Arial" pitchFamily="34" charset="-122"/>
+                <a:cs typeface="Arial" pitchFamily="34" charset="-120"/>
+              </a:rPr>
+              <a:t>1</a:t>
+            </a:r>
+            <a:endParaRPr lang="en-US" sz="900" dirty="0"/>
+          </a:p>
+        </p:txBody>
+      </p:sp>
+      <p:sp>
+        <p:nvSpPr>
+          <p:cNvPr id="92" name="Shape 89"/>
+          <p:cNvSpPr/>
+          <p:nvPr/>
+        </p:nvSpPr>
+        <p:spPr>
+          <a:xfrm>
+            <a:off x="4607169" y="4105656"/>
+            <a:ext cx="91" cy="109728"/>
+          </a:xfrm>
+          <a:prstGeom prst="line">
+            <a:avLst/>
+          </a:prstGeom>
+          <a:noFill/>
+          <a:ln w="12700">
+            <a:solidFill>
+              <a:srgbClr val="687783"/>
+            </a:solidFill>
+            <a:prstDash val="solid"/>
+          </a:ln>
+        </p:spPr>
+      </p:sp>
+      <p:sp>
+        <p:nvSpPr>
+          <p:cNvPr id="93" name="Text 90"/>
+          <p:cNvSpPr txBox="1"/>
+          <p:nvPr/>
+        </p:nvSpPr>
+        <p:spPr>
+          <a:xfrm>
+            <a:off x="4424289" y="4251960"/>
+            <a:ext cx="365760" cy="201168"/>
+          </a:xfrm>
+          <a:prstGeom prst="rect">
+            <a:avLst/>
+          </a:prstGeom>
+          <a:noFill/>
+          <a:ln/>
+        </p:spPr>
+        <p:txBody>
+          <a:bodyPr wrap="square" lIns="0" tIns="0" rIns="0" bIns="0" rtlCol="0" anchor="t"/>
+          <a:lstStyle/>
+          <a:p>
+            <a:pPr algn="ctr" indent="0" marL="0">
+              <a:buNone/>
+            </a:pPr>
+            <a:r>
+              <a:rPr lang="en-US" sz="900" dirty="0">
+                <a:solidFill>
+                  <a:srgbClr val="687783"/>
+                </a:solidFill>
+                <a:latin typeface="Arial" pitchFamily="34" charset="0"/>
+                <a:ea typeface="Arial" pitchFamily="34" charset="-122"/>
+                <a:cs typeface="Arial" pitchFamily="34" charset="-120"/>
+              </a:rPr>
+              <a:t>2</a:t>
+            </a:r>
+            <a:endParaRPr lang="en-US" sz="900" dirty="0"/>
+          </a:p>
+        </p:txBody>
+      </p:sp>
+      <p:sp>
+        <p:nvSpPr>
+          <p:cNvPr id="94" name="Shape 91"/>
+          <p:cNvSpPr/>
+          <p:nvPr/>
+        </p:nvSpPr>
+        <p:spPr>
+          <a:xfrm>
+            <a:off x="4965895" y="4105656"/>
+            <a:ext cx="91" cy="109728"/>
+          </a:xfrm>
+          <a:prstGeom prst="line">
+            <a:avLst/>
+          </a:prstGeom>
+          <a:noFill/>
+          <a:ln w="12700">
+            <a:solidFill>
+              <a:srgbClr val="687783"/>
+            </a:solidFill>
+            <a:prstDash val="solid"/>
+          </a:ln>
+        </p:spPr>
+      </p:sp>
+      <p:sp>
+        <p:nvSpPr>
+          <p:cNvPr id="95" name="Text 92"/>
+          <p:cNvSpPr txBox="1"/>
+          <p:nvPr/>
+        </p:nvSpPr>
+        <p:spPr>
+          <a:xfrm>
+            <a:off x="4783015" y="4251960"/>
+            <a:ext cx="365760" cy="201168"/>
+          </a:xfrm>
+          <a:prstGeom prst="rect">
+            <a:avLst/>
+          </a:prstGeom>
+          <a:noFill/>
+          <a:ln/>
+        </p:spPr>
+        <p:txBody>
+          <a:bodyPr wrap="square" lIns="0" tIns="0" rIns="0" bIns="0" rtlCol="0" anchor="t"/>
+          <a:lstStyle/>
+          <a:p>
+            <a:pPr algn="ctr" indent="0" marL="0">
+              <a:buNone/>
+            </a:pPr>
+            <a:r>
+              <a:rPr lang="en-US" sz="900" dirty="0">
+                <a:solidFill>
+                  <a:srgbClr val="687783"/>
+                </a:solidFill>
+                <a:latin typeface="Arial" pitchFamily="34" charset="0"/>
+                <a:ea typeface="Arial" pitchFamily="34" charset="-122"/>
+                <a:cs typeface="Arial" pitchFamily="34" charset="-120"/>
+              </a:rPr>
+              <a:t>3</a:t>
+            </a:r>
+            <a:endParaRPr lang="en-US" sz="900" dirty="0"/>
+          </a:p>
+        </p:txBody>
+      </p:sp>
+      <p:sp>
+        <p:nvSpPr>
+          <p:cNvPr id="96" name="Shape 93"/>
+          <p:cNvSpPr/>
+          <p:nvPr/>
+        </p:nvSpPr>
+        <p:spPr>
+          <a:xfrm>
+            <a:off x="5324622" y="4105656"/>
+            <a:ext cx="91" cy="109728"/>
+          </a:xfrm>
+          <a:prstGeom prst="line">
+            <a:avLst/>
+          </a:prstGeom>
+          <a:noFill/>
+          <a:ln w="12700">
+            <a:solidFill>
+              <a:srgbClr val="687783"/>
+            </a:solidFill>
+            <a:prstDash val="solid"/>
+          </a:ln>
+        </p:spPr>
+      </p:sp>
+      <p:sp>
+        <p:nvSpPr>
+          <p:cNvPr id="97" name="Text 94"/>
+          <p:cNvSpPr txBox="1"/>
+          <p:nvPr/>
+        </p:nvSpPr>
+        <p:spPr>
+          <a:xfrm>
+            <a:off x="5141742" y="4251960"/>
+            <a:ext cx="365760" cy="201168"/>
+          </a:xfrm>
+          <a:prstGeom prst="rect">
+            <a:avLst/>
+          </a:prstGeom>
+          <a:noFill/>
+          <a:ln/>
+        </p:spPr>
+        <p:txBody>
+          <a:bodyPr wrap="square" lIns="0" tIns="0" rIns="0" bIns="0" rtlCol="0" anchor="t"/>
+          <a:lstStyle/>
+          <a:p>
+            <a:pPr algn="ctr" indent="0" marL="0">
+              <a:buNone/>
+            </a:pPr>
+            <a:r>
+              <a:rPr lang="en-US" sz="900" dirty="0">
+                <a:solidFill>
+                  <a:srgbClr val="687783"/>
+                </a:solidFill>
+                <a:latin typeface="Arial" pitchFamily="34" charset="0"/>
+                <a:ea typeface="Arial" pitchFamily="34" charset="-122"/>
+                <a:cs typeface="Arial" pitchFamily="34" charset="-120"/>
+              </a:rPr>
+              <a:t>4</a:t>
+            </a:r>
+            <a:endParaRPr lang="en-US" sz="900" dirty="0"/>
+          </a:p>
+        </p:txBody>
+      </p:sp>
+      <p:sp>
+        <p:nvSpPr>
+          <p:cNvPr id="98" name="Shape 95"/>
+          <p:cNvSpPr/>
+          <p:nvPr/>
+        </p:nvSpPr>
+        <p:spPr>
+          <a:xfrm>
+            <a:off x="5683348" y="4105656"/>
+            <a:ext cx="91" cy="109728"/>
+          </a:xfrm>
+          <a:prstGeom prst="line">
+            <a:avLst/>
+          </a:prstGeom>
+          <a:noFill/>
+          <a:ln w="12700">
+            <a:solidFill>
+              <a:srgbClr val="687783"/>
+            </a:solidFill>
+            <a:prstDash val="solid"/>
+          </a:ln>
+        </p:spPr>
+      </p:sp>
+      <p:sp>
+        <p:nvSpPr>
+          <p:cNvPr id="99" name="Text 96"/>
+          <p:cNvSpPr txBox="1"/>
+          <p:nvPr/>
+        </p:nvSpPr>
+        <p:spPr>
+          <a:xfrm>
+            <a:off x="5500468" y="4251960"/>
+            <a:ext cx="365760" cy="201168"/>
+          </a:xfrm>
+          <a:prstGeom prst="rect">
+            <a:avLst/>
+          </a:prstGeom>
+          <a:noFill/>
+          <a:ln/>
+        </p:spPr>
+        <p:txBody>
+          <a:bodyPr wrap="square" lIns="0" tIns="0" rIns="0" bIns="0" rtlCol="0" anchor="t"/>
+          <a:lstStyle/>
+          <a:p>
+            <a:pPr algn="ctr" indent="0" marL="0">
+              <a:buNone/>
+            </a:pPr>
+            <a:r>
+              <a:rPr lang="en-US" sz="900" dirty="0">
+                <a:solidFill>
+                  <a:srgbClr val="687783"/>
+                </a:solidFill>
+                <a:latin typeface="Arial" pitchFamily="34" charset="0"/>
+                <a:ea typeface="Arial" pitchFamily="34" charset="-122"/>
+                <a:cs typeface="Arial" pitchFamily="34" charset="-120"/>
+              </a:rPr>
+              <a:t>5</a:t>
+            </a:r>
+            <a:endParaRPr lang="en-US" sz="900" dirty="0"/>
+          </a:p>
+        </p:txBody>
+      </p:sp>
+      <p:sp>
+        <p:nvSpPr>
+          <p:cNvPr id="100" name="Shape 97"/>
+          <p:cNvSpPr/>
+          <p:nvPr/>
+        </p:nvSpPr>
+        <p:spPr>
+          <a:xfrm>
+            <a:off x="6042074" y="4105656"/>
+            <a:ext cx="91" cy="109728"/>
+          </a:xfrm>
+          <a:prstGeom prst="line">
+            <a:avLst/>
+          </a:prstGeom>
+          <a:noFill/>
+          <a:ln w="12700">
+            <a:solidFill>
+              <a:srgbClr val="687783"/>
+            </a:solidFill>
+            <a:prstDash val="solid"/>
+          </a:ln>
+        </p:spPr>
+      </p:sp>
+      <p:sp>
+        <p:nvSpPr>
+          <p:cNvPr id="101" name="Text 98"/>
+          <p:cNvSpPr txBox="1"/>
+          <p:nvPr/>
+        </p:nvSpPr>
+        <p:spPr>
+          <a:xfrm>
+            <a:off x="5859194" y="4251960"/>
+            <a:ext cx="365760" cy="201168"/>
+          </a:xfrm>
+          <a:prstGeom prst="rect">
+            <a:avLst/>
+          </a:prstGeom>
+          <a:noFill/>
+          <a:ln/>
+        </p:spPr>
+        <p:txBody>
+          <a:bodyPr wrap="square" lIns="0" tIns="0" rIns="0" bIns="0" rtlCol="0" anchor="t"/>
+          <a:lstStyle/>
+          <a:p>
+            <a:pPr algn="ctr" indent="0" marL="0">
+              <a:buNone/>
+            </a:pPr>
+            <a:r>
+              <a:rPr lang="en-US" sz="900" dirty="0">
+                <a:solidFill>
+                  <a:srgbClr val="687783"/>
+                </a:solidFill>
+                <a:latin typeface="Arial" pitchFamily="34" charset="0"/>
+                <a:ea typeface="Arial" pitchFamily="34" charset="-122"/>
+                <a:cs typeface="Arial" pitchFamily="34" charset="-120"/>
+              </a:rPr>
+              <a:t>6</a:t>
+            </a:r>
+            <a:endParaRPr lang="en-US" sz="900" dirty="0"/>
+          </a:p>
+        </p:txBody>
+      </p:sp>
+      <p:sp>
+        <p:nvSpPr>
+          <p:cNvPr id="102" name="Shape 99"/>
+          <p:cNvSpPr/>
+          <p:nvPr/>
+        </p:nvSpPr>
+        <p:spPr>
+          <a:xfrm>
+            <a:off x="6400800" y="4105656"/>
+            <a:ext cx="91" cy="109728"/>
+          </a:xfrm>
+          <a:prstGeom prst="line">
+            <a:avLst/>
+          </a:prstGeom>
+          <a:noFill/>
+          <a:ln w="12700">
+            <a:solidFill>
+              <a:srgbClr val="687783"/>
+            </a:solidFill>
+            <a:prstDash val="solid"/>
+          </a:ln>
+        </p:spPr>
+      </p:sp>
+      <p:sp>
+        <p:nvSpPr>
+          <p:cNvPr id="103" name="Text 100"/>
+          <p:cNvSpPr txBox="1"/>
+          <p:nvPr/>
+        </p:nvSpPr>
+        <p:spPr>
+          <a:xfrm>
+            <a:off x="6217920" y="4251960"/>
+            <a:ext cx="365760" cy="201168"/>
+          </a:xfrm>
+          <a:prstGeom prst="rect">
+            <a:avLst/>
+          </a:prstGeom>
+          <a:noFill/>
+          <a:ln/>
+        </p:spPr>
+        <p:txBody>
+          <a:bodyPr wrap="square" lIns="0" tIns="0" rIns="0" bIns="0" rtlCol="0" anchor="t"/>
+          <a:lstStyle/>
+          <a:p>
+            <a:pPr algn="ctr" indent="0" marL="0">
+              <a:buNone/>
+            </a:pPr>
+            <a:r>
+              <a:rPr lang="en-US" sz="900" dirty="0">
+                <a:solidFill>
+                  <a:srgbClr val="687783"/>
+                </a:solidFill>
+                <a:latin typeface="Arial" pitchFamily="34" charset="0"/>
+                <a:ea typeface="Arial" pitchFamily="34" charset="-122"/>
+                <a:cs typeface="Arial" pitchFamily="34" charset="-120"/>
+              </a:rPr>
+              <a:t>7</a:t>
+            </a:r>
+            <a:endParaRPr lang="en-US" sz="900" dirty="0"/>
+          </a:p>
+        </p:txBody>
+      </p:sp>
+      <p:sp>
+        <p:nvSpPr>
+          <p:cNvPr id="104" name="Text 101"/>
+          <p:cNvSpPr txBox="1"/>
+          <p:nvPr/>
+        </p:nvSpPr>
+        <p:spPr>
+          <a:xfrm>
+            <a:off x="685800" y="3977640"/>
+            <a:ext cx="777240" cy="365760"/>
+          </a:xfrm>
+          <a:prstGeom prst="rect">
+            <a:avLst/>
+          </a:prstGeom>
+          <a:noFill/>
+          <a:ln/>
+        </p:spPr>
+        <p:txBody>
+          <a:bodyPr wrap="square" lIns="0" tIns="0" rIns="0" bIns="0" rtlCol="0" anchor="ctr"/>
+          <a:lstStyle/>
+          <a:p>
+            <a:pPr indent="0" marL="0">
+              <a:buNone/>
+            </a:pPr>
+            <a:r>
+              <a:rPr lang="en-US" sz="1500" b="1" dirty="0">
+                <a:solidFill>
+                  <a:srgbClr val="11344E"/>
+                </a:solidFill>
+                <a:latin typeface="Times New Roman" pitchFamily="34" charset="0"/>
+                <a:ea typeface="Times New Roman" pitchFamily="34" charset="-122"/>
+                <a:cs typeface="Times New Roman" pitchFamily="34" charset="-120"/>
+              </a:rPr>
+              <a:t>3.</a:t>
+            </a:r>
+            <a:endParaRPr lang="en-US" sz="1500" dirty="0"/>
+          </a:p>
+        </p:txBody>
+      </p:sp>
+      <p:sp>
+        <p:nvSpPr>
+          <p:cNvPr id="105" name="Shape 102"/>
+          <p:cNvSpPr/>
+          <p:nvPr/>
+        </p:nvSpPr>
+        <p:spPr>
+          <a:xfrm>
+            <a:off x="1600200" y="4160520"/>
+            <a:ext cx="3365695" cy="0"/>
+          </a:xfrm>
+          <a:prstGeom prst="line">
+            <a:avLst/>
+          </a:prstGeom>
+          <a:noFill/>
+          <a:ln w="63500">
+            <a:solidFill>
+              <a:srgbClr val="1B7F5E"/>
+            </a:solidFill>
+            <a:prstDash val="solid"/>
+            <a:headEnd type="triangle"/>
+          </a:ln>
+        </p:spPr>
+      </p:sp>
+      <p:sp>
+        <p:nvSpPr>
+          <p:cNvPr id="106" name="Shape 103"/>
+          <p:cNvSpPr/>
+          <p:nvPr/>
+        </p:nvSpPr>
+        <p:spPr>
+          <a:xfrm>
+            <a:off x="4883599" y="4078224"/>
+            <a:ext cx="164592" cy="164592"/>
+          </a:xfrm>
+          <a:prstGeom prst="ellipse">
+            <a:avLst/>
+          </a:prstGeom>
+          <a:solidFill>
+            <a:srgbClr val="FFFFFF"/>
+          </a:solidFill>
+          <a:ln w="25400">
+            <a:solidFill>
+              <a:srgbClr val="1B7F5E"/>
+            </a:solidFill>
+            <a:prstDash val="solid"/>
+          </a:ln>
+        </p:spPr>
+      </p:sp>
+      <p:sp>
+        <p:nvSpPr>
+          <p:cNvPr id="107" name="Text 104"/>
+          <p:cNvSpPr txBox="1"/>
+          <p:nvPr/>
+        </p:nvSpPr>
+        <p:spPr>
+          <a:xfrm>
+            <a:off x="1737360" y="4526280"/>
+            <a:ext cx="5029200" cy="365760"/>
+          </a:xfrm>
+          <a:prstGeom prst="rect">
+            <a:avLst/>
+          </a:prstGeom>
+          <a:noFill/>
+          <a:ln/>
+        </p:spPr>
+        <p:txBody>
+          <a:bodyPr wrap="square" lIns="0" tIns="0" rIns="0" bIns="0" rtlCol="0" anchor="t"/>
+          <a:lstStyle/>
+          <a:p>
+            <a:pPr indent="0" marL="0">
+              <a:buNone/>
+            </a:pPr>
+            <a:r>
+              <a:rPr lang="en-US" sz="1800" b="1" dirty="0">
+                <a:solidFill>
+                  <a:srgbClr val="1B7F5E"/>
+                </a:solidFill>
+                <a:latin typeface="Times New Roman" pitchFamily="34" charset="0"/>
+                <a:ea typeface="Times New Roman" pitchFamily="34" charset="-122"/>
+                <a:cs typeface="Times New Roman" pitchFamily="34" charset="-120"/>
+              </a:rPr>
+              <a:t>A ∪ C = (−∞, 3)</a:t>
+            </a:r>
+            <a:endParaRPr lang="en-US" sz="1800" dirty="0"/>
+          </a:p>
+        </p:txBody>
+      </p:sp>
+      <p:sp>
+        <p:nvSpPr>
+          <p:cNvPr id="108" name="Shape 105"/>
           <p:cNvSpPr/>
           <p:nvPr/>
         </p:nvSpPr>
@@ -12671,7 +12696,7 @@
       </p:sp>
       <p:sp>
         <p:nvSpPr>
-          <p:cNvPr id="108" name="Text 105"/>
+          <p:cNvPr id="109" name="Text 106"/>
           <p:cNvSpPr txBox="1"/>
           <p:nvPr/>
         </p:nvSpPr>
@@ -12710,7 +12735,7 @@
       </p:sp>
       <p:sp>
         <p:nvSpPr>
-          <p:cNvPr id="109" name="Text 106"/>
+          <p:cNvPr id="110" name="Text 107"/>
           <p:cNvSpPr txBox="1"/>
           <p:nvPr/>
         </p:nvSpPr>
@@ -12812,7 +12837,7 @@
       </p:sp>
       <p:sp>
         <p:nvSpPr>
-          <p:cNvPr id="110" name="Text 107"/>
+          <p:cNvPr id="111" name="Text 108"/>
           <p:cNvSpPr txBox="1"/>
           <p:nvPr/>
         </p:nvSpPr>
@@ -13244,7 +13269,7 @@
                 <a:ea typeface="Times New Roman" pitchFamily="34" charset="-122"/>
                 <a:cs typeface="Times New Roman" pitchFamily="34" charset="-120"/>
               </a:rPr>
-              <a:t>2x</a:t>
+              <a:t>2</a:t>
             </a:r>
             <a:endParaRPr lang="en-US" sz="2200" dirty="0"/>
           </a:p>
@@ -13320,20 +13345,20 @@
         </p:nvSpPr>
         <p:spPr>
           <a:xfrm>
-            <a:off x="2468880" y="2240280"/>
-            <a:ext cx="365760" cy="457200"/>
-          </a:xfrm>
-          <a:prstGeom prst="rect">
-            <a:avLst/>
-          </a:prstGeom>
-          <a:noFill/>
-          <a:ln/>
-        </p:spPr>
-        <p:txBody>
-          <a:bodyPr wrap="square" lIns="0" tIns="0" rIns="0" bIns="0" rtlCol="0" anchor="t"/>
-          <a:lstStyle/>
-          <a:p>
-            <a:pPr algn="ctr" indent="0" marL="0">
+            <a:off x="2514600" y="2240280"/>
+            <a:ext cx="822960" cy="457200"/>
+          </a:xfrm>
+          <a:prstGeom prst="rect">
+            <a:avLst/>
+          </a:prstGeom>
+          <a:noFill/>
+          <a:ln/>
+        </p:spPr>
+        <p:txBody>
+          <a:bodyPr wrap="square" lIns="0" tIns="0" rIns="0" bIns="0" rtlCol="0" anchor="t"/>
+          <a:lstStyle/>
+          <a:p>
+            <a:pPr indent="0" marL="0">
               <a:buNone/>
             </a:pPr>
             <a:r>
@@ -13345,7 +13370,7 @@
                 <a:ea typeface="Times New Roman" pitchFamily="34" charset="-122"/>
                 <a:cs typeface="Times New Roman" pitchFamily="34" charset="-120"/>
               </a:rPr>
-              <a:t>=</a:t>
+              <a:t>+ 1  =</a:t>
             </a:r>
             <a:endParaRPr lang="en-US" sz="2200" dirty="0"/>
           </a:p>
@@ -13359,7 +13384,7 @@
         </p:nvSpPr>
         <p:spPr>
           <a:xfrm>
-            <a:off x="2834640" y="1874520"/>
+            <a:off x="3291840" y="1874520"/>
             <a:ext cx="1188720" cy="363220"/>
           </a:xfrm>
           <a:prstGeom prst="rect">
@@ -13384,7 +13409,7 @@
                 <a:ea typeface="Times New Roman" pitchFamily="34" charset="-122"/>
                 <a:cs typeface="Times New Roman" pitchFamily="34" charset="-120"/>
               </a:rPr>
-              <a:t>2</a:t>
+              <a:t>4</a:t>
             </a:r>
             <a:endParaRPr lang="en-US" sz="2200" dirty="0"/>
           </a:p>
@@ -13398,7 +13423,7 @@
         </p:nvSpPr>
         <p:spPr>
           <a:xfrm>
-            <a:off x="2880360" y="2265172"/>
+            <a:off x="3337560" y="2265172"/>
             <a:ext cx="1097280" cy="0"/>
           </a:xfrm>
           <a:prstGeom prst="line">
@@ -13421,7 +13446,7 @@
         </p:nvSpPr>
         <p:spPr>
           <a:xfrm>
-            <a:off x="2834640" y="2301748"/>
+            <a:off x="3291840" y="2301748"/>
             <a:ext cx="1188720" cy="363220"/>
           </a:xfrm>
           <a:prstGeom prst="rect">
@@ -13446,38 +13471,13 @@
                 <a:ea typeface="Times New Roman" pitchFamily="34" charset="-122"/>
                 <a:cs typeface="Times New Roman" pitchFamily="34" charset="-120"/>
               </a:rPr>
-              <a:t>x − 1</a:t>
-            </a:r>
-            <a:endParaRPr lang="en-US" sz="2200" dirty="0"/>
-          </a:p>
-        </p:txBody>
-      </p:sp>
-      <p:sp>
-        <p:nvSpPr>
-          <p:cNvPr id="20" name="Text 17"/>
-          <p:cNvSpPr txBox="1"/>
-          <p:nvPr/>
-        </p:nvSpPr>
-        <p:spPr>
-          <a:xfrm>
-            <a:off x="4069080" y="2240280"/>
-            <a:ext cx="731520" cy="457200"/>
-          </a:xfrm>
-          <a:prstGeom prst="rect">
-            <a:avLst/>
-          </a:prstGeom>
-          <a:noFill/>
-          <a:ln/>
-        </p:spPr>
-        <p:txBody>
-          <a:bodyPr wrap="square" lIns="0" tIns="0" rIns="0" bIns="0" rtlCol="0" anchor="t"/>
-          <a:lstStyle/>
-          <a:p>
-            <a:pPr indent="0" marL="0">
-              <a:buNone/>
-            </a:pPr>
-            <a:r>
-              <a:rPr lang="en-US" sz="2200" dirty="0">
+              <a:t>x</a:t>
+            </a:r>
+            <a:pPr algn="ctr" indent="0" marL="0">
+              <a:buNone/>
+            </a:pPr>
+            <a:r>
+              <a:rPr lang="en-US" sz="2200" baseline="30000" dirty="0">
                 <a:solidFill>
                   <a:srgbClr val="11344E"/>
                 </a:solidFill>
@@ -13485,34 +13485,9 @@
                 <a:ea typeface="Times New Roman" pitchFamily="34" charset="-122"/>
                 <a:cs typeface="Times New Roman" pitchFamily="34" charset="-120"/>
               </a:rPr>
-              <a:t>+ 5</a:t>
-            </a:r>
-            <a:endParaRPr lang="en-US" sz="2200" dirty="0"/>
-          </a:p>
-        </p:txBody>
-      </p:sp>
-      <p:sp>
-        <p:nvSpPr>
-          <p:cNvPr id="21" name="Text 18"/>
-          <p:cNvSpPr txBox="1"/>
-          <p:nvPr/>
-        </p:nvSpPr>
-        <p:spPr>
-          <a:xfrm>
-            <a:off x="6446520" y="2240280"/>
-            <a:ext cx="4846320" cy="457200"/>
-          </a:xfrm>
-          <a:prstGeom prst="rect">
-            <a:avLst/>
-          </a:prstGeom>
-          <a:noFill/>
-          <a:ln/>
-        </p:spPr>
-        <p:txBody>
-          <a:bodyPr wrap="square" lIns="0" tIns="0" rIns="0" bIns="0" rtlCol="0" anchor="t"/>
-          <a:lstStyle/>
-          <a:p>
-            <a:pPr indent="0" marL="0">
+              <a:t>2</a:t>
+            </a:r>
+            <a:pPr algn="ctr" indent="0" marL="0">
               <a:buNone/>
             </a:pPr>
             <a:r>
@@ -13524,13 +13499,38 @@
                 <a:ea typeface="Times New Roman" pitchFamily="34" charset="-122"/>
                 <a:cs typeface="Times New Roman" pitchFamily="34" charset="-120"/>
               </a:rPr>
-              <a:t>2.     9x</a:t>
-            </a:r>
-            <a:pPr indent="0" marL="0">
-              <a:buNone/>
-            </a:pPr>
-            <a:r>
-              <a:rPr lang="en-US" sz="2200" baseline="30000" dirty="0">
+              <a:t> − 1</a:t>
+            </a:r>
+            <a:endParaRPr lang="en-US" sz="2200" dirty="0"/>
+          </a:p>
+        </p:txBody>
+      </p:sp>
+      <p:sp>
+        <p:nvSpPr>
+          <p:cNvPr id="20" name="Text 17"/>
+          <p:cNvSpPr txBox="1"/>
+          <p:nvPr/>
+        </p:nvSpPr>
+        <p:spPr>
+          <a:xfrm>
+            <a:off x="6446520" y="2240280"/>
+            <a:ext cx="4846320" cy="457200"/>
+          </a:xfrm>
+          <a:prstGeom prst="rect">
+            <a:avLst/>
+          </a:prstGeom>
+          <a:noFill/>
+          <a:ln/>
+        </p:spPr>
+        <p:txBody>
+          <a:bodyPr wrap="square" lIns="0" tIns="0" rIns="0" bIns="0" rtlCol="0" anchor="t"/>
+          <a:lstStyle/>
+          <a:p>
+            <a:pPr indent="0" marL="0">
+              <a:buNone/>
+            </a:pPr>
+            <a:r>
+              <a:rPr lang="en-US" sz="2200" dirty="0">
                 <a:solidFill>
                   <a:srgbClr val="11344E"/>
                 </a:solidFill>
@@ -13538,13 +13538,13 @@
                 <a:ea typeface="Times New Roman" pitchFamily="34" charset="-122"/>
                 <a:cs typeface="Times New Roman" pitchFamily="34" charset="-120"/>
               </a:rPr>
-              <a:t>2</a:t>
-            </a:r>
-            <a:pPr indent="0" marL="0">
-              <a:buNone/>
-            </a:pPr>
-            <a:r>
-              <a:rPr lang="en-US" sz="2200" dirty="0">
+              <a:t>2.     6x</a:t>
+            </a:r>
+            <a:pPr indent="0" marL="0">
+              <a:buNone/>
+            </a:pPr>
+            <a:r>
+              <a:rPr lang="en-US" sz="2200" baseline="30000" dirty="0">
                 <a:solidFill>
                   <a:srgbClr val="11344E"/>
                 </a:solidFill>
@@ -13552,33 +13552,8 @@
                 <a:ea typeface="Times New Roman" pitchFamily="34" charset="-122"/>
                 <a:cs typeface="Times New Roman" pitchFamily="34" charset="-120"/>
               </a:rPr>
-              <a:t> = 30x − 25</a:t>
-            </a:r>
-            <a:endParaRPr lang="en-US" sz="2200" dirty="0"/>
-          </a:p>
-        </p:txBody>
-      </p:sp>
-      <p:sp>
-        <p:nvSpPr>
-          <p:cNvPr id="22" name="Text 19"/>
-          <p:cNvSpPr txBox="1"/>
-          <p:nvPr/>
-        </p:nvSpPr>
-        <p:spPr>
-          <a:xfrm>
-            <a:off x="822960" y="4434840"/>
-            <a:ext cx="457200" cy="457200"/>
-          </a:xfrm>
-          <a:prstGeom prst="rect">
-            <a:avLst/>
-          </a:prstGeom>
-          <a:noFill/>
-          <a:ln/>
-        </p:spPr>
-        <p:txBody>
-          <a:bodyPr wrap="square" lIns="0" tIns="0" rIns="0" bIns="0" rtlCol="0" anchor="t"/>
-          <a:lstStyle/>
-          <a:p>
+              <a:t>2</a:t>
+            </a:r>
             <a:pPr indent="0" marL="0">
               <a:buNone/>
             </a:pPr>
@@ -13591,7 +13566,7 @@
                 <a:ea typeface="Times New Roman" pitchFamily="34" charset="-122"/>
                 <a:cs typeface="Times New Roman" pitchFamily="34" charset="-120"/>
               </a:rPr>
-              <a:t>3.</a:t>
+              <a:t> = 7x + 3</a:t>
             </a:r>
             <a:endParaRPr lang="en-US" sz="2200" dirty="0"/>
           </a:p>
@@ -13599,26 +13574,26 @@
       </p:sp>
       <p:sp>
         <p:nvSpPr>
-          <p:cNvPr id="23" name="Text 20"/>
-          <p:cNvSpPr txBox="1"/>
-          <p:nvPr/>
-        </p:nvSpPr>
-        <p:spPr>
-          <a:xfrm>
-            <a:off x="1234440" y="4069080"/>
-            <a:ext cx="457200" cy="363220"/>
-          </a:xfrm>
-          <a:prstGeom prst="rect">
-            <a:avLst/>
-          </a:prstGeom>
-          <a:noFill/>
-          <a:ln/>
-        </p:spPr>
-        <p:txBody>
-          <a:bodyPr wrap="square" lIns="0" tIns="0" rIns="0" bIns="0" rtlCol="0" anchor="b"/>
-          <a:lstStyle/>
-          <a:p>
-            <a:pPr algn="ctr" indent="0" marL="0">
+          <p:cNvPr id="21" name="Text 18"/>
+          <p:cNvSpPr txBox="1"/>
+          <p:nvPr/>
+        </p:nvSpPr>
+        <p:spPr>
+          <a:xfrm>
+            <a:off x="822960" y="4434840"/>
+            <a:ext cx="457200" cy="457200"/>
+          </a:xfrm>
+          <a:prstGeom prst="rect">
+            <a:avLst/>
+          </a:prstGeom>
+          <a:noFill/>
+          <a:ln/>
+        </p:spPr>
+        <p:txBody>
+          <a:bodyPr wrap="square" lIns="0" tIns="0" rIns="0" bIns="0" rtlCol="0" anchor="t"/>
+          <a:lstStyle/>
+          <a:p>
+            <a:pPr indent="0" marL="0">
               <a:buNone/>
             </a:pPr>
             <a:r>
@@ -13630,6 +13605,45 @@
                 <a:ea typeface="Times New Roman" pitchFamily="34" charset="-122"/>
                 <a:cs typeface="Times New Roman" pitchFamily="34" charset="-120"/>
               </a:rPr>
+              <a:t>3.</a:t>
+            </a:r>
+            <a:endParaRPr lang="en-US" sz="2200" dirty="0"/>
+          </a:p>
+        </p:txBody>
+      </p:sp>
+      <p:sp>
+        <p:nvSpPr>
+          <p:cNvPr id="22" name="Text 19"/>
+          <p:cNvSpPr txBox="1"/>
+          <p:nvPr/>
+        </p:nvSpPr>
+        <p:spPr>
+          <a:xfrm>
+            <a:off x="1234440" y="4069080"/>
+            <a:ext cx="457200" cy="363220"/>
+          </a:xfrm>
+          <a:prstGeom prst="rect">
+            <a:avLst/>
+          </a:prstGeom>
+          <a:noFill/>
+          <a:ln/>
+        </p:spPr>
+        <p:txBody>
+          <a:bodyPr wrap="square" lIns="0" tIns="0" rIns="0" bIns="0" rtlCol="0" anchor="b"/>
+          <a:lstStyle/>
+          <a:p>
+            <a:pPr algn="ctr" indent="0" marL="0">
+              <a:buNone/>
+            </a:pPr>
+            <a:r>
+              <a:rPr lang="en-US" sz="2200" dirty="0">
+                <a:solidFill>
+                  <a:srgbClr val="11344E"/>
+                </a:solidFill>
+                <a:latin typeface="Times New Roman" pitchFamily="34" charset="0"/>
+                <a:ea typeface="Times New Roman" pitchFamily="34" charset="-122"/>
+                <a:cs typeface="Times New Roman" pitchFamily="34" charset="-120"/>
+              </a:rPr>
               <a:t>1</a:t>
             </a:r>
             <a:endParaRPr lang="en-US" sz="2200" dirty="0"/>
@@ -13638,7 +13652,7 @@
       </p:sp>
       <p:sp>
         <p:nvSpPr>
-          <p:cNvPr id="24" name="Shape 21"/>
+          <p:cNvPr id="23" name="Shape 20"/>
           <p:cNvSpPr/>
           <p:nvPr/>
         </p:nvSpPr>
@@ -13661,7 +13675,7 @@
       </p:sp>
       <p:sp>
         <p:nvSpPr>
-          <p:cNvPr id="25" name="Text 22"/>
+          <p:cNvPr id="24" name="Text 21"/>
           <p:cNvSpPr txBox="1"/>
           <p:nvPr/>
         </p:nvSpPr>
@@ -13700,7 +13714,7 @@
       </p:sp>
       <p:sp>
         <p:nvSpPr>
-          <p:cNvPr id="26" name="Text 23"/>
+          <p:cNvPr id="25" name="Text 22"/>
           <p:cNvSpPr txBox="1"/>
           <p:nvPr/>
         </p:nvSpPr>
@@ -13767,7 +13781,7 @@
       </p:sp>
       <p:sp>
         <p:nvSpPr>
-          <p:cNvPr id="27" name="Text 24"/>
+          <p:cNvPr id="26" name="Text 23"/>
           <p:cNvSpPr txBox="1"/>
           <p:nvPr/>
         </p:nvSpPr>
@@ -13806,7 +13820,7 @@
       </p:sp>
       <p:sp>
         <p:nvSpPr>
-          <p:cNvPr id="28" name="Shape 25"/>
+          <p:cNvPr id="27" name="Shape 24"/>
           <p:cNvSpPr/>
           <p:nvPr/>
         </p:nvSpPr>
@@ -13829,7 +13843,7 @@
       </p:sp>
       <p:sp>
         <p:nvSpPr>
-          <p:cNvPr id="29" name="Text 26"/>
+          <p:cNvPr id="28" name="Text 25"/>
           <p:cNvSpPr txBox="1"/>
           <p:nvPr/>
         </p:nvSpPr>
@@ -13868,7 +13882,7 @@
       </p:sp>
       <p:sp>
         <p:nvSpPr>
-          <p:cNvPr id="30" name="Text 27"/>
+          <p:cNvPr id="29" name="Text 26"/>
           <p:cNvSpPr txBox="1"/>
           <p:nvPr/>
         </p:nvSpPr>
@@ -13907,7 +13921,7 @@
       </p:sp>
       <p:sp>
         <p:nvSpPr>
-          <p:cNvPr id="31" name="Text 28"/>
+          <p:cNvPr id="30" name="Text 27"/>
           <p:cNvSpPr txBox="1"/>
           <p:nvPr/>
         </p:nvSpPr>
@@ -13946,7 +13960,7 @@
       </p:sp>
       <p:sp>
         <p:nvSpPr>
-          <p:cNvPr id="32" name="Text 29"/>
+          <p:cNvPr id="31" name="Text 28"/>
           <p:cNvSpPr txBox="1"/>
           <p:nvPr/>
         </p:nvSpPr>
@@ -13985,7 +13999,7 @@
       </p:sp>
       <p:sp>
         <p:nvSpPr>
-          <p:cNvPr id="33" name="Shape 30"/>
+          <p:cNvPr id="32" name="Shape 29"/>
           <p:cNvSpPr/>
           <p:nvPr/>
         </p:nvSpPr>
@@ -14008,7 +14022,7 @@
       </p:sp>
       <p:sp>
         <p:nvSpPr>
-          <p:cNvPr id="34" name="Text 31"/>
+          <p:cNvPr id="33" name="Text 30"/>
           <p:cNvSpPr txBox="1"/>
           <p:nvPr/>
         </p:nvSpPr>
@@ -14047,7 +14061,7 @@
       </p:sp>
       <p:sp>
         <p:nvSpPr>
-          <p:cNvPr id="35" name="Text 32"/>
+          <p:cNvPr id="34" name="Text 31"/>
           <p:cNvSpPr txBox="1"/>
           <p:nvPr/>
         </p:nvSpPr>
@@ -14086,7 +14100,7 @@
       </p:sp>
       <p:sp>
         <p:nvSpPr>
-          <p:cNvPr id="36" name="Text 33"/>
+          <p:cNvPr id="35" name="Text 32"/>
           <p:cNvSpPr txBox="1"/>
           <p:nvPr/>
         </p:nvSpPr>
@@ -14125,7 +14139,7 @@
       </p:sp>
       <p:sp>
         <p:nvSpPr>
-          <p:cNvPr id="37" name="Shape 34"/>
+          <p:cNvPr id="36" name="Shape 33"/>
           <p:cNvSpPr/>
           <p:nvPr/>
         </p:nvSpPr>
@@ -14148,7 +14162,7 @@
       </p:sp>
       <p:sp>
         <p:nvSpPr>
-          <p:cNvPr id="38" name="Text 35"/>
+          <p:cNvPr id="37" name="Text 34"/>
           <p:cNvSpPr txBox="1"/>
           <p:nvPr/>
         </p:nvSpPr>
@@ -14394,7 +14408,7 @@
                 <a:ea typeface="Arial" pitchFamily="34" charset="-122"/>
                 <a:cs typeface="Arial" pitchFamily="34" charset="-120"/>
               </a:rPr>
-              <a:t>1.  Restriction first:  x ≠ 1</a:t>
+              <a:t>1.  Restrictions first:  x ≠ 1,  x ≠ −1</a:t>
             </a:r>
             <a:endParaRPr lang="en-US" sz="1700" dirty="0"/>
           </a:p>
@@ -14428,7 +14442,7 @@
               <a:buNone/>
             </a:pPr>
             <a:r>
-              <a:rPr lang="en-US" sz="2100" dirty="0">
+              <a:rPr lang="en-US" sz="2000" dirty="0">
                 <a:solidFill>
                   <a:srgbClr val="11344E"/>
                 </a:solidFill>
@@ -14436,9 +14450,9 @@
                 <a:ea typeface="Times New Roman" pitchFamily="34" charset="-122"/>
                 <a:cs typeface="Times New Roman" pitchFamily="34" charset="-120"/>
               </a:rPr>
-              <a:t>Multiply every term by (x − 1):</a:t>
-            </a:r>
-            <a:endParaRPr lang="en-US" sz="2100" dirty="0"/>
+              <a:t>Multiply every term by (x − 1)(x + 1):</a:t>
+            </a:r>
+            <a:endParaRPr lang="en-US" sz="2000" dirty="0"/>
           </a:p>
           <a:p>
             <a:pPr indent="0" marL="0">
@@ -14448,7 +14462,7 @@
               <a:buNone/>
             </a:pPr>
             <a:r>
-              <a:rPr lang="en-US" sz="2100" dirty="0">
+              <a:rPr lang="en-US" sz="2000" dirty="0">
                 <a:solidFill>
                   <a:srgbClr val="11344E"/>
                 </a:solidFill>
@@ -14456,11 +14470,8 @@
                 <a:ea typeface="Times New Roman" pitchFamily="34" charset="-122"/>
                 <a:cs typeface="Times New Roman" pitchFamily="34" charset="-120"/>
               </a:rPr>
-              <a:t>2x = 2 + 5(x − 1)</a:t>
-            </a:r>
-            <a:endParaRPr lang="en-US" sz="2100" dirty="0"/>
-          </a:p>
-          <a:p>
+              <a:t>2(x + 1) + (x</a:t>
+            </a:r>
             <a:pPr indent="0" marL="0">
               <a:spcAft>
                 <a:spcPts val="600"/>
@@ -14468,7 +14479,7 @@
               <a:buNone/>
             </a:pPr>
             <a:r>
-              <a:rPr lang="en-US" sz="2100" dirty="0">
+              <a:rPr lang="en-US" sz="2000" baseline="30000" dirty="0">
                 <a:solidFill>
                   <a:srgbClr val="11344E"/>
                 </a:solidFill>
@@ -14476,11 +14487,8 @@
                 <a:ea typeface="Times New Roman" pitchFamily="34" charset="-122"/>
                 <a:cs typeface="Times New Roman" pitchFamily="34" charset="-120"/>
               </a:rPr>
-              <a:t>2x = 5x − 3</a:t>
-            </a:r>
-            <a:endParaRPr lang="en-US" sz="2100" dirty="0"/>
-          </a:p>
-          <a:p>
+              <a:t>2</a:t>
+            </a:r>
             <a:pPr indent="0" marL="0">
               <a:spcAft>
                 <a:spcPts val="600"/>
@@ -14488,7 +14496,7 @@
               <a:buNone/>
             </a:pPr>
             <a:r>
-              <a:rPr lang="en-US" sz="2100" dirty="0">
+              <a:rPr lang="en-US" sz="2000" dirty="0">
                 <a:solidFill>
                   <a:srgbClr val="11344E"/>
                 </a:solidFill>
@@ -14496,9 +14504,83 @@
                 <a:ea typeface="Times New Roman" pitchFamily="34" charset="-122"/>
                 <a:cs typeface="Times New Roman" pitchFamily="34" charset="-120"/>
               </a:rPr>
-              <a:t>x = 1</a:t>
-            </a:r>
-            <a:endParaRPr lang="en-US" sz="2100" dirty="0"/>
+              <a:t> − 1) = 4</a:t>
+            </a:r>
+            <a:endParaRPr lang="en-US" sz="2000" dirty="0"/>
+          </a:p>
+          <a:p>
+            <a:pPr indent="0" marL="0">
+              <a:spcAft>
+                <a:spcPts val="600"/>
+              </a:spcAft>
+              <a:buNone/>
+            </a:pPr>
+            <a:r>
+              <a:rPr lang="en-US" sz="2000" dirty="0">
+                <a:solidFill>
+                  <a:srgbClr val="11344E"/>
+                </a:solidFill>
+                <a:latin typeface="Times New Roman" pitchFamily="34" charset="0"/>
+                <a:ea typeface="Times New Roman" pitchFamily="34" charset="-122"/>
+                <a:cs typeface="Times New Roman" pitchFamily="34" charset="-120"/>
+              </a:rPr>
+              <a:t>x</a:t>
+            </a:r>
+            <a:pPr indent="0" marL="0">
+              <a:spcAft>
+                <a:spcPts val="600"/>
+              </a:spcAft>
+              <a:buNone/>
+            </a:pPr>
+            <a:r>
+              <a:rPr lang="en-US" sz="2000" baseline="30000" dirty="0">
+                <a:solidFill>
+                  <a:srgbClr val="11344E"/>
+                </a:solidFill>
+                <a:latin typeface="Times New Roman" pitchFamily="34" charset="0"/>
+                <a:ea typeface="Times New Roman" pitchFamily="34" charset="-122"/>
+                <a:cs typeface="Times New Roman" pitchFamily="34" charset="-120"/>
+              </a:rPr>
+              <a:t>2</a:t>
+            </a:r>
+            <a:pPr indent="0" marL="0">
+              <a:spcAft>
+                <a:spcPts val="600"/>
+              </a:spcAft>
+              <a:buNone/>
+            </a:pPr>
+            <a:r>
+              <a:rPr lang="en-US" sz="2000" dirty="0">
+                <a:solidFill>
+                  <a:srgbClr val="11344E"/>
+                </a:solidFill>
+                <a:latin typeface="Times New Roman" pitchFamily="34" charset="0"/>
+                <a:ea typeface="Times New Roman" pitchFamily="34" charset="-122"/>
+                <a:cs typeface="Times New Roman" pitchFamily="34" charset="-120"/>
+              </a:rPr>
+              <a:t> + 2x − 3 = 0</a:t>
+            </a:r>
+            <a:endParaRPr lang="en-US" sz="2000" dirty="0"/>
+          </a:p>
+          <a:p>
+            <a:pPr indent="0" marL="0">
+              <a:spcAft>
+                <a:spcPts val="600"/>
+              </a:spcAft>
+              <a:buNone/>
+            </a:pPr>
+            <a:r>
+              <a:rPr lang="en-US" sz="2000" dirty="0">
+                <a:solidFill>
+                  <a:srgbClr val="11344E"/>
+                </a:solidFill>
+                <a:latin typeface="Times New Roman" pitchFamily="34" charset="0"/>
+                <a:ea typeface="Times New Roman" pitchFamily="34" charset="-122"/>
+                <a:cs typeface="Times New Roman" pitchFamily="34" charset="-120"/>
+              </a:rPr>
+              <a:t>(x + 3)(x − 1) = 0</a:t>
+            </a:r>
+            <a:endParaRPr lang="en-US" sz="2000" dirty="0"/>
           </a:p>
         </p:txBody>
       </p:sp>
@@ -14519,11 +14601,11 @@
             </a:avLst>
           </a:prstGeom>
           <a:solidFill>
-            <a:srgbClr val="FBEDEB"/>
+            <a:srgbClr val="EAF5F0"/>
           </a:solidFill>
           <a:ln w="12700">
             <a:solidFill>
-              <a:srgbClr val="FBEDEB"/>
+              <a:srgbClr val="EAF5F0"/>
             </a:solidFill>
             <a:prstDash val="solid"/>
           </a:ln>
@@ -14554,17 +14636,17 @@
               <a:buNone/>
             </a:pPr>
             <a:r>
-              <a:rPr lang="en-US" sz="1900" b="1" dirty="0">
-                <a:solidFill>
-                  <a:srgbClr val="B03A2E"/>
-                </a:solidFill>
-                <a:latin typeface="Arial" pitchFamily="34" charset="0"/>
-                <a:ea typeface="Arial" pitchFamily="34" charset="-122"/>
-                <a:cs typeface="Arial" pitchFamily="34" charset="-120"/>
-              </a:rPr>
-              <a:t>x = 1 is excluded.  No solution.</a:t>
-            </a:r>
-            <a:endParaRPr lang="en-US" sz="1900" dirty="0"/>
+              <a:rPr lang="en-US" sz="2000" b="1" dirty="0">
+                <a:solidFill>
+                  <a:srgbClr val="1B7F5E"/>
+                </a:solidFill>
+                <a:latin typeface="Times New Roman" pitchFamily="34" charset="0"/>
+                <a:ea typeface="Times New Roman" pitchFamily="34" charset="-122"/>
+                <a:cs typeface="Times New Roman" pitchFamily="34" charset="-120"/>
+              </a:rPr>
+              <a:t>x = −3   (x = 1 is excluded)</a:t>
+            </a:r>
+            <a:endParaRPr lang="en-US" sz="2000" dirty="0"/>
           </a:p>
         </p:txBody>
       </p:sp>
@@ -14670,7 +14752,7 @@
                 <a:ea typeface="Times New Roman" pitchFamily="34" charset="-122"/>
                 <a:cs typeface="Times New Roman" pitchFamily="34" charset="-120"/>
               </a:rPr>
-              <a:t>9x</a:t>
+              <a:t>6x</a:t>
             </a:r>
             <a:pPr indent="0" marL="0">
               <a:spcAft>
@@ -14704,7 +14786,7 @@
                 <a:ea typeface="Times New Roman" pitchFamily="34" charset="-122"/>
                 <a:cs typeface="Times New Roman" pitchFamily="34" charset="-120"/>
               </a:rPr>
-              <a:t> − 30x + 25 = 0</a:t>
+              <a:t> − 7x − 3 = 0</a:t>
             </a:r>
             <a:endParaRPr lang="en-US" sz="2100" dirty="0"/>
           </a:p>
@@ -14724,8 +14806,11 @@
                 <a:ea typeface="Times New Roman" pitchFamily="34" charset="-122"/>
                 <a:cs typeface="Times New Roman" pitchFamily="34" charset="-120"/>
               </a:rPr>
-              <a:t>(3x − 5)</a:t>
-            </a:r>
+              <a:t>(3x + 1)(2x − 3) = 0</a:t>
+            </a:r>
+            <a:endParaRPr lang="en-US" sz="2100" dirty="0"/>
+          </a:p>
+          <a:p>
             <a:pPr indent="0" marL="0">
               <a:spcAft>
                 <a:spcPts val="600"/>
@@ -14733,7 +14818,7 @@
               <a:buNone/>
             </a:pPr>
             <a:r>
-              <a:rPr lang="en-US" sz="2100" baseline="30000" dirty="0">
+              <a:rPr lang="en-US" sz="2100" dirty="0">
                 <a:solidFill>
                   <a:srgbClr val="11344E"/>
                 </a:solidFill>
@@ -14741,44 +14826,7 @@
                 <a:ea typeface="Times New Roman" pitchFamily="34" charset="-122"/>
                 <a:cs typeface="Times New Roman" pitchFamily="34" charset="-120"/>
               </a:rPr>
-              <a:t>2</a:t>
-            </a:r>
-            <a:pPr indent="0" marL="0">
-              <a:spcAft>
-                <a:spcPts val="600"/>
-              </a:spcAft>
-              <a:buNone/>
-            </a:pPr>
-            <a:r>
-              <a:rPr lang="en-US" sz="2100" dirty="0">
-                <a:solidFill>
-                  <a:srgbClr val="11344E"/>
-                </a:solidFill>
-                <a:latin typeface="Times New Roman" pitchFamily="34" charset="0"/>
-                <a:ea typeface="Times New Roman" pitchFamily="34" charset="-122"/>
-                <a:cs typeface="Times New Roman" pitchFamily="34" charset="-120"/>
-              </a:rPr>
-              <a:t> = 0</a:t>
-            </a:r>
-            <a:endParaRPr lang="en-US" sz="2100" dirty="0"/>
-          </a:p>
-          <a:p>
-            <a:pPr indent="0" marL="0">
-              <a:spcAft>
-                <a:spcPts val="600"/>
-              </a:spcAft>
-              <a:buNone/>
-            </a:pPr>
-            <a:r>
-              <a:rPr lang="en-US" sz="2100" dirty="0">
-                <a:solidFill>
-                  <a:srgbClr val="11344E"/>
-                </a:solidFill>
-                <a:latin typeface="Times New Roman" pitchFamily="34" charset="0"/>
-                <a:ea typeface="Times New Roman" pitchFamily="34" charset="-122"/>
-                <a:cs typeface="Times New Roman" pitchFamily="34" charset="-120"/>
-              </a:rPr>
-              <a:t>3x − 5 = 0</a:t>
+              <a:t>3x + 1 = 0  or  2x − 3 = 0</a:t>
             </a:r>
             <a:endParaRPr lang="en-US" sz="2100" dirty="0"/>
           </a:p>
@@ -14836,7 +14884,7 @@
               <a:buNone/>
             </a:pPr>
             <a:r>
-              <a:rPr lang="en-US" sz="2000" b="1" dirty="0">
+              <a:rPr lang="en-US" sz="2100" b="1" dirty="0">
                 <a:solidFill>
                   <a:srgbClr val="1B7F5E"/>
                 </a:solidFill>
@@ -14844,9 +14892,9 @@
                 <a:ea typeface="Times New Roman" pitchFamily="34" charset="-122"/>
                 <a:cs typeface="Times New Roman" pitchFamily="34" charset="-120"/>
               </a:rPr>
-              <a:t>x = 5/3   (one repeated solution)</a:t>
-            </a:r>
-            <a:endParaRPr lang="en-US" sz="2000" dirty="0"/>
+              <a:t>x = −1/3  or  x = 3/2</a:t>
+            </a:r>
+            <a:endParaRPr lang="en-US" sz="2100" dirty="0"/>
           </a:p>
         </p:txBody>
       </p:sp>
